--- a/presentation/EarthSafe_Final_Presentation.pptx
+++ b/presentation/EarthSafe_Final_Presentation.pptx
@@ -132,7 +132,7 @@
               <c:strCache>
                 <c:ptCount val="1"/>
                 <c:pt idx="0">
-                  <c:v>Hazard Label</c:v>
+                  <c:v>Hazard</c:v>
                 </c:pt>
               </c:strCache>
             </c:strRef>
@@ -183,16 +183,16 @@
           <c:dLbls>
             <c:dLbl>
               <c:idx val="0"/>
-              <c:numFmt formatCode="0%" sourceLinked="0"/>
+              <c:numFmt formatCode="General" sourceLinked="0"/>
               <c:spPr/>
               <c:txPr>
                 <a:bodyPr/>
                 <a:lstStyle/>
                 <a:p>
                   <a:pPr>
-                    <a:defRPr sz="1400" b="0" i="0" u="none" strike="noStrike">
+                    <a:defRPr sz="1400" b="1" i="0" u="none" strike="noStrike">
                       <a:solidFill>
-                        <a:srgbClr val="FFFFFF"/>
+                        <a:srgbClr val="000000"/>
                       </a:solidFill>
                       <a:latin typeface="Arial"/>
                     </a:defRPr>
@@ -200,24 +200,24 @@
                 </a:p>
               </c:txPr>
               <c:showLegendKey val="0"/>
-              <c:showVal val="0"/>
+              <c:showVal val="1"/>
               <c:showCatName val="0"/>
               <c:showSerName val="0"/>
-              <c:showPercent val="1"/>
+              <c:showPercent val="0"/>
               <c:showBubbleSize val="0"/>
             </c:dLbl>
             <c:dLbl>
               <c:idx val="1"/>
-              <c:numFmt formatCode="0%" sourceLinked="0"/>
+              <c:numFmt formatCode="General" sourceLinked="0"/>
               <c:spPr/>
               <c:txPr>
                 <a:bodyPr/>
                 <a:lstStyle/>
                 <a:p>
                   <a:pPr>
-                    <a:defRPr sz="1400" b="0" i="0" u="none" strike="noStrike">
+                    <a:defRPr sz="1400" b="1" i="0" u="none" strike="noStrike">
                       <a:solidFill>
-                        <a:srgbClr val="FFFFFF"/>
+                        <a:srgbClr val="000000"/>
                       </a:solidFill>
                       <a:latin typeface="Arial"/>
                     </a:defRPr>
@@ -225,24 +225,24 @@
                 </a:p>
               </c:txPr>
               <c:showLegendKey val="0"/>
-              <c:showVal val="0"/>
+              <c:showVal val="1"/>
               <c:showCatName val="0"/>
               <c:showSerName val="0"/>
-              <c:showPercent val="1"/>
+              <c:showPercent val="0"/>
               <c:showBubbleSize val="0"/>
             </c:dLbl>
             <c:dLbl>
               <c:idx val="2"/>
-              <c:numFmt formatCode="0%" sourceLinked="0"/>
+              <c:numFmt formatCode="General" sourceLinked="0"/>
               <c:spPr/>
               <c:txPr>
                 <a:bodyPr/>
                 <a:lstStyle/>
                 <a:p>
                   <a:pPr>
-                    <a:defRPr sz="1400" b="0" i="0" u="none" strike="noStrike">
+                    <a:defRPr sz="1400" b="1" i="0" u="none" strike="noStrike">
                       <a:solidFill>
-                        <a:srgbClr val="FFFFFF"/>
+                        <a:srgbClr val="000000"/>
                       </a:solidFill>
                       <a:latin typeface="Arial"/>
                     </a:defRPr>
@@ -250,19 +250,19 @@
                 </a:p>
               </c:txPr>
               <c:showLegendKey val="0"/>
-              <c:showVal val="0"/>
+              <c:showVal val="1"/>
               <c:showCatName val="0"/>
               <c:showSerName val="0"/>
-              <c:showPercent val="1"/>
+              <c:showPercent val="0"/>
               <c:showBubbleSize val="0"/>
             </c:dLbl>
-            <c:numFmt formatCode="0%" sourceLinked="0"/>
+            <c:numFmt formatCode="General" sourceLinked="0"/>
             <c:txPr>
               <a:bodyPr/>
               <a:lstStyle/>
               <a:p>
                 <a:pPr>
-                  <a:defRPr sz="1800" b="0" i="0" u="none" strike="noStrike">
+                  <a:defRPr sz="1800" b="1" i="0" u="none" strike="noStrike">
                     <a:solidFill>
                       <a:srgbClr val="000000"/>
                     </a:solidFill>
@@ -303,13 +303,13 @@
               <c:numCache>
                 <c:ptCount val="3"/>
                 <c:pt idx="0">
-                  <c:v>1033</c:v>
+                  <c:v>51.6</c:v>
                 </c:pt>
                 <c:pt idx="1">
-                  <c:v>960</c:v>
+                  <c:v>48</c:v>
                 </c:pt>
                 <c:pt idx="2">
-                  <c:v>7</c:v>
+                  <c:v>0.4</c:v>
                 </c:pt>
               </c:numCache>
             </c:numRef>
@@ -343,9 +343,7 @@
     <c:dispBlanksAs val="span"/>
   </c:chart>
   <c:spPr>
-    <a:solidFill>
-      <a:srgbClr val="FFFFFF"/>
-    </a:solidFill>
+    <a:noFill/>
     <a:ln>
       <a:noFill/>
     </a:ln>
@@ -360,38 +358,9 @@
 <file path=ppt/charts/chart2.xml><?xml version="1.0" encoding="utf-8"?>
 <c:chartSpace xmlns:c="http://schemas.openxmlformats.org/drawingml/2006/chart" xmlns:a="http://schemas.openxmlformats.org/drawingml/2006/main" xmlns:r="http://schemas.openxmlformats.org/officeDocument/2006/relationships">
   <c:date1904 val="0"/>
-  <c:roundedCorners val="0"/>
+  <c:roundedCorners val="1"/>
   <c:chart>
-    <c:title>
-      <c:tx>
-        <c:rich>
-          <a:bodyPr/>
-          <a:lstStyle/>
-          <a:p>
-            <a:pPr>
-              <a:defRPr sz="1500" b="0" i="0" u="none" strike="noStrike">
-                <a:solidFill>
-                  <a:srgbClr val="1A5276"/>
-                </a:solidFill>
-                <a:latin typeface="Arial"/>
-              </a:defRPr>
-            </a:pPr>
-            <a:r>
-              <a:rPr sz="1500" b="0" i="0" u="none" strike="noStrike">
-                <a:solidFill>
-                  <a:srgbClr val="1A5276"/>
-                </a:solidFill>
-                <a:latin typeface="Arial"/>
-              </a:rPr>
-              <a:t>5-Fold Cross-Validation Results</a:t>
-            </a:r>
-          </a:p>
-        </c:rich>
-      </c:tx>
-      <c:layout/>
-      <c:overlay val="0"/>
-    </c:title>
-    <c:autoTitleDeleted val="0"/>
+    <c:autoTitleDeleted val="1"/>
     <c:plotArea>
       <c:layout/>
       <c:barChart>
@@ -621,7 +590,7 @@
             <a:pPr>
               <a:defRPr sz="1300" b="0" i="0" u="none" strike="noStrike">
                 <a:solidFill>
-                  <a:srgbClr val="1A1A2A"/>
+                  <a:srgbClr val="000000"/>
                 </a:solidFill>
                 <a:latin typeface="Arial"/>
               </a:defRPr>
@@ -646,9 +615,9 @@
         <c:axPos val="l"/>
         <c:majorGridlines>
           <c:spPr>
-            <a:ln w="6350" cap="flat">
+            <a:ln w="12700" cap="flat">
               <a:solidFill>
-                <a:srgbClr val="D5E8F0"/>
+                <a:srgbClr val="888888"/>
               </a:solidFill>
               <a:prstDash val="solid"/>
               <a:round/>
@@ -673,9 +642,9 @@
           <a:lstStyle/>
           <a:p>
             <a:pPr>
-              <a:defRPr sz="1200" b="0" i="0" u="none" strike="noStrike">
-                <a:solidFill>
-                  <a:srgbClr val="4A6274"/>
+              <a:defRPr sz="1100" b="0" i="0" u="none" strike="noStrike">
+                <a:solidFill>
+                  <a:srgbClr val="000000"/>
                 </a:solidFill>
                 <a:latin typeface="Arial"/>
               </a:defRPr>
@@ -713,9 +682,7 @@
     <c:dispBlanksAs val="span"/>
   </c:chart>
   <c:spPr>
-    <a:solidFill>
-      <a:srgbClr val="FFFFFF"/>
-    </a:solidFill>
+    <a:noFill/>
     <a:ln>
       <a:noFill/>
     </a:ln>
@@ -2156,8 +2123,8 @@
         </p:nvSpPr>
         <p:spPr>
           <a:xfrm>
-            <a:off x="457200" y="2651760"/>
-            <a:ext cx="8229600" cy="548640"/>
+            <a:off x="457200" y="2633472"/>
+            <a:ext cx="8229600" cy="640080"/>
           </a:xfrm>
           <a:prstGeom prst="rect">
             <a:avLst/>
@@ -2176,78 +2143,78 @@
               <a:rPr lang="en-US" sz="2600" dirty="0">
                 <a:solidFill>
                   <a:srgbClr val="0D9488"/>
+                </a:solidFill>
+                <a:latin typeface="Trebuchet MS" pitchFamily="34" charset="0"/>
+                <a:ea typeface="Trebuchet MS" pitchFamily="34" charset="-122"/>
+                <a:cs typeface="Trebuchet MS" pitchFamily="34" charset="-120"/>
+              </a:rPr>
+              <a:t>Real-Time Earthquake Hazard Prediction</a:t>
+            </a:r>
+            <a:endParaRPr lang="en-US" sz="2600" dirty="0"/>
+          </a:p>
+        </p:txBody>
+      </p:sp>
+      <p:sp>
+        <p:nvSpPr>
+          <p:cNvPr id="7" name="Shape 5"/>
+          <p:cNvSpPr/>
+          <p:nvPr/>
+        </p:nvSpPr>
+        <p:spPr>
+          <a:xfrm>
+            <a:off x="2011680" y="3337560"/>
+            <a:ext cx="5120640" cy="36576"/>
+          </a:xfrm>
+          <a:prstGeom prst="rect">
+            <a:avLst/>
+          </a:prstGeom>
+          <a:solidFill>
+            <a:srgbClr val="0D9488"/>
+          </a:solidFill>
+          <a:ln w="12700">
+            <a:solidFill>
+              <a:srgbClr val="0D9488"/>
+            </a:solidFill>
+            <a:prstDash val="solid"/>
+          </a:ln>
+        </p:spPr>
+      </p:sp>
+      <p:sp>
+        <p:nvSpPr>
+          <p:cNvPr id="8" name="Text 6"/>
+          <p:cNvSpPr/>
+          <p:nvPr/>
+        </p:nvSpPr>
+        <p:spPr>
+          <a:xfrm>
+            <a:off x="457200" y="3456432"/>
+            <a:ext cx="8229600" cy="384048"/>
+          </a:xfrm>
+          <a:prstGeom prst="rect">
+            <a:avLst/>
+          </a:prstGeom>
+          <a:noFill/>
+          <a:ln/>
+        </p:spPr>
+        <p:txBody>
+          <a:bodyPr wrap="square" rtlCol="0" anchor="ctr"/>
+          <a:lstStyle/>
+          <a:p>
+            <a:pPr algn="ctr" indent="0" marL="0">
+              <a:buNone/>
+            </a:pPr>
+            <a:r>
+              <a:rPr lang="en-US" sz="1600" dirty="0">
+                <a:solidFill>
+                  <a:srgbClr val="4A6274"/>
                 </a:solidFill>
                 <a:latin typeface="Calibri" pitchFamily="34" charset="0"/>
                 <a:ea typeface="Calibri" pitchFamily="34" charset="-122"/>
                 <a:cs typeface="Calibri" pitchFamily="34" charset="-120"/>
               </a:rPr>
-              <a:t>Real-Time Earthquake Hazard Prediction</a:t>
-            </a:r>
-            <a:endParaRPr lang="en-US" sz="2600" dirty="0"/>
-          </a:p>
-        </p:txBody>
-      </p:sp>
-      <p:sp>
-        <p:nvSpPr>
-          <p:cNvPr id="7" name="Shape 5"/>
-          <p:cNvSpPr/>
-          <p:nvPr/>
-        </p:nvSpPr>
-        <p:spPr>
-          <a:xfrm>
-            <a:off x="3200400" y="3310128"/>
-            <a:ext cx="2743200" cy="45720"/>
-          </a:xfrm>
-          <a:prstGeom prst="rect">
-            <a:avLst/>
-          </a:prstGeom>
-          <a:solidFill>
-            <a:srgbClr val="B2D8F0"/>
-          </a:solidFill>
-          <a:ln w="12700">
-            <a:solidFill>
-              <a:srgbClr val="B2D8F0"/>
-            </a:solidFill>
-            <a:prstDash val="solid"/>
-          </a:ln>
-        </p:spPr>
-      </p:sp>
-      <p:sp>
-        <p:nvSpPr>
-          <p:cNvPr id="8" name="Text 6"/>
-          <p:cNvSpPr/>
-          <p:nvPr/>
-        </p:nvSpPr>
-        <p:spPr>
-          <a:xfrm>
-            <a:off x="457200" y="3456432"/>
-            <a:ext cx="8229600" cy="384048"/>
-          </a:xfrm>
-          <a:prstGeom prst="rect">
-            <a:avLst/>
-          </a:prstGeom>
-          <a:noFill/>
-          <a:ln/>
-        </p:spPr>
-        <p:txBody>
-          <a:bodyPr wrap="square" rtlCol="0" anchor="ctr"/>
-          <a:lstStyle/>
-          <a:p>
-            <a:pPr algn="ctr" indent="0" marL="0">
-              <a:buNone/>
-            </a:pPr>
-            <a:r>
-              <a:rPr lang="en-US" sz="1800" dirty="0">
-                <a:solidFill>
-                  <a:srgbClr val="4A6274"/>
-                </a:solidFill>
-                <a:latin typeface="Calibri" pitchFamily="34" charset="0"/>
-                <a:ea typeface="Calibri" pitchFamily="34" charset="-122"/>
-                <a:cs typeface="Calibri" pitchFamily="34" charset="-120"/>
-              </a:rPr>
               <a:t>STAT 418  ·  UCLA  ·  Spring 2026  ·  Yutong Ma</a:t>
             </a:r>
-            <a:endParaRPr lang="en-US" sz="1800" dirty="0"/>
+            <a:endParaRPr lang="en-US" sz="1600" dirty="0"/>
           </a:p>
         </p:txBody>
       </p:sp>
@@ -2512,8 +2479,8 @@
         </p:nvSpPr>
         <p:spPr>
           <a:xfrm>
-            <a:off x="365760" y="1005840"/>
-            <a:ext cx="4389120" cy="411480"/>
+            <a:off x="365760" y="987552"/>
+            <a:ext cx="4389120" cy="384048"/>
           </a:xfrm>
           <a:prstGeom prst="rect">
             <a:avLst/>
@@ -2551,8 +2518,8 @@
         </p:nvSpPr>
         <p:spPr>
           <a:xfrm>
-            <a:off x="365760" y="1463040"/>
-            <a:ext cx="4389120" cy="1554480"/>
+            <a:off x="365760" y="1426464"/>
+            <a:ext cx="4389120" cy="1600200"/>
           </a:xfrm>
           <a:prstGeom prst="rect">
             <a:avLst/>
@@ -2568,7 +2535,7 @@
               <a:buNone/>
             </a:pPr>
             <a:r>
-              <a:rPr lang="en-US" sz="1700" dirty="0">
+              <a:rPr lang="en-US" sz="1500" dirty="0">
                 <a:solidFill>
                   <a:srgbClr val="1A1A2A"/>
                 </a:solidFill>
@@ -2576,22 +2543,22 @@
                 <a:ea typeface="Calibri" pitchFamily="34" charset="-122"/>
                 <a:cs typeface="Calibri" pitchFamily="34" charset="-120"/>
               </a:rPr>
-              <a:t>Every year ~55,000 earthquakes of M≥2.5 occur globally. USGS publishes the data in real time — but it's raw, technical numbers that most people cannot act on.</a:t>
-            </a:r>
-            <a:endParaRPr lang="en-US" sz="1700" dirty="0"/>
+              <a:t>Every year ~55,000 earthquakes of M≥2.5 occur globally. USGS publishes the data in real time — but it's raw, technical numbers most people cannot act on.</a:t>
+            </a:r>
+            <a:endParaRPr lang="en-US" sz="1500" dirty="0"/>
           </a:p>
           <a:p>
             <a:pPr indent="0" marL="0">
               <a:buNone/>
             </a:pPr>
-            <a:endParaRPr lang="en-US" sz="1700" dirty="0"/>
+            <a:endParaRPr lang="en-US" sz="1500" dirty="0"/>
           </a:p>
           <a:p>
             <a:pPr indent="0" marL="0">
               <a:buNone/>
             </a:pPr>
             <a:r>
-              <a:rPr lang="en-US" sz="1700" dirty="0">
+              <a:rPr lang="en-US" sz="1500" dirty="0">
                 <a:solidFill>
                   <a:srgbClr val="1A1A2A"/>
                 </a:solidFill>
@@ -2599,9 +2566,9 @@
                 <a:ea typeface="Calibri" pitchFamily="34" charset="-122"/>
                 <a:cs typeface="Calibri" pitchFamily="34" charset="-120"/>
               </a:rPr>
-              <a:t>EarthSafe translates seismic parameters into a clear hazard level: Low, Moderate, or High.</a:t>
-            </a:r>
-            <a:endParaRPr lang="en-US" sz="1700" dirty="0"/>
+              <a:t>EarthSafe turns seismic parameters into a clear hazard level: Low, Moderate, or High.</a:t>
+            </a:r>
+            <a:endParaRPr lang="en-US" sz="1500" dirty="0"/>
           </a:p>
         </p:txBody>
       </p:sp>
@@ -2613,8 +2580,8 @@
         </p:nvSpPr>
         <p:spPr>
           <a:xfrm>
-            <a:off x="347472" y="3108960"/>
-            <a:ext cx="1389888" cy="1051560"/>
+            <a:off x="347472" y="3218688"/>
+            <a:ext cx="1389888" cy="1078992"/>
           </a:xfrm>
           <a:prstGeom prst="rect">
             <a:avLst/>
@@ -2645,7 +2612,7 @@
         </p:nvSpPr>
         <p:spPr>
           <a:xfrm>
-            <a:off x="347472" y="3145536"/>
+            <a:off x="347472" y="3255264"/>
             <a:ext cx="1389888" cy="530352"/>
           </a:xfrm>
           <a:prstGeom prst="rect">
@@ -2684,7 +2651,7 @@
         </p:nvSpPr>
         <p:spPr>
           <a:xfrm>
-            <a:off x="347472" y="3657600"/>
+            <a:off x="347472" y="3767328"/>
             <a:ext cx="1389888" cy="438912"/>
           </a:xfrm>
           <a:prstGeom prst="rect">
@@ -2740,8 +2707,8 @@
         </p:nvSpPr>
         <p:spPr>
           <a:xfrm>
-            <a:off x="1883664" y="3108960"/>
-            <a:ext cx="1389888" cy="1051560"/>
+            <a:off x="1883664" y="3218688"/>
+            <a:ext cx="1389888" cy="1078992"/>
           </a:xfrm>
           <a:prstGeom prst="rect">
             <a:avLst/>
@@ -2772,7 +2739,7 @@
         </p:nvSpPr>
         <p:spPr>
           <a:xfrm>
-            <a:off x="1883664" y="3145536"/>
+            <a:off x="1883664" y="3255264"/>
             <a:ext cx="1389888" cy="530352"/>
           </a:xfrm>
           <a:prstGeom prst="rect">
@@ -2811,7 +2778,7 @@
         </p:nvSpPr>
         <p:spPr>
           <a:xfrm>
-            <a:off x="1883664" y="3657600"/>
+            <a:off x="1883664" y="3767328"/>
             <a:ext cx="1389888" cy="438912"/>
           </a:xfrm>
           <a:prstGeom prst="rect">
@@ -2867,8 +2834,8 @@
         </p:nvSpPr>
         <p:spPr>
           <a:xfrm>
-            <a:off x="3419856" y="3108960"/>
-            <a:ext cx="1389888" cy="1051560"/>
+            <a:off x="3419856" y="3218688"/>
+            <a:ext cx="1389888" cy="1078992"/>
           </a:xfrm>
           <a:prstGeom prst="rect">
             <a:avLst/>
@@ -2899,7 +2866,7 @@
         </p:nvSpPr>
         <p:spPr>
           <a:xfrm>
-            <a:off x="3419856" y="3145536"/>
+            <a:off x="3419856" y="3255264"/>
             <a:ext cx="1389888" cy="530352"/>
           </a:xfrm>
           <a:prstGeom prst="rect">
@@ -2938,7 +2905,7 @@
         </p:nvSpPr>
         <p:spPr>
           <a:xfrm>
-            <a:off x="3419856" y="3657600"/>
+            <a:off x="3419856" y="3767328"/>
             <a:ext cx="1389888" cy="438912"/>
           </a:xfrm>
           <a:prstGeom prst="rect">
@@ -2994,8 +2961,8 @@
         </p:nvSpPr>
         <p:spPr>
           <a:xfrm>
-            <a:off x="5029200" y="1005840"/>
-            <a:ext cx="3749040" cy="411480"/>
+            <a:off x="5029200" y="987552"/>
+            <a:ext cx="3749040" cy="384048"/>
           </a:xfrm>
           <a:prstGeom prst="rect">
             <a:avLst/>
@@ -3033,7 +3000,7 @@
         </p:nvSpPr>
         <p:spPr>
           <a:xfrm>
-            <a:off x="4937760" y="1481328"/>
+            <a:off x="4937760" y="1463040"/>
             <a:ext cx="3840480" cy="1005840"/>
           </a:xfrm>
           <a:prstGeom prst="rect">
@@ -3065,7 +3032,7 @@
         </p:nvSpPr>
         <p:spPr>
           <a:xfrm>
-            <a:off x="4937760" y="1481328"/>
+            <a:off x="4937760" y="1463040"/>
             <a:ext cx="128016" cy="1005840"/>
           </a:xfrm>
           <a:prstGeom prst="rect">
@@ -3090,7 +3057,7 @@
         </p:nvSpPr>
         <p:spPr>
           <a:xfrm>
-            <a:off x="5166360" y="1572768"/>
+            <a:off x="5166360" y="1554480"/>
             <a:ext cx="3520440" cy="347472"/>
           </a:xfrm>
           <a:prstGeom prst="rect">
@@ -3129,7 +3096,7 @@
         </p:nvSpPr>
         <p:spPr>
           <a:xfrm>
-            <a:off x="5166360" y="1975104"/>
+            <a:off x="5166360" y="1956816"/>
             <a:ext cx="3520440" cy="402336"/>
           </a:xfrm>
           <a:prstGeom prst="rect">
@@ -3168,7 +3135,7 @@
         </p:nvSpPr>
         <p:spPr>
           <a:xfrm>
-            <a:off x="4937760" y="2651760"/>
+            <a:off x="4937760" y="2633472"/>
             <a:ext cx="3840480" cy="1005840"/>
           </a:xfrm>
           <a:prstGeom prst="rect">
@@ -3200,7 +3167,7 @@
         </p:nvSpPr>
         <p:spPr>
           <a:xfrm>
-            <a:off x="4937760" y="2651760"/>
+            <a:off x="4937760" y="2633472"/>
             <a:ext cx="128016" cy="1005840"/>
           </a:xfrm>
           <a:prstGeom prst="rect">
@@ -3225,7 +3192,7 @@
         </p:nvSpPr>
         <p:spPr>
           <a:xfrm>
-            <a:off x="5166360" y="2743200"/>
+            <a:off x="5166360" y="2724912"/>
             <a:ext cx="3520440" cy="347472"/>
           </a:xfrm>
           <a:prstGeom prst="rect">
@@ -3264,7 +3231,7 @@
         </p:nvSpPr>
         <p:spPr>
           <a:xfrm>
-            <a:off x="5166360" y="3145536"/>
+            <a:off x="5166360" y="3127248"/>
             <a:ext cx="3520440" cy="402336"/>
           </a:xfrm>
           <a:prstGeom prst="rect">
@@ -3303,7 +3270,7 @@
         </p:nvSpPr>
         <p:spPr>
           <a:xfrm>
-            <a:off x="4937760" y="3822192"/>
+            <a:off x="4937760" y="3803904"/>
             <a:ext cx="3840480" cy="1005840"/>
           </a:xfrm>
           <a:prstGeom prst="rect">
@@ -3335,7 +3302,7 @@
         </p:nvSpPr>
         <p:spPr>
           <a:xfrm>
-            <a:off x="4937760" y="3822192"/>
+            <a:off x="4937760" y="3803904"/>
             <a:ext cx="128016" cy="1005840"/>
           </a:xfrm>
           <a:prstGeom prst="rect">
@@ -3360,7 +3327,7 @@
         </p:nvSpPr>
         <p:spPr>
           <a:xfrm>
-            <a:off x="5166360" y="3913632"/>
+            <a:off x="5166360" y="3895344"/>
             <a:ext cx="3520440" cy="347472"/>
           </a:xfrm>
           <a:prstGeom prst="rect">
@@ -3399,7 +3366,7 @@
         </p:nvSpPr>
         <p:spPr>
           <a:xfrm>
-            <a:off x="5166360" y="4315968"/>
+            <a:off x="5166360" y="4297680"/>
             <a:ext cx="3520440" cy="402336"/>
           </a:xfrm>
           <a:prstGeom prst="rect">
@@ -3598,8 +3565,8 @@
         </p:nvSpPr>
         <p:spPr>
           <a:xfrm>
-            <a:off x="320040" y="1417320"/>
-            <a:ext cx="502920" cy="502920"/>
+            <a:off x="347472" y="1389888"/>
+            <a:ext cx="530352" cy="530352"/>
           </a:xfrm>
           <a:prstGeom prst="ellipse">
             <a:avLst/>
@@ -3623,17 +3590,17 @@
         </p:nvSpPr>
         <p:spPr>
           <a:xfrm>
-            <a:off x="320040" y="1417320"/>
-            <a:ext cx="502920" cy="502920"/>
-          </a:xfrm>
-          <a:prstGeom prst="rect">
-            <a:avLst/>
-          </a:prstGeom>
-          <a:noFill/>
-          <a:ln/>
-        </p:spPr>
-        <p:txBody>
-          <a:bodyPr wrap="square" lIns="0" tIns="0" rIns="0" bIns="0" rtlCol="0" anchor="ctr"/>
+            <a:off x="347472" y="1389888"/>
+            <a:ext cx="530352" cy="530352"/>
+          </a:xfrm>
+          <a:prstGeom prst="rect">
+            <a:avLst/>
+          </a:prstGeom>
+          <a:noFill/>
+          <a:ln/>
+        </p:spPr>
+        <p:txBody>
+          <a:bodyPr wrap="square" rtlCol="0" anchor="ctr"/>
           <a:lstStyle/>
           <a:p>
             <a:pPr algn="ctr" indent="0" marL="0">
@@ -3662,8 +3629,8 @@
         </p:nvSpPr>
         <p:spPr>
           <a:xfrm>
-            <a:off x="969264" y="1435608"/>
-            <a:ext cx="3520440" cy="256032"/>
+            <a:off x="1005840" y="1408176"/>
+            <a:ext cx="3474720" cy="274320"/>
           </a:xfrm>
           <a:prstGeom prst="rect">
             <a:avLst/>
@@ -3701,8 +3668,8 @@
         </p:nvSpPr>
         <p:spPr>
           <a:xfrm>
-            <a:off x="969264" y="1691640"/>
-            <a:ext cx="3520440" cy="274320"/>
+            <a:off x="1005840" y="1664208"/>
+            <a:ext cx="3474720" cy="347472"/>
           </a:xfrm>
           <a:prstGeom prst="rect">
             <a:avLst/>
@@ -3718,7 +3685,7 @@
               <a:buNone/>
             </a:pPr>
             <a:r>
-              <a:rPr lang="en-US" sz="1300" dirty="0">
+              <a:rPr lang="en-US" sz="1200" dirty="0">
                 <a:solidFill>
                   <a:srgbClr val="4A6274"/>
                 </a:solidFill>
@@ -3728,7 +3695,7 @@
               </a:rPr>
               <a:t>Monthly chunks · M≥2.5 · 2023–2024 · 2,000 records</a:t>
             </a:r>
-            <a:endParaRPr lang="en-US" sz="1300" dirty="0"/>
+            <a:endParaRPr lang="en-US" sz="1200" dirty="0"/>
           </a:p>
         </p:txBody>
       </p:sp>
@@ -3740,8 +3707,8 @@
         </p:nvSpPr>
         <p:spPr>
           <a:xfrm>
-            <a:off x="320040" y="2276856"/>
-            <a:ext cx="502920" cy="502920"/>
+            <a:off x="347472" y="2212848"/>
+            <a:ext cx="530352" cy="530352"/>
           </a:xfrm>
           <a:prstGeom prst="ellipse">
             <a:avLst/>
@@ -3765,17 +3732,17 @@
         </p:nvSpPr>
         <p:spPr>
           <a:xfrm>
-            <a:off x="320040" y="2276856"/>
-            <a:ext cx="502920" cy="502920"/>
-          </a:xfrm>
-          <a:prstGeom prst="rect">
-            <a:avLst/>
-          </a:prstGeom>
-          <a:noFill/>
-          <a:ln/>
-        </p:spPr>
-        <p:txBody>
-          <a:bodyPr wrap="square" lIns="0" tIns="0" rIns="0" bIns="0" rtlCol="0" anchor="ctr"/>
+            <a:off x="347472" y="2212848"/>
+            <a:ext cx="530352" cy="530352"/>
+          </a:xfrm>
+          <a:prstGeom prst="rect">
+            <a:avLst/>
+          </a:prstGeom>
+          <a:noFill/>
+          <a:ln/>
+        </p:spPr>
+        <p:txBody>
+          <a:bodyPr wrap="square" rtlCol="0" anchor="ctr"/>
           <a:lstStyle/>
           <a:p>
             <a:pPr algn="ctr" indent="0" marL="0">
@@ -3804,8 +3771,8 @@
         </p:nvSpPr>
         <p:spPr>
           <a:xfrm>
-            <a:off x="969264" y="2295144"/>
-            <a:ext cx="3520440" cy="256032"/>
+            <a:off x="1005840" y="2231136"/>
+            <a:ext cx="3474720" cy="274320"/>
           </a:xfrm>
           <a:prstGeom prst="rect">
             <a:avLst/>
@@ -3843,8 +3810,8 @@
         </p:nvSpPr>
         <p:spPr>
           <a:xfrm>
-            <a:off x="969264" y="2551176"/>
-            <a:ext cx="3520440" cy="274320"/>
+            <a:off x="1005840" y="2487168"/>
+            <a:ext cx="3474720" cy="347472"/>
           </a:xfrm>
           <a:prstGeom prst="rect">
             <a:avLst/>
@@ -3860,7 +3827,7 @@
               <a:buNone/>
             </a:pPr>
             <a:r>
-              <a:rPr lang="en-US" sz="1300" dirty="0">
+              <a:rPr lang="en-US" sz="1200" dirty="0">
                 <a:solidFill>
                   <a:srgbClr val="4A6274"/>
                 </a:solidFill>
@@ -3870,7 +3837,7 @@
               </a:rPr>
               <a:t>location_type from place text · impute gap (103 nulls with median)</a:t>
             </a:r>
-            <a:endParaRPr lang="en-US" sz="1300" dirty="0"/>
+            <a:endParaRPr lang="en-US" sz="1200" dirty="0"/>
           </a:p>
         </p:txBody>
       </p:sp>
@@ -3882,8 +3849,8 @@
         </p:nvSpPr>
         <p:spPr>
           <a:xfrm>
-            <a:off x="320040" y="3136392"/>
-            <a:ext cx="502920" cy="502920"/>
+            <a:off x="347472" y="3035808"/>
+            <a:ext cx="530352" cy="530352"/>
           </a:xfrm>
           <a:prstGeom prst="ellipse">
             <a:avLst/>
@@ -3907,17 +3874,17 @@
         </p:nvSpPr>
         <p:spPr>
           <a:xfrm>
-            <a:off x="320040" y="3136392"/>
-            <a:ext cx="502920" cy="502920"/>
-          </a:xfrm>
-          <a:prstGeom prst="rect">
-            <a:avLst/>
-          </a:prstGeom>
-          <a:noFill/>
-          <a:ln/>
-        </p:spPr>
-        <p:txBody>
-          <a:bodyPr wrap="square" lIns="0" tIns="0" rIns="0" bIns="0" rtlCol="0" anchor="ctr"/>
+            <a:off x="347472" y="3035808"/>
+            <a:ext cx="530352" cy="530352"/>
+          </a:xfrm>
+          <a:prstGeom prst="rect">
+            <a:avLst/>
+          </a:prstGeom>
+          <a:noFill/>
+          <a:ln/>
+        </p:spPr>
+        <p:txBody>
+          <a:bodyPr wrap="square" rtlCol="0" anchor="ctr"/>
           <a:lstStyle/>
           <a:p>
             <a:pPr algn="ctr" indent="0" marL="0">
@@ -3946,8 +3913,8 @@
         </p:nvSpPr>
         <p:spPr>
           <a:xfrm>
-            <a:off x="969264" y="3154680"/>
-            <a:ext cx="3520440" cy="256032"/>
+            <a:off x="1005840" y="3054096"/>
+            <a:ext cx="3474720" cy="274320"/>
           </a:xfrm>
           <a:prstGeom prst="rect">
             <a:avLst/>
@@ -3985,8 +3952,8 @@
         </p:nvSpPr>
         <p:spPr>
           <a:xfrm>
-            <a:off x="969264" y="3410712"/>
-            <a:ext cx="3520440" cy="274320"/>
+            <a:off x="1005840" y="3310128"/>
+            <a:ext cx="3474720" cy="347472"/>
           </a:xfrm>
           <a:prstGeom prst="rect">
             <a:avLst/>
@@ -4002,7 +3969,7 @@
               <a:buNone/>
             </a:pPr>
             <a:r>
-              <a:rPr lang="en-US" sz="1300" dirty="0">
+              <a:rPr lang="en-US" sz="1200" dirty="0">
                 <a:solidFill>
                   <a:srgbClr val="4A6274"/>
                 </a:solidFill>
@@ -4012,7 +3979,7 @@
               </a:rPr>
               <a:t>Rule-based: Low &lt;4.0 · Moderate 4–6 · High ≥6.0</a:t>
             </a:r>
-            <a:endParaRPr lang="en-US" sz="1300" dirty="0"/>
+            <a:endParaRPr lang="en-US" sz="1200" dirty="0"/>
           </a:p>
         </p:txBody>
       </p:sp>
@@ -4024,8 +3991,8 @@
         </p:nvSpPr>
         <p:spPr>
           <a:xfrm>
-            <a:off x="320040" y="3995928"/>
-            <a:ext cx="502920" cy="502920"/>
+            <a:off x="347472" y="3858768"/>
+            <a:ext cx="530352" cy="530352"/>
           </a:xfrm>
           <a:prstGeom prst="ellipse">
             <a:avLst/>
@@ -4049,17 +4016,17 @@
         </p:nvSpPr>
         <p:spPr>
           <a:xfrm>
-            <a:off x="320040" y="3995928"/>
-            <a:ext cx="502920" cy="502920"/>
-          </a:xfrm>
-          <a:prstGeom prst="rect">
-            <a:avLst/>
-          </a:prstGeom>
-          <a:noFill/>
-          <a:ln/>
-        </p:spPr>
-        <p:txBody>
-          <a:bodyPr wrap="square" lIns="0" tIns="0" rIns="0" bIns="0" rtlCol="0" anchor="ctr"/>
+            <a:off x="347472" y="3858768"/>
+            <a:ext cx="530352" cy="530352"/>
+          </a:xfrm>
+          <a:prstGeom prst="rect">
+            <a:avLst/>
+          </a:prstGeom>
+          <a:noFill/>
+          <a:ln/>
+        </p:spPr>
+        <p:txBody>
+          <a:bodyPr wrap="square" rtlCol="0" anchor="ctr"/>
           <a:lstStyle/>
           <a:p>
             <a:pPr algn="ctr" indent="0" marL="0">
@@ -4088,8 +4055,8 @@
         </p:nvSpPr>
         <p:spPr>
           <a:xfrm>
-            <a:off x="969264" y="4014216"/>
-            <a:ext cx="3520440" cy="256032"/>
+            <a:off x="1005840" y="3877056"/>
+            <a:ext cx="3474720" cy="274320"/>
           </a:xfrm>
           <a:prstGeom prst="rect">
             <a:avLst/>
@@ -4127,8 +4094,8 @@
         </p:nvSpPr>
         <p:spPr>
           <a:xfrm>
-            <a:off x="969264" y="4270248"/>
-            <a:ext cx="3520440" cy="274320"/>
+            <a:off x="1005840" y="4133088"/>
+            <a:ext cx="3474720" cy="347472"/>
           </a:xfrm>
           <a:prstGeom prst="rect">
             <a:avLst/>
@@ -4144,7 +4111,7 @@
               <a:buNone/>
             </a:pPr>
             <a:r>
-              <a:rPr lang="en-US" sz="1300" dirty="0">
+              <a:rPr lang="en-US" sz="1200" dirty="0">
                 <a:solidFill>
                   <a:srgbClr val="4A6274"/>
                 </a:solidFill>
@@ -4154,7 +4121,7 @@
               </a:rPr>
               <a:t>5-fold cross-validation, stratified by hazard class</a:t>
             </a:r>
-            <a:endParaRPr lang="en-US" sz="1300" dirty="0"/>
+            <a:endParaRPr lang="en-US" sz="1200" dirty="0"/>
           </a:p>
         </p:txBody>
       </p:sp>
@@ -4166,8 +4133,8 @@
         </p:nvSpPr>
         <p:spPr>
           <a:xfrm>
-            <a:off x="5029200" y="914400"/>
-            <a:ext cx="3749040" cy="411480"/>
+            <a:off x="4937760" y="914400"/>
+            <a:ext cx="3840480" cy="411480"/>
           </a:xfrm>
           <a:prstGeom prst="rect">
             <a:avLst/>
@@ -4204,8 +4171,8 @@
           <p:nvPr/>
         </p:nvGraphicFramePr>
         <p:xfrm>
-          <a:off x="4663440" y="1353312"/>
-          <a:ext cx="4206240" cy="2834640"/>
+          <a:off x="4754880" y="1188720"/>
+          <a:ext cx="4114800" cy="2926080"/>
         </p:xfrm>
         <a:graphic xmlns:a="http://schemas.openxmlformats.org/drawingml/2006/main">
           <a:graphicData uri="http://schemas.openxmlformats.org/drawingml/2006/chart">
@@ -4221,8 +4188,8 @@
         </p:nvSpPr>
         <p:spPr>
           <a:xfrm>
-            <a:off x="4663440" y="4315968"/>
-            <a:ext cx="4206240" cy="512064"/>
+            <a:off x="4754880" y="4187952"/>
+            <a:ext cx="4114800" cy="658368"/>
           </a:xfrm>
           <a:prstGeom prst="rect">
             <a:avLst/>
@@ -4232,7 +4199,7 @@
           </a:solidFill>
           <a:ln w="12700">
             <a:solidFill>
-              <a:srgbClr val="D4800A"/>
+              <a:srgbClr val="D68910"/>
             </a:solidFill>
             <a:prstDash val="solid"/>
           </a:ln>
@@ -4246,8 +4213,8 @@
         </p:nvSpPr>
         <p:spPr>
           <a:xfrm>
-            <a:off x="4754880" y="4343400"/>
-            <a:ext cx="4023360" cy="457200"/>
+            <a:off x="4892040" y="4224528"/>
+            <a:ext cx="3840480" cy="566928"/>
           </a:xfrm>
           <a:prstGeom prst="rect">
             <a:avLst/>
@@ -4263,17 +4230,34 @@
               <a:buNone/>
             </a:pPr>
             <a:r>
-              <a:rPr lang="en-US" sz="1200" dirty="0">
-                <a:solidFill>
-                  <a:srgbClr val="7D6608"/>
+              <a:rPr lang="en-US" sz="1300" dirty="0">
+                <a:solidFill>
+                  <a:srgbClr val="1A1A2A"/>
                 </a:solidFill>
                 <a:latin typeface="Calibri" pitchFamily="34" charset="0"/>
                 <a:ea typeface="Calibri" pitchFamily="34" charset="-122"/>
                 <a:cs typeface="Calibri" pitchFamily="34" charset="-120"/>
               </a:rPr>
-              <a:t>⚠️  High class: only 7 records (M≥6.0 events are rare). Handled with balanced sample weights in training.</a:t>
-            </a:r>
-            <a:endParaRPr lang="en-US" sz="1200" dirty="0"/>
+              <a:t>⚠️  High class: only 7 records (M≥6.0 events are rare).</a:t>
+            </a:r>
+            <a:endParaRPr lang="en-US" sz="1300" dirty="0"/>
+          </a:p>
+          <a:p>
+            <a:pPr indent="0" marL="0">
+              <a:buNone/>
+            </a:pPr>
+            <a:r>
+              <a:rPr lang="en-US" sz="1300" dirty="0">
+                <a:solidFill>
+                  <a:srgbClr val="1A1A2A"/>
+                </a:solidFill>
+                <a:latin typeface="Calibri" pitchFamily="34" charset="0"/>
+                <a:ea typeface="Calibri" pitchFamily="34" charset="-122"/>
+                <a:cs typeface="Calibri" pitchFamily="34" charset="-120"/>
+              </a:rPr>
+              <a:t>Handled with balanced sample weights in training.</a:t>
+            </a:r>
+            <a:endParaRPr lang="en-US" sz="1300" dirty="0"/>
           </a:p>
         </p:txBody>
       </p:sp>
@@ -4398,15 +4382,54 @@
           </a:p>
         </p:txBody>
       </p:sp>
+      <p:sp>
+        <p:nvSpPr>
+          <p:cNvPr id="5" name="Text 3"/>
+          <p:cNvSpPr/>
+          <p:nvPr/>
+        </p:nvSpPr>
+        <p:spPr>
+          <a:xfrm>
+            <a:off x="365760" y="914400"/>
+            <a:ext cx="5303520" cy="365760"/>
+          </a:xfrm>
+          <a:prstGeom prst="rect">
+            <a:avLst/>
+          </a:prstGeom>
+          <a:noFill/>
+          <a:ln/>
+        </p:spPr>
+        <p:txBody>
+          <a:bodyPr wrap="square" rtlCol="0" anchor="ctr"/>
+          <a:lstStyle/>
+          <a:p>
+            <a:pPr algn="ctr" indent="0" marL="0">
+              <a:buNone/>
+            </a:pPr>
+            <a:r>
+              <a:rPr lang="en-US" sz="1600" b="1" dirty="0">
+                <a:solidFill>
+                  <a:srgbClr val="1A5276"/>
+                </a:solidFill>
+                <a:latin typeface="Trebuchet MS" pitchFamily="34" charset="0"/>
+                <a:ea typeface="Trebuchet MS" pitchFamily="34" charset="-122"/>
+                <a:cs typeface="Trebuchet MS" pitchFamily="34" charset="-120"/>
+              </a:rPr>
+              <a:t>5-Fold Cross-Validation Results</a:t>
+            </a:r>
+            <a:endParaRPr lang="en-US" sz="1600" dirty="0"/>
+          </a:p>
+        </p:txBody>
+      </p:sp>
       <p:graphicFrame>
         <p:nvGraphicFramePr>
-          <p:cNvPr id="5" name="Chart 0" descr=""/>
+          <p:cNvPr id="6" name="Chart 0" descr=""/>
           <p:cNvGraphicFramePr/>
           <p:nvPr/>
         </p:nvGraphicFramePr>
         <p:xfrm>
-          <a:off x="274320" y="868680"/>
-          <a:ext cx="5394960" cy="3520440"/>
+          <a:off x="274320" y="1261872"/>
+          <a:ext cx="5486400" cy="3611880"/>
         </p:xfrm>
         <a:graphic xmlns:a="http://schemas.openxmlformats.org/drawingml/2006/main">
           <a:graphicData uri="http://schemas.openxmlformats.org/drawingml/2006/chart">
@@ -4416,24 +4439,24 @@
       </p:graphicFrame>
       <p:sp>
         <p:nvSpPr>
-          <p:cNvPr id="6" name="Shape 3"/>
-          <p:cNvSpPr/>
-          <p:nvPr/>
-        </p:nvSpPr>
-        <p:spPr>
-          <a:xfrm>
-            <a:off x="5897880" y="868680"/>
-            <a:ext cx="2926080" cy="1737360"/>
-          </a:xfrm>
-          <a:prstGeom prst="rect">
-            <a:avLst/>
-          </a:prstGeom>
-          <a:solidFill>
-            <a:srgbClr val="EAF4FB"/>
+          <p:cNvPr id="7" name="Shape 4"/>
+          <p:cNvSpPr/>
+          <p:nvPr/>
+        </p:nvSpPr>
+        <p:spPr>
+          <a:xfrm>
+            <a:off x="5897880" y="914400"/>
+            <a:ext cx="2926080" cy="1554480"/>
+          </a:xfrm>
+          <a:prstGeom prst="rect">
+            <a:avLst/>
+          </a:prstGeom>
+          <a:solidFill>
+            <a:srgbClr val="FEF9E7"/>
           </a:solidFill>
           <a:ln w="12700">
             <a:solidFill>
-              <a:srgbClr val="B2D8F0"/>
+              <a:srgbClr val="D68910"/>
             </a:solidFill>
             <a:prstDash val="solid"/>
           </a:ln>
@@ -4448,14 +4471,14 @@
       </p:sp>
       <p:sp>
         <p:nvSpPr>
-          <p:cNvPr id="7" name="Text 4"/>
-          <p:cNvSpPr/>
-          <p:nvPr/>
-        </p:nvSpPr>
-        <p:spPr>
-          <a:xfrm>
-            <a:off x="5989320" y="914400"/>
-            <a:ext cx="2743200" cy="384048"/>
+          <p:cNvPr id="8" name="Text 5"/>
+          <p:cNvSpPr/>
+          <p:nvPr/>
+        </p:nvSpPr>
+        <p:spPr>
+          <a:xfrm>
+            <a:off x="6035040" y="987552"/>
+            <a:ext cx="2651760" cy="347472"/>
           </a:xfrm>
           <a:prstGeom prst="rect">
             <a:avLst/>
@@ -4471,9 +4494,9 @@
               <a:buNone/>
             </a:pPr>
             <a:r>
-              <a:rPr lang="en-US" sz="1600" b="1" dirty="0">
-                <a:solidFill>
-                  <a:srgbClr val="1A5276"/>
+              <a:rPr lang="en-US" sz="1500" b="1" dirty="0">
+                <a:solidFill>
+                  <a:srgbClr val="D68910"/>
                 </a:solidFill>
                 <a:latin typeface="Trebuchet MS" pitchFamily="34" charset="0"/>
                 <a:ea typeface="Trebuchet MS" pitchFamily="34" charset="-122"/>
@@ -4481,20 +4504,20 @@
               </a:rPr>
               <a:t>🏆  Best Model</a:t>
             </a:r>
-            <a:endParaRPr lang="en-US" sz="1600" dirty="0"/>
-          </a:p>
-        </p:txBody>
-      </p:sp>
-      <p:sp>
-        <p:nvSpPr>
-          <p:cNvPr id="8" name="Text 5"/>
-          <p:cNvSpPr/>
-          <p:nvPr/>
-        </p:nvSpPr>
-        <p:spPr>
-          <a:xfrm>
-            <a:off x="5989320" y="1280160"/>
-            <a:ext cx="2743200" cy="530352"/>
+            <a:endParaRPr lang="en-US" sz="1500" dirty="0"/>
+          </a:p>
+        </p:txBody>
+      </p:sp>
+      <p:sp>
+        <p:nvSpPr>
+          <p:cNvPr id="9" name="Text 6"/>
+          <p:cNvSpPr/>
+          <p:nvPr/>
+        </p:nvSpPr>
+        <p:spPr>
+          <a:xfrm>
+            <a:off x="5943600" y="1316736"/>
+            <a:ext cx="2743200" cy="566928"/>
           </a:xfrm>
           <a:prstGeom prst="rect">
             <a:avLst/>
@@ -4510,9 +4533,9 @@
               <a:buNone/>
             </a:pPr>
             <a:r>
-              <a:rPr lang="en-US" sz="3400" b="1" dirty="0">
-                <a:solidFill>
-                  <a:srgbClr val="0D9488"/>
+              <a:rPr lang="en-US" sz="3000" b="1" dirty="0">
+                <a:solidFill>
+                  <a:srgbClr val="1A5276"/>
                 </a:solidFill>
                 <a:latin typeface="Trebuchet MS" pitchFamily="34" charset="0"/>
                 <a:ea typeface="Trebuchet MS" pitchFamily="34" charset="-122"/>
@@ -4520,20 +4543,20 @@
               </a:rPr>
               <a:t>XGBoost</a:t>
             </a:r>
-            <a:endParaRPr lang="en-US" sz="3400" dirty="0"/>
-          </a:p>
-        </p:txBody>
-      </p:sp>
-      <p:sp>
-        <p:nvSpPr>
-          <p:cNvPr id="9" name="Text 6"/>
-          <p:cNvSpPr/>
-          <p:nvPr/>
-        </p:nvSpPr>
-        <p:spPr>
-          <a:xfrm>
-            <a:off x="5989320" y="1792224"/>
-            <a:ext cx="2743200" cy="310896"/>
+            <a:endParaRPr lang="en-US" sz="3000" dirty="0"/>
+          </a:p>
+        </p:txBody>
+      </p:sp>
+      <p:sp>
+        <p:nvSpPr>
+          <p:cNvPr id="10" name="Text 7"/>
+          <p:cNvSpPr/>
+          <p:nvPr/>
+        </p:nvSpPr>
+        <p:spPr>
+          <a:xfrm>
+            <a:off x="5943600" y="1847088"/>
+            <a:ext cx="2743200" cy="292608"/>
           </a:xfrm>
           <a:prstGeom prst="rect">
             <a:avLst/>
@@ -4549,7 +4572,7 @@
               <a:buNone/>
             </a:pPr>
             <a:r>
-              <a:rPr lang="en-US" sz="1200" dirty="0">
+              <a:rPr lang="en-US" sz="1300" dirty="0">
                 <a:solidFill>
                   <a:srgbClr val="4A6274"/>
                 </a:solidFill>
@@ -4559,20 +4582,20 @@
               </a:rPr>
               <a:t>Accuracy 99.95%  ·  Macro F1 1.00</a:t>
             </a:r>
-            <a:endParaRPr lang="en-US" sz="1200" dirty="0"/>
-          </a:p>
-        </p:txBody>
-      </p:sp>
-      <p:sp>
-        <p:nvSpPr>
-          <p:cNvPr id="10" name="Text 7"/>
-          <p:cNvSpPr/>
-          <p:nvPr/>
-        </p:nvSpPr>
-        <p:spPr>
-          <a:xfrm>
-            <a:off x="5989320" y="2084832"/>
-            <a:ext cx="2743200" cy="402336"/>
+            <a:endParaRPr lang="en-US" sz="1300" dirty="0"/>
+          </a:p>
+        </p:txBody>
+      </p:sp>
+      <p:sp>
+        <p:nvSpPr>
+          <p:cNvPr id="11" name="Text 8"/>
+          <p:cNvSpPr/>
+          <p:nvPr/>
+        </p:nvSpPr>
+        <p:spPr>
+          <a:xfrm>
+            <a:off x="5943600" y="2121408"/>
+            <a:ext cx="2743200" cy="256032"/>
           </a:xfrm>
           <a:prstGeom prst="rect">
             <a:avLst/>
@@ -4604,7 +4627,7 @@
       </p:sp>
       <p:sp>
         <p:nvSpPr>
-          <p:cNvPr id="11" name="Text 8"/>
+          <p:cNvPr id="12" name="Text 9"/>
           <p:cNvSpPr/>
           <p:nvPr/>
         </p:nvSpPr>
@@ -4643,7 +4666,7 @@
       </p:sp>
       <p:sp>
         <p:nvSpPr>
-          <p:cNvPr id="12" name="Text 9"/>
+          <p:cNvPr id="13" name="Text 10"/>
           <p:cNvSpPr/>
           <p:nvPr/>
         </p:nvSpPr>
@@ -4682,7 +4705,7 @@
       </p:sp>
       <p:sp>
         <p:nvSpPr>
-          <p:cNvPr id="13" name="Shape 10"/>
+          <p:cNvPr id="14" name="Shape 11"/>
           <p:cNvSpPr/>
           <p:nvPr/>
         </p:nvSpPr>
@@ -4707,7 +4730,7 @@
       </p:sp>
       <p:sp>
         <p:nvSpPr>
-          <p:cNvPr id="14" name="Text 11"/>
+          <p:cNvPr id="15" name="Text 12"/>
           <p:cNvSpPr/>
           <p:nvPr/>
         </p:nvSpPr>
@@ -4746,7 +4769,7 @@
       </p:sp>
       <p:sp>
         <p:nvSpPr>
-          <p:cNvPr id="15" name="Text 12"/>
+          <p:cNvPr id="16" name="Text 13"/>
           <p:cNvSpPr/>
           <p:nvPr/>
         </p:nvSpPr>
@@ -4785,7 +4808,7 @@
       </p:sp>
       <p:sp>
         <p:nvSpPr>
-          <p:cNvPr id="16" name="Shape 13"/>
+          <p:cNvPr id="17" name="Shape 14"/>
           <p:cNvSpPr/>
           <p:nvPr/>
         </p:nvSpPr>
@@ -4810,7 +4833,7 @@
       </p:sp>
       <p:sp>
         <p:nvSpPr>
-          <p:cNvPr id="17" name="Text 14"/>
+          <p:cNvPr id="18" name="Text 15"/>
           <p:cNvSpPr/>
           <p:nvPr/>
         </p:nvSpPr>
@@ -4849,7 +4872,7 @@
       </p:sp>
       <p:sp>
         <p:nvSpPr>
-          <p:cNvPr id="18" name="Text 15"/>
+          <p:cNvPr id="19" name="Text 16"/>
           <p:cNvSpPr/>
           <p:nvPr/>
         </p:nvSpPr>
@@ -4888,7 +4911,7 @@
       </p:sp>
       <p:sp>
         <p:nvSpPr>
-          <p:cNvPr id="19" name="Shape 16"/>
+          <p:cNvPr id="20" name="Shape 17"/>
           <p:cNvSpPr/>
           <p:nvPr/>
         </p:nvSpPr>
@@ -4913,7 +4936,7 @@
       </p:sp>
       <p:sp>
         <p:nvSpPr>
-          <p:cNvPr id="20" name="Text 17"/>
+          <p:cNvPr id="21" name="Text 18"/>
           <p:cNvSpPr/>
           <p:nvPr/>
         </p:nvSpPr>
@@ -4952,7 +4975,7 @@
       </p:sp>
       <p:sp>
         <p:nvSpPr>
-          <p:cNvPr id="21" name="Text 18"/>
+          <p:cNvPr id="22" name="Text 19"/>
           <p:cNvSpPr/>
           <p:nvPr/>
         </p:nvSpPr>
@@ -4991,7 +5014,7 @@
       </p:sp>
       <p:sp>
         <p:nvSpPr>
-          <p:cNvPr id="22" name="Shape 19"/>
+          <p:cNvPr id="23" name="Shape 20"/>
           <p:cNvSpPr/>
           <p:nvPr/>
         </p:nvSpPr>
@@ -5016,7 +5039,7 @@
       </p:sp>
       <p:sp>
         <p:nvSpPr>
-          <p:cNvPr id="23" name="Text 20"/>
+          <p:cNvPr id="24" name="Text 21"/>
           <p:cNvSpPr/>
           <p:nvPr/>
         </p:nvSpPr>
@@ -5055,7 +5078,7 @@
       </p:sp>
       <p:sp>
         <p:nvSpPr>
-          <p:cNvPr id="24" name="Text 21"/>
+          <p:cNvPr id="25" name="Text 22"/>
           <p:cNvSpPr/>
           <p:nvPr/>
         </p:nvSpPr>
@@ -5094,7 +5117,7 @@
       </p:sp>
       <p:sp>
         <p:nvSpPr>
-          <p:cNvPr id="25" name="Shape 22"/>
+          <p:cNvPr id="26" name="Shape 23"/>
           <p:cNvSpPr/>
           <p:nvPr/>
         </p:nvSpPr>
@@ -5119,7 +5142,7 @@
       </p:sp>
       <p:sp>
         <p:nvSpPr>
-          <p:cNvPr id="26" name="Text 23"/>
+          <p:cNvPr id="27" name="Text 24"/>
           <p:cNvSpPr/>
           <p:nvPr/>
         </p:nvSpPr>
@@ -5293,476 +5316,14 @@
         </p:blipFill>
         <p:spPr>
           <a:xfrm>
-            <a:off x="228600" y="868680"/>
-            <a:ext cx="8686800" cy="3337560"/>
+            <a:off x="274320" y="822960"/>
+            <a:ext cx="8595360" cy="4334256"/>
           </a:xfrm>
           <a:prstGeom prst="rect">
             <a:avLst/>
           </a:prstGeom>
         </p:spPr>
       </p:pic>
-      <p:sp>
-        <p:nvSpPr>
-          <p:cNvPr id="6" name="Shape 3"/>
-          <p:cNvSpPr/>
-          <p:nvPr/>
-        </p:nvSpPr>
-        <p:spPr>
-          <a:xfrm>
-            <a:off x="393192" y="4407408"/>
-            <a:ext cx="1115568" cy="384048"/>
-          </a:xfrm>
-          <a:prstGeom prst="roundRect">
-            <a:avLst>
-              <a:gd name="adj" fmla="val 14286"/>
-            </a:avLst>
-          </a:prstGeom>
-          <a:solidFill>
-            <a:srgbClr val="1A5276"/>
-          </a:solidFill>
-          <a:ln w="12700">
-            <a:solidFill>
-              <a:srgbClr val="1A5276"/>
-            </a:solidFill>
-            <a:prstDash val="solid"/>
-          </a:ln>
-        </p:spPr>
-      </p:sp>
-      <p:sp>
-        <p:nvSpPr>
-          <p:cNvPr id="7" name="Text 4"/>
-          <p:cNvSpPr/>
-          <p:nvPr/>
-        </p:nvSpPr>
-        <p:spPr>
-          <a:xfrm>
-            <a:off x="393192" y="4407408"/>
-            <a:ext cx="1115568" cy="384048"/>
-          </a:xfrm>
-          <a:prstGeom prst="rect">
-            <a:avLst/>
-          </a:prstGeom>
-          <a:noFill/>
-          <a:ln/>
-        </p:spPr>
-        <p:txBody>
-          <a:bodyPr wrap="square" lIns="0" tIns="0" rIns="0" bIns="0" rtlCol="0" anchor="ctr"/>
-          <a:lstStyle/>
-          <a:p>
-            <a:pPr algn="ctr" indent="0" marL="0">
-              <a:buNone/>
-            </a:pPr>
-            <a:r>
-              <a:rPr lang="en-US" sz="1100" dirty="0">
-                <a:solidFill>
-                  <a:srgbClr val="FFFFFF"/>
-                </a:solidFill>
-                <a:latin typeface="Calibri" pitchFamily="34" charset="0"/>
-                <a:ea typeface="Calibri" pitchFamily="34" charset="-122"/>
-                <a:cs typeface="Calibri" pitchFamily="34" charset="-120"/>
-              </a:rPr>
-              <a:t>Python 3.11</a:t>
-            </a:r>
-            <a:endParaRPr lang="en-US" sz="1100" dirty="0"/>
-          </a:p>
-        </p:txBody>
-      </p:sp>
-      <p:sp>
-        <p:nvSpPr>
-          <p:cNvPr id="8" name="Shape 5"/>
-          <p:cNvSpPr/>
-          <p:nvPr/>
-        </p:nvSpPr>
-        <p:spPr>
-          <a:xfrm>
-            <a:off x="1600200" y="4407408"/>
-            <a:ext cx="1115568" cy="384048"/>
-          </a:xfrm>
-          <a:prstGeom prst="roundRect">
-            <a:avLst>
-              <a:gd name="adj" fmla="val 14286"/>
-            </a:avLst>
-          </a:prstGeom>
-          <a:solidFill>
-            <a:srgbClr val="1A5276"/>
-          </a:solidFill>
-          <a:ln w="12700">
-            <a:solidFill>
-              <a:srgbClr val="1A5276"/>
-            </a:solidFill>
-            <a:prstDash val="solid"/>
-          </a:ln>
-        </p:spPr>
-      </p:sp>
-      <p:sp>
-        <p:nvSpPr>
-          <p:cNvPr id="9" name="Text 6"/>
-          <p:cNvSpPr/>
-          <p:nvPr/>
-        </p:nvSpPr>
-        <p:spPr>
-          <a:xfrm>
-            <a:off x="1600200" y="4407408"/>
-            <a:ext cx="1115568" cy="384048"/>
-          </a:xfrm>
-          <a:prstGeom prst="rect">
-            <a:avLst/>
-          </a:prstGeom>
-          <a:noFill/>
-          <a:ln/>
-        </p:spPr>
-        <p:txBody>
-          <a:bodyPr wrap="square" lIns="0" tIns="0" rIns="0" bIns="0" rtlCol="0" anchor="ctr"/>
-          <a:lstStyle/>
-          <a:p>
-            <a:pPr algn="ctr" indent="0" marL="0">
-              <a:buNone/>
-            </a:pPr>
-            <a:r>
-              <a:rPr lang="en-US" sz="1100" dirty="0">
-                <a:solidFill>
-                  <a:srgbClr val="FFFFFF"/>
-                </a:solidFill>
-                <a:latin typeface="Calibri" pitchFamily="34" charset="0"/>
-                <a:ea typeface="Calibri" pitchFamily="34" charset="-122"/>
-                <a:cs typeface="Calibri" pitchFamily="34" charset="-120"/>
-              </a:rPr>
-              <a:t>XGBoost 2.0</a:t>
-            </a:r>
-            <a:endParaRPr lang="en-US" sz="1100" dirty="0"/>
-          </a:p>
-        </p:txBody>
-      </p:sp>
-      <p:sp>
-        <p:nvSpPr>
-          <p:cNvPr id="10" name="Shape 7"/>
-          <p:cNvSpPr/>
-          <p:nvPr/>
-        </p:nvSpPr>
-        <p:spPr>
-          <a:xfrm>
-            <a:off x="2807208" y="4407408"/>
-            <a:ext cx="1115568" cy="384048"/>
-          </a:xfrm>
-          <a:prstGeom prst="roundRect">
-            <a:avLst>
-              <a:gd name="adj" fmla="val 14286"/>
-            </a:avLst>
-          </a:prstGeom>
-          <a:solidFill>
-            <a:srgbClr val="1A5276"/>
-          </a:solidFill>
-          <a:ln w="12700">
-            <a:solidFill>
-              <a:srgbClr val="1A5276"/>
-            </a:solidFill>
-            <a:prstDash val="solid"/>
-          </a:ln>
-        </p:spPr>
-      </p:sp>
-      <p:sp>
-        <p:nvSpPr>
-          <p:cNvPr id="11" name="Text 8"/>
-          <p:cNvSpPr/>
-          <p:nvPr/>
-        </p:nvSpPr>
-        <p:spPr>
-          <a:xfrm>
-            <a:off x="2807208" y="4407408"/>
-            <a:ext cx="1115568" cy="384048"/>
-          </a:xfrm>
-          <a:prstGeom prst="rect">
-            <a:avLst/>
-          </a:prstGeom>
-          <a:noFill/>
-          <a:ln/>
-        </p:spPr>
-        <p:txBody>
-          <a:bodyPr wrap="square" lIns="0" tIns="0" rIns="0" bIns="0" rtlCol="0" anchor="ctr"/>
-          <a:lstStyle/>
-          <a:p>
-            <a:pPr algn="ctr" indent="0" marL="0">
-              <a:buNone/>
-            </a:pPr>
-            <a:r>
-              <a:rPr lang="en-US" sz="1100" dirty="0">
-                <a:solidFill>
-                  <a:srgbClr val="FFFFFF"/>
-                </a:solidFill>
-                <a:latin typeface="Calibri" pitchFamily="34" charset="0"/>
-                <a:ea typeface="Calibri" pitchFamily="34" charset="-122"/>
-                <a:cs typeface="Calibri" pitchFamily="34" charset="-120"/>
-              </a:rPr>
-              <a:t>Flask 3.0</a:t>
-            </a:r>
-            <a:endParaRPr lang="en-US" sz="1100" dirty="0"/>
-          </a:p>
-        </p:txBody>
-      </p:sp>
-      <p:sp>
-        <p:nvSpPr>
-          <p:cNvPr id="12" name="Shape 9"/>
-          <p:cNvSpPr/>
-          <p:nvPr/>
-        </p:nvSpPr>
-        <p:spPr>
-          <a:xfrm>
-            <a:off x="4014216" y="4407408"/>
-            <a:ext cx="1115568" cy="384048"/>
-          </a:xfrm>
-          <a:prstGeom prst="roundRect">
-            <a:avLst>
-              <a:gd name="adj" fmla="val 14286"/>
-            </a:avLst>
-          </a:prstGeom>
-          <a:solidFill>
-            <a:srgbClr val="1A5276"/>
-          </a:solidFill>
-          <a:ln w="12700">
-            <a:solidFill>
-              <a:srgbClr val="1A5276"/>
-            </a:solidFill>
-            <a:prstDash val="solid"/>
-          </a:ln>
-        </p:spPr>
-      </p:sp>
-      <p:sp>
-        <p:nvSpPr>
-          <p:cNvPr id="13" name="Text 10"/>
-          <p:cNvSpPr/>
-          <p:nvPr/>
-        </p:nvSpPr>
-        <p:spPr>
-          <a:xfrm>
-            <a:off x="4014216" y="4407408"/>
-            <a:ext cx="1115568" cy="384048"/>
-          </a:xfrm>
-          <a:prstGeom prst="rect">
-            <a:avLst/>
-          </a:prstGeom>
-          <a:noFill/>
-          <a:ln/>
-        </p:spPr>
-        <p:txBody>
-          <a:bodyPr wrap="square" lIns="0" tIns="0" rIns="0" bIns="0" rtlCol="0" anchor="ctr"/>
-          <a:lstStyle/>
-          <a:p>
-            <a:pPr algn="ctr" indent="0" marL="0">
-              <a:buNone/>
-            </a:pPr>
-            <a:r>
-              <a:rPr lang="en-US" sz="1100" dirty="0">
-                <a:solidFill>
-                  <a:srgbClr val="FFFFFF"/>
-                </a:solidFill>
-                <a:latin typeface="Calibri" pitchFamily="34" charset="0"/>
-                <a:ea typeface="Calibri" pitchFamily="34" charset="-122"/>
-                <a:cs typeface="Calibri" pitchFamily="34" charset="-120"/>
-              </a:rPr>
-              <a:t>Streamlit 1.35</a:t>
-            </a:r>
-            <a:endParaRPr lang="en-US" sz="1100" dirty="0"/>
-          </a:p>
-        </p:txBody>
-      </p:sp>
-      <p:sp>
-        <p:nvSpPr>
-          <p:cNvPr id="14" name="Shape 11"/>
-          <p:cNvSpPr/>
-          <p:nvPr/>
-        </p:nvSpPr>
-        <p:spPr>
-          <a:xfrm>
-            <a:off x="5221224" y="4407408"/>
-            <a:ext cx="1115568" cy="384048"/>
-          </a:xfrm>
-          <a:prstGeom prst="roundRect">
-            <a:avLst>
-              <a:gd name="adj" fmla="val 14286"/>
-            </a:avLst>
-          </a:prstGeom>
-          <a:solidFill>
-            <a:srgbClr val="1A5276"/>
-          </a:solidFill>
-          <a:ln w="12700">
-            <a:solidFill>
-              <a:srgbClr val="1A5276"/>
-            </a:solidFill>
-            <a:prstDash val="solid"/>
-          </a:ln>
-        </p:spPr>
-      </p:sp>
-      <p:sp>
-        <p:nvSpPr>
-          <p:cNvPr id="15" name="Text 12"/>
-          <p:cNvSpPr/>
-          <p:nvPr/>
-        </p:nvSpPr>
-        <p:spPr>
-          <a:xfrm>
-            <a:off x="5221224" y="4407408"/>
-            <a:ext cx="1115568" cy="384048"/>
-          </a:xfrm>
-          <a:prstGeom prst="rect">
-            <a:avLst/>
-          </a:prstGeom>
-          <a:noFill/>
-          <a:ln/>
-        </p:spPr>
-        <p:txBody>
-          <a:bodyPr wrap="square" lIns="0" tIns="0" rIns="0" bIns="0" rtlCol="0" anchor="ctr"/>
-          <a:lstStyle/>
-          <a:p>
-            <a:pPr algn="ctr" indent="0" marL="0">
-              <a:buNone/>
-            </a:pPr>
-            <a:r>
-              <a:rPr lang="en-US" sz="1100" dirty="0">
-                <a:solidFill>
-                  <a:srgbClr val="FFFFFF"/>
-                </a:solidFill>
-                <a:latin typeface="Calibri" pitchFamily="34" charset="0"/>
-                <a:ea typeface="Calibri" pitchFamily="34" charset="-122"/>
-                <a:cs typeface="Calibri" pitchFamily="34" charset="-120"/>
-              </a:rPr>
-              <a:t>Plotly 5.20</a:t>
-            </a:r>
-            <a:endParaRPr lang="en-US" sz="1100" dirty="0"/>
-          </a:p>
-        </p:txBody>
-      </p:sp>
-      <p:sp>
-        <p:nvSpPr>
-          <p:cNvPr id="16" name="Shape 13"/>
-          <p:cNvSpPr/>
-          <p:nvPr/>
-        </p:nvSpPr>
-        <p:spPr>
-          <a:xfrm>
-            <a:off x="6428232" y="4407408"/>
-            <a:ext cx="1115568" cy="384048"/>
-          </a:xfrm>
-          <a:prstGeom prst="roundRect">
-            <a:avLst>
-              <a:gd name="adj" fmla="val 14286"/>
-            </a:avLst>
-          </a:prstGeom>
-          <a:solidFill>
-            <a:srgbClr val="1A5276"/>
-          </a:solidFill>
-          <a:ln w="12700">
-            <a:solidFill>
-              <a:srgbClr val="1A5276"/>
-            </a:solidFill>
-            <a:prstDash val="solid"/>
-          </a:ln>
-        </p:spPr>
-      </p:sp>
-      <p:sp>
-        <p:nvSpPr>
-          <p:cNvPr id="17" name="Text 14"/>
-          <p:cNvSpPr/>
-          <p:nvPr/>
-        </p:nvSpPr>
-        <p:spPr>
-          <a:xfrm>
-            <a:off x="6428232" y="4407408"/>
-            <a:ext cx="1115568" cy="384048"/>
-          </a:xfrm>
-          <a:prstGeom prst="rect">
-            <a:avLst/>
-          </a:prstGeom>
-          <a:noFill/>
-          <a:ln/>
-        </p:spPr>
-        <p:txBody>
-          <a:bodyPr wrap="square" lIns="0" tIns="0" rIns="0" bIns="0" rtlCol="0" anchor="ctr"/>
-          <a:lstStyle/>
-          <a:p>
-            <a:pPr algn="ctr" indent="0" marL="0">
-              <a:buNone/>
-            </a:pPr>
-            <a:r>
-              <a:rPr lang="en-US" sz="1100" dirty="0">
-                <a:solidFill>
-                  <a:srgbClr val="FFFFFF"/>
-                </a:solidFill>
-                <a:latin typeface="Calibri" pitchFamily="34" charset="0"/>
-                <a:ea typeface="Calibri" pitchFamily="34" charset="-122"/>
-                <a:cs typeface="Calibri" pitchFamily="34" charset="-120"/>
-              </a:rPr>
-              <a:t>Docker</a:t>
-            </a:r>
-            <a:endParaRPr lang="en-US" sz="1100" dirty="0"/>
-          </a:p>
-        </p:txBody>
-      </p:sp>
-      <p:sp>
-        <p:nvSpPr>
-          <p:cNvPr id="18" name="Shape 15"/>
-          <p:cNvSpPr/>
-          <p:nvPr/>
-        </p:nvSpPr>
-        <p:spPr>
-          <a:xfrm>
-            <a:off x="7635240" y="4407408"/>
-            <a:ext cx="1115568" cy="384048"/>
-          </a:xfrm>
-          <a:prstGeom prst="roundRect">
-            <a:avLst>
-              <a:gd name="adj" fmla="val 14286"/>
-            </a:avLst>
-          </a:prstGeom>
-          <a:solidFill>
-            <a:srgbClr val="1A5276"/>
-          </a:solidFill>
-          <a:ln w="12700">
-            <a:solidFill>
-              <a:srgbClr val="1A5276"/>
-            </a:solidFill>
-            <a:prstDash val="solid"/>
-          </a:ln>
-        </p:spPr>
-      </p:sp>
-      <p:sp>
-        <p:nvSpPr>
-          <p:cNvPr id="19" name="Text 16"/>
-          <p:cNvSpPr/>
-          <p:nvPr/>
-        </p:nvSpPr>
-        <p:spPr>
-          <a:xfrm>
-            <a:off x="7635240" y="4407408"/>
-            <a:ext cx="1115568" cy="384048"/>
-          </a:xfrm>
-          <a:prstGeom prst="rect">
-            <a:avLst/>
-          </a:prstGeom>
-          <a:noFill/>
-          <a:ln/>
-        </p:spPr>
-        <p:txBody>
-          <a:bodyPr wrap="square" lIns="0" tIns="0" rIns="0" bIns="0" rtlCol="0" anchor="ctr"/>
-          <a:lstStyle/>
-          <a:p>
-            <a:pPr algn="ctr" indent="0" marL="0">
-              <a:buNone/>
-            </a:pPr>
-            <a:r>
-              <a:rPr lang="en-US" sz="1100" dirty="0">
-                <a:solidFill>
-                  <a:srgbClr val="FFFFFF"/>
-                </a:solidFill>
-                <a:latin typeface="Calibri" pitchFamily="34" charset="0"/>
-                <a:ea typeface="Calibri" pitchFamily="34" charset="-122"/>
-                <a:cs typeface="Calibri" pitchFamily="34" charset="-120"/>
-              </a:rPr>
-              <a:t>Cloud Run</a:t>
-            </a:r>
-            <a:endParaRPr lang="en-US" sz="1100" dirty="0"/>
-          </a:p>
-        </p:txBody>
-      </p:sp>
     </p:spTree>
   </p:cSld>
   <p:clrMapOvr>
@@ -5892,14 +5453,14 @@
         </p:nvSpPr>
         <p:spPr>
           <a:xfrm>
-            <a:off x="256032" y="932688"/>
-            <a:ext cx="2816352" cy="1828800"/>
-          </a:xfrm>
-          <a:prstGeom prst="rect">
-            <a:avLst/>
-          </a:prstGeom>
-          <a:solidFill>
-            <a:srgbClr val="E0F5F2"/>
+            <a:off x="274320" y="960120"/>
+            <a:ext cx="73152" cy="1005840"/>
+          </a:xfrm>
+          <a:prstGeom prst="rect">
+            <a:avLst/>
+          </a:prstGeom>
+          <a:solidFill>
+            <a:srgbClr val="0D9488"/>
           </a:solidFill>
           <a:ln w="12700">
             <a:solidFill>
@@ -5907,35 +5468,142 @@
             </a:solidFill>
             <a:prstDash val="solid"/>
           </a:ln>
-          <a:effectLst>
-            <a:outerShdw sx="100000" sy="100000" kx="0" ky="0" algn="bl" rotWithShape="0" blurRad="127000" dist="38100" dir="8100000">
-              <a:srgbClr val="000000">
-                <a:alpha val="10000"/>
-              </a:srgbClr>
-            </a:outerShdw>
-          </a:effectLst>
-        </p:spPr>
-      </p:sp>
-      <p:sp>
-        <p:nvSpPr>
-          <p:cNvPr id="6" name="Shape 4"/>
-          <p:cNvSpPr/>
-          <p:nvPr/>
-        </p:nvSpPr>
-        <p:spPr>
-          <a:xfrm>
-            <a:off x="256032" y="932688"/>
-            <a:ext cx="2816352" cy="82296"/>
-          </a:xfrm>
-          <a:prstGeom prst="rect">
-            <a:avLst/>
-          </a:prstGeom>
-          <a:solidFill>
-            <a:srgbClr val="0D9488"/>
+        </p:spPr>
+      </p:sp>
+      <p:sp>
+        <p:nvSpPr>
+          <p:cNvPr id="6" name="Text 4"/>
+          <p:cNvSpPr/>
+          <p:nvPr/>
+        </p:nvSpPr>
+        <p:spPr>
+          <a:xfrm>
+            <a:off x="438912" y="996696"/>
+            <a:ext cx="603504" cy="502920"/>
+          </a:xfrm>
+          <a:prstGeom prst="rect">
+            <a:avLst/>
+          </a:prstGeom>
+          <a:noFill/>
+          <a:ln/>
+        </p:spPr>
+        <p:txBody>
+          <a:bodyPr wrap="square" rtlCol="0" anchor="ctr"/>
+          <a:lstStyle/>
+          <a:p>
+            <a:pPr algn="ctr" indent="0" marL="0">
+              <a:buNone/>
+            </a:pPr>
+            <a:r>
+              <a:rPr lang="en-US" sz="2600" dirty="0">
+                <a:solidFill>
+                  <a:srgbClr val="000000"/>
+                </a:solidFill>
+              </a:rPr>
+              <a:t>🎚️</a:t>
+            </a:r>
+            <a:endParaRPr lang="en-US" sz="2600" dirty="0"/>
+          </a:p>
+        </p:txBody>
+      </p:sp>
+      <p:sp>
+        <p:nvSpPr>
+          <p:cNvPr id="7" name="Text 5"/>
+          <p:cNvSpPr/>
+          <p:nvPr/>
+        </p:nvSpPr>
+        <p:spPr>
+          <a:xfrm>
+            <a:off x="1078992" y="1014984"/>
+            <a:ext cx="3657600" cy="402336"/>
+          </a:xfrm>
+          <a:prstGeom prst="rect">
+            <a:avLst/>
+          </a:prstGeom>
+          <a:noFill/>
+          <a:ln/>
+        </p:spPr>
+        <p:txBody>
+          <a:bodyPr wrap="square" rtlCol="0" anchor="ctr"/>
+          <a:lstStyle/>
+          <a:p>
+            <a:pPr indent="0" marL="0">
+              <a:buNone/>
+            </a:pPr>
+            <a:r>
+              <a:rPr lang="en-US" sz="1700" b="1" dirty="0">
+                <a:solidFill>
+                  <a:srgbClr val="0D9488"/>
+                </a:solidFill>
+                <a:latin typeface="Trebuchet MS" pitchFamily="34" charset="0"/>
+                <a:ea typeface="Trebuchet MS" pitchFamily="34" charset="-122"/>
+                <a:cs typeface="Trebuchet MS" pitchFamily="34" charset="-120"/>
+              </a:rPr>
+              <a:t>Interactive Sliders</a:t>
+            </a:r>
+            <a:endParaRPr lang="en-US" sz="1700" dirty="0"/>
+          </a:p>
+        </p:txBody>
+      </p:sp>
+      <p:sp>
+        <p:nvSpPr>
+          <p:cNvPr id="8" name="Text 6"/>
+          <p:cNvSpPr/>
+          <p:nvPr/>
+        </p:nvSpPr>
+        <p:spPr>
+          <a:xfrm>
+            <a:off x="438912" y="1472184"/>
+            <a:ext cx="4297680" cy="475488"/>
+          </a:xfrm>
+          <a:prstGeom prst="rect">
+            <a:avLst/>
+          </a:prstGeom>
+          <a:noFill/>
+          <a:ln/>
+        </p:spPr>
+        <p:txBody>
+          <a:bodyPr wrap="square" rtlCol="0" anchor="ctr"/>
+          <a:lstStyle/>
+          <a:p>
+            <a:pPr indent="0" marL="0">
+              <a:buNone/>
+            </a:pPr>
+            <a:r>
+              <a:rPr lang="en-US" sz="1300" dirty="0">
+                <a:solidFill>
+                  <a:srgbClr val="1A1A2A"/>
+                </a:solidFill>
+                <a:latin typeface="Calibri" pitchFamily="34" charset="0"/>
+                <a:ea typeface="Calibri" pitchFamily="34" charset="-122"/>
+                <a:cs typeface="Calibri" pitchFamily="34" charset="-120"/>
+              </a:rPr>
+              <a:t>Drag magnitude, depth, gap, RMS, location type — hazard level updates instantly</a:t>
+            </a:r>
+            <a:endParaRPr lang="en-US" sz="1300" dirty="0"/>
+          </a:p>
+        </p:txBody>
+      </p:sp>
+      <p:sp>
+        <p:nvSpPr>
+          <p:cNvPr id="9" name="Shape 7"/>
+          <p:cNvSpPr/>
+          <p:nvPr/>
+        </p:nvSpPr>
+        <p:spPr>
+          <a:xfrm>
+            <a:off x="274320" y="2039112"/>
+            <a:ext cx="4480560" cy="18288"/>
+          </a:xfrm>
+          <a:prstGeom prst="rect">
+            <a:avLst/>
+          </a:prstGeom>
+          <a:solidFill>
+            <a:srgbClr val="B2D8F0"/>
           </a:solidFill>
           <a:ln w="12700">
             <a:solidFill>
-              <a:srgbClr val="0D9488"/>
+              <a:srgbClr val="B2D8F0"/>
             </a:solidFill>
             <a:prstDash val="solid"/>
           </a:ln>
@@ -5943,134 +5611,20 @@
       </p:sp>
       <p:sp>
         <p:nvSpPr>
-          <p:cNvPr id="7" name="Text 5"/>
-          <p:cNvSpPr/>
-          <p:nvPr/>
-        </p:nvSpPr>
-        <p:spPr>
-          <a:xfrm>
-            <a:off x="329184" y="1078992"/>
-            <a:ext cx="640080" cy="548640"/>
-          </a:xfrm>
-          <a:prstGeom prst="rect">
-            <a:avLst/>
-          </a:prstGeom>
-          <a:noFill/>
-          <a:ln/>
-        </p:spPr>
-        <p:txBody>
-          <a:bodyPr wrap="square" rtlCol="0" anchor="ctr"/>
-          <a:lstStyle/>
-          <a:p>
-            <a:pPr algn="ctr" indent="0" marL="0">
-              <a:buNone/>
-            </a:pPr>
-            <a:r>
-              <a:rPr lang="en-US" sz="2400" dirty="0">
-                <a:solidFill>
-                  <a:srgbClr val="000000"/>
-                </a:solidFill>
-              </a:rPr>
-              <a:t>🎚️</a:t>
-            </a:r>
-            <a:endParaRPr lang="en-US" sz="2400" dirty="0"/>
-          </a:p>
-        </p:txBody>
-      </p:sp>
-      <p:sp>
-        <p:nvSpPr>
-          <p:cNvPr id="8" name="Text 6"/>
-          <p:cNvSpPr/>
-          <p:nvPr/>
-        </p:nvSpPr>
-        <p:spPr>
-          <a:xfrm>
-            <a:off x="1005840" y="1078992"/>
-            <a:ext cx="1956816" cy="548640"/>
-          </a:xfrm>
-          <a:prstGeom prst="rect">
-            <a:avLst/>
-          </a:prstGeom>
-          <a:noFill/>
-          <a:ln/>
-        </p:spPr>
-        <p:txBody>
-          <a:bodyPr wrap="square" rtlCol="0" anchor="ctr"/>
-          <a:lstStyle/>
-          <a:p>
-            <a:pPr indent="0" marL="0">
-              <a:buNone/>
-            </a:pPr>
-            <a:r>
-              <a:rPr lang="en-US" sz="1500" b="1" dirty="0">
-                <a:solidFill>
-                  <a:srgbClr val="0D9488"/>
-                </a:solidFill>
-                <a:latin typeface="Trebuchet MS" pitchFamily="34" charset="0"/>
-                <a:ea typeface="Trebuchet MS" pitchFamily="34" charset="-122"/>
-                <a:cs typeface="Trebuchet MS" pitchFamily="34" charset="-120"/>
-              </a:rPr>
-              <a:t>Interactive Sliders</a:t>
-            </a:r>
-            <a:endParaRPr lang="en-US" sz="1500" dirty="0"/>
-          </a:p>
-        </p:txBody>
-      </p:sp>
-      <p:sp>
-        <p:nvSpPr>
-          <p:cNvPr id="9" name="Text 7"/>
-          <p:cNvSpPr/>
-          <p:nvPr/>
-        </p:nvSpPr>
-        <p:spPr>
-          <a:xfrm>
-            <a:off x="384048" y="1682496"/>
-            <a:ext cx="2578608" cy="987552"/>
-          </a:xfrm>
-          <a:prstGeom prst="rect">
-            <a:avLst/>
-          </a:prstGeom>
-          <a:noFill/>
-          <a:ln/>
-        </p:spPr>
-        <p:txBody>
-          <a:bodyPr wrap="square" rtlCol="0" anchor="ctr"/>
-          <a:lstStyle/>
-          <a:p>
-            <a:pPr indent="0" marL="0">
-              <a:buNone/>
-            </a:pPr>
-            <a:r>
-              <a:rPr lang="en-US" sz="1300" dirty="0">
-                <a:solidFill>
-                  <a:srgbClr val="1A1A2A"/>
-                </a:solidFill>
-                <a:latin typeface="Calibri" pitchFamily="34" charset="0"/>
-                <a:ea typeface="Calibri" pitchFamily="34" charset="-122"/>
-                <a:cs typeface="Calibri" pitchFamily="34" charset="-120"/>
-              </a:rPr>
-              <a:t>Drag magnitude, depth, gap, RMS, location type — hazard level updates instantly</a:t>
-            </a:r>
-            <a:endParaRPr lang="en-US" sz="1300" dirty="0"/>
-          </a:p>
-        </p:txBody>
-      </p:sp>
-      <p:sp>
-        <p:nvSpPr>
           <p:cNvPr id="10" name="Shape 8"/>
           <p:cNvSpPr/>
           <p:nvPr/>
         </p:nvSpPr>
         <p:spPr>
           <a:xfrm>
-            <a:off x="3218688" y="932688"/>
-            <a:ext cx="2816352" cy="1828800"/>
-          </a:xfrm>
-          <a:prstGeom prst="rect">
-            <a:avLst/>
-          </a:prstGeom>
-          <a:solidFill>
-            <a:srgbClr val="EAF4FB"/>
+            <a:off x="274320" y="2221992"/>
+            <a:ext cx="73152" cy="1005840"/>
+          </a:xfrm>
+          <a:prstGeom prst="rect">
+            <a:avLst/>
+          </a:prstGeom>
+          <a:solidFill>
+            <a:srgbClr val="1A5276"/>
           </a:solidFill>
           <a:ln w="12700">
             <a:solidFill>
@@ -6078,35 +5632,142 @@
             </a:solidFill>
             <a:prstDash val="solid"/>
           </a:ln>
-          <a:effectLst>
-            <a:outerShdw sx="100000" sy="100000" kx="0" ky="0" algn="bl" rotWithShape="0" blurRad="127000" dist="38100" dir="8100000">
-              <a:srgbClr val="000000">
-                <a:alpha val="10000"/>
-              </a:srgbClr>
-            </a:outerShdw>
-          </a:effectLst>
-        </p:spPr>
-      </p:sp>
-      <p:sp>
-        <p:nvSpPr>
-          <p:cNvPr id="11" name="Shape 9"/>
-          <p:cNvSpPr/>
-          <p:nvPr/>
-        </p:nvSpPr>
-        <p:spPr>
-          <a:xfrm>
-            <a:off x="3218688" y="932688"/>
-            <a:ext cx="2816352" cy="82296"/>
-          </a:xfrm>
-          <a:prstGeom prst="rect">
-            <a:avLst/>
-          </a:prstGeom>
-          <a:solidFill>
-            <a:srgbClr val="1A5276"/>
+        </p:spPr>
+      </p:sp>
+      <p:sp>
+        <p:nvSpPr>
+          <p:cNvPr id="11" name="Text 9"/>
+          <p:cNvSpPr/>
+          <p:nvPr/>
+        </p:nvSpPr>
+        <p:spPr>
+          <a:xfrm>
+            <a:off x="438912" y="2258568"/>
+            <a:ext cx="603504" cy="502920"/>
+          </a:xfrm>
+          <a:prstGeom prst="rect">
+            <a:avLst/>
+          </a:prstGeom>
+          <a:noFill/>
+          <a:ln/>
+        </p:spPr>
+        <p:txBody>
+          <a:bodyPr wrap="square" rtlCol="0" anchor="ctr"/>
+          <a:lstStyle/>
+          <a:p>
+            <a:pPr algn="ctr" indent="0" marL="0">
+              <a:buNone/>
+            </a:pPr>
+            <a:r>
+              <a:rPr lang="en-US" sz="2600" dirty="0">
+                <a:solidFill>
+                  <a:srgbClr val="000000"/>
+                </a:solidFill>
+              </a:rPr>
+              <a:t>🗺️</a:t>
+            </a:r>
+            <a:endParaRPr lang="en-US" sz="2600" dirty="0"/>
+          </a:p>
+        </p:txBody>
+      </p:sp>
+      <p:sp>
+        <p:nvSpPr>
+          <p:cNvPr id="12" name="Text 10"/>
+          <p:cNvSpPr/>
+          <p:nvPr/>
+        </p:nvSpPr>
+        <p:spPr>
+          <a:xfrm>
+            <a:off x="1078992" y="2276856"/>
+            <a:ext cx="3657600" cy="402336"/>
+          </a:xfrm>
+          <a:prstGeom prst="rect">
+            <a:avLst/>
+          </a:prstGeom>
+          <a:noFill/>
+          <a:ln/>
+        </p:spPr>
+        <p:txBody>
+          <a:bodyPr wrap="square" rtlCol="0" anchor="ctr"/>
+          <a:lstStyle/>
+          <a:p>
+            <a:pPr indent="0" marL="0">
+              <a:buNone/>
+            </a:pPr>
+            <a:r>
+              <a:rPr lang="en-US" sz="1700" b="1" dirty="0">
+                <a:solidFill>
+                  <a:srgbClr val="1A5276"/>
+                </a:solidFill>
+                <a:latin typeface="Trebuchet MS" pitchFamily="34" charset="0"/>
+                <a:ea typeface="Trebuchet MS" pitchFamily="34" charset="-122"/>
+                <a:cs typeface="Trebuchet MS" pitchFamily="34" charset="-120"/>
+              </a:rPr>
+              <a:t>Live Earthquake Map</a:t>
+            </a:r>
+            <a:endParaRPr lang="en-US" sz="1700" dirty="0"/>
+          </a:p>
+        </p:txBody>
+      </p:sp>
+      <p:sp>
+        <p:nvSpPr>
+          <p:cNvPr id="13" name="Text 11"/>
+          <p:cNvSpPr/>
+          <p:nvPr/>
+        </p:nvSpPr>
+        <p:spPr>
+          <a:xfrm>
+            <a:off x="438912" y="2734056"/>
+            <a:ext cx="4297680" cy="475488"/>
+          </a:xfrm>
+          <a:prstGeom prst="rect">
+            <a:avLst/>
+          </a:prstGeom>
+          <a:noFill/>
+          <a:ln/>
+        </p:spPr>
+        <p:txBody>
+          <a:bodyPr wrap="square" rtlCol="0" anchor="ctr"/>
+          <a:lstStyle/>
+          <a:p>
+            <a:pPr indent="0" marL="0">
+              <a:buNone/>
+            </a:pPr>
+            <a:r>
+              <a:rPr lang="en-US" sz="1300" dirty="0">
+                <a:solidFill>
+                  <a:srgbClr val="1A1A2A"/>
+                </a:solidFill>
+                <a:latin typeface="Calibri" pitchFamily="34" charset="0"/>
+                <a:ea typeface="Calibri" pitchFamily="34" charset="-122"/>
+                <a:cs typeface="Calibri" pitchFamily="34" charset="-120"/>
+              </a:rPr>
+              <a:t>Plotly globe · live USGS data · color-coded by hazard · auto-refreshes every 5 min</a:t>
+            </a:r>
+            <a:endParaRPr lang="en-US" sz="1300" dirty="0"/>
+          </a:p>
+        </p:txBody>
+      </p:sp>
+      <p:sp>
+        <p:nvSpPr>
+          <p:cNvPr id="14" name="Shape 12"/>
+          <p:cNvSpPr/>
+          <p:nvPr/>
+        </p:nvSpPr>
+        <p:spPr>
+          <a:xfrm>
+            <a:off x="274320" y="3300984"/>
+            <a:ext cx="4480560" cy="18288"/>
+          </a:xfrm>
+          <a:prstGeom prst="rect">
+            <a:avLst/>
+          </a:prstGeom>
+          <a:solidFill>
+            <a:srgbClr val="B2D8F0"/>
           </a:solidFill>
           <a:ln w="12700">
             <a:solidFill>
-              <a:srgbClr val="1A5276"/>
+              <a:srgbClr val="B2D8F0"/>
             </a:solidFill>
             <a:prstDash val="solid"/>
           </a:ln>
@@ -6114,134 +5775,20 @@
       </p:sp>
       <p:sp>
         <p:nvSpPr>
-          <p:cNvPr id="12" name="Text 10"/>
-          <p:cNvSpPr/>
-          <p:nvPr/>
-        </p:nvSpPr>
-        <p:spPr>
-          <a:xfrm>
-            <a:off x="3291840" y="1078992"/>
-            <a:ext cx="640080" cy="548640"/>
-          </a:xfrm>
-          <a:prstGeom prst="rect">
-            <a:avLst/>
-          </a:prstGeom>
-          <a:noFill/>
-          <a:ln/>
-        </p:spPr>
-        <p:txBody>
-          <a:bodyPr wrap="square" rtlCol="0" anchor="ctr"/>
-          <a:lstStyle/>
-          <a:p>
-            <a:pPr algn="ctr" indent="0" marL="0">
-              <a:buNone/>
-            </a:pPr>
-            <a:r>
-              <a:rPr lang="en-US" sz="2400" dirty="0">
-                <a:solidFill>
-                  <a:srgbClr val="000000"/>
-                </a:solidFill>
-              </a:rPr>
-              <a:t>🗺️</a:t>
-            </a:r>
-            <a:endParaRPr lang="en-US" sz="2400" dirty="0"/>
-          </a:p>
-        </p:txBody>
-      </p:sp>
-      <p:sp>
-        <p:nvSpPr>
-          <p:cNvPr id="13" name="Text 11"/>
-          <p:cNvSpPr/>
-          <p:nvPr/>
-        </p:nvSpPr>
-        <p:spPr>
-          <a:xfrm>
-            <a:off x="3968496" y="1078992"/>
-            <a:ext cx="1956816" cy="548640"/>
-          </a:xfrm>
-          <a:prstGeom prst="rect">
-            <a:avLst/>
-          </a:prstGeom>
-          <a:noFill/>
-          <a:ln/>
-        </p:spPr>
-        <p:txBody>
-          <a:bodyPr wrap="square" rtlCol="0" anchor="ctr"/>
-          <a:lstStyle/>
-          <a:p>
-            <a:pPr indent="0" marL="0">
-              <a:buNone/>
-            </a:pPr>
-            <a:r>
-              <a:rPr lang="en-US" sz="1500" b="1" dirty="0">
-                <a:solidFill>
-                  <a:srgbClr val="1A5276"/>
-                </a:solidFill>
-                <a:latin typeface="Trebuchet MS" pitchFamily="34" charset="0"/>
-                <a:ea typeface="Trebuchet MS" pitchFamily="34" charset="-122"/>
-                <a:cs typeface="Trebuchet MS" pitchFamily="34" charset="-120"/>
-              </a:rPr>
-              <a:t>Live Earthquake Map</a:t>
-            </a:r>
-            <a:endParaRPr lang="en-US" sz="1500" dirty="0"/>
-          </a:p>
-        </p:txBody>
-      </p:sp>
-      <p:sp>
-        <p:nvSpPr>
-          <p:cNvPr id="14" name="Text 12"/>
-          <p:cNvSpPr/>
-          <p:nvPr/>
-        </p:nvSpPr>
-        <p:spPr>
-          <a:xfrm>
-            <a:off x="3346704" y="1682496"/>
-            <a:ext cx="2578608" cy="987552"/>
-          </a:xfrm>
-          <a:prstGeom prst="rect">
-            <a:avLst/>
-          </a:prstGeom>
-          <a:noFill/>
-          <a:ln/>
-        </p:spPr>
-        <p:txBody>
-          <a:bodyPr wrap="square" rtlCol="0" anchor="ctr"/>
-          <a:lstStyle/>
-          <a:p>
-            <a:pPr indent="0" marL="0">
-              <a:buNone/>
-            </a:pPr>
-            <a:r>
-              <a:rPr lang="en-US" sz="1300" dirty="0">
-                <a:solidFill>
-                  <a:srgbClr val="1A1A2A"/>
-                </a:solidFill>
-                <a:latin typeface="Calibri" pitchFamily="34" charset="0"/>
-                <a:ea typeface="Calibri" pitchFamily="34" charset="-122"/>
-                <a:cs typeface="Calibri" pitchFamily="34" charset="-120"/>
-              </a:rPr>
-              <a:t>Plotly globe with live USGS data, color-coded by hazard, auto-refreshes every 5 min</a:t>
-            </a:r>
-            <a:endParaRPr lang="en-US" sz="1300" dirty="0"/>
-          </a:p>
-        </p:txBody>
-      </p:sp>
-      <p:sp>
-        <p:nvSpPr>
           <p:cNvPr id="15" name="Shape 13"/>
           <p:cNvSpPr/>
           <p:nvPr/>
         </p:nvSpPr>
         <p:spPr>
           <a:xfrm>
-            <a:off x="6181344" y="932688"/>
-            <a:ext cx="2816352" cy="1828800"/>
-          </a:xfrm>
-          <a:prstGeom prst="rect">
-            <a:avLst/>
-          </a:prstGeom>
-          <a:solidFill>
-            <a:srgbClr val="FEF9E7"/>
+            <a:off x="274320" y="3483864"/>
+            <a:ext cx="73152" cy="1005840"/>
+          </a:xfrm>
+          <a:prstGeom prst="rect">
+            <a:avLst/>
+          </a:prstGeom>
+          <a:solidFill>
+            <a:srgbClr val="D68910"/>
           </a:solidFill>
           <a:ln w="12700">
             <a:solidFill>
@@ -6249,35 +5796,142 @@
             </a:solidFill>
             <a:prstDash val="solid"/>
           </a:ln>
-          <a:effectLst>
-            <a:outerShdw sx="100000" sy="100000" kx="0" ky="0" algn="bl" rotWithShape="0" blurRad="127000" dist="38100" dir="8100000">
-              <a:srgbClr val="000000">
-                <a:alpha val="10000"/>
-              </a:srgbClr>
-            </a:outerShdw>
-          </a:effectLst>
-        </p:spPr>
-      </p:sp>
-      <p:sp>
-        <p:nvSpPr>
-          <p:cNvPr id="16" name="Shape 14"/>
-          <p:cNvSpPr/>
-          <p:nvPr/>
-        </p:nvSpPr>
-        <p:spPr>
-          <a:xfrm>
-            <a:off x="6181344" y="932688"/>
-            <a:ext cx="2816352" cy="82296"/>
-          </a:xfrm>
-          <a:prstGeom prst="rect">
-            <a:avLst/>
-          </a:prstGeom>
-          <a:solidFill>
-            <a:srgbClr val="D68910"/>
+        </p:spPr>
+      </p:sp>
+      <p:sp>
+        <p:nvSpPr>
+          <p:cNvPr id="16" name="Text 14"/>
+          <p:cNvSpPr/>
+          <p:nvPr/>
+        </p:nvSpPr>
+        <p:spPr>
+          <a:xfrm>
+            <a:off x="438912" y="3520440"/>
+            <a:ext cx="603504" cy="502920"/>
+          </a:xfrm>
+          <a:prstGeom prst="rect">
+            <a:avLst/>
+          </a:prstGeom>
+          <a:noFill/>
+          <a:ln/>
+        </p:spPr>
+        <p:txBody>
+          <a:bodyPr wrap="square" rtlCol="0" anchor="ctr"/>
+          <a:lstStyle/>
+          <a:p>
+            <a:pPr algn="ctr" indent="0" marL="0">
+              <a:buNone/>
+            </a:pPr>
+            <a:r>
+              <a:rPr lang="en-US" sz="2600" dirty="0">
+                <a:solidFill>
+                  <a:srgbClr val="000000"/>
+                </a:solidFill>
+              </a:rPr>
+              <a:t>📊</a:t>
+            </a:r>
+            <a:endParaRPr lang="en-US" sz="2600" dirty="0"/>
+          </a:p>
+        </p:txBody>
+      </p:sp>
+      <p:sp>
+        <p:nvSpPr>
+          <p:cNvPr id="17" name="Text 15"/>
+          <p:cNvSpPr/>
+          <p:nvPr/>
+        </p:nvSpPr>
+        <p:spPr>
+          <a:xfrm>
+            <a:off x="1078992" y="3538728"/>
+            <a:ext cx="3657600" cy="402336"/>
+          </a:xfrm>
+          <a:prstGeom prst="rect">
+            <a:avLst/>
+          </a:prstGeom>
+          <a:noFill/>
+          <a:ln/>
+        </p:spPr>
+        <p:txBody>
+          <a:bodyPr wrap="square" rtlCol="0" anchor="ctr"/>
+          <a:lstStyle/>
+          <a:p>
+            <a:pPr indent="0" marL="0">
+              <a:buNone/>
+            </a:pPr>
+            <a:r>
+              <a:rPr lang="en-US" sz="1700" b="1" dirty="0">
+                <a:solidFill>
+                  <a:srgbClr val="D68910"/>
+                </a:solidFill>
+                <a:latin typeface="Trebuchet MS" pitchFamily="34" charset="0"/>
+                <a:ea typeface="Trebuchet MS" pitchFamily="34" charset="-122"/>
+                <a:cs typeface="Trebuchet MS" pitchFamily="34" charset="-120"/>
+              </a:rPr>
+              <a:t>Probability Display</a:t>
+            </a:r>
+            <a:endParaRPr lang="en-US" sz="1700" dirty="0"/>
+          </a:p>
+        </p:txBody>
+      </p:sp>
+      <p:sp>
+        <p:nvSpPr>
+          <p:cNvPr id="18" name="Text 16"/>
+          <p:cNvSpPr/>
+          <p:nvPr/>
+        </p:nvSpPr>
+        <p:spPr>
+          <a:xfrm>
+            <a:off x="438912" y="3995928"/>
+            <a:ext cx="4297680" cy="475488"/>
+          </a:xfrm>
+          <a:prstGeom prst="rect">
+            <a:avLst/>
+          </a:prstGeom>
+          <a:noFill/>
+          <a:ln/>
+        </p:spPr>
+        <p:txBody>
+          <a:bodyPr wrap="square" rtlCol="0" anchor="ctr"/>
+          <a:lstStyle/>
+          <a:p>
+            <a:pPr indent="0" marL="0">
+              <a:buNone/>
+            </a:pPr>
+            <a:r>
+              <a:rPr lang="en-US" sz="1300" dirty="0">
+                <a:solidFill>
+                  <a:srgbClr val="1A1A2A"/>
+                </a:solidFill>
+                <a:latin typeface="Calibri" pitchFamily="34" charset="0"/>
+                <a:ea typeface="Calibri" pitchFamily="34" charset="-122"/>
+                <a:cs typeface="Calibri" pitchFamily="34" charset="-120"/>
+              </a:rPr>
+              <a:t>Confidence scores for each class + magnitude gauge chart</a:t>
+            </a:r>
+            <a:endParaRPr lang="en-US" sz="1300" dirty="0"/>
+          </a:p>
+        </p:txBody>
+      </p:sp>
+      <p:sp>
+        <p:nvSpPr>
+          <p:cNvPr id="19" name="Shape 17"/>
+          <p:cNvSpPr/>
+          <p:nvPr/>
+        </p:nvSpPr>
+        <p:spPr>
+          <a:xfrm>
+            <a:off x="5029200" y="960120"/>
+            <a:ext cx="3840480" cy="475488"/>
+          </a:xfrm>
+          <a:prstGeom prst="rect">
+            <a:avLst/>
+          </a:prstGeom>
+          <a:solidFill>
+            <a:srgbClr val="2C3E50"/>
           </a:solidFill>
           <a:ln w="12700">
             <a:solidFill>
-              <a:srgbClr val="D68910"/>
+              <a:srgbClr val="2C3E50"/>
             </a:solidFill>
             <a:prstDash val="solid"/>
           </a:ln>
@@ -6285,59 +5939,23 @@
       </p:sp>
       <p:sp>
         <p:nvSpPr>
-          <p:cNvPr id="17" name="Text 15"/>
-          <p:cNvSpPr/>
-          <p:nvPr/>
-        </p:nvSpPr>
-        <p:spPr>
-          <a:xfrm>
-            <a:off x="6254496" y="1078992"/>
-            <a:ext cx="640080" cy="548640"/>
-          </a:xfrm>
-          <a:prstGeom prst="rect">
-            <a:avLst/>
-          </a:prstGeom>
-          <a:noFill/>
-          <a:ln/>
-        </p:spPr>
-        <p:txBody>
-          <a:bodyPr wrap="square" rtlCol="0" anchor="ctr"/>
-          <a:lstStyle/>
-          <a:p>
-            <a:pPr algn="ctr" indent="0" marL="0">
-              <a:buNone/>
-            </a:pPr>
-            <a:r>
-              <a:rPr lang="en-US" sz="2400" dirty="0">
-                <a:solidFill>
-                  <a:srgbClr val="000000"/>
-                </a:solidFill>
-              </a:rPr>
-              <a:t>📊</a:t>
-            </a:r>
-            <a:endParaRPr lang="en-US" sz="2400" dirty="0"/>
-          </a:p>
-        </p:txBody>
-      </p:sp>
-      <p:sp>
-        <p:nvSpPr>
-          <p:cNvPr id="18" name="Text 16"/>
-          <p:cNvSpPr/>
-          <p:nvPr/>
-        </p:nvSpPr>
-        <p:spPr>
-          <a:xfrm>
-            <a:off x="6931152" y="1078992"/>
-            <a:ext cx="1956816" cy="548640"/>
-          </a:xfrm>
-          <a:prstGeom prst="rect">
-            <a:avLst/>
-          </a:prstGeom>
-          <a:noFill/>
-          <a:ln/>
-        </p:spPr>
-        <p:txBody>
-          <a:bodyPr wrap="square" rtlCol="0" anchor="ctr"/>
+          <p:cNvPr id="20" name="Text 18"/>
+          <p:cNvSpPr/>
+          <p:nvPr/>
+        </p:nvSpPr>
+        <p:spPr>
+          <a:xfrm>
+            <a:off x="5029200" y="960120"/>
+            <a:ext cx="3840480" cy="475488"/>
+          </a:xfrm>
+          <a:prstGeom prst="rect">
+            <a:avLst/>
+          </a:prstGeom>
+          <a:noFill/>
+          <a:ln/>
+        </p:spPr>
+        <p:txBody>
+          <a:bodyPr wrap="square" lIns="0" tIns="177800" rIns="0" bIns="0" rtlCol="0" anchor="ctr"/>
           <a:lstStyle/>
           <a:p>
             <a:pPr indent="0" marL="0">
@@ -6346,13 +5964,13 @@
             <a:r>
               <a:rPr lang="en-US" sz="1500" b="1" dirty="0">
                 <a:solidFill>
-                  <a:srgbClr val="D68910"/>
+                  <a:srgbClr val="FFFFFF"/>
                 </a:solidFill>
                 <a:latin typeface="Trebuchet MS" pitchFamily="34" charset="0"/>
                 <a:ea typeface="Trebuchet MS" pitchFamily="34" charset="-122"/>
                 <a:cs typeface="Trebuchet MS" pitchFamily="34" charset="-120"/>
               </a:rPr>
-              <a:t>Probability Display</a:t>
+              <a:t>⚡  Flask REST API</a:t>
             </a:r>
             <a:endParaRPr lang="en-US" sz="1500" dirty="0"/>
           </a:p>
@@ -6360,110 +5978,283 @@
       </p:sp>
       <p:sp>
         <p:nvSpPr>
-          <p:cNvPr id="19" name="Text 17"/>
-          <p:cNvSpPr/>
-          <p:nvPr/>
-        </p:nvSpPr>
-        <p:spPr>
-          <a:xfrm>
-            <a:off x="6309360" y="1682496"/>
-            <a:ext cx="2578608" cy="987552"/>
-          </a:xfrm>
-          <a:prstGeom prst="rect">
-            <a:avLst/>
-          </a:prstGeom>
-          <a:noFill/>
-          <a:ln/>
-        </p:spPr>
-        <p:txBody>
-          <a:bodyPr wrap="square" rtlCol="0" anchor="ctr"/>
+          <p:cNvPr id="21" name="Shape 19"/>
+          <p:cNvSpPr/>
+          <p:nvPr/>
+        </p:nvSpPr>
+        <p:spPr>
+          <a:xfrm>
+            <a:off x="5029200" y="1435608"/>
+            <a:ext cx="3840480" cy="1481328"/>
+          </a:xfrm>
+          <a:prstGeom prst="rect">
+            <a:avLst/>
+          </a:prstGeom>
+          <a:solidFill>
+            <a:srgbClr val="1E2B38"/>
+          </a:solidFill>
+          <a:ln w="12700">
+            <a:solidFill>
+              <a:srgbClr val="1E2B38"/>
+            </a:solidFill>
+            <a:prstDash val="solid"/>
+          </a:ln>
+        </p:spPr>
+      </p:sp>
+      <p:sp>
+        <p:nvSpPr>
+          <p:cNvPr id="22" name="Text 20"/>
+          <p:cNvSpPr/>
+          <p:nvPr/>
+        </p:nvSpPr>
+        <p:spPr>
+          <a:xfrm>
+            <a:off x="5138928" y="1481328"/>
+            <a:ext cx="3621024" cy="1389888"/>
+          </a:xfrm>
+          <a:prstGeom prst="rect">
+            <a:avLst/>
+          </a:prstGeom>
+          <a:noFill/>
+          <a:ln/>
+        </p:spPr>
+        <p:txBody>
+          <a:bodyPr wrap="square" rtlCol="0" anchor="t"/>
           <a:lstStyle/>
           <a:p>
             <a:pPr indent="0" marL="0">
               <a:buNone/>
             </a:pPr>
             <a:r>
-              <a:rPr lang="en-US" sz="1300" dirty="0">
-                <a:solidFill>
-                  <a:srgbClr val="1A1A2A"/>
+              <a:rPr lang="en-US" sz="1100" dirty="0">
+                <a:solidFill>
+                  <a:srgbClr val="A8D8A8"/>
+                </a:solidFill>
+                <a:latin typeface="Courier New" pitchFamily="34" charset="0"/>
+                <a:ea typeface="Courier New" pitchFamily="34" charset="-122"/>
+                <a:cs typeface="Courier New" pitchFamily="34" charset="-120"/>
+              </a:rPr>
+              <a:t>POST /predict</a:t>
+            </a:r>
+            <a:endParaRPr lang="en-US" sz="1100" dirty="0"/>
+          </a:p>
+          <a:p>
+            <a:pPr indent="0" marL="0">
+              <a:buNone/>
+            </a:pPr>
+            <a:r>
+              <a:rPr lang="en-US" sz="1100" dirty="0">
+                <a:solidFill>
+                  <a:srgbClr val="A8D8A8"/>
+                </a:solidFill>
+                <a:latin typeface="Courier New" pitchFamily="34" charset="0"/>
+                <a:ea typeface="Courier New" pitchFamily="34" charset="-122"/>
+                <a:cs typeface="Courier New" pitchFamily="34" charset="-120"/>
+              </a:rPr>
+              <a:t>{"magnitude": 7.0, "depth": 10,</a:t>
+            </a:r>
+            <a:endParaRPr lang="en-US" sz="1100" dirty="0"/>
+          </a:p>
+          <a:p>
+            <a:pPr indent="0" marL="0">
+              <a:buNone/>
+            </a:pPr>
+            <a:r>
+              <a:rPr lang="en-US" sz="1100" dirty="0">
+                <a:solidFill>
+                  <a:srgbClr val="A8D8A8"/>
+                </a:solidFill>
+                <a:latin typeface="Courier New" pitchFamily="34" charset="0"/>
+                <a:ea typeface="Courier New" pitchFamily="34" charset="-122"/>
+                <a:cs typeface="Courier New" pitchFamily="34" charset="-120"/>
+              </a:rPr>
+              <a:t> "gap": 90, "rms": 0.3, "location_type": 0}</a:t>
+            </a:r>
+            <a:endParaRPr lang="en-US" sz="1100" dirty="0"/>
+          </a:p>
+          <a:p>
+            <a:pPr indent="0" marL="0">
+              <a:buNone/>
+            </a:pPr>
+            <a:endParaRPr lang="en-US" sz="1100" dirty="0"/>
+          </a:p>
+          <a:p>
+            <a:pPr indent="0" marL="0">
+              <a:buNone/>
+            </a:pPr>
+            <a:r>
+              <a:rPr lang="en-US" sz="1100" dirty="0">
+                <a:solidFill>
+                  <a:srgbClr val="A8D8A8"/>
+                </a:solidFill>
+                <a:latin typeface="Courier New" pitchFamily="34" charset="0"/>
+                <a:ea typeface="Courier New" pitchFamily="34" charset="-122"/>
+                <a:cs typeface="Courier New" pitchFamily="34" charset="-120"/>
+              </a:rPr>
+              <a:t>→ {"hazard_label": "High",</a:t>
+            </a:r>
+            <a:endParaRPr lang="en-US" sz="1100" dirty="0"/>
+          </a:p>
+          <a:p>
+            <a:pPr indent="0" marL="0">
+              <a:buNone/>
+            </a:pPr>
+            <a:r>
+              <a:rPr lang="en-US" sz="1100" dirty="0">
+                <a:solidFill>
+                  <a:srgbClr val="A8D8A8"/>
+                </a:solidFill>
+                <a:latin typeface="Courier New" pitchFamily="34" charset="0"/>
+                <a:ea typeface="Courier New" pitchFamily="34" charset="-122"/>
+                <a:cs typeface="Courier New" pitchFamily="34" charset="-120"/>
+              </a:rPr>
+              <a:t>   "color": "#e74c3c",</a:t>
+            </a:r>
+            <a:endParaRPr lang="en-US" sz="1100" dirty="0"/>
+          </a:p>
+          <a:p>
+            <a:pPr indent="0" marL="0">
+              <a:buNone/>
+            </a:pPr>
+            <a:r>
+              <a:rPr lang="en-US" sz="1100" dirty="0">
+                <a:solidFill>
+                  <a:srgbClr val="A8D8A8"/>
+                </a:solidFill>
+                <a:latin typeface="Courier New" pitchFamily="34" charset="0"/>
+                <a:ea typeface="Courier New" pitchFamily="34" charset="-122"/>
+                <a:cs typeface="Courier New" pitchFamily="34" charset="-120"/>
+              </a:rPr>
+              <a:t>   "probabilities": {...}}</a:t>
+            </a:r>
+            <a:endParaRPr lang="en-US" sz="1100" dirty="0"/>
+          </a:p>
+        </p:txBody>
+      </p:sp>
+      <p:sp>
+        <p:nvSpPr>
+          <p:cNvPr id="23" name="Text 21"/>
+          <p:cNvSpPr/>
+          <p:nvPr/>
+        </p:nvSpPr>
+        <p:spPr>
+          <a:xfrm>
+            <a:off x="5029200" y="3035808"/>
+            <a:ext cx="457200" cy="512064"/>
+          </a:xfrm>
+          <a:prstGeom prst="rect">
+            <a:avLst/>
+          </a:prstGeom>
+          <a:noFill/>
+          <a:ln/>
+        </p:spPr>
+        <p:txBody>
+          <a:bodyPr wrap="square" rtlCol="0" anchor="ctr"/>
+          <a:lstStyle/>
+          <a:p>
+            <a:pPr algn="ctr" indent="0" marL="0">
+              <a:buNone/>
+            </a:pPr>
+            <a:r>
+              <a:rPr lang="en-US" sz="2000" dirty="0">
+                <a:solidFill>
+                  <a:srgbClr val="000000"/>
+                </a:solidFill>
+              </a:rPr>
+              <a:t>🌐</a:t>
+            </a:r>
+            <a:endParaRPr lang="en-US" sz="2000" dirty="0"/>
+          </a:p>
+        </p:txBody>
+      </p:sp>
+      <p:sp>
+        <p:nvSpPr>
+          <p:cNvPr id="24" name="Text 22"/>
+          <p:cNvSpPr/>
+          <p:nvPr/>
+        </p:nvSpPr>
+        <p:spPr>
+          <a:xfrm>
+            <a:off x="5504688" y="3054096"/>
+            <a:ext cx="3200400" cy="256032"/>
+          </a:xfrm>
+          <a:prstGeom prst="rect">
+            <a:avLst/>
+          </a:prstGeom>
+          <a:noFill/>
+          <a:ln/>
+        </p:spPr>
+        <p:txBody>
+          <a:bodyPr wrap="square" rtlCol="0" anchor="ctr"/>
+          <a:lstStyle/>
+          <a:p>
+            <a:pPr indent="0" marL="0">
+              <a:buNone/>
+            </a:pPr>
+            <a:r>
+              <a:rPr lang="en-US" sz="1300" b="1" dirty="0">
+                <a:solidFill>
+                  <a:srgbClr val="1A5276"/>
+                </a:solidFill>
+                <a:latin typeface="Trebuchet MS" pitchFamily="34" charset="0"/>
+                <a:ea typeface="Trebuchet MS" pitchFamily="34" charset="-122"/>
+                <a:cs typeface="Trebuchet MS" pitchFamily="34" charset="-120"/>
+              </a:rPr>
+              <a:t>USGS Live Proxy</a:t>
+            </a:r>
+            <a:endParaRPr lang="en-US" sz="1300" dirty="0"/>
+          </a:p>
+        </p:txBody>
+      </p:sp>
+      <p:sp>
+        <p:nvSpPr>
+          <p:cNvPr id="25" name="Text 23"/>
+          <p:cNvSpPr/>
+          <p:nvPr/>
+        </p:nvSpPr>
+        <p:spPr>
+          <a:xfrm>
+            <a:off x="5504688" y="3310128"/>
+            <a:ext cx="3200400" cy="237744"/>
+          </a:xfrm>
+          <a:prstGeom prst="rect">
+            <a:avLst/>
+          </a:prstGeom>
+          <a:noFill/>
+          <a:ln/>
+        </p:spPr>
+        <p:txBody>
+          <a:bodyPr wrap="square" rtlCol="0" anchor="ctr"/>
+          <a:lstStyle/>
+          <a:p>
+            <a:pPr indent="0" marL="0">
+              <a:buNone/>
+            </a:pPr>
+            <a:r>
+              <a:rPr lang="en-US" sz="1200" dirty="0">
+                <a:solidFill>
+                  <a:srgbClr val="4A6274"/>
                 </a:solidFill>
                 <a:latin typeface="Calibri" pitchFamily="34" charset="0"/>
                 <a:ea typeface="Calibri" pitchFamily="34" charset="-122"/>
                 <a:cs typeface="Calibri" pitchFamily="34" charset="-120"/>
               </a:rPr>
-              <a:t>Confidence scores for each class, progress bars, magnitude gauge chart</a:t>
-            </a:r>
-            <a:endParaRPr lang="en-US" sz="1300" dirty="0"/>
-          </a:p>
-        </p:txBody>
-      </p:sp>
-      <p:sp>
-        <p:nvSpPr>
-          <p:cNvPr id="20" name="Shape 18"/>
-          <p:cNvSpPr/>
-          <p:nvPr/>
-        </p:nvSpPr>
-        <p:spPr>
-          <a:xfrm>
-            <a:off x="256032" y="2944368"/>
-            <a:ext cx="2816352" cy="1828800"/>
-          </a:xfrm>
-          <a:prstGeom prst="rect">
-            <a:avLst/>
-          </a:prstGeom>
-          <a:solidFill>
-            <a:srgbClr val="F4ECF7"/>
-          </a:solidFill>
-          <a:ln w="12700">
-            <a:solidFill>
-              <a:srgbClr val="7D3C98"/>
-            </a:solidFill>
-            <a:prstDash val="solid"/>
-          </a:ln>
-          <a:effectLst>
-            <a:outerShdw sx="100000" sy="100000" kx="0" ky="0" algn="bl" rotWithShape="0" blurRad="127000" dist="38100" dir="8100000">
-              <a:srgbClr val="000000">
-                <a:alpha val="10000"/>
-              </a:srgbClr>
-            </a:outerShdw>
-          </a:effectLst>
-        </p:spPr>
-      </p:sp>
-      <p:sp>
-        <p:nvSpPr>
-          <p:cNvPr id="21" name="Shape 19"/>
-          <p:cNvSpPr/>
-          <p:nvPr/>
-        </p:nvSpPr>
-        <p:spPr>
-          <a:xfrm>
-            <a:off x="256032" y="2944368"/>
-            <a:ext cx="2816352" cy="82296"/>
-          </a:xfrm>
-          <a:prstGeom prst="rect">
-            <a:avLst/>
-          </a:prstGeom>
-          <a:solidFill>
-            <a:srgbClr val="7D3C98"/>
-          </a:solidFill>
-          <a:ln w="12700">
-            <a:solidFill>
-              <a:srgbClr val="7D3C98"/>
-            </a:solidFill>
-            <a:prstDash val="solid"/>
-          </a:ln>
-        </p:spPr>
-      </p:sp>
-      <p:sp>
-        <p:nvSpPr>
-          <p:cNvPr id="22" name="Text 20"/>
-          <p:cNvSpPr/>
-          <p:nvPr/>
-        </p:nvSpPr>
-        <p:spPr>
-          <a:xfrm>
-            <a:off x="329184" y="3090672"/>
-            <a:ext cx="640080" cy="548640"/>
+              <a:t>GET /recent — last 24h quakes for the map</a:t>
+            </a:r>
+            <a:endParaRPr lang="en-US" sz="1200" dirty="0"/>
+          </a:p>
+        </p:txBody>
+      </p:sp>
+      <p:sp>
+        <p:nvSpPr>
+          <p:cNvPr id="26" name="Text 24"/>
+          <p:cNvSpPr/>
+          <p:nvPr/>
+        </p:nvSpPr>
+        <p:spPr>
+          <a:xfrm>
+            <a:off x="5029200" y="3694176"/>
+            <a:ext cx="457200" cy="512064"/>
           </a:xfrm>
           <a:prstGeom prst="rect">
             <a:avLst/>
@@ -6479,27 +6270,27 @@
               <a:buNone/>
             </a:pPr>
             <a:r>
-              <a:rPr lang="en-US" sz="2400" dirty="0">
+              <a:rPr lang="en-US" sz="2000" dirty="0">
                 <a:solidFill>
                   <a:srgbClr val="000000"/>
                 </a:solidFill>
               </a:rPr>
-              <a:t>⚡</a:t>
-            </a:r>
-            <a:endParaRPr lang="en-US" sz="2400" dirty="0"/>
-          </a:p>
-        </p:txBody>
-      </p:sp>
-      <p:sp>
-        <p:nvSpPr>
-          <p:cNvPr id="23" name="Text 21"/>
-          <p:cNvSpPr/>
-          <p:nvPr/>
-        </p:nvSpPr>
-        <p:spPr>
-          <a:xfrm>
-            <a:off x="1005840" y="3090672"/>
-            <a:ext cx="1956816" cy="548640"/>
+              <a:t>🐳</a:t>
+            </a:r>
+            <a:endParaRPr lang="en-US" sz="2000" dirty="0"/>
+          </a:p>
+        </p:txBody>
+      </p:sp>
+      <p:sp>
+        <p:nvSpPr>
+          <p:cNvPr id="27" name="Text 25"/>
+          <p:cNvSpPr/>
+          <p:nvPr/>
+        </p:nvSpPr>
+        <p:spPr>
+          <a:xfrm>
+            <a:off x="5504688" y="3712464"/>
+            <a:ext cx="3200400" cy="256032"/>
           </a:xfrm>
           <a:prstGeom prst="rect">
             <a:avLst/>
@@ -6515,30 +6306,30 @@
               <a:buNone/>
             </a:pPr>
             <a:r>
-              <a:rPr lang="en-US" sz="1500" b="1" dirty="0">
-                <a:solidFill>
-                  <a:srgbClr val="7D3C98"/>
+              <a:rPr lang="en-US" sz="1300" b="1" dirty="0">
+                <a:solidFill>
+                  <a:srgbClr val="1A5276"/>
                 </a:solidFill>
                 <a:latin typeface="Trebuchet MS" pitchFamily="34" charset="0"/>
                 <a:ea typeface="Trebuchet MS" pitchFamily="34" charset="-122"/>
                 <a:cs typeface="Trebuchet MS" pitchFamily="34" charset="-120"/>
               </a:rPr>
-              <a:t>Flask REST API</a:t>
-            </a:r>
-            <a:endParaRPr lang="en-US" sz="1500" dirty="0"/>
-          </a:p>
-        </p:txBody>
-      </p:sp>
-      <p:sp>
-        <p:nvSpPr>
-          <p:cNvPr id="24" name="Text 22"/>
-          <p:cNvSpPr/>
-          <p:nvPr/>
-        </p:nvSpPr>
-        <p:spPr>
-          <a:xfrm>
-            <a:off x="384048" y="3694176"/>
-            <a:ext cx="2578608" cy="987552"/>
+              <a:t>Docker + Cloud Run</a:t>
+            </a:r>
+            <a:endParaRPr lang="en-US" sz="1300" dirty="0"/>
+          </a:p>
+        </p:txBody>
+      </p:sp>
+      <p:sp>
+        <p:nvSpPr>
+          <p:cNvPr id="28" name="Text 26"/>
+          <p:cNvSpPr/>
+          <p:nvPr/>
+        </p:nvSpPr>
+        <p:spPr>
+          <a:xfrm>
+            <a:off x="5504688" y="3968496"/>
+            <a:ext cx="3200400" cy="237744"/>
           </a:xfrm>
           <a:prstGeom prst="rect">
             <a:avLst/>
@@ -6554,87 +6345,30 @@
               <a:buNone/>
             </a:pPr>
             <a:r>
-              <a:rPr lang="en-US" sz="1300" dirty="0">
-                <a:solidFill>
-                  <a:srgbClr val="1A1A2A"/>
+              <a:rPr lang="en-US" sz="1200" dirty="0">
+                <a:solidFill>
+                  <a:srgbClr val="4A6274"/>
                 </a:solidFill>
                 <a:latin typeface="Calibri" pitchFamily="34" charset="0"/>
                 <a:ea typeface="Calibri" pitchFamily="34" charset="-122"/>
                 <a:cs typeface="Calibri" pitchFamily="34" charset="-120"/>
               </a:rPr>
-              <a:t>POST /predict returns hazard_label, probabilities, hex color in JSON</a:t>
-            </a:r>
-            <a:endParaRPr lang="en-US" sz="1300" dirty="0"/>
-          </a:p>
-        </p:txBody>
-      </p:sp>
-      <p:sp>
-        <p:nvSpPr>
-          <p:cNvPr id="25" name="Shape 23"/>
-          <p:cNvSpPr/>
-          <p:nvPr/>
-        </p:nvSpPr>
-        <p:spPr>
-          <a:xfrm>
-            <a:off x="3218688" y="2944368"/>
-            <a:ext cx="2816352" cy="1828800"/>
-          </a:xfrm>
-          <a:prstGeom prst="rect">
-            <a:avLst/>
-          </a:prstGeom>
-          <a:solidFill>
-            <a:srgbClr val="E9F7EF"/>
-          </a:solidFill>
-          <a:ln w="12700">
-            <a:solidFill>
-              <a:srgbClr val="1E8449"/>
-            </a:solidFill>
-            <a:prstDash val="solid"/>
-          </a:ln>
-          <a:effectLst>
-            <a:outerShdw sx="100000" sy="100000" kx="0" ky="0" algn="bl" rotWithShape="0" blurRad="127000" dist="38100" dir="8100000">
-              <a:srgbClr val="000000">
-                <a:alpha val="10000"/>
-              </a:srgbClr>
-            </a:outerShdw>
-          </a:effectLst>
-        </p:spPr>
-      </p:sp>
-      <p:sp>
-        <p:nvSpPr>
-          <p:cNvPr id="26" name="Shape 24"/>
-          <p:cNvSpPr/>
-          <p:nvPr/>
-        </p:nvSpPr>
-        <p:spPr>
-          <a:xfrm>
-            <a:off x="3218688" y="2944368"/>
-            <a:ext cx="2816352" cy="82296"/>
-          </a:xfrm>
-          <a:prstGeom prst="rect">
-            <a:avLst/>
-          </a:prstGeom>
-          <a:solidFill>
-            <a:srgbClr val="1E8449"/>
-          </a:solidFill>
-          <a:ln w="12700">
-            <a:solidFill>
-              <a:srgbClr val="1E8449"/>
-            </a:solidFill>
-            <a:prstDash val="solid"/>
-          </a:ln>
-        </p:spPr>
-      </p:sp>
-      <p:sp>
-        <p:nvSpPr>
-          <p:cNvPr id="27" name="Text 25"/>
-          <p:cNvSpPr/>
-          <p:nvPr/>
-        </p:nvSpPr>
-        <p:spPr>
-          <a:xfrm>
-            <a:off x="3291840" y="3090672"/>
-            <a:ext cx="640080" cy="548640"/>
+              <a:t>Containerised · serverless · live June 2–9</a:t>
+            </a:r>
+            <a:endParaRPr lang="en-US" sz="1200" dirty="0"/>
+          </a:p>
+        </p:txBody>
+      </p:sp>
+      <p:sp>
+        <p:nvSpPr>
+          <p:cNvPr id="29" name="Text 27"/>
+          <p:cNvSpPr/>
+          <p:nvPr/>
+        </p:nvSpPr>
+        <p:spPr>
+          <a:xfrm>
+            <a:off x="5029200" y="4352544"/>
+            <a:ext cx="457200" cy="512064"/>
           </a:xfrm>
           <a:prstGeom prst="rect">
             <a:avLst/>
@@ -6650,27 +6384,27 @@
               <a:buNone/>
             </a:pPr>
             <a:r>
-              <a:rPr lang="en-US" sz="2400" dirty="0">
+              <a:rPr lang="en-US" sz="2000" dirty="0">
                 <a:solidFill>
                   <a:srgbClr val="000000"/>
                 </a:solidFill>
               </a:rPr>
-              <a:t>🌐</a:t>
-            </a:r>
-            <a:endParaRPr lang="en-US" sz="2400" dirty="0"/>
-          </a:p>
-        </p:txBody>
-      </p:sp>
-      <p:sp>
-        <p:nvSpPr>
-          <p:cNvPr id="28" name="Text 26"/>
-          <p:cNvSpPr/>
-          <p:nvPr/>
-        </p:nvSpPr>
-        <p:spPr>
-          <a:xfrm>
-            <a:off x="3968496" y="3090672"/>
-            <a:ext cx="1956816" cy="548640"/>
+              <a:t>🔄</a:t>
+            </a:r>
+            <a:endParaRPr lang="en-US" sz="2000" dirty="0"/>
+          </a:p>
+        </p:txBody>
+      </p:sp>
+      <p:sp>
+        <p:nvSpPr>
+          <p:cNvPr id="30" name="Text 28"/>
+          <p:cNvSpPr/>
+          <p:nvPr/>
+        </p:nvSpPr>
+        <p:spPr>
+          <a:xfrm>
+            <a:off x="5504688" y="4370832"/>
+            <a:ext cx="3200400" cy="256032"/>
           </a:xfrm>
           <a:prstGeom prst="rect">
             <a:avLst/>
@@ -6686,30 +6420,30 @@
               <a:buNone/>
             </a:pPr>
             <a:r>
-              <a:rPr lang="en-US" sz="1500" b="1" dirty="0">
-                <a:solidFill>
-                  <a:srgbClr val="1E8449"/>
+              <a:rPr lang="en-US" sz="1300" b="1" dirty="0">
+                <a:solidFill>
+                  <a:srgbClr val="1A5276"/>
                 </a:solidFill>
                 <a:latin typeface="Trebuchet MS" pitchFamily="34" charset="0"/>
                 <a:ea typeface="Trebuchet MS" pitchFamily="34" charset="-122"/>
                 <a:cs typeface="Trebuchet MS" pitchFamily="34" charset="-120"/>
               </a:rPr>
-              <a:t>USGS Live Proxy</a:t>
-            </a:r>
-            <a:endParaRPr lang="en-US" sz="1500" dirty="0"/>
-          </a:p>
-        </p:txBody>
-      </p:sp>
-      <p:sp>
-        <p:nvSpPr>
-          <p:cNvPr id="29" name="Text 27"/>
-          <p:cNvSpPr/>
-          <p:nvPr/>
-        </p:nvSpPr>
-        <p:spPr>
-          <a:xfrm>
-            <a:off x="3346704" y="3694176"/>
-            <a:ext cx="2578608" cy="987552"/>
+              <a:t>Auto-Refresh</a:t>
+            </a:r>
+            <a:endParaRPr lang="en-US" sz="1300" dirty="0"/>
+          </a:p>
+        </p:txBody>
+      </p:sp>
+      <p:sp>
+        <p:nvSpPr>
+          <p:cNvPr id="31" name="Text 29"/>
+          <p:cNvSpPr/>
+          <p:nvPr/>
+        </p:nvSpPr>
+        <p:spPr>
+          <a:xfrm>
+            <a:off x="5504688" y="4626864"/>
+            <a:ext cx="3200400" cy="237744"/>
           </a:xfrm>
           <a:prstGeom prst="rect">
             <a:avLst/>
@@ -6725,188 +6459,17 @@
               <a:buNone/>
             </a:pPr>
             <a:r>
-              <a:rPr lang="en-US" sz="1300" dirty="0">
-                <a:solidFill>
-                  <a:srgbClr val="1A1A2A"/>
+              <a:rPr lang="en-US" sz="1200" dirty="0">
+                <a:solidFill>
+                  <a:srgbClr val="4A6274"/>
                 </a:solidFill>
                 <a:latin typeface="Calibri" pitchFamily="34" charset="0"/>
                 <a:ea typeface="Calibri" pitchFamily="34" charset="-122"/>
                 <a:cs typeface="Calibri" pitchFamily="34" charset="-120"/>
               </a:rPr>
-              <a:t>GET /recent fetches last 24h earthquakes in real time for the map feed</a:t>
-            </a:r>
-            <a:endParaRPr lang="en-US" sz="1300" dirty="0"/>
-          </a:p>
-        </p:txBody>
-      </p:sp>
-      <p:sp>
-        <p:nvSpPr>
-          <p:cNvPr id="30" name="Shape 28"/>
-          <p:cNvSpPr/>
-          <p:nvPr/>
-        </p:nvSpPr>
-        <p:spPr>
-          <a:xfrm>
-            <a:off x="6181344" y="2944368"/>
-            <a:ext cx="2816352" cy="1828800"/>
-          </a:xfrm>
-          <a:prstGeom prst="rect">
-            <a:avLst/>
-          </a:prstGeom>
-          <a:solidFill>
-            <a:srgbClr val="FDEDEC"/>
-          </a:solidFill>
-          <a:ln w="12700">
-            <a:solidFill>
-              <a:srgbClr val="C0392B"/>
-            </a:solidFill>
-            <a:prstDash val="solid"/>
-          </a:ln>
-          <a:effectLst>
-            <a:outerShdw sx="100000" sy="100000" kx="0" ky="0" algn="bl" rotWithShape="0" blurRad="127000" dist="38100" dir="8100000">
-              <a:srgbClr val="000000">
-                <a:alpha val="10000"/>
-              </a:srgbClr>
-            </a:outerShdw>
-          </a:effectLst>
-        </p:spPr>
-      </p:sp>
-      <p:sp>
-        <p:nvSpPr>
-          <p:cNvPr id="31" name="Shape 29"/>
-          <p:cNvSpPr/>
-          <p:nvPr/>
-        </p:nvSpPr>
-        <p:spPr>
-          <a:xfrm>
-            <a:off x="6181344" y="2944368"/>
-            <a:ext cx="2816352" cy="82296"/>
-          </a:xfrm>
-          <a:prstGeom prst="rect">
-            <a:avLst/>
-          </a:prstGeom>
-          <a:solidFill>
-            <a:srgbClr val="C0392B"/>
-          </a:solidFill>
-          <a:ln w="12700">
-            <a:solidFill>
-              <a:srgbClr val="C0392B"/>
-            </a:solidFill>
-            <a:prstDash val="solid"/>
-          </a:ln>
-        </p:spPr>
-      </p:sp>
-      <p:sp>
-        <p:nvSpPr>
-          <p:cNvPr id="32" name="Text 30"/>
-          <p:cNvSpPr/>
-          <p:nvPr/>
-        </p:nvSpPr>
-        <p:spPr>
-          <a:xfrm>
-            <a:off x="6254496" y="3090672"/>
-            <a:ext cx="640080" cy="548640"/>
-          </a:xfrm>
-          <a:prstGeom prst="rect">
-            <a:avLst/>
-          </a:prstGeom>
-          <a:noFill/>
-          <a:ln/>
-        </p:spPr>
-        <p:txBody>
-          <a:bodyPr wrap="square" rtlCol="0" anchor="ctr"/>
-          <a:lstStyle/>
-          <a:p>
-            <a:pPr algn="ctr" indent="0" marL="0">
-              <a:buNone/>
-            </a:pPr>
-            <a:r>
-              <a:rPr lang="en-US" sz="2400" dirty="0">
-                <a:solidFill>
-                  <a:srgbClr val="000000"/>
-                </a:solidFill>
-              </a:rPr>
-              <a:t>🐳</a:t>
-            </a:r>
-            <a:endParaRPr lang="en-US" sz="2400" dirty="0"/>
-          </a:p>
-        </p:txBody>
-      </p:sp>
-      <p:sp>
-        <p:nvSpPr>
-          <p:cNvPr id="33" name="Text 31"/>
-          <p:cNvSpPr/>
-          <p:nvPr/>
-        </p:nvSpPr>
-        <p:spPr>
-          <a:xfrm>
-            <a:off x="6931152" y="3090672"/>
-            <a:ext cx="1956816" cy="548640"/>
-          </a:xfrm>
-          <a:prstGeom prst="rect">
-            <a:avLst/>
-          </a:prstGeom>
-          <a:noFill/>
-          <a:ln/>
-        </p:spPr>
-        <p:txBody>
-          <a:bodyPr wrap="square" rtlCol="0" anchor="ctr"/>
-          <a:lstStyle/>
-          <a:p>
-            <a:pPr indent="0" marL="0">
-              <a:buNone/>
-            </a:pPr>
-            <a:r>
-              <a:rPr lang="en-US" sz="1500" b="1" dirty="0">
-                <a:solidFill>
-                  <a:srgbClr val="C0392B"/>
-                </a:solidFill>
-                <a:latin typeface="Trebuchet MS" pitchFamily="34" charset="0"/>
-                <a:ea typeface="Trebuchet MS" pitchFamily="34" charset="-122"/>
-                <a:cs typeface="Trebuchet MS" pitchFamily="34" charset="-120"/>
-              </a:rPr>
-              <a:t>Docker + Cloud Run</a:t>
-            </a:r>
-            <a:endParaRPr lang="en-US" sz="1500" dirty="0"/>
-          </a:p>
-        </p:txBody>
-      </p:sp>
-      <p:sp>
-        <p:nvSpPr>
-          <p:cNvPr id="34" name="Text 32"/>
-          <p:cNvSpPr/>
-          <p:nvPr/>
-        </p:nvSpPr>
-        <p:spPr>
-          <a:xfrm>
-            <a:off x="6309360" y="3694176"/>
-            <a:ext cx="2578608" cy="987552"/>
-          </a:xfrm>
-          <a:prstGeom prst="rect">
-            <a:avLst/>
-          </a:prstGeom>
-          <a:noFill/>
-          <a:ln/>
-        </p:spPr>
-        <p:txBody>
-          <a:bodyPr wrap="square" rtlCol="0" anchor="ctr"/>
-          <a:lstStyle/>
-          <a:p>
-            <a:pPr indent="0" marL="0">
-              <a:buNone/>
-            </a:pPr>
-            <a:r>
-              <a:rPr lang="en-US" sz="1300" dirty="0">
-                <a:solidFill>
-                  <a:srgbClr val="1A1A2A"/>
-                </a:solidFill>
-                <a:latin typeface="Calibri" pitchFamily="34" charset="0"/>
-                <a:ea typeface="Calibri" pitchFamily="34" charset="-122"/>
-                <a:cs typeface="Calibri" pitchFamily="34" charset="-120"/>
-              </a:rPr>
-              <a:t>Containerised, serverless deployment — app stays live June 2 to June 9</a:t>
-            </a:r>
-            <a:endParaRPr lang="en-US" sz="1300" dirty="0"/>
+              <a:t>Map updates every 5 min via cache_data TTL</a:t>
+            </a:r>
+            <a:endParaRPr lang="en-US" sz="1200" dirty="0"/>
           </a:p>
         </p:txBody>
       </p:sp>
@@ -7039,8 +6602,33 @@
         </p:nvSpPr>
         <p:spPr>
           <a:xfrm>
-            <a:off x="256032" y="914400"/>
-            <a:ext cx="2816352" cy="530352"/>
+            <a:off x="274320" y="914400"/>
+            <a:ext cx="8595360" cy="1170432"/>
+          </a:xfrm>
+          <a:prstGeom prst="rect">
+            <a:avLst/>
+          </a:prstGeom>
+          <a:solidFill>
+            <a:srgbClr val="FEF0EE"/>
+          </a:solidFill>
+          <a:ln w="12700">
+            <a:solidFill>
+              <a:srgbClr val="FEF0EE"/>
+            </a:solidFill>
+            <a:prstDash val="solid"/>
+          </a:ln>
+        </p:spPr>
+      </p:sp>
+      <p:sp>
+        <p:nvSpPr>
+          <p:cNvPr id="6" name="Shape 4"/>
+          <p:cNvSpPr/>
+          <p:nvPr/>
+        </p:nvSpPr>
+        <p:spPr>
+          <a:xfrm>
+            <a:off x="274320" y="914400"/>
+            <a:ext cx="91440" cy="1170432"/>
           </a:xfrm>
           <a:prstGeom prst="rect">
             <a:avLst/>
@@ -7058,63 +6646,151 @@
       </p:sp>
       <p:sp>
         <p:nvSpPr>
-          <p:cNvPr id="6" name="Text 4"/>
-          <p:cNvSpPr/>
-          <p:nvPr/>
-        </p:nvSpPr>
-        <p:spPr>
-          <a:xfrm>
-            <a:off x="256032" y="914400"/>
-            <a:ext cx="2816352" cy="530352"/>
-          </a:xfrm>
-          <a:prstGeom prst="rect">
-            <a:avLst/>
-          </a:prstGeom>
-          <a:noFill/>
-          <a:ln/>
-        </p:spPr>
-        <p:txBody>
-          <a:bodyPr wrap="square" lIns="0" tIns="0" rIns="0" bIns="0" rtlCol="0" anchor="ctr"/>
+          <p:cNvPr id="7" name="Shape 5"/>
+          <p:cNvSpPr/>
+          <p:nvPr/>
+        </p:nvSpPr>
+        <p:spPr>
+          <a:xfrm>
+            <a:off x="502920" y="1115568"/>
+            <a:ext cx="694944" cy="694944"/>
+          </a:xfrm>
+          <a:prstGeom prst="ellipse">
+            <a:avLst/>
+          </a:prstGeom>
+          <a:solidFill>
+            <a:srgbClr val="C0392B"/>
+          </a:solidFill>
+          <a:ln w="12700">
+            <a:solidFill>
+              <a:srgbClr val="C0392B"/>
+            </a:solidFill>
+            <a:prstDash val="solid"/>
+          </a:ln>
+        </p:spPr>
+      </p:sp>
+      <p:sp>
+        <p:nvSpPr>
+          <p:cNvPr id="8" name="Text 6"/>
+          <p:cNvSpPr/>
+          <p:nvPr/>
+        </p:nvSpPr>
+        <p:spPr>
+          <a:xfrm>
+            <a:off x="502920" y="1115568"/>
+            <a:ext cx="694944" cy="694944"/>
+          </a:xfrm>
+          <a:prstGeom prst="rect">
+            <a:avLst/>
+          </a:prstGeom>
+          <a:noFill/>
+          <a:ln/>
+        </p:spPr>
+        <p:txBody>
+          <a:bodyPr wrap="square" rtlCol="0" anchor="ctr"/>
           <a:lstStyle/>
           <a:p>
             <a:pPr algn="ctr" indent="0" marL="0">
               <a:buNone/>
             </a:pPr>
             <a:r>
-              <a:rPr lang="en-US" sz="1800" b="1" dirty="0">
-                <a:solidFill>
-                  <a:srgbClr val="FFFFFF"/>
+              <a:rPr lang="en-US" sz="2200" dirty="0">
+                <a:solidFill>
+                  <a:srgbClr val="000000"/>
+                </a:solidFill>
+              </a:rPr>
+              <a:t>⚡</a:t>
+            </a:r>
+            <a:endParaRPr lang="en-US" sz="2200" dirty="0"/>
+          </a:p>
+        </p:txBody>
+      </p:sp>
+      <p:sp>
+        <p:nvSpPr>
+          <p:cNvPr id="9" name="Text 7"/>
+          <p:cNvSpPr/>
+          <p:nvPr/>
+        </p:nvSpPr>
+        <p:spPr>
+          <a:xfrm>
+            <a:off x="1316736" y="1170432"/>
+            <a:ext cx="1737360" cy="594360"/>
+          </a:xfrm>
+          <a:prstGeom prst="rect">
+            <a:avLst/>
+          </a:prstGeom>
+          <a:noFill/>
+          <a:ln/>
+        </p:spPr>
+        <p:txBody>
+          <a:bodyPr wrap="square" rtlCol="0" anchor="ctr"/>
+          <a:lstStyle/>
+          <a:p>
+            <a:pPr indent="0" marL="0">
+              <a:buNone/>
+            </a:pPr>
+            <a:r>
+              <a:rPr lang="en-US" sz="1900" b="1" dirty="0">
+                <a:solidFill>
+                  <a:srgbClr val="C0392B"/>
                 </a:solidFill>
                 <a:latin typeface="Trebuchet MS" pitchFamily="34" charset="0"/>
                 <a:ea typeface="Trebuchet MS" pitchFamily="34" charset="-122"/>
                 <a:cs typeface="Trebuchet MS" pitchFamily="34" charset="-120"/>
               </a:rPr>
-              <a:t>⚡  Challenges</a:t>
-            </a:r>
-            <a:endParaRPr lang="en-US" sz="1800" dirty="0"/>
-          </a:p>
-        </p:txBody>
-      </p:sp>
-      <p:sp>
-        <p:nvSpPr>
-          <p:cNvPr id="7" name="Shape 5"/>
-          <p:cNvSpPr/>
-          <p:nvPr/>
-        </p:nvSpPr>
-        <p:spPr>
-          <a:xfrm>
-            <a:off x="256032" y="1517904"/>
-            <a:ext cx="2816352" cy="1024128"/>
-          </a:xfrm>
-          <a:prstGeom prst="rect">
-            <a:avLst/>
-          </a:prstGeom>
-          <a:solidFill>
-            <a:srgbClr val="FDEDEC"/>
+              <a:t>Challenges</a:t>
+            </a:r>
+            <a:endParaRPr lang="en-US" sz="1900" dirty="0"/>
+          </a:p>
+        </p:txBody>
+      </p:sp>
+      <p:sp>
+        <p:nvSpPr>
+          <p:cNvPr id="10" name="Shape 8"/>
+          <p:cNvSpPr/>
+          <p:nvPr/>
+        </p:nvSpPr>
+        <p:spPr>
+          <a:xfrm>
+            <a:off x="3127248" y="1042416"/>
+            <a:ext cx="36576" cy="914400"/>
+          </a:xfrm>
+          <a:prstGeom prst="rect">
+            <a:avLst/>
+          </a:prstGeom>
+          <a:solidFill>
+            <a:srgbClr val="C0392B"/>
           </a:solidFill>
           <a:ln w="12700">
             <a:solidFill>
-              <a:srgbClr val="F5B7B1"/>
+              <a:srgbClr val="C0392B"/>
+            </a:solidFill>
+            <a:prstDash val="solid"/>
+          </a:ln>
+        </p:spPr>
+      </p:sp>
+      <p:sp>
+        <p:nvSpPr>
+          <p:cNvPr id="11" name="Shape 9"/>
+          <p:cNvSpPr/>
+          <p:nvPr/>
+        </p:nvSpPr>
+        <p:spPr>
+          <a:xfrm>
+            <a:off x="3291840" y="1097280"/>
+            <a:ext cx="1828800" cy="786384"/>
+          </a:xfrm>
+          <a:prstGeom prst="roundRect">
+            <a:avLst>
+              <a:gd name="adj" fmla="val 9302"/>
+            </a:avLst>
+          </a:prstGeom>
+          <a:solidFill>
+            <a:srgbClr val="FFFFFF"/>
+          </a:solidFill>
+          <a:ln w="12700">
+            <a:solidFill>
+              <a:srgbClr val="C0392B"/>
             </a:solidFill>
             <a:prstDash val="solid"/>
           </a:ln>
@@ -7129,88 +6805,82 @@
       </p:sp>
       <p:sp>
         <p:nvSpPr>
-          <p:cNvPr id="8" name="Shape 6"/>
-          <p:cNvSpPr/>
-          <p:nvPr/>
-        </p:nvSpPr>
-        <p:spPr>
-          <a:xfrm>
-            <a:off x="256032" y="1517904"/>
-            <a:ext cx="91440" cy="1024128"/>
-          </a:xfrm>
-          <a:prstGeom prst="rect">
-            <a:avLst/>
-          </a:prstGeom>
-          <a:solidFill>
-            <a:srgbClr val="C0392B"/>
+          <p:cNvPr id="12" name="Text 10"/>
+          <p:cNvSpPr/>
+          <p:nvPr/>
+        </p:nvSpPr>
+        <p:spPr>
+          <a:xfrm>
+            <a:off x="3364992" y="1097280"/>
+            <a:ext cx="1682496" cy="786384"/>
+          </a:xfrm>
+          <a:prstGeom prst="rect">
+            <a:avLst/>
+          </a:prstGeom>
+          <a:noFill/>
+          <a:ln/>
+        </p:spPr>
+        <p:txBody>
+          <a:bodyPr wrap="square" rtlCol="0" anchor="ctr"/>
+          <a:lstStyle/>
+          <a:p>
+            <a:pPr algn="ctr" indent="0" marL="0">
+              <a:buNone/>
+            </a:pPr>
+            <a:r>
+              <a:rPr lang="en-US" sz="1200" dirty="0">
+                <a:solidFill>
+                  <a:srgbClr val="1A1A2A"/>
+                </a:solidFill>
+                <a:latin typeface="Calibri" pitchFamily="34" charset="0"/>
+                <a:ea typeface="Calibri" pitchFamily="34" charset="-122"/>
+                <a:cs typeface="Calibri" pitchFamily="34" charset="-120"/>
+              </a:rPr>
+              <a:t>Class Imbalance</a:t>
+            </a:r>
+            <a:endParaRPr lang="en-US" sz="1200" dirty="0"/>
+          </a:p>
+          <a:p>
+            <a:pPr algn="ctr" indent="0" marL="0">
+              <a:buNone/>
+            </a:pPr>
+            <a:r>
+              <a:rPr lang="en-US" sz="1200" dirty="0">
+                <a:solidFill>
+                  <a:srgbClr val="1A1A2A"/>
+                </a:solidFill>
+                <a:latin typeface="Calibri" pitchFamily="34" charset="0"/>
+                <a:ea typeface="Calibri" pitchFamily="34" charset="-122"/>
+                <a:cs typeface="Calibri" pitchFamily="34" charset="-120"/>
+              </a:rPr>
+              <a:t>7 High / 2,000 records</a:t>
+            </a:r>
+            <a:endParaRPr lang="en-US" sz="1200" dirty="0"/>
+          </a:p>
+        </p:txBody>
+      </p:sp>
+      <p:sp>
+        <p:nvSpPr>
+          <p:cNvPr id="13" name="Shape 11"/>
+          <p:cNvSpPr/>
+          <p:nvPr/>
+        </p:nvSpPr>
+        <p:spPr>
+          <a:xfrm>
+            <a:off x="5175504" y="1097280"/>
+            <a:ext cx="1828800" cy="786384"/>
+          </a:xfrm>
+          <a:prstGeom prst="roundRect">
+            <a:avLst>
+              <a:gd name="adj" fmla="val 9302"/>
+            </a:avLst>
+          </a:prstGeom>
+          <a:solidFill>
+            <a:srgbClr val="FFFFFF"/>
           </a:solidFill>
           <a:ln w="12700">
             <a:solidFill>
               <a:srgbClr val="C0392B"/>
-            </a:solidFill>
-            <a:prstDash val="solid"/>
-          </a:ln>
-        </p:spPr>
-      </p:sp>
-      <p:sp>
-        <p:nvSpPr>
-          <p:cNvPr id="9" name="Text 7"/>
-          <p:cNvSpPr/>
-          <p:nvPr/>
-        </p:nvSpPr>
-        <p:spPr>
-          <a:xfrm>
-            <a:off x="420624" y="1591056"/>
-            <a:ext cx="2560320" cy="877824"/>
-          </a:xfrm>
-          <a:prstGeom prst="rect">
-            <a:avLst/>
-          </a:prstGeom>
-          <a:noFill/>
-          <a:ln/>
-        </p:spPr>
-        <p:txBody>
-          <a:bodyPr wrap="square" rtlCol="0" anchor="ctr"/>
-          <a:lstStyle/>
-          <a:p>
-            <a:pPr indent="0" marL="0">
-              <a:buNone/>
-            </a:pPr>
-            <a:r>
-              <a:rPr lang="en-US" sz="1400" dirty="0">
-                <a:solidFill>
-                  <a:srgbClr val="1A1A2A"/>
-                </a:solidFill>
-                <a:latin typeface="Calibri" pitchFamily="34" charset="0"/>
-                <a:ea typeface="Calibri" pitchFamily="34" charset="-122"/>
-                <a:cs typeface="Calibri" pitchFamily="34" charset="-120"/>
-              </a:rPr>
-              <a:t>Class imbalance — 7 High events / 2,000 records</a:t>
-            </a:r>
-            <a:endParaRPr lang="en-US" sz="1400" dirty="0"/>
-          </a:p>
-        </p:txBody>
-      </p:sp>
-      <p:sp>
-        <p:nvSpPr>
-          <p:cNvPr id="10" name="Shape 8"/>
-          <p:cNvSpPr/>
-          <p:nvPr/>
-        </p:nvSpPr>
-        <p:spPr>
-          <a:xfrm>
-            <a:off x="256032" y="2615184"/>
-            <a:ext cx="2816352" cy="1024128"/>
-          </a:xfrm>
-          <a:prstGeom prst="rect">
-            <a:avLst/>
-          </a:prstGeom>
-          <a:solidFill>
-            <a:srgbClr val="FDEDEC"/>
-          </a:solidFill>
-          <a:ln w="12700">
-            <a:solidFill>
-              <a:srgbClr val="F5B7B1"/>
             </a:solidFill>
             <a:prstDash val="solid"/>
           </a:ln>
@@ -7225,88 +6895,82 @@
       </p:sp>
       <p:sp>
         <p:nvSpPr>
-          <p:cNvPr id="11" name="Shape 9"/>
-          <p:cNvSpPr/>
-          <p:nvPr/>
-        </p:nvSpPr>
-        <p:spPr>
-          <a:xfrm>
-            <a:off x="256032" y="2615184"/>
-            <a:ext cx="91440" cy="1024128"/>
-          </a:xfrm>
-          <a:prstGeom prst="rect">
-            <a:avLst/>
-          </a:prstGeom>
-          <a:solidFill>
-            <a:srgbClr val="C0392B"/>
+          <p:cNvPr id="14" name="Text 12"/>
+          <p:cNvSpPr/>
+          <p:nvPr/>
+        </p:nvSpPr>
+        <p:spPr>
+          <a:xfrm>
+            <a:off x="5248656" y="1097280"/>
+            <a:ext cx="1682496" cy="786384"/>
+          </a:xfrm>
+          <a:prstGeom prst="rect">
+            <a:avLst/>
+          </a:prstGeom>
+          <a:noFill/>
+          <a:ln/>
+        </p:spPr>
+        <p:txBody>
+          <a:bodyPr wrap="square" rtlCol="0" anchor="ctr"/>
+          <a:lstStyle/>
+          <a:p>
+            <a:pPr algn="ctr" indent="0" marL="0">
+              <a:buNone/>
+            </a:pPr>
+            <a:r>
+              <a:rPr lang="en-US" sz="1200" dirty="0">
+                <a:solidFill>
+                  <a:srgbClr val="1A1A2A"/>
+                </a:solidFill>
+                <a:latin typeface="Calibri" pitchFamily="34" charset="0"/>
+                <a:ea typeface="Calibri" pitchFamily="34" charset="-122"/>
+                <a:cs typeface="Calibri" pitchFamily="34" charset="-120"/>
+              </a:rPr>
+              <a:t>Port 5000 → 5001</a:t>
+            </a:r>
+            <a:endParaRPr lang="en-US" sz="1200" dirty="0"/>
+          </a:p>
+          <a:p>
+            <a:pPr algn="ctr" indent="0" marL="0">
+              <a:buNone/>
+            </a:pPr>
+            <a:r>
+              <a:rPr lang="en-US" sz="1200" dirty="0">
+                <a:solidFill>
+                  <a:srgbClr val="1A1A2A"/>
+                </a:solidFill>
+                <a:latin typeface="Calibri" pitchFamily="34" charset="0"/>
+                <a:ea typeface="Calibri" pitchFamily="34" charset="-122"/>
+                <a:cs typeface="Calibri" pitchFamily="34" charset="-120"/>
+              </a:rPr>
+              <a:t>macOS AirPlay conflict</a:t>
+            </a:r>
+            <a:endParaRPr lang="en-US" sz="1200" dirty="0"/>
+          </a:p>
+        </p:txBody>
+      </p:sp>
+      <p:sp>
+        <p:nvSpPr>
+          <p:cNvPr id="15" name="Shape 13"/>
+          <p:cNvSpPr/>
+          <p:nvPr/>
+        </p:nvSpPr>
+        <p:spPr>
+          <a:xfrm>
+            <a:off x="7059168" y="1097280"/>
+            <a:ext cx="1828800" cy="786384"/>
+          </a:xfrm>
+          <a:prstGeom prst="roundRect">
+            <a:avLst>
+              <a:gd name="adj" fmla="val 9302"/>
+            </a:avLst>
+          </a:prstGeom>
+          <a:solidFill>
+            <a:srgbClr val="FFFFFF"/>
           </a:solidFill>
           <a:ln w="12700">
             <a:solidFill>
               <a:srgbClr val="C0392B"/>
-            </a:solidFill>
-            <a:prstDash val="solid"/>
-          </a:ln>
-        </p:spPr>
-      </p:sp>
-      <p:sp>
-        <p:nvSpPr>
-          <p:cNvPr id="12" name="Text 10"/>
-          <p:cNvSpPr/>
-          <p:nvPr/>
-        </p:nvSpPr>
-        <p:spPr>
-          <a:xfrm>
-            <a:off x="420624" y="2688336"/>
-            <a:ext cx="2560320" cy="877824"/>
-          </a:xfrm>
-          <a:prstGeom prst="rect">
-            <a:avLst/>
-          </a:prstGeom>
-          <a:noFill/>
-          <a:ln/>
-        </p:spPr>
-        <p:txBody>
-          <a:bodyPr wrap="square" rtlCol="0" anchor="ctr"/>
-          <a:lstStyle/>
-          <a:p>
-            <a:pPr indent="0" marL="0">
-              <a:buNone/>
-            </a:pPr>
-            <a:r>
-              <a:rPr lang="en-US" sz="1400" dirty="0">
-                <a:solidFill>
-                  <a:srgbClr val="1A1A2A"/>
-                </a:solidFill>
-                <a:latin typeface="Calibri" pitchFamily="34" charset="0"/>
-                <a:ea typeface="Calibri" pitchFamily="34" charset="-122"/>
-                <a:cs typeface="Calibri" pitchFamily="34" charset="-120"/>
-              </a:rPr>
-              <a:t>Port 5000 blocked → Flask moved to 5001</a:t>
-            </a:r>
-            <a:endParaRPr lang="en-US" sz="1400" dirty="0"/>
-          </a:p>
-        </p:txBody>
-      </p:sp>
-      <p:sp>
-        <p:nvSpPr>
-          <p:cNvPr id="13" name="Shape 11"/>
-          <p:cNvSpPr/>
-          <p:nvPr/>
-        </p:nvSpPr>
-        <p:spPr>
-          <a:xfrm>
-            <a:off x="256032" y="3712464"/>
-            <a:ext cx="2816352" cy="1024128"/>
-          </a:xfrm>
-          <a:prstGeom prst="rect">
-            <a:avLst/>
-          </a:prstGeom>
-          <a:solidFill>
-            <a:srgbClr val="FDEDEC"/>
-          </a:solidFill>
-          <a:ln w="12700">
-            <a:solidFill>
-              <a:srgbClr val="F5B7B1"/>
             </a:solidFill>
             <a:prstDash val="solid"/>
           </a:ln>
@@ -7321,24 +6985,80 @@
       </p:sp>
       <p:sp>
         <p:nvSpPr>
-          <p:cNvPr id="14" name="Shape 12"/>
-          <p:cNvSpPr/>
-          <p:nvPr/>
-        </p:nvSpPr>
-        <p:spPr>
-          <a:xfrm>
-            <a:off x="256032" y="3712464"/>
-            <a:ext cx="91440" cy="1024128"/>
-          </a:xfrm>
-          <a:prstGeom prst="rect">
-            <a:avLst/>
-          </a:prstGeom>
-          <a:solidFill>
-            <a:srgbClr val="C0392B"/>
+          <p:cNvPr id="16" name="Text 14"/>
+          <p:cNvSpPr/>
+          <p:nvPr/>
+        </p:nvSpPr>
+        <p:spPr>
+          <a:xfrm>
+            <a:off x="7132320" y="1097280"/>
+            <a:ext cx="1682496" cy="786384"/>
+          </a:xfrm>
+          <a:prstGeom prst="rect">
+            <a:avLst/>
+          </a:prstGeom>
+          <a:noFill/>
+          <a:ln/>
+        </p:spPr>
+        <p:txBody>
+          <a:bodyPr wrap="square" rtlCol="0" anchor="ctr"/>
+          <a:lstStyle/>
+          <a:p>
+            <a:pPr algn="ctr" indent="0" marL="0">
+              <a:buNone/>
+            </a:pPr>
+            <a:r>
+              <a:rPr lang="en-US" sz="1200" dirty="0">
+                <a:solidFill>
+                  <a:srgbClr val="1A1A2A"/>
+                </a:solidFill>
+                <a:latin typeface="Calibri" pitchFamily="34" charset="0"/>
+                <a:ea typeface="Calibri" pitchFamily="34" charset="-122"/>
+                <a:cs typeface="Calibri" pitchFamily="34" charset="-120"/>
+              </a:rPr>
+              <a:t>brew install libomp</a:t>
+            </a:r>
+            <a:endParaRPr lang="en-US" sz="1200" dirty="0"/>
+          </a:p>
+          <a:p>
+            <a:pPr algn="ctr" indent="0" marL="0">
+              <a:buNone/>
+            </a:pPr>
+            <a:r>
+              <a:rPr lang="en-US" sz="1200" dirty="0">
+                <a:solidFill>
+                  <a:srgbClr val="1A1A2A"/>
+                </a:solidFill>
+                <a:latin typeface="Calibri" pitchFamily="34" charset="0"/>
+                <a:ea typeface="Calibri" pitchFamily="34" charset="-122"/>
+                <a:cs typeface="Calibri" pitchFamily="34" charset="-120"/>
+              </a:rPr>
+              <a:t>XGBoost on Mac</a:t>
+            </a:r>
+            <a:endParaRPr lang="en-US" sz="1200" dirty="0"/>
+          </a:p>
+        </p:txBody>
+      </p:sp>
+      <p:sp>
+        <p:nvSpPr>
+          <p:cNvPr id="17" name="Shape 15"/>
+          <p:cNvSpPr/>
+          <p:nvPr/>
+        </p:nvSpPr>
+        <p:spPr>
+          <a:xfrm>
+            <a:off x="274320" y="2176272"/>
+            <a:ext cx="8595360" cy="1170432"/>
+          </a:xfrm>
+          <a:prstGeom prst="rect">
+            <a:avLst/>
+          </a:prstGeom>
+          <a:solidFill>
+            <a:srgbClr val="E6F7F5"/>
           </a:solidFill>
           <a:ln w="12700">
             <a:solidFill>
-              <a:srgbClr val="C0392B"/>
+              <a:srgbClr val="E6F7F5"/>
             </a:solidFill>
             <a:prstDash val="solid"/>
           </a:ln>
@@ -7346,53 +7066,14 @@
       </p:sp>
       <p:sp>
         <p:nvSpPr>
-          <p:cNvPr id="15" name="Text 13"/>
-          <p:cNvSpPr/>
-          <p:nvPr/>
-        </p:nvSpPr>
-        <p:spPr>
-          <a:xfrm>
-            <a:off x="420624" y="3785616"/>
-            <a:ext cx="2560320" cy="877824"/>
-          </a:xfrm>
-          <a:prstGeom prst="rect">
-            <a:avLst/>
-          </a:prstGeom>
-          <a:noFill/>
-          <a:ln/>
-        </p:spPr>
-        <p:txBody>
-          <a:bodyPr wrap="square" rtlCol="0" anchor="ctr"/>
-          <a:lstStyle/>
-          <a:p>
-            <a:pPr indent="0" marL="0">
-              <a:buNone/>
-            </a:pPr>
-            <a:r>
-              <a:rPr lang="en-US" sz="1400" dirty="0">
-                <a:solidFill>
-                  <a:srgbClr val="1A1A2A"/>
-                </a:solidFill>
-                <a:latin typeface="Calibri" pitchFamily="34" charset="0"/>
-                <a:ea typeface="Calibri" pitchFamily="34" charset="-122"/>
-                <a:cs typeface="Calibri" pitchFamily="34" charset="-120"/>
-              </a:rPr>
-              <a:t>XGBoost on Mac — brew install libomp</a:t>
-            </a:r>
-            <a:endParaRPr lang="en-US" sz="1400" dirty="0"/>
-          </a:p>
-        </p:txBody>
-      </p:sp>
-      <p:sp>
-        <p:nvSpPr>
-          <p:cNvPr id="16" name="Shape 14"/>
-          <p:cNvSpPr/>
-          <p:nvPr/>
-        </p:nvSpPr>
-        <p:spPr>
-          <a:xfrm>
-            <a:off x="3218688" y="914400"/>
-            <a:ext cx="2816352" cy="530352"/>
+          <p:cNvPr id="18" name="Shape 16"/>
+          <p:cNvSpPr/>
+          <p:nvPr/>
+        </p:nvSpPr>
+        <p:spPr>
+          <a:xfrm>
+            <a:off x="274320" y="2176272"/>
+            <a:ext cx="91440" cy="1170432"/>
           </a:xfrm>
           <a:prstGeom prst="rect">
             <a:avLst/>
@@ -7410,63 +7091,151 @@
       </p:sp>
       <p:sp>
         <p:nvSpPr>
-          <p:cNvPr id="17" name="Text 15"/>
-          <p:cNvSpPr/>
-          <p:nvPr/>
-        </p:nvSpPr>
-        <p:spPr>
-          <a:xfrm>
-            <a:off x="3218688" y="914400"/>
-            <a:ext cx="2816352" cy="530352"/>
-          </a:xfrm>
-          <a:prstGeom prst="rect">
-            <a:avLst/>
-          </a:prstGeom>
-          <a:noFill/>
-          <a:ln/>
-        </p:spPr>
-        <p:txBody>
-          <a:bodyPr wrap="square" lIns="0" tIns="0" rIns="0" bIns="0" rtlCol="0" anchor="ctr"/>
+          <p:cNvPr id="19" name="Shape 17"/>
+          <p:cNvSpPr/>
+          <p:nvPr/>
+        </p:nvSpPr>
+        <p:spPr>
+          <a:xfrm>
+            <a:off x="502920" y="2377440"/>
+            <a:ext cx="694944" cy="694944"/>
+          </a:xfrm>
+          <a:prstGeom prst="ellipse">
+            <a:avLst/>
+          </a:prstGeom>
+          <a:solidFill>
+            <a:srgbClr val="0D9488"/>
+          </a:solidFill>
+          <a:ln w="12700">
+            <a:solidFill>
+              <a:srgbClr val="0D9488"/>
+            </a:solidFill>
+            <a:prstDash val="solid"/>
+          </a:ln>
+        </p:spPr>
+      </p:sp>
+      <p:sp>
+        <p:nvSpPr>
+          <p:cNvPr id="20" name="Text 18"/>
+          <p:cNvSpPr/>
+          <p:nvPr/>
+        </p:nvSpPr>
+        <p:spPr>
+          <a:xfrm>
+            <a:off x="502920" y="2377440"/>
+            <a:ext cx="694944" cy="694944"/>
+          </a:xfrm>
+          <a:prstGeom prst="rect">
+            <a:avLst/>
+          </a:prstGeom>
+          <a:noFill/>
+          <a:ln/>
+        </p:spPr>
+        <p:txBody>
+          <a:bodyPr wrap="square" rtlCol="0" anchor="ctr"/>
           <a:lstStyle/>
           <a:p>
             <a:pPr algn="ctr" indent="0" marL="0">
               <a:buNone/>
             </a:pPr>
             <a:r>
-              <a:rPr lang="en-US" sz="1800" b="1" dirty="0">
-                <a:solidFill>
-                  <a:srgbClr val="FFFFFF"/>
+              <a:rPr lang="en-US" sz="2200" dirty="0">
+                <a:solidFill>
+                  <a:srgbClr val="000000"/>
+                </a:solidFill>
+              </a:rPr>
+              <a:t>💡</a:t>
+            </a:r>
+            <a:endParaRPr lang="en-US" sz="2200" dirty="0"/>
+          </a:p>
+        </p:txBody>
+      </p:sp>
+      <p:sp>
+        <p:nvSpPr>
+          <p:cNvPr id="21" name="Text 19"/>
+          <p:cNvSpPr/>
+          <p:nvPr/>
+        </p:nvSpPr>
+        <p:spPr>
+          <a:xfrm>
+            <a:off x="1316736" y="2432304"/>
+            <a:ext cx="1737360" cy="594360"/>
+          </a:xfrm>
+          <a:prstGeom prst="rect">
+            <a:avLst/>
+          </a:prstGeom>
+          <a:noFill/>
+          <a:ln/>
+        </p:spPr>
+        <p:txBody>
+          <a:bodyPr wrap="square" rtlCol="0" anchor="ctr"/>
+          <a:lstStyle/>
+          <a:p>
+            <a:pPr indent="0" marL="0">
+              <a:buNone/>
+            </a:pPr>
+            <a:r>
+              <a:rPr lang="en-US" sz="1900" b="1" dirty="0">
+                <a:solidFill>
+                  <a:srgbClr val="0D9488"/>
                 </a:solidFill>
                 <a:latin typeface="Trebuchet MS" pitchFamily="34" charset="0"/>
                 <a:ea typeface="Trebuchet MS" pitchFamily="34" charset="-122"/>
                 <a:cs typeface="Trebuchet MS" pitchFamily="34" charset="-120"/>
               </a:rPr>
-              <a:t>💡  Learnings</a:t>
-            </a:r>
-            <a:endParaRPr lang="en-US" sz="1800" dirty="0"/>
-          </a:p>
-        </p:txBody>
-      </p:sp>
-      <p:sp>
-        <p:nvSpPr>
-          <p:cNvPr id="18" name="Shape 16"/>
-          <p:cNvSpPr/>
-          <p:nvPr/>
-        </p:nvSpPr>
-        <p:spPr>
-          <a:xfrm>
-            <a:off x="3218688" y="1517904"/>
-            <a:ext cx="2816352" cy="1024128"/>
-          </a:xfrm>
-          <a:prstGeom prst="rect">
-            <a:avLst/>
-          </a:prstGeom>
-          <a:solidFill>
-            <a:srgbClr val="E0F5F2"/>
+              <a:t>Learnings</a:t>
+            </a:r>
+            <a:endParaRPr lang="en-US" sz="1900" dirty="0"/>
+          </a:p>
+        </p:txBody>
+      </p:sp>
+      <p:sp>
+        <p:nvSpPr>
+          <p:cNvPr id="22" name="Shape 20"/>
+          <p:cNvSpPr/>
+          <p:nvPr/>
+        </p:nvSpPr>
+        <p:spPr>
+          <a:xfrm>
+            <a:off x="3127248" y="2304288"/>
+            <a:ext cx="36576" cy="914400"/>
+          </a:xfrm>
+          <a:prstGeom prst="rect">
+            <a:avLst/>
+          </a:prstGeom>
+          <a:solidFill>
+            <a:srgbClr val="0D9488"/>
           </a:solidFill>
           <a:ln w="12700">
             <a:solidFill>
-              <a:srgbClr val="A2D9CE"/>
+              <a:srgbClr val="0D9488"/>
+            </a:solidFill>
+            <a:prstDash val="solid"/>
+          </a:ln>
+        </p:spPr>
+      </p:sp>
+      <p:sp>
+        <p:nvSpPr>
+          <p:cNvPr id="23" name="Shape 21"/>
+          <p:cNvSpPr/>
+          <p:nvPr/>
+        </p:nvSpPr>
+        <p:spPr>
+          <a:xfrm>
+            <a:off x="3291840" y="2359152"/>
+            <a:ext cx="1828800" cy="786384"/>
+          </a:xfrm>
+          <a:prstGeom prst="roundRect">
+            <a:avLst>
+              <a:gd name="adj" fmla="val 9302"/>
+            </a:avLst>
+          </a:prstGeom>
+          <a:solidFill>
+            <a:srgbClr val="FFFFFF"/>
+          </a:solidFill>
+          <a:ln w="12700">
+            <a:solidFill>
+              <a:srgbClr val="0D9488"/>
             </a:solidFill>
             <a:prstDash val="solid"/>
           </a:ln>
@@ -7481,88 +7250,82 @@
       </p:sp>
       <p:sp>
         <p:nvSpPr>
-          <p:cNvPr id="19" name="Shape 17"/>
-          <p:cNvSpPr/>
-          <p:nvPr/>
-        </p:nvSpPr>
-        <p:spPr>
-          <a:xfrm>
-            <a:off x="3218688" y="1517904"/>
-            <a:ext cx="91440" cy="1024128"/>
-          </a:xfrm>
-          <a:prstGeom prst="rect">
-            <a:avLst/>
-          </a:prstGeom>
-          <a:solidFill>
-            <a:srgbClr val="0D9488"/>
+          <p:cNvPr id="24" name="Text 22"/>
+          <p:cNvSpPr/>
+          <p:nvPr/>
+        </p:nvSpPr>
+        <p:spPr>
+          <a:xfrm>
+            <a:off x="3364992" y="2359152"/>
+            <a:ext cx="1682496" cy="786384"/>
+          </a:xfrm>
+          <a:prstGeom prst="rect">
+            <a:avLst/>
+          </a:prstGeom>
+          <a:noFill/>
+          <a:ln/>
+        </p:spPr>
+        <p:txBody>
+          <a:bodyPr wrap="square" rtlCol="0" anchor="ctr"/>
+          <a:lstStyle/>
+          <a:p>
+            <a:pPr algn="ctr" indent="0" marL="0">
+              <a:buNone/>
+            </a:pPr>
+            <a:r>
+              <a:rPr lang="en-US" sz="1200" dirty="0">
+                <a:solidFill>
+                  <a:srgbClr val="1A1A2A"/>
+                </a:solidFill>
+                <a:latin typeface="Calibri" pitchFamily="34" charset="0"/>
+                <a:ea typeface="Calibri" pitchFamily="34" charset="-122"/>
+                <a:cs typeface="Calibri" pitchFamily="34" charset="-120"/>
+              </a:rPr>
+              <a:t>End-to-End MLOps</a:t>
+            </a:r>
+            <a:endParaRPr lang="en-US" sz="1200" dirty="0"/>
+          </a:p>
+          <a:p>
+            <a:pPr algn="ctr" indent="0" marL="0">
+              <a:buNone/>
+            </a:pPr>
+            <a:r>
+              <a:rPr lang="en-US" sz="1200" dirty="0">
+                <a:solidFill>
+                  <a:srgbClr val="1A1A2A"/>
+                </a:solidFill>
+                <a:latin typeface="Calibri" pitchFamily="34" charset="0"/>
+                <a:ea typeface="Calibri" pitchFamily="34" charset="-122"/>
+                <a:cs typeface="Calibri" pitchFamily="34" charset="-120"/>
+              </a:rPr>
+              <a:t>data → model → API → cloud</a:t>
+            </a:r>
+            <a:endParaRPr lang="en-US" sz="1200" dirty="0"/>
+          </a:p>
+        </p:txBody>
+      </p:sp>
+      <p:sp>
+        <p:nvSpPr>
+          <p:cNvPr id="25" name="Shape 23"/>
+          <p:cNvSpPr/>
+          <p:nvPr/>
+        </p:nvSpPr>
+        <p:spPr>
+          <a:xfrm>
+            <a:off x="5175504" y="2359152"/>
+            <a:ext cx="1828800" cy="786384"/>
+          </a:xfrm>
+          <a:prstGeom prst="roundRect">
+            <a:avLst>
+              <a:gd name="adj" fmla="val 9302"/>
+            </a:avLst>
+          </a:prstGeom>
+          <a:solidFill>
+            <a:srgbClr val="FFFFFF"/>
           </a:solidFill>
           <a:ln w="12700">
             <a:solidFill>
               <a:srgbClr val="0D9488"/>
-            </a:solidFill>
-            <a:prstDash val="solid"/>
-          </a:ln>
-        </p:spPr>
-      </p:sp>
-      <p:sp>
-        <p:nvSpPr>
-          <p:cNvPr id="20" name="Text 18"/>
-          <p:cNvSpPr/>
-          <p:nvPr/>
-        </p:nvSpPr>
-        <p:spPr>
-          <a:xfrm>
-            <a:off x="3383280" y="1591056"/>
-            <a:ext cx="2560320" cy="877824"/>
-          </a:xfrm>
-          <a:prstGeom prst="rect">
-            <a:avLst/>
-          </a:prstGeom>
-          <a:noFill/>
-          <a:ln/>
-        </p:spPr>
-        <p:txBody>
-          <a:bodyPr wrap="square" rtlCol="0" anchor="ctr"/>
-          <a:lstStyle/>
-          <a:p>
-            <a:pPr indent="0" marL="0">
-              <a:buNone/>
-            </a:pPr>
-            <a:r>
-              <a:rPr lang="en-US" sz="1400" dirty="0">
-                <a:solidFill>
-                  <a:srgbClr val="1A1A2A"/>
-                </a:solidFill>
-                <a:latin typeface="Calibri" pitchFamily="34" charset="0"/>
-                <a:ea typeface="Calibri" pitchFamily="34" charset="-122"/>
-                <a:cs typeface="Calibri" pitchFamily="34" charset="-120"/>
-              </a:rPr>
-              <a:t>Full MLOps: data → model → API → UI → cloud</a:t>
-            </a:r>
-            <a:endParaRPr lang="en-US" sz="1400" dirty="0"/>
-          </a:p>
-        </p:txBody>
-      </p:sp>
-      <p:sp>
-        <p:nvSpPr>
-          <p:cNvPr id="21" name="Shape 19"/>
-          <p:cNvSpPr/>
-          <p:nvPr/>
-        </p:nvSpPr>
-        <p:spPr>
-          <a:xfrm>
-            <a:off x="3218688" y="2615184"/>
-            <a:ext cx="2816352" cy="1024128"/>
-          </a:xfrm>
-          <a:prstGeom prst="rect">
-            <a:avLst/>
-          </a:prstGeom>
-          <a:solidFill>
-            <a:srgbClr val="E0F5F2"/>
-          </a:solidFill>
-          <a:ln w="12700">
-            <a:solidFill>
-              <a:srgbClr val="A2D9CE"/>
             </a:solidFill>
             <a:prstDash val="solid"/>
           </a:ln>
@@ -7577,88 +7340,82 @@
       </p:sp>
       <p:sp>
         <p:nvSpPr>
-          <p:cNvPr id="22" name="Shape 20"/>
-          <p:cNvSpPr/>
-          <p:nvPr/>
-        </p:nvSpPr>
-        <p:spPr>
-          <a:xfrm>
-            <a:off x="3218688" y="2615184"/>
-            <a:ext cx="91440" cy="1024128"/>
-          </a:xfrm>
-          <a:prstGeom prst="rect">
-            <a:avLst/>
-          </a:prstGeom>
-          <a:solidFill>
-            <a:srgbClr val="0D9488"/>
+          <p:cNvPr id="26" name="Text 24"/>
+          <p:cNvSpPr/>
+          <p:nvPr/>
+        </p:nvSpPr>
+        <p:spPr>
+          <a:xfrm>
+            <a:off x="5248656" y="2359152"/>
+            <a:ext cx="1682496" cy="786384"/>
+          </a:xfrm>
+          <a:prstGeom prst="rect">
+            <a:avLst/>
+          </a:prstGeom>
+          <a:noFill/>
+          <a:ln/>
+        </p:spPr>
+        <p:txBody>
+          <a:bodyPr wrap="square" rtlCol="0" anchor="ctr"/>
+          <a:lstStyle/>
+          <a:p>
+            <a:pPr algn="ctr" indent="0" marL="0">
+              <a:buNone/>
+            </a:pPr>
+            <a:r>
+              <a:rPr lang="en-US" sz="1200" dirty="0">
+                <a:solidFill>
+                  <a:srgbClr val="1A1A2A"/>
+                </a:solidFill>
+                <a:latin typeface="Calibri" pitchFamily="34" charset="0"/>
+                <a:ea typeface="Calibri" pitchFamily="34" charset="-122"/>
+                <a:cs typeface="Calibri" pitchFamily="34" charset="-120"/>
+              </a:rPr>
+              <a:t>Macro F1 &gt; Accuracy</a:t>
+            </a:r>
+            <a:endParaRPr lang="en-US" sz="1200" dirty="0"/>
+          </a:p>
+          <a:p>
+            <a:pPr algn="ctr" indent="0" marL="0">
+              <a:buNone/>
+            </a:pPr>
+            <a:r>
+              <a:rPr lang="en-US" sz="1200" dirty="0">
+                <a:solidFill>
+                  <a:srgbClr val="1A1A2A"/>
+                </a:solidFill>
+                <a:latin typeface="Calibri" pitchFamily="34" charset="0"/>
+                <a:ea typeface="Calibri" pitchFamily="34" charset="-122"/>
+                <a:cs typeface="Calibri" pitchFamily="34" charset="-120"/>
+              </a:rPr>
+              <a:t>imbalanced classes</a:t>
+            </a:r>
+            <a:endParaRPr lang="en-US" sz="1200" dirty="0"/>
+          </a:p>
+        </p:txBody>
+      </p:sp>
+      <p:sp>
+        <p:nvSpPr>
+          <p:cNvPr id="27" name="Shape 25"/>
+          <p:cNvSpPr/>
+          <p:nvPr/>
+        </p:nvSpPr>
+        <p:spPr>
+          <a:xfrm>
+            <a:off x="7059168" y="2359152"/>
+            <a:ext cx="1828800" cy="786384"/>
+          </a:xfrm>
+          <a:prstGeom prst="roundRect">
+            <a:avLst>
+              <a:gd name="adj" fmla="val 9302"/>
+            </a:avLst>
+          </a:prstGeom>
+          <a:solidFill>
+            <a:srgbClr val="FFFFFF"/>
           </a:solidFill>
           <a:ln w="12700">
             <a:solidFill>
               <a:srgbClr val="0D9488"/>
-            </a:solidFill>
-            <a:prstDash val="solid"/>
-          </a:ln>
-        </p:spPr>
-      </p:sp>
-      <p:sp>
-        <p:nvSpPr>
-          <p:cNvPr id="23" name="Text 21"/>
-          <p:cNvSpPr/>
-          <p:nvPr/>
-        </p:nvSpPr>
-        <p:spPr>
-          <a:xfrm>
-            <a:off x="3383280" y="2688336"/>
-            <a:ext cx="2560320" cy="877824"/>
-          </a:xfrm>
-          <a:prstGeom prst="rect">
-            <a:avLst/>
-          </a:prstGeom>
-          <a:noFill/>
-          <a:ln/>
-        </p:spPr>
-        <p:txBody>
-          <a:bodyPr wrap="square" rtlCol="0" anchor="ctr"/>
-          <a:lstStyle/>
-          <a:p>
-            <a:pPr indent="0" marL="0">
-              <a:buNone/>
-            </a:pPr>
-            <a:r>
-              <a:rPr lang="en-US" sz="1400" dirty="0">
-                <a:solidFill>
-                  <a:srgbClr val="1A1A2A"/>
-                </a:solidFill>
-                <a:latin typeface="Calibri" pitchFamily="34" charset="0"/>
-                <a:ea typeface="Calibri" pitchFamily="34" charset="-122"/>
-                <a:cs typeface="Calibri" pitchFamily="34" charset="-120"/>
-              </a:rPr>
-              <a:t>Macro F1 &gt; accuracy on imbalanced data</a:t>
-            </a:r>
-            <a:endParaRPr lang="en-US" sz="1400" dirty="0"/>
-          </a:p>
-        </p:txBody>
-      </p:sp>
-      <p:sp>
-        <p:nvSpPr>
-          <p:cNvPr id="24" name="Shape 22"/>
-          <p:cNvSpPr/>
-          <p:nvPr/>
-        </p:nvSpPr>
-        <p:spPr>
-          <a:xfrm>
-            <a:off x="3218688" y="3712464"/>
-            <a:ext cx="2816352" cy="1024128"/>
-          </a:xfrm>
-          <a:prstGeom prst="rect">
-            <a:avLst/>
-          </a:prstGeom>
-          <a:solidFill>
-            <a:srgbClr val="E0F5F2"/>
-          </a:solidFill>
-          <a:ln w="12700">
-            <a:solidFill>
-              <a:srgbClr val="A2D9CE"/>
             </a:solidFill>
             <a:prstDash val="solid"/>
           </a:ln>
@@ -7673,24 +7430,80 @@
       </p:sp>
       <p:sp>
         <p:nvSpPr>
-          <p:cNvPr id="25" name="Shape 23"/>
-          <p:cNvSpPr/>
-          <p:nvPr/>
-        </p:nvSpPr>
-        <p:spPr>
-          <a:xfrm>
-            <a:off x="3218688" y="3712464"/>
-            <a:ext cx="91440" cy="1024128"/>
-          </a:xfrm>
-          <a:prstGeom prst="rect">
-            <a:avLst/>
-          </a:prstGeom>
-          <a:solidFill>
-            <a:srgbClr val="0D9488"/>
+          <p:cNvPr id="28" name="Text 26"/>
+          <p:cNvSpPr/>
+          <p:nvPr/>
+        </p:nvSpPr>
+        <p:spPr>
+          <a:xfrm>
+            <a:off x="7132320" y="2359152"/>
+            <a:ext cx="1682496" cy="786384"/>
+          </a:xfrm>
+          <a:prstGeom prst="rect">
+            <a:avLst/>
+          </a:prstGeom>
+          <a:noFill/>
+          <a:ln/>
+        </p:spPr>
+        <p:txBody>
+          <a:bodyPr wrap="square" rtlCol="0" anchor="ctr"/>
+          <a:lstStyle/>
+          <a:p>
+            <a:pPr algn="ctr" indent="0" marL="0">
+              <a:buNone/>
+            </a:pPr>
+            <a:r>
+              <a:rPr lang="en-US" sz="1200" dirty="0">
+                <a:solidFill>
+                  <a:srgbClr val="1A1A2A"/>
+                </a:solidFill>
+                <a:latin typeface="Calibri" pitchFamily="34" charset="0"/>
+                <a:ea typeface="Calibri" pitchFamily="34" charset="-122"/>
+                <a:cs typeface="Calibri" pitchFamily="34" charset="-120"/>
+              </a:rPr>
+              <a:t>Claude AI</a:t>
+            </a:r>
+            <a:endParaRPr lang="en-US" sz="1200" dirty="0"/>
+          </a:p>
+          <a:p>
+            <a:pPr algn="ctr" indent="0" marL="0">
+              <a:buNone/>
+            </a:pPr>
+            <a:r>
+              <a:rPr lang="en-US" sz="1200" dirty="0">
+                <a:solidFill>
+                  <a:srgbClr val="1A1A2A"/>
+                </a:solidFill>
+                <a:latin typeface="Calibri" pitchFamily="34" charset="0"/>
+                <a:ea typeface="Calibri" pitchFamily="34" charset="-122"/>
+                <a:cs typeface="Calibri" pitchFamily="34" charset="-120"/>
+              </a:rPr>
+              <a:t>code, debug &amp; deploy</a:t>
+            </a:r>
+            <a:endParaRPr lang="en-US" sz="1200" dirty="0"/>
+          </a:p>
+        </p:txBody>
+      </p:sp>
+      <p:sp>
+        <p:nvSpPr>
+          <p:cNvPr id="29" name="Shape 27"/>
+          <p:cNvSpPr/>
+          <p:nvPr/>
+        </p:nvSpPr>
+        <p:spPr>
+          <a:xfrm>
+            <a:off x="274320" y="3438144"/>
+            <a:ext cx="8595360" cy="1170432"/>
+          </a:xfrm>
+          <a:prstGeom prst="rect">
+            <a:avLst/>
+          </a:prstGeom>
+          <a:solidFill>
+            <a:srgbClr val="EAF4FB"/>
           </a:solidFill>
           <a:ln w="12700">
             <a:solidFill>
-              <a:srgbClr val="0D9488"/>
+              <a:srgbClr val="EAF4FB"/>
             </a:solidFill>
             <a:prstDash val="solid"/>
           </a:ln>
@@ -7698,53 +7511,14 @@
       </p:sp>
       <p:sp>
         <p:nvSpPr>
-          <p:cNvPr id="26" name="Text 24"/>
-          <p:cNvSpPr/>
-          <p:nvPr/>
-        </p:nvSpPr>
-        <p:spPr>
-          <a:xfrm>
-            <a:off x="3383280" y="3785616"/>
-            <a:ext cx="2560320" cy="877824"/>
-          </a:xfrm>
-          <a:prstGeom prst="rect">
-            <a:avLst/>
-          </a:prstGeom>
-          <a:noFill/>
-          <a:ln/>
-        </p:spPr>
-        <p:txBody>
-          <a:bodyPr wrap="square" rtlCol="0" anchor="ctr"/>
-          <a:lstStyle/>
-          <a:p>
-            <a:pPr indent="0" marL="0">
-              <a:buNone/>
-            </a:pPr>
-            <a:r>
-              <a:rPr lang="en-US" sz="1400" dirty="0">
-                <a:solidFill>
-                  <a:srgbClr val="1A1A2A"/>
-                </a:solidFill>
-                <a:latin typeface="Calibri" pitchFamily="34" charset="0"/>
-                <a:ea typeface="Calibri" pitchFamily="34" charset="-122"/>
-                <a:cs typeface="Calibri" pitchFamily="34" charset="-120"/>
-              </a:rPr>
-              <a:t>Claude AI: code, debug &amp; deploy at every layer</a:t>
-            </a:r>
-            <a:endParaRPr lang="en-US" sz="1400" dirty="0"/>
-          </a:p>
-        </p:txBody>
-      </p:sp>
-      <p:sp>
-        <p:nvSpPr>
-          <p:cNvPr id="27" name="Shape 25"/>
-          <p:cNvSpPr/>
-          <p:nvPr/>
-        </p:nvSpPr>
-        <p:spPr>
-          <a:xfrm>
-            <a:off x="6181344" y="914400"/>
-            <a:ext cx="2816352" cy="530352"/>
+          <p:cNvPr id="30" name="Shape 28"/>
+          <p:cNvSpPr/>
+          <p:nvPr/>
+        </p:nvSpPr>
+        <p:spPr>
+          <a:xfrm>
+            <a:off x="274320" y="3438144"/>
+            <a:ext cx="91440" cy="1170432"/>
           </a:xfrm>
           <a:prstGeom prst="rect">
             <a:avLst/>
@@ -7762,63 +7536,151 @@
       </p:sp>
       <p:sp>
         <p:nvSpPr>
-          <p:cNvPr id="28" name="Text 26"/>
-          <p:cNvSpPr/>
-          <p:nvPr/>
-        </p:nvSpPr>
-        <p:spPr>
-          <a:xfrm>
-            <a:off x="6181344" y="914400"/>
-            <a:ext cx="2816352" cy="530352"/>
-          </a:xfrm>
-          <a:prstGeom prst="rect">
-            <a:avLst/>
-          </a:prstGeom>
-          <a:noFill/>
-          <a:ln/>
-        </p:spPr>
-        <p:txBody>
-          <a:bodyPr wrap="square" lIns="0" tIns="0" rIns="0" bIns="0" rtlCol="0" anchor="ctr"/>
+          <p:cNvPr id="31" name="Shape 29"/>
+          <p:cNvSpPr/>
+          <p:nvPr/>
+        </p:nvSpPr>
+        <p:spPr>
+          <a:xfrm>
+            <a:off x="502920" y="3639312"/>
+            <a:ext cx="694944" cy="694944"/>
+          </a:xfrm>
+          <a:prstGeom prst="ellipse">
+            <a:avLst/>
+          </a:prstGeom>
+          <a:solidFill>
+            <a:srgbClr val="1A5276"/>
+          </a:solidFill>
+          <a:ln w="12700">
+            <a:solidFill>
+              <a:srgbClr val="1A5276"/>
+            </a:solidFill>
+            <a:prstDash val="solid"/>
+          </a:ln>
+        </p:spPr>
+      </p:sp>
+      <p:sp>
+        <p:nvSpPr>
+          <p:cNvPr id="32" name="Text 30"/>
+          <p:cNvSpPr/>
+          <p:nvPr/>
+        </p:nvSpPr>
+        <p:spPr>
+          <a:xfrm>
+            <a:off x="502920" y="3639312"/>
+            <a:ext cx="694944" cy="694944"/>
+          </a:xfrm>
+          <a:prstGeom prst="rect">
+            <a:avLst/>
+          </a:prstGeom>
+          <a:noFill/>
+          <a:ln/>
+        </p:spPr>
+        <p:txBody>
+          <a:bodyPr wrap="square" rtlCol="0" anchor="ctr"/>
           <a:lstStyle/>
           <a:p>
             <a:pPr algn="ctr" indent="0" marL="0">
               <a:buNone/>
             </a:pPr>
             <a:r>
-              <a:rPr lang="en-US" sz="1800" b="1" dirty="0">
-                <a:solidFill>
-                  <a:srgbClr val="FFFFFF"/>
+              <a:rPr lang="en-US" sz="2200" dirty="0">
+                <a:solidFill>
+                  <a:srgbClr val="000000"/>
+                </a:solidFill>
+              </a:rPr>
+              <a:t>🚀</a:t>
+            </a:r>
+            <a:endParaRPr lang="en-US" sz="2200" dirty="0"/>
+          </a:p>
+        </p:txBody>
+      </p:sp>
+      <p:sp>
+        <p:nvSpPr>
+          <p:cNvPr id="33" name="Text 31"/>
+          <p:cNvSpPr/>
+          <p:nvPr/>
+        </p:nvSpPr>
+        <p:spPr>
+          <a:xfrm>
+            <a:off x="1316736" y="3694176"/>
+            <a:ext cx="1737360" cy="594360"/>
+          </a:xfrm>
+          <a:prstGeom prst="rect">
+            <a:avLst/>
+          </a:prstGeom>
+          <a:noFill/>
+          <a:ln/>
+        </p:spPr>
+        <p:txBody>
+          <a:bodyPr wrap="square" rtlCol="0" anchor="ctr"/>
+          <a:lstStyle/>
+          <a:p>
+            <a:pPr indent="0" marL="0">
+              <a:buNone/>
+            </a:pPr>
+            <a:r>
+              <a:rPr lang="en-US" sz="1900" b="1" dirty="0">
+                <a:solidFill>
+                  <a:srgbClr val="1A5276"/>
                 </a:solidFill>
                 <a:latin typeface="Trebuchet MS" pitchFamily="34" charset="0"/>
                 <a:ea typeface="Trebuchet MS" pitchFamily="34" charset="-122"/>
                 <a:cs typeface="Trebuchet MS" pitchFamily="34" charset="-120"/>
               </a:rPr>
-              <a:t>🚀  Future Work</a:t>
-            </a:r>
-            <a:endParaRPr lang="en-US" sz="1800" dirty="0"/>
-          </a:p>
-        </p:txBody>
-      </p:sp>
-      <p:sp>
-        <p:nvSpPr>
-          <p:cNvPr id="29" name="Shape 27"/>
-          <p:cNvSpPr/>
-          <p:nvPr/>
-        </p:nvSpPr>
-        <p:spPr>
-          <a:xfrm>
-            <a:off x="6181344" y="1517904"/>
-            <a:ext cx="2816352" cy="1024128"/>
-          </a:xfrm>
-          <a:prstGeom prst="rect">
-            <a:avLst/>
-          </a:prstGeom>
-          <a:solidFill>
-            <a:srgbClr val="EAF4FB"/>
+              <a:t>Future Work</a:t>
+            </a:r>
+            <a:endParaRPr lang="en-US" sz="1900" dirty="0"/>
+          </a:p>
+        </p:txBody>
+      </p:sp>
+      <p:sp>
+        <p:nvSpPr>
+          <p:cNvPr id="34" name="Shape 32"/>
+          <p:cNvSpPr/>
+          <p:nvPr/>
+        </p:nvSpPr>
+        <p:spPr>
+          <a:xfrm>
+            <a:off x="3127248" y="3566160"/>
+            <a:ext cx="36576" cy="914400"/>
+          </a:xfrm>
+          <a:prstGeom prst="rect">
+            <a:avLst/>
+          </a:prstGeom>
+          <a:solidFill>
+            <a:srgbClr val="1A5276"/>
           </a:solidFill>
           <a:ln w="12700">
             <a:solidFill>
-              <a:srgbClr val="B2D8F0"/>
+              <a:srgbClr val="1A5276"/>
+            </a:solidFill>
+            <a:prstDash val="solid"/>
+          </a:ln>
+        </p:spPr>
+      </p:sp>
+      <p:sp>
+        <p:nvSpPr>
+          <p:cNvPr id="35" name="Shape 33"/>
+          <p:cNvSpPr/>
+          <p:nvPr/>
+        </p:nvSpPr>
+        <p:spPr>
+          <a:xfrm>
+            <a:off x="3291840" y="3621024"/>
+            <a:ext cx="1828800" cy="786384"/>
+          </a:xfrm>
+          <a:prstGeom prst="roundRect">
+            <a:avLst>
+              <a:gd name="adj" fmla="val 9302"/>
+            </a:avLst>
+          </a:prstGeom>
+          <a:solidFill>
+            <a:srgbClr val="FFFFFF"/>
+          </a:solidFill>
+          <a:ln w="12700">
+            <a:solidFill>
+              <a:srgbClr val="1A5276"/>
             </a:solidFill>
             <a:prstDash val="solid"/>
           </a:ln>
@@ -7833,88 +7695,82 @@
       </p:sp>
       <p:sp>
         <p:nvSpPr>
-          <p:cNvPr id="30" name="Shape 28"/>
-          <p:cNvSpPr/>
-          <p:nvPr/>
-        </p:nvSpPr>
-        <p:spPr>
-          <a:xfrm>
-            <a:off x="6181344" y="1517904"/>
-            <a:ext cx="91440" cy="1024128"/>
-          </a:xfrm>
-          <a:prstGeom prst="rect">
-            <a:avLst/>
-          </a:prstGeom>
-          <a:solidFill>
-            <a:srgbClr val="1A5276"/>
+          <p:cNvPr id="36" name="Text 34"/>
+          <p:cNvSpPr/>
+          <p:nvPr/>
+        </p:nvSpPr>
+        <p:spPr>
+          <a:xfrm>
+            <a:off x="3364992" y="3621024"/>
+            <a:ext cx="1682496" cy="786384"/>
+          </a:xfrm>
+          <a:prstGeom prst="rect">
+            <a:avLst/>
+          </a:prstGeom>
+          <a:noFill/>
+          <a:ln/>
+        </p:spPr>
+        <p:txBody>
+          <a:bodyPr wrap="square" rtlCol="0" anchor="ctr"/>
+          <a:lstStyle/>
+          <a:p>
+            <a:pPr algn="ctr" indent="0" marL="0">
+              <a:buNone/>
+            </a:pPr>
+            <a:r>
+              <a:rPr lang="en-US" sz="1200" dirty="0">
+                <a:solidFill>
+                  <a:srgbClr val="1A1A2A"/>
+                </a:solidFill>
+                <a:latin typeface="Calibri" pitchFamily="34" charset="0"/>
+                <a:ea typeface="Calibri" pitchFamily="34" charset="-122"/>
+                <a:cs typeface="Calibri" pitchFamily="34" charset="-120"/>
+              </a:rPr>
+              <a:t>Temporal Features</a:t>
+            </a:r>
+            <a:endParaRPr lang="en-US" sz="1200" dirty="0"/>
+          </a:p>
+          <a:p>
+            <a:pPr algn="ctr" indent="0" marL="0">
+              <a:buNone/>
+            </a:pPr>
+            <a:r>
+              <a:rPr lang="en-US" sz="1200" dirty="0">
+                <a:solidFill>
+                  <a:srgbClr val="1A1A2A"/>
+                </a:solidFill>
+                <a:latin typeface="Calibri" pitchFamily="34" charset="0"/>
+                <a:ea typeface="Calibri" pitchFamily="34" charset="-122"/>
+                <a:cs typeface="Calibri" pitchFamily="34" charset="-120"/>
+              </a:rPr>
+              <a:t>afterShock sequences</a:t>
+            </a:r>
+            <a:endParaRPr lang="en-US" sz="1200" dirty="0"/>
+          </a:p>
+        </p:txBody>
+      </p:sp>
+      <p:sp>
+        <p:nvSpPr>
+          <p:cNvPr id="37" name="Shape 35"/>
+          <p:cNvSpPr/>
+          <p:nvPr/>
+        </p:nvSpPr>
+        <p:spPr>
+          <a:xfrm>
+            <a:off x="5175504" y="3621024"/>
+            <a:ext cx="1828800" cy="786384"/>
+          </a:xfrm>
+          <a:prstGeom prst="roundRect">
+            <a:avLst>
+              <a:gd name="adj" fmla="val 9302"/>
+            </a:avLst>
+          </a:prstGeom>
+          <a:solidFill>
+            <a:srgbClr val="FFFFFF"/>
           </a:solidFill>
           <a:ln w="12700">
             <a:solidFill>
               <a:srgbClr val="1A5276"/>
-            </a:solidFill>
-            <a:prstDash val="solid"/>
-          </a:ln>
-        </p:spPr>
-      </p:sp>
-      <p:sp>
-        <p:nvSpPr>
-          <p:cNvPr id="31" name="Text 29"/>
-          <p:cNvSpPr/>
-          <p:nvPr/>
-        </p:nvSpPr>
-        <p:spPr>
-          <a:xfrm>
-            <a:off x="6345936" y="1591056"/>
-            <a:ext cx="2560320" cy="877824"/>
-          </a:xfrm>
-          <a:prstGeom prst="rect">
-            <a:avLst/>
-          </a:prstGeom>
-          <a:noFill/>
-          <a:ln/>
-        </p:spPr>
-        <p:txBody>
-          <a:bodyPr wrap="square" rtlCol="0" anchor="ctr"/>
-          <a:lstStyle/>
-          <a:p>
-            <a:pPr indent="0" marL="0">
-              <a:buNone/>
-            </a:pPr>
-            <a:r>
-              <a:rPr lang="en-US" sz="1400" dirty="0">
-                <a:solidFill>
-                  <a:srgbClr val="1A1A2A"/>
-                </a:solidFill>
-                <a:latin typeface="Calibri" pitchFamily="34" charset="0"/>
-                <a:ea typeface="Calibri" pitchFamily="34" charset="-122"/>
-                <a:cs typeface="Calibri" pitchFamily="34" charset="-120"/>
-              </a:rPr>
-              <a:t>Temporal features — aftershock sequences</a:t>
-            </a:r>
-            <a:endParaRPr lang="en-US" sz="1400" dirty="0"/>
-          </a:p>
-        </p:txBody>
-      </p:sp>
-      <p:sp>
-        <p:nvSpPr>
-          <p:cNvPr id="32" name="Shape 30"/>
-          <p:cNvSpPr/>
-          <p:nvPr/>
-        </p:nvSpPr>
-        <p:spPr>
-          <a:xfrm>
-            <a:off x="6181344" y="2615184"/>
-            <a:ext cx="2816352" cy="1024128"/>
-          </a:xfrm>
-          <a:prstGeom prst="rect">
-            <a:avLst/>
-          </a:prstGeom>
-          <a:solidFill>
-            <a:srgbClr val="EAF4FB"/>
-          </a:solidFill>
-          <a:ln w="12700">
-            <a:solidFill>
-              <a:srgbClr val="B2D8F0"/>
             </a:solidFill>
             <a:prstDash val="solid"/>
           </a:ln>
@@ -7929,88 +7785,82 @@
       </p:sp>
       <p:sp>
         <p:nvSpPr>
-          <p:cNvPr id="33" name="Shape 31"/>
-          <p:cNvSpPr/>
-          <p:nvPr/>
-        </p:nvSpPr>
-        <p:spPr>
-          <a:xfrm>
-            <a:off x="6181344" y="2615184"/>
-            <a:ext cx="91440" cy="1024128"/>
-          </a:xfrm>
-          <a:prstGeom prst="rect">
-            <a:avLst/>
-          </a:prstGeom>
-          <a:solidFill>
-            <a:srgbClr val="1A5276"/>
+          <p:cNvPr id="38" name="Text 36"/>
+          <p:cNvSpPr/>
+          <p:nvPr/>
+        </p:nvSpPr>
+        <p:spPr>
+          <a:xfrm>
+            <a:off x="5248656" y="3621024"/>
+            <a:ext cx="1682496" cy="786384"/>
+          </a:xfrm>
+          <a:prstGeom prst="rect">
+            <a:avLst/>
+          </a:prstGeom>
+          <a:noFill/>
+          <a:ln/>
+        </p:spPr>
+        <p:txBody>
+          <a:bodyPr wrap="square" rtlCol="0" anchor="ctr"/>
+          <a:lstStyle/>
+          <a:p>
+            <a:pPr algn="ctr" indent="0" marL="0">
+              <a:buNone/>
+            </a:pPr>
+            <a:r>
+              <a:rPr lang="en-US" sz="1200" dirty="0">
+                <a:solidFill>
+                  <a:srgbClr val="1A1A2A"/>
+                </a:solidFill>
+                <a:latin typeface="Calibri" pitchFamily="34" charset="0"/>
+                <a:ea typeface="Calibri" pitchFamily="34" charset="-122"/>
+                <a:cs typeface="Calibri" pitchFamily="34" charset="-120"/>
+              </a:rPr>
+              <a:t>USGS WebSocket</a:t>
+            </a:r>
+            <a:endParaRPr lang="en-US" sz="1200" dirty="0"/>
+          </a:p>
+          <a:p>
+            <a:pPr algn="ctr" indent="0" marL="0">
+              <a:buNone/>
+            </a:pPr>
+            <a:r>
+              <a:rPr lang="en-US" sz="1200" dirty="0">
+                <a:solidFill>
+                  <a:srgbClr val="1A1A2A"/>
+                </a:solidFill>
+                <a:latin typeface="Calibri" pitchFamily="34" charset="0"/>
+                <a:ea typeface="Calibri" pitchFamily="34" charset="-122"/>
+                <a:cs typeface="Calibri" pitchFamily="34" charset="-120"/>
+              </a:rPr>
+              <a:t>sub-second map updates</a:t>
+            </a:r>
+            <a:endParaRPr lang="en-US" sz="1200" dirty="0"/>
+          </a:p>
+        </p:txBody>
+      </p:sp>
+      <p:sp>
+        <p:nvSpPr>
+          <p:cNvPr id="39" name="Shape 37"/>
+          <p:cNvSpPr/>
+          <p:nvPr/>
+        </p:nvSpPr>
+        <p:spPr>
+          <a:xfrm>
+            <a:off x="7059168" y="3621024"/>
+            <a:ext cx="1828800" cy="786384"/>
+          </a:xfrm>
+          <a:prstGeom prst="roundRect">
+            <a:avLst>
+              <a:gd name="adj" fmla="val 9302"/>
+            </a:avLst>
+          </a:prstGeom>
+          <a:solidFill>
+            <a:srgbClr val="FFFFFF"/>
           </a:solidFill>
           <a:ln w="12700">
             <a:solidFill>
               <a:srgbClr val="1A5276"/>
-            </a:solidFill>
-            <a:prstDash val="solid"/>
-          </a:ln>
-        </p:spPr>
-      </p:sp>
-      <p:sp>
-        <p:nvSpPr>
-          <p:cNvPr id="34" name="Text 32"/>
-          <p:cNvSpPr/>
-          <p:nvPr/>
-        </p:nvSpPr>
-        <p:spPr>
-          <a:xfrm>
-            <a:off x="6345936" y="2688336"/>
-            <a:ext cx="2560320" cy="877824"/>
-          </a:xfrm>
-          <a:prstGeom prst="rect">
-            <a:avLst/>
-          </a:prstGeom>
-          <a:noFill/>
-          <a:ln/>
-        </p:spPr>
-        <p:txBody>
-          <a:bodyPr wrap="square" rtlCol="0" anchor="ctr"/>
-          <a:lstStyle/>
-          <a:p>
-            <a:pPr indent="0" marL="0">
-              <a:buNone/>
-            </a:pPr>
-            <a:r>
-              <a:rPr lang="en-US" sz="1400" dirty="0">
-                <a:solidFill>
-                  <a:srgbClr val="1A1A2A"/>
-                </a:solidFill>
-                <a:latin typeface="Calibri" pitchFamily="34" charset="0"/>
-                <a:ea typeface="Calibri" pitchFamily="34" charset="-122"/>
-                <a:cs typeface="Calibri" pitchFamily="34" charset="-120"/>
-              </a:rPr>
-              <a:t>USGS WebSocket — sub-second map updates</a:t>
-            </a:r>
-            <a:endParaRPr lang="en-US" sz="1400" dirty="0"/>
-          </a:p>
-        </p:txBody>
-      </p:sp>
-      <p:sp>
-        <p:nvSpPr>
-          <p:cNvPr id="35" name="Shape 33"/>
-          <p:cNvSpPr/>
-          <p:nvPr/>
-        </p:nvSpPr>
-        <p:spPr>
-          <a:xfrm>
-            <a:off x="6181344" y="3712464"/>
-            <a:ext cx="2816352" cy="1024128"/>
-          </a:xfrm>
-          <a:prstGeom prst="rect">
-            <a:avLst/>
-          </a:prstGeom>
-          <a:solidFill>
-            <a:srgbClr val="EAF4FB"/>
-          </a:solidFill>
-          <a:ln w="12700">
-            <a:solidFill>
-              <a:srgbClr val="B2D8F0"/>
             </a:solidFill>
             <a:prstDash val="solid"/>
           </a:ln>
@@ -8025,55 +7875,30 @@
       </p:sp>
       <p:sp>
         <p:nvSpPr>
-          <p:cNvPr id="36" name="Shape 34"/>
-          <p:cNvSpPr/>
-          <p:nvPr/>
-        </p:nvSpPr>
-        <p:spPr>
-          <a:xfrm>
-            <a:off x="6181344" y="3712464"/>
-            <a:ext cx="91440" cy="1024128"/>
-          </a:xfrm>
-          <a:prstGeom prst="rect">
-            <a:avLst/>
-          </a:prstGeom>
-          <a:solidFill>
-            <a:srgbClr val="1A5276"/>
-          </a:solidFill>
-          <a:ln w="12700">
-            <a:solidFill>
-              <a:srgbClr val="1A5276"/>
-            </a:solidFill>
-            <a:prstDash val="solid"/>
-          </a:ln>
-        </p:spPr>
-      </p:sp>
-      <p:sp>
-        <p:nvSpPr>
-          <p:cNvPr id="37" name="Text 35"/>
-          <p:cNvSpPr/>
-          <p:nvPr/>
-        </p:nvSpPr>
-        <p:spPr>
-          <a:xfrm>
-            <a:off x="6345936" y="3785616"/>
-            <a:ext cx="2560320" cy="877824"/>
-          </a:xfrm>
-          <a:prstGeom prst="rect">
-            <a:avLst/>
-          </a:prstGeom>
-          <a:noFill/>
-          <a:ln/>
-        </p:spPr>
-        <p:txBody>
-          <a:bodyPr wrap="square" rtlCol="0" anchor="ctr"/>
-          <a:lstStyle/>
-          <a:p>
-            <a:pPr indent="0" marL="0">
-              <a:buNone/>
-            </a:pPr>
-            <a:r>
-              <a:rPr lang="en-US" sz="1400" dirty="0">
+          <p:cNvPr id="40" name="Text 38"/>
+          <p:cNvSpPr/>
+          <p:nvPr/>
+        </p:nvSpPr>
+        <p:spPr>
+          <a:xfrm>
+            <a:off x="7132320" y="3621024"/>
+            <a:ext cx="1682496" cy="786384"/>
+          </a:xfrm>
+          <a:prstGeom prst="rect">
+            <a:avLst/>
+          </a:prstGeom>
+          <a:noFill/>
+          <a:ln/>
+        </p:spPr>
+        <p:txBody>
+          <a:bodyPr wrap="square" rtlCol="0" anchor="ctr"/>
+          <a:lstStyle/>
+          <a:p>
+            <a:pPr algn="ctr" indent="0" marL="0">
+              <a:buNone/>
+            </a:pPr>
+            <a:r>
+              <a:rPr lang="en-US" sz="1200" dirty="0">
                 <a:solidFill>
                   <a:srgbClr val="1A1A2A"/>
                 </a:solidFill>
@@ -8081,15 +7906,32 @@
                 <a:ea typeface="Calibri" pitchFamily="34" charset="-122"/>
                 <a:cs typeface="Calibri" pitchFamily="34" charset="-120"/>
               </a:rPr>
-              <a:t>Magnitude regression — early warning</a:t>
-            </a:r>
-            <a:endParaRPr lang="en-US" sz="1400" dirty="0"/>
-          </a:p>
-        </p:txBody>
-      </p:sp>
-      <p:sp>
-        <p:nvSpPr>
-          <p:cNvPr id="38" name="Text 36"/>
+              <a:t>Magnitude Regression</a:t>
+            </a:r>
+            <a:endParaRPr lang="en-US" sz="1200" dirty="0"/>
+          </a:p>
+          <a:p>
+            <a:pPr algn="ctr" indent="0" marL="0">
+              <a:buNone/>
+            </a:pPr>
+            <a:r>
+              <a:rPr lang="en-US" sz="1200" dirty="0">
+                <a:solidFill>
+                  <a:srgbClr val="1A1A2A"/>
+                </a:solidFill>
+                <a:latin typeface="Calibri" pitchFamily="34" charset="0"/>
+                <a:ea typeface="Calibri" pitchFamily="34" charset="-122"/>
+                <a:cs typeface="Calibri" pitchFamily="34" charset="-120"/>
+              </a:rPr>
+              <a:t>early warning potential</a:t>
+            </a:r>
+            <a:endParaRPr lang="en-US" sz="1200" dirty="0"/>
+          </a:p>
+        </p:txBody>
+      </p:sp>
+      <p:sp>
+        <p:nvSpPr>
+          <p:cNvPr id="41" name="Text 39"/>
           <p:cNvSpPr/>
           <p:nvPr/>
         </p:nvSpPr>

--- a/presentation/EarthSafe_Final_Presentation.pptx
+++ b/presentation/EarthSafe_Final_Presentation.pptx
@@ -1,23 +1,23 @@
 
 <file path=ppt/presentation.xml><?xml version="1.0" encoding="utf-8"?>
-<p:presentation xmlns:a="http://schemas.openxmlformats.org/drawingml/2006/main" xmlns:r="http://schemas.openxmlformats.org/officeDocument/2006/relationships" xmlns:p="http://schemas.openxmlformats.org/presentationml/2006/main" saveSubsetFonts="1" autoCompressPictures="0">
+<p:presentation xmlns:a="http://schemas.openxmlformats.org/drawingml/2006/main" xmlns:r="http://schemas.openxmlformats.org/officeDocument/2006/relationships" xmlns:p="http://schemas.openxmlformats.org/presentationml/2006/main" autoCompressPictures="0">
   <p:sldMasterIdLst>
     <p:sldMasterId id="2147483648" r:id="rId1"/>
   </p:sldMasterIdLst>
+  <p:notesMasterIdLst>
+    <p:notesMasterId r:id="rId4"/>
+  </p:notesMasterIdLst>
   <p:sldIdLst>
-    <p:sldId id="256" r:id="rId2"/>
-    <p:sldId id="257" r:id="rId3"/>
-    <p:sldId id="258" r:id="rId4"/>
-    <p:sldId id="259" r:id="rId5"/>
-    <p:sldId id="260" r:id="rId6"/>
-    <p:sldId id="261" r:id="rId7"/>
-    <p:sldId id="262" r:id="rId8"/>
+    <p:sldId id="256" r:id="rId3"/>
+    <p:sldId id="257" r:id="rId5"/>
+    <p:sldId id="258" r:id="rId6"/>
+    <p:sldId id="259" r:id="rId7"/>
+    <p:sldId id="260" r:id="rId8"/>
+    <p:sldId id="261" r:id="rId9"/>
+    <p:sldId id="262" r:id="rId10"/>
   </p:sldIdLst>
-  <p:notesMasterIdLst>
-    <p:notesMasterId r:id="rId9"/>
-  </p:notesMasterIdLst>
   <p:sldSz cx="9144000" cy="5143500"/>
-  <p:notesSz cx="5143500" cy="9144000"/>
+  <p:notesSz cx="9144000" cy="5143500"/>
   <p:defaultTextStyle>
     <a:lvl1pPr marL="0" algn="l" defTabSz="914400" rtl="0" eaLnBrk="1" latinLnBrk="0" hangingPunct="1">
       <a:defRPr sz="1800" kern="1200">
@@ -116,7 +116,16 @@
 <file path=ppt/charts/chart1.xml><?xml version="1.0" encoding="utf-8"?>
 <c:chartSpace xmlns:c="http://schemas.openxmlformats.org/drawingml/2006/chart" xmlns:a="http://schemas.openxmlformats.org/drawingml/2006/main" xmlns:r="http://schemas.openxmlformats.org/officeDocument/2006/relationships">
   <c:date1904 val="0"/>
+  <c:lang val="zh-CN"/>
   <c:roundedCorners val="1"/>
+  <mc:AlternateContent xmlns:mc="http://schemas.openxmlformats.org/markup-compatibility/2006">
+    <mc:Choice xmlns:c14="http://schemas.microsoft.com/office/drawing/2007/8/2/chart" Requires="c14">
+      <c14:style val="102"/>
+    </mc:Choice>
+    <mc:Fallback>
+      <c:style val="2"/>
+    </mc:Fallback>
+  </mc:AlternateContent>
   <c:chart>
     <c:autoTitleDeleted val="1"/>
     <c:plotArea>
@@ -150,6 +159,7 @@
             </a:ln>
             <a:effectLst/>
           </c:spPr>
+          <c:explosion val="0"/>
           <c:dPt>
             <c:idx val="0"/>
             <c:bubble3D val="0"/>
@@ -183,90 +193,216 @@
           <c:dLbls>
             <c:dLbl>
               <c:idx val="0"/>
+              <c:layout/>
+              <c:tx>
+                <c:rich>
+                  <a:bodyPr rot="0" spcFirstLastPara="0" vertOverflow="ellipsis" vert="horz" wrap="square" lIns="38100" tIns="19050" rIns="38100" bIns="19050" anchor="ctr" anchorCtr="1"/>
+                  <a:lstStyle/>
+                  <a:p>
+                    <a:pPr defTabSz="914400">
+                      <a:defRPr lang="zh-CN" sz="1400" b="1" i="0" u="none" strike="noStrike" kern="1200" baseline="0">
+                        <a:solidFill>
+                          <a:srgbClr val="000000"/>
+                        </a:solidFill>
+                        <a:latin typeface="Arial" panose="020B0604020202090204"/>
+                        <a:ea typeface="+mn-ea"/>
+                        <a:cs typeface="+mn-cs"/>
+                      </a:defRPr>
+                    </a:pPr>
+                    <a:r>
+                      <a:t>51.6</a:t>
+                    </a:r>
+                    <a:r>
+                      <a:rPr lang="en-US" altLang="zh-CN"/>
+                      <a:t>%</a:t>
+                    </a:r>
+                    <a:endParaRPr lang="en-US" altLang="zh-CN"/>
+                  </a:p>
+                </c:rich>
+              </c:tx>
               <c:numFmt formatCode="General" sourceLinked="0"/>
-              <c:spPr/>
+              <c:spPr>
+                <a:noFill/>
+                <a:ln>
+                  <a:noFill/>
+                </a:ln>
+                <a:effectLst/>
+              </c:spPr>
               <c:txPr>
-                <a:bodyPr/>
+                <a:bodyPr rot="0" spcFirstLastPara="0" vertOverflow="ellipsis" vert="horz" wrap="square" lIns="38100" tIns="19050" rIns="38100" bIns="19050" anchor="ctr" anchorCtr="1"/>
                 <a:lstStyle/>
                 <a:p>
                   <a:pPr>
-                    <a:defRPr sz="1400" b="1" i="0" u="none" strike="noStrike">
+                    <a:defRPr lang="zh-CN" sz="1400" b="1" i="0" u="none" strike="noStrike" kern="1200" baseline="0">
                       <a:solidFill>
                         <a:srgbClr val="000000"/>
                       </a:solidFill>
-                      <a:latin typeface="Arial"/>
+                      <a:latin typeface="Arial" panose="020B0604020202090204"/>
+                      <a:ea typeface="+mn-ea"/>
+                      <a:cs typeface="+mn-cs"/>
                     </a:defRPr>
                   </a:pPr>
                 </a:p>
               </c:txPr>
+              <c:dLblPos val="bestFit"/>
               <c:showLegendKey val="0"/>
               <c:showVal val="1"/>
               <c:showCatName val="0"/>
               <c:showSerName val="0"/>
               <c:showPercent val="0"/>
               <c:showBubbleSize val="0"/>
+              <c:extLst>
+                <c:ext xmlns:c15="http://schemas.microsoft.com/office/drawing/2012/chart" uri="{CE6537A1-D6FC-4f65-9D91-7224C49458BB}"/>
+              </c:extLst>
             </c:dLbl>
             <c:dLbl>
               <c:idx val="1"/>
+              <c:layout/>
+              <c:tx>
+                <c:rich>
+                  <a:bodyPr rot="0" spcFirstLastPara="0" vertOverflow="ellipsis" vert="horz" wrap="square" lIns="38100" tIns="19050" rIns="38100" bIns="19050" anchor="ctr" anchorCtr="1"/>
+                  <a:lstStyle/>
+                  <a:p>
+                    <a:pPr defTabSz="914400">
+                      <a:defRPr lang="zh-CN" sz="1400" b="1" i="0" u="none" strike="noStrike" kern="1200" baseline="0">
+                        <a:solidFill>
+                          <a:srgbClr val="000000"/>
+                        </a:solidFill>
+                        <a:latin typeface="Arial" panose="020B0604020202090204"/>
+                        <a:ea typeface="+mn-ea"/>
+                        <a:cs typeface="+mn-cs"/>
+                      </a:defRPr>
+                    </a:pPr>
+                    <a:r>
+                      <a:t>48</a:t>
+                    </a:r>
+                    <a:r>
+                      <a:rPr lang="en-US" altLang="zh-CN"/>
+                      <a:t>%</a:t>
+                    </a:r>
+                    <a:endParaRPr lang="en-US" altLang="zh-CN"/>
+                  </a:p>
+                </c:rich>
+              </c:tx>
               <c:numFmt formatCode="General" sourceLinked="0"/>
-              <c:spPr/>
+              <c:spPr>
+                <a:noFill/>
+                <a:ln>
+                  <a:noFill/>
+                </a:ln>
+                <a:effectLst/>
+              </c:spPr>
               <c:txPr>
-                <a:bodyPr/>
+                <a:bodyPr rot="0" spcFirstLastPara="0" vertOverflow="ellipsis" vert="horz" wrap="square" lIns="38100" tIns="19050" rIns="38100" bIns="19050" anchor="ctr" anchorCtr="1"/>
                 <a:lstStyle/>
                 <a:p>
                   <a:pPr>
-                    <a:defRPr sz="1400" b="1" i="0" u="none" strike="noStrike">
+                    <a:defRPr lang="zh-CN" sz="1400" b="1" i="0" u="none" strike="noStrike" kern="1200" baseline="0">
                       <a:solidFill>
                         <a:srgbClr val="000000"/>
                       </a:solidFill>
-                      <a:latin typeface="Arial"/>
+                      <a:latin typeface="Arial" panose="020B0604020202090204"/>
+                      <a:ea typeface="+mn-ea"/>
+                      <a:cs typeface="+mn-cs"/>
                     </a:defRPr>
                   </a:pPr>
                 </a:p>
               </c:txPr>
+              <c:dLblPos val="bestFit"/>
               <c:showLegendKey val="0"/>
               <c:showVal val="1"/>
               <c:showCatName val="0"/>
               <c:showSerName val="0"/>
               <c:showPercent val="0"/>
               <c:showBubbleSize val="0"/>
+              <c:extLst>
+                <c:ext xmlns:c15="http://schemas.microsoft.com/office/drawing/2012/chart" uri="{CE6537A1-D6FC-4f65-9D91-7224C49458BB}"/>
+              </c:extLst>
             </c:dLbl>
             <c:dLbl>
               <c:idx val="2"/>
+              <c:layout/>
+              <c:tx>
+                <c:rich>
+                  <a:bodyPr rot="0" spcFirstLastPara="0" vertOverflow="ellipsis" vert="horz" wrap="square" lIns="38100" tIns="19050" rIns="38100" bIns="19050" anchor="ctr" anchorCtr="1"/>
+                  <a:lstStyle/>
+                  <a:p>
+                    <a:pPr defTabSz="914400">
+                      <a:defRPr lang="zh-CN" sz="1400" b="1" i="0" u="none" strike="noStrike" kern="1200" baseline="0">
+                        <a:solidFill>
+                          <a:srgbClr val="000000"/>
+                        </a:solidFill>
+                        <a:latin typeface="Arial" panose="020B0604020202090204"/>
+                        <a:ea typeface="+mn-ea"/>
+                        <a:cs typeface="+mn-cs"/>
+                      </a:defRPr>
+                    </a:pPr>
+                    <a:r>
+                      <a:t>0.4</a:t>
+                    </a:r>
+                    <a:r>
+                      <a:rPr lang="en-US" altLang="zh-CN"/>
+                      <a:t>%</a:t>
+                    </a:r>
+                    <a:endParaRPr lang="en-US" altLang="zh-CN"/>
+                  </a:p>
+                </c:rich>
+              </c:tx>
               <c:numFmt formatCode="General" sourceLinked="0"/>
-              <c:spPr/>
+              <c:spPr>
+                <a:noFill/>
+                <a:ln>
+                  <a:noFill/>
+                </a:ln>
+                <a:effectLst/>
+              </c:spPr>
               <c:txPr>
-                <a:bodyPr/>
+                <a:bodyPr rot="0" spcFirstLastPara="0" vertOverflow="ellipsis" vert="horz" wrap="square" lIns="38100" tIns="19050" rIns="38100" bIns="19050" anchor="ctr" anchorCtr="1"/>
                 <a:lstStyle/>
                 <a:p>
                   <a:pPr>
-                    <a:defRPr sz="1400" b="1" i="0" u="none" strike="noStrike">
+                    <a:defRPr lang="zh-CN" sz="1400" b="1" i="0" u="none" strike="noStrike" kern="1200" baseline="0">
                       <a:solidFill>
                         <a:srgbClr val="000000"/>
                       </a:solidFill>
-                      <a:latin typeface="Arial"/>
+                      <a:latin typeface="Arial" panose="020B0604020202090204"/>
+                      <a:ea typeface="+mn-ea"/>
+                      <a:cs typeface="+mn-cs"/>
                     </a:defRPr>
                   </a:pPr>
                 </a:p>
               </c:txPr>
+              <c:dLblPos val="bestFit"/>
               <c:showLegendKey val="0"/>
               <c:showVal val="1"/>
               <c:showCatName val="0"/>
               <c:showSerName val="0"/>
               <c:showPercent val="0"/>
               <c:showBubbleSize val="0"/>
+              <c:extLst>
+                <c:ext xmlns:c15="http://schemas.microsoft.com/office/drawing/2012/chart" uri="{CE6537A1-D6FC-4f65-9D91-7224C49458BB}"/>
+              </c:extLst>
             </c:dLbl>
             <c:numFmt formatCode="General" sourceLinked="0"/>
+            <c:spPr>
+              <a:noFill/>
+              <a:ln>
+                <a:noFill/>
+              </a:ln>
+              <a:effectLst/>
+            </c:spPr>
             <c:txPr>
-              <a:bodyPr/>
+              <a:bodyPr rot="0" spcFirstLastPara="0" vertOverflow="ellipsis" vert="horz" wrap="square" lIns="38100" tIns="19050" rIns="38100" bIns="19050" anchor="ctr" anchorCtr="1"/>
               <a:lstStyle/>
               <a:p>
                 <a:pPr>
-                  <a:defRPr sz="1800" b="1" i="0" u="none" strike="noStrike">
+                  <a:defRPr lang="zh-CN" sz="1800" b="1" i="0" u="none" strike="noStrike" kern="1200" baseline="0">
                     <a:solidFill>
                       <a:srgbClr val="000000"/>
                     </a:solidFill>
-                    <a:latin typeface="Arial"/>
+                    <a:latin typeface="Arial" panose="020B0604020202090204"/>
+                    <a:ea typeface="+mn-ea"/>
+                    <a:cs typeface="+mn-cs"/>
                   </a:defRPr>
                 </a:pPr>
               </a:p>
@@ -279,6 +415,13 @@
             <c:showPercent val="1"/>
             <c:showBubbleSize val="0"/>
             <c:showLeaderLines val="0"/>
+            <c:extLst>
+              <c:ext xmlns:c15="http://schemas.microsoft.com/office/drawing/2012/chart" uri="{CE6537A1-D6FC-4f65-9D91-7224C49458BB}">
+                <c15:layout/>
+                <c15:showLeaderLines val="0"/>
+                <c15:leaderLines/>
+              </c:ext>
+            </c:extLst>
           </c:dLbls>
           <c:cat>
             <c:strRef>
@@ -301,6 +444,7 @@
             <c:numRef>
               <c:f>Sheet1!$B$2:$B$4</c:f>
               <c:numCache>
+                <c:formatCode>General</c:formatCode>
                 <c:ptCount val="3"/>
                 <c:pt idx="0">
                   <c:v>51.6</c:v>
@@ -315,6 +459,15 @@
             </c:numRef>
           </c:val>
         </c:ser>
+        <c:dLbls>
+          <c:showLegendKey val="0"/>
+          <c:showVal val="0"/>
+          <c:showCatName val="1"/>
+          <c:showSerName val="0"/>
+          <c:showPercent val="1"/>
+          <c:showBubbleSize val="0"/>
+          <c:showLeaderLines val="1"/>
+        </c:dLbls>
         <c:firstSliceAng val="0"/>
       </c:pieChart>
       <c:spPr>
@@ -327,20 +480,33 @@
     </c:plotArea>
     <c:legend>
       <c:legendPos val="b"/>
+      <c:layout/>
       <c:overlay val="0"/>
       <c:txPr>
-        <a:bodyPr/>
+        <a:bodyPr rot="0" spcFirstLastPara="0" vertOverflow="ellipsis" vert="horz" wrap="square" anchor="ctr" anchorCtr="1"/>
         <a:lstStyle/>
         <a:p>
           <a:pPr>
-            <a:defRPr sz="1300">      </a:defRPr>
+            <a:defRPr lang="zh-CN" sz="1300" b="0" i="0" u="none" strike="noStrike" kern="1200" baseline="0">
+              <a:solidFill>
+                <a:schemeClr val="tx1"/>
+              </a:solidFill>
+              <a:latin typeface="+mn-lt"/>
+              <a:ea typeface="+mn-ea"/>
+              <a:cs typeface="+mn-cs"/>
+            </a:defRPr>
           </a:pPr>
-          <a:endParaRPr lang="en-US"/>
         </a:p>
       </c:txPr>
     </c:legend>
     <c:plotVisOnly val="1"/>
     <c:dispBlanksAs val="span"/>
+    <c:showDLblsOverMax val="0"/>
+    <c:extLst>
+      <c:ext uri="{0b15fc19-7d7d-44ad-8c2d-2c3a37ce22c3}">
+        <chartProps xmlns="https://web.wps.cn/et/2018/main" chartId="{54bfcc5a-c2e2-4208-b92b-0cc34ced85fa}"/>
+      </c:ext>
+    </c:extLst>
   </c:chart>
   <c:spPr>
     <a:noFill/>
@@ -349,6 +515,15 @@
     </a:ln>
     <a:effectLst/>
   </c:spPr>
+  <c:txPr>
+    <a:bodyPr/>
+    <a:lstStyle/>
+    <a:p>
+      <a:pPr>
+        <a:defRPr lang="zh-CN"/>
+      </a:pPr>
+    </a:p>
+  </c:txPr>
   <c:externalData r:id="rId1">
     <c:autoUpdate val="0"/>
   </c:externalData>
@@ -358,7 +533,16 @@
 <file path=ppt/charts/chart2.xml><?xml version="1.0" encoding="utf-8"?>
 <c:chartSpace xmlns:c="http://schemas.openxmlformats.org/drawingml/2006/chart" xmlns:a="http://schemas.openxmlformats.org/drawingml/2006/main" xmlns:r="http://schemas.openxmlformats.org/officeDocument/2006/relationships">
   <c:date1904 val="0"/>
+  <c:lang val="zh-CN"/>
   <c:roundedCorners val="1"/>
+  <mc:AlternateContent xmlns:mc="http://schemas.openxmlformats.org/markup-compatibility/2006">
+    <mc:Choice xmlns:c14="http://schemas.microsoft.com/office/drawing/2007/8/2/chart" Requires="c14">
+      <c14:style val="102"/>
+    </mc:Choice>
+    <mc:Fallback>
+      <c:style val="2"/>
+    </mc:Fallback>
+  </mc:AlternateContent>
   <c:chart>
     <c:autoTitleDeleted val="1"/>
     <c:plotArea>
@@ -389,21 +573,43 @@
           </c:spPr>
           <c:invertIfNegative val="0"/>
           <c:dLbls>
+            <c:dLbl>
+              <c:idx val="0"/>
+              <c:delete val="1"/>
+            </c:dLbl>
+            <c:dLbl>
+              <c:idx val="1"/>
+              <c:delete val="1"/>
+            </c:dLbl>
+            <c:dLbl>
+              <c:idx val="2"/>
+              <c:delete val="1"/>
+            </c:dLbl>
             <c:numFmt formatCode="#,##0" sourceLinked="0"/>
+            <c:spPr>
+              <a:noFill/>
+              <a:ln>
+                <a:noFill/>
+              </a:ln>
+              <a:effectLst/>
+            </c:spPr>
             <c:txPr>
-              <a:bodyPr/>
+              <a:bodyPr rot="0" spcFirstLastPara="0" vertOverflow="ellipsis" vert="horz" wrap="square" lIns="38100" tIns="19050" rIns="38100" bIns="19050" anchor="ctr" anchorCtr="1"/>
               <a:lstStyle/>
               <a:p>
                 <a:pPr>
-                  <a:defRPr b="0" i="0" strike="noStrike" sz="1200" u="none">
+                  <a:defRPr lang="zh-CN" sz="1200" b="0" i="0" u="none" strike="noStrike" kern="1200" baseline="0">
                     <a:solidFill>
                       <a:srgbClr val="000000"/>
                     </a:solidFill>
-                    <a:latin typeface="Arial"/>
+                    <a:latin typeface="Arial" panose="020B0604020202090204"/>
+                    <a:ea typeface="+mn-ea"/>
+                    <a:cs typeface="+mn-cs"/>
                   </a:defRPr>
                 </a:pPr>
               </a:p>
             </c:txPr>
+            <c:dLblPos val="outEnd"/>
             <c:showLegendKey val="0"/>
             <c:showVal val="0"/>
             <c:showCatName val="0"/>
@@ -411,25 +617,30 @@
             <c:showPercent val="0"/>
             <c:showBubbleSize val="0"/>
             <c:showLeaderLines val="0"/>
+            <c:extLst>
+              <c:ext xmlns:c15="http://schemas.microsoft.com/office/drawing/2012/chart" uri="{CE6537A1-D6FC-4f65-9D91-7224C49458BB}">
+                <c15:layout/>
+                <c15:showLeaderLines val="0"/>
+                <c15:leaderLines/>
+              </c:ext>
+            </c:extLst>
           </c:dLbls>
           <c:cat>
-            <c:multiLvlStrRef>
+            <c:strRef>
               <c:f>Sheet1!$A$2:$A$4</c:f>
-              <c:multiLvlStrCache>
+              <c:strCache>
                 <c:ptCount val="3"/>
-                <c:lvl>
-                  <c:pt idx="0">
-                    <c:v>Logistic Regression</c:v>
-                  </c:pt>
-                  <c:pt idx="1">
-                    <c:v>Random Forest</c:v>
-                  </c:pt>
-                  <c:pt idx="2">
-                    <c:v>XGBoost</c:v>
-                  </c:pt>
-                </c:lvl>
-              </c:multiLvlStrCache>
-            </c:multiLvlStrRef>
+                <c:pt idx="0">
+                  <c:v>Logistic Regression</c:v>
+                </c:pt>
+                <c:pt idx="1">
+                  <c:v>Random Forest</c:v>
+                </c:pt>
+                <c:pt idx="2">
+                  <c:v>XGBoost</c:v>
+                </c:pt>
+              </c:strCache>
+            </c:strRef>
           </c:cat>
           <c:val>
             <c:numRef>
@@ -472,21 +683,43 @@
           </c:spPr>
           <c:invertIfNegative val="0"/>
           <c:dLbls>
+            <c:dLbl>
+              <c:idx val="0"/>
+              <c:delete val="1"/>
+            </c:dLbl>
+            <c:dLbl>
+              <c:idx val="1"/>
+              <c:delete val="1"/>
+            </c:dLbl>
+            <c:dLbl>
+              <c:idx val="2"/>
+              <c:delete val="1"/>
+            </c:dLbl>
             <c:numFmt formatCode="#,##0" sourceLinked="0"/>
+            <c:spPr>
+              <a:noFill/>
+              <a:ln>
+                <a:noFill/>
+              </a:ln>
+              <a:effectLst/>
+            </c:spPr>
             <c:txPr>
-              <a:bodyPr/>
+              <a:bodyPr rot="0" spcFirstLastPara="0" vertOverflow="ellipsis" vert="horz" wrap="square" lIns="38100" tIns="19050" rIns="38100" bIns="19050" anchor="ctr" anchorCtr="1"/>
               <a:lstStyle/>
               <a:p>
                 <a:pPr>
-                  <a:defRPr b="0" i="0" strike="noStrike" sz="1200" u="none">
+                  <a:defRPr lang="zh-CN" sz="1200" b="0" i="0" u="none" strike="noStrike" kern="1200" baseline="0">
                     <a:solidFill>
                       <a:srgbClr val="000000"/>
                     </a:solidFill>
-                    <a:latin typeface="Arial"/>
+                    <a:latin typeface="Arial" panose="020B0604020202090204"/>
+                    <a:ea typeface="+mn-ea"/>
+                    <a:cs typeface="+mn-cs"/>
                   </a:defRPr>
                 </a:pPr>
               </a:p>
             </c:txPr>
+            <c:dLblPos val="outEnd"/>
             <c:showLegendKey val="0"/>
             <c:showVal val="0"/>
             <c:showCatName val="0"/>
@@ -494,25 +727,30 @@
             <c:showPercent val="0"/>
             <c:showBubbleSize val="0"/>
             <c:showLeaderLines val="0"/>
+            <c:extLst>
+              <c:ext xmlns:c15="http://schemas.microsoft.com/office/drawing/2012/chart" uri="{CE6537A1-D6FC-4f65-9D91-7224C49458BB}">
+                <c15:layout/>
+                <c15:showLeaderLines val="0"/>
+                <c15:leaderLines/>
+              </c:ext>
+            </c:extLst>
           </c:dLbls>
           <c:cat>
-            <c:multiLvlStrRef>
+            <c:strRef>
               <c:f>Sheet1!$A$2:$A$4</c:f>
-              <c:multiLvlStrCache>
+              <c:strCache>
                 <c:ptCount val="3"/>
-                <c:lvl>
-                  <c:pt idx="0">
-                    <c:v>Logistic Regression</c:v>
-                  </c:pt>
-                  <c:pt idx="1">
-                    <c:v>Random Forest</c:v>
-                  </c:pt>
-                  <c:pt idx="2">
-                    <c:v>XGBoost</c:v>
-                  </c:pt>
-                </c:lvl>
-              </c:multiLvlStrCache>
-            </c:multiLvlStrRef>
+                <c:pt idx="0">
+                  <c:v>Logistic Regression</c:v>
+                </c:pt>
+                <c:pt idx="1">
+                  <c:v>Random Forest</c:v>
+                </c:pt>
+                <c:pt idx="2">
+                  <c:v>XGBoost</c:v>
+                </c:pt>
+              </c:strCache>
+            </c:strRef>
           </c:cat>
           <c:val>
             <c:numRef>
@@ -534,34 +772,17 @@
           </c:val>
         </c:ser>
         <c:dLbls>
-          <c:numFmt formatCode="#,##0" sourceLinked="0"/>
-          <c:txPr>
-            <a:bodyPr/>
-            <a:lstStyle/>
-            <a:p>
-              <a:pPr>
-                <a:defRPr b="0" i="0" strike="noStrike" sz="1200" u="none">
-                  <a:solidFill>
-                    <a:srgbClr val="000000"/>
-                  </a:solidFill>
-                  <a:latin typeface="Arial"/>
-                </a:defRPr>
-              </a:pPr>
-            </a:p>
-          </c:txPr>
           <c:showLegendKey val="0"/>
           <c:showVal val="0"/>
           <c:showCatName val="0"/>
           <c:showSerName val="0"/>
           <c:showPercent val="0"/>
           <c:showBubbleSize val="0"/>
-          <c:showLeaderLines val="0"/>
         </c:dLbls>
         <c:gapWidth val="150"/>
         <c:overlap val="0"/>
         <c:axId val="2094734554"/>
         <c:axId val="2094734552"/>
-        <c:axId val="2094734556"/>
       </c:barChart>
       <c:catAx>
         <c:axId val="2094734554"/>
@@ -575,7 +796,7 @@
         <c:minorTickMark val="none"/>
         <c:tickLblPos val="low"/>
         <c:spPr>
-          <a:ln w="12700" cap="flat">
+          <a:ln w="12700" cap="flat" cmpd="sng" algn="ctr">
             <a:solidFill>
               <a:srgbClr val="888888"/>
             </a:solidFill>
@@ -584,24 +805,26 @@
           </a:ln>
         </c:spPr>
         <c:txPr>
-          <a:bodyPr/>
+          <a:bodyPr rot="-60000000" spcFirstLastPara="0" vertOverflow="ellipsis" vert="horz" wrap="square" anchor="ctr" anchorCtr="1"/>
           <a:lstStyle/>
           <a:p>
             <a:pPr>
-              <a:defRPr sz="1300" b="0" i="0" u="none" strike="noStrike">
+              <a:defRPr lang="zh-CN" sz="1300" b="0" i="0" u="none" strike="noStrike" kern="1200" baseline="0">
                 <a:solidFill>
                   <a:srgbClr val="000000"/>
                 </a:solidFill>
-                <a:latin typeface="Arial"/>
+                <a:latin typeface="Arial" panose="020B0604020202090204"/>
+                <a:ea typeface="+mn-ea"/>
+                <a:cs typeface="+mn-cs"/>
               </a:defRPr>
             </a:pPr>
-            <a:endParaRPr lang="en-US"/>
           </a:p>
         </c:txPr>
         <c:crossAx val="2094734552"/>
         <c:crosses val="autoZero"/>
         <c:auto val="1"/>
         <c:lblAlgn val="ctr"/>
+        <c:lblOffset val="100"/>
         <c:noMultiLvlLbl val="1"/>
       </c:catAx>
       <c:valAx>
@@ -615,7 +838,7 @@
         <c:axPos val="l"/>
         <c:majorGridlines>
           <c:spPr>
-            <a:ln w="12700" cap="flat">
+            <a:ln w="12700" cap="flat" cmpd="sng" algn="ctr">
               <a:solidFill>
                 <a:srgbClr val="888888"/>
               </a:solidFill>
@@ -629,7 +852,7 @@
         <c:minorTickMark val="none"/>
         <c:tickLblPos val="nextTo"/>
         <c:spPr>
-          <a:ln w="12700" cap="flat">
+          <a:ln w="12700" cap="flat" cmpd="sng" algn="ctr">
             <a:solidFill>
               <a:srgbClr val="888888"/>
             </a:solidFill>
@@ -638,18 +861,19 @@
           </a:ln>
         </c:spPr>
         <c:txPr>
-          <a:bodyPr/>
+          <a:bodyPr rot="-60000000" spcFirstLastPara="0" vertOverflow="ellipsis" vert="horz" wrap="square" anchor="ctr" anchorCtr="1"/>
           <a:lstStyle/>
           <a:p>
             <a:pPr>
-              <a:defRPr sz="1100" b="0" i="0" u="none" strike="noStrike">
+              <a:defRPr lang="zh-CN" sz="1100" b="0" i="0" u="none" strike="noStrike" kern="1200" baseline="0">
                 <a:solidFill>
                   <a:srgbClr val="000000"/>
                 </a:solidFill>
-                <a:latin typeface="Arial"/>
+                <a:latin typeface="Arial" panose="020B0604020202090204"/>
+                <a:ea typeface="+mn-ea"/>
+                <a:cs typeface="+mn-cs"/>
               </a:defRPr>
             </a:pPr>
-            <a:endParaRPr lang="en-US"/>
           </a:p>
         </c:txPr>
         <c:crossAx val="2094734554"/>
@@ -666,20 +890,33 @@
     </c:plotArea>
     <c:legend>
       <c:legendPos val="t"/>
+      <c:layout/>
       <c:overlay val="0"/>
       <c:txPr>
-        <a:bodyPr/>
+        <a:bodyPr rot="0" spcFirstLastPara="0" vertOverflow="ellipsis" vert="horz" wrap="square" anchor="ctr" anchorCtr="1"/>
         <a:lstStyle/>
         <a:p>
           <a:pPr>
-            <a:defRPr sz="1300">      </a:defRPr>
+            <a:defRPr lang="zh-CN" sz="1300" b="0" i="0" u="none" strike="noStrike" kern="1200" baseline="0">
+              <a:solidFill>
+                <a:schemeClr val="tx1"/>
+              </a:solidFill>
+              <a:latin typeface="+mn-lt"/>
+              <a:ea typeface="+mn-ea"/>
+              <a:cs typeface="+mn-cs"/>
+            </a:defRPr>
           </a:pPr>
-          <a:endParaRPr lang="en-US"/>
         </a:p>
       </c:txPr>
     </c:legend>
     <c:plotVisOnly val="1"/>
     <c:dispBlanksAs val="span"/>
+    <c:showDLblsOverMax val="0"/>
+    <c:extLst>
+      <c:ext uri="{0b15fc19-7d7d-44ad-8c2d-2c3a37ce22c3}">
+        <chartProps xmlns="https://web.wps.cn/et/2018/main" chartId="{f220be77-f3ab-409a-8db2-11791656a016}"/>
+      </c:ext>
+    </c:extLst>
   </c:chart>
   <c:spPr>
     <a:noFill/>
@@ -688,6 +925,15 @@
     </a:ln>
     <a:effectLst/>
   </c:spPr>
+  <c:txPr>
+    <a:bodyPr/>
+    <a:lstStyle/>
+    <a:p>
+      <a:pPr>
+        <a:defRPr lang="zh-CN"/>
+      </a:pPr>
+    </a:p>
+  </c:txPr>
   <c:externalData r:id="rId1">
     <c:autoUpdate val="0"/>
   </c:externalData>
@@ -729,7 +975,7 @@
         <p:spPr>
           <a:xfrm>
             <a:off x="0" y="0"/>
-            <a:ext cx="2971800" cy="458788"/>
+            <a:ext cx="5283200" cy="258068"/>
           </a:xfrm>
           <a:prstGeom prst="rect">
             <a:avLst/>
@@ -759,8 +1005,8 @@
         </p:nvSpPr>
         <p:spPr>
           <a:xfrm>
-            <a:off x="3884613" y="0"/>
-            <a:ext cx="2971800" cy="458788"/>
+            <a:off x="6905979" y="0"/>
+            <a:ext cx="5283200" cy="258068"/>
           </a:xfrm>
           <a:prstGeom prst="rect">
             <a:avLst/>
@@ -776,7 +1022,6 @@
           <a:p>
             <a:fld id="{5282F153-3F37-0F45-9E97-73ACFA13230C}" type="datetimeFigureOut">
               <a:rPr lang="en-US"/>
-              <a:t>7/23/19</a:t>
             </a:fld>
             <a:endParaRPr lang="en-US"/>
           </a:p>
@@ -794,8 +1039,8 @@
         </p:nvSpPr>
         <p:spPr>
           <a:xfrm>
-            <a:off x="685800" y="1143000"/>
-            <a:ext cx="5486400" cy="3086100"/>
+            <a:off x="4552950" y="642938"/>
+            <a:ext cx="3086100" cy="1735931"/>
           </a:xfrm>
           <a:prstGeom prst="rect">
             <a:avLst/>
@@ -827,8 +1072,8 @@
         </p:nvSpPr>
         <p:spPr>
           <a:xfrm>
-            <a:off x="685800" y="4400550"/>
-            <a:ext cx="5486400" cy="3600450"/>
+            <a:off x="1219200" y="2475309"/>
+            <a:ext cx="9753600" cy="2025253"/>
           </a:xfrm>
           <a:prstGeom prst="rect">
             <a:avLst/>
@@ -843,6 +1088,7 @@
               <a:rPr lang="en-US"/>
               <a:t>Click to edit Master text styles</a:t>
             </a:r>
+            <a:endParaRPr lang="en-US"/>
           </a:p>
           <a:p>
             <a:pPr lvl="1"/>
@@ -850,6 +1096,7 @@
               <a:rPr lang="en-US"/>
               <a:t>Second level</a:t>
             </a:r>
+            <a:endParaRPr lang="en-US"/>
           </a:p>
           <a:p>
             <a:pPr lvl="2"/>
@@ -857,6 +1104,7 @@
               <a:rPr lang="en-US"/>
               <a:t>Third level</a:t>
             </a:r>
+            <a:endParaRPr lang="en-US"/>
           </a:p>
           <a:p>
             <a:pPr lvl="3"/>
@@ -864,6 +1112,7 @@
               <a:rPr lang="en-US"/>
               <a:t>Fourth level</a:t>
             </a:r>
+            <a:endParaRPr lang="en-US"/>
           </a:p>
           <a:p>
             <a:pPr lvl="4"/>
@@ -871,6 +1120,7 @@
               <a:rPr lang="en-US"/>
               <a:t>Fifth level</a:t>
             </a:r>
+            <a:endParaRPr lang="en-US"/>
           </a:p>
         </p:txBody>
       </p:sp>
@@ -886,8 +1136,8 @@
         </p:nvSpPr>
         <p:spPr>
           <a:xfrm>
-            <a:off x="0" y="8685213"/>
-            <a:ext cx="2971800" cy="458787"/>
+            <a:off x="0" y="4885432"/>
+            <a:ext cx="5283200" cy="258068"/>
           </a:xfrm>
           <a:prstGeom prst="rect">
             <a:avLst/>
@@ -917,8 +1167,8 @@
         </p:nvSpPr>
         <p:spPr>
           <a:xfrm>
-            <a:off x="3884613" y="8685213"/>
-            <a:ext cx="2971800" cy="458787"/>
+            <a:off x="6905979" y="4885432"/>
+            <a:ext cx="5283200" cy="258068"/>
           </a:xfrm>
           <a:prstGeom prst="rect">
             <a:avLst/>
@@ -934,18 +1184,12 @@
           <a:p>
             <a:fld id="{CE5E9CC1-C706-0F49-92D6-E571CC5EEA8F}" type="slidenum">
               <a:rPr lang="en-US"/>
-              <a:t>‹#›</a:t>
             </a:fld>
             <a:endParaRPr lang="en-US"/>
           </a:p>
         </p:txBody>
       </p:sp>
     </p:spTree>
-    <p:extLst>
-      <p:ext uri="{BB962C8B-B14F-4D97-AF65-F5344CB8AC3E}">
-        <p14:creationId xmlns:p14="http://schemas.microsoft.com/office/powerpoint/2010/main" val="1024086991"/>
-      </p:ext>
-    </p:extLst>
   </p:cSld>
   <p:clrMap bg1="lt1" tx1="dk1" bg2="lt2" tx2="dk2" accent1="accent1" accent2="accent2" accent3="accent3" accent4="accent4" accent5="accent5" accent6="accent6" hlink="hlink" folHlink="folHlink"/>
   <p:notesStyle>
@@ -1087,10 +1331,6 @@
           <a:bodyPr/>
           <a:lstStyle/>
           <a:p>
-            <a:r>
-              <a:rPr lang="en-US" dirty="0"/>
-              <a:t/>
-            </a:r>
             <a:endParaRPr lang="en-US" dirty="0"/>
           </a:p>
         </p:txBody>
@@ -1112,18 +1352,12 @@
           <a:p>
             <a:fld id="{F7021451-1387-4CA6-816F-3879F97B5CBC}" type="slidenum">
               <a:rPr lang="en-US"/>
-              <a:t>1</a:t>
             </a:fld>
             <a:endParaRPr lang="en-US"/>
           </a:p>
         </p:txBody>
       </p:sp>
     </p:spTree>
-    <p:extLst>
-      <p:ext uri="{BB962C8B-B14F-4D97-AF65-F5344CB8AC3E}">
-        <p14:creationId xmlns:p14="http://schemas.microsoft.com/office/powerpoint/2010/main" val="1024086991"/>
-      </p:ext>
-    </p:extLst>
   </p:cSld>
   <p:clrMapOvr>
     <a:masterClrMapping/>
@@ -1175,10 +1409,6 @@
           <a:bodyPr/>
           <a:lstStyle/>
           <a:p>
-            <a:r>
-              <a:rPr lang="en-US" dirty="0"/>
-              <a:t/>
-            </a:r>
             <a:endParaRPr lang="en-US" dirty="0"/>
           </a:p>
         </p:txBody>
@@ -1200,18 +1430,12 @@
           <a:p>
             <a:fld id="{F7021451-1387-4CA6-816F-3879F97B5CBC}" type="slidenum">
               <a:rPr lang="en-US"/>
-              <a:t>2</a:t>
             </a:fld>
             <a:endParaRPr lang="en-US"/>
           </a:p>
         </p:txBody>
       </p:sp>
     </p:spTree>
-    <p:extLst>
-      <p:ext uri="{BB962C8B-B14F-4D97-AF65-F5344CB8AC3E}">
-        <p14:creationId xmlns:p14="http://schemas.microsoft.com/office/powerpoint/2010/main" val="1024086991"/>
-      </p:ext>
-    </p:extLst>
   </p:cSld>
   <p:clrMapOvr>
     <a:masterClrMapping/>
@@ -1263,10 +1487,6 @@
           <a:bodyPr/>
           <a:lstStyle/>
           <a:p>
-            <a:r>
-              <a:rPr lang="en-US" dirty="0"/>
-              <a:t/>
-            </a:r>
             <a:endParaRPr lang="en-US" dirty="0"/>
           </a:p>
         </p:txBody>
@@ -1288,18 +1508,12 @@
           <a:p>
             <a:fld id="{F7021451-1387-4CA6-816F-3879F97B5CBC}" type="slidenum">
               <a:rPr lang="en-US"/>
-              <a:t>3</a:t>
             </a:fld>
             <a:endParaRPr lang="en-US"/>
           </a:p>
         </p:txBody>
       </p:sp>
     </p:spTree>
-    <p:extLst>
-      <p:ext uri="{BB962C8B-B14F-4D97-AF65-F5344CB8AC3E}">
-        <p14:creationId xmlns:p14="http://schemas.microsoft.com/office/powerpoint/2010/main" val="1024086991"/>
-      </p:ext>
-    </p:extLst>
   </p:cSld>
   <p:clrMapOvr>
     <a:masterClrMapping/>
@@ -1351,10 +1565,6 @@
           <a:bodyPr/>
           <a:lstStyle/>
           <a:p>
-            <a:r>
-              <a:rPr lang="en-US" dirty="0"/>
-              <a:t/>
-            </a:r>
             <a:endParaRPr lang="en-US" dirty="0"/>
           </a:p>
         </p:txBody>
@@ -1376,18 +1586,12 @@
           <a:p>
             <a:fld id="{F7021451-1387-4CA6-816F-3879F97B5CBC}" type="slidenum">
               <a:rPr lang="en-US"/>
-              <a:t>4</a:t>
             </a:fld>
             <a:endParaRPr lang="en-US"/>
           </a:p>
         </p:txBody>
       </p:sp>
     </p:spTree>
-    <p:extLst>
-      <p:ext uri="{BB962C8B-B14F-4D97-AF65-F5344CB8AC3E}">
-        <p14:creationId xmlns:p14="http://schemas.microsoft.com/office/powerpoint/2010/main" val="1024086991"/>
-      </p:ext>
-    </p:extLst>
   </p:cSld>
   <p:clrMapOvr>
     <a:masterClrMapping/>
@@ -1439,10 +1643,6 @@
           <a:bodyPr/>
           <a:lstStyle/>
           <a:p>
-            <a:r>
-              <a:rPr lang="en-US" dirty="0"/>
-              <a:t/>
-            </a:r>
             <a:endParaRPr lang="en-US" dirty="0"/>
           </a:p>
         </p:txBody>
@@ -1464,18 +1664,12 @@
           <a:p>
             <a:fld id="{F7021451-1387-4CA6-816F-3879F97B5CBC}" type="slidenum">
               <a:rPr lang="en-US"/>
-              <a:t>5</a:t>
             </a:fld>
             <a:endParaRPr lang="en-US"/>
           </a:p>
         </p:txBody>
       </p:sp>
     </p:spTree>
-    <p:extLst>
-      <p:ext uri="{BB962C8B-B14F-4D97-AF65-F5344CB8AC3E}">
-        <p14:creationId xmlns:p14="http://schemas.microsoft.com/office/powerpoint/2010/main" val="1024086991"/>
-      </p:ext>
-    </p:extLst>
   </p:cSld>
   <p:clrMapOvr>
     <a:masterClrMapping/>
@@ -1527,10 +1721,6 @@
           <a:bodyPr/>
           <a:lstStyle/>
           <a:p>
-            <a:r>
-              <a:rPr lang="en-US" dirty="0"/>
-              <a:t/>
-            </a:r>
             <a:endParaRPr lang="en-US" dirty="0"/>
           </a:p>
         </p:txBody>
@@ -1552,18 +1742,12 @@
           <a:p>
             <a:fld id="{F7021451-1387-4CA6-816F-3879F97B5CBC}" type="slidenum">
               <a:rPr lang="en-US"/>
-              <a:t>6</a:t>
             </a:fld>
             <a:endParaRPr lang="en-US"/>
           </a:p>
         </p:txBody>
       </p:sp>
     </p:spTree>
-    <p:extLst>
-      <p:ext uri="{BB962C8B-B14F-4D97-AF65-F5344CB8AC3E}">
-        <p14:creationId xmlns:p14="http://schemas.microsoft.com/office/powerpoint/2010/main" val="1024086991"/>
-      </p:ext>
-    </p:extLst>
   </p:cSld>
   <p:clrMapOvr>
     <a:masterClrMapping/>
@@ -1615,10 +1799,6 @@
           <a:bodyPr/>
           <a:lstStyle/>
           <a:p>
-            <a:r>
-              <a:rPr lang="en-US" dirty="0"/>
-              <a:t/>
-            </a:r>
             <a:endParaRPr lang="en-US" dirty="0"/>
           </a:p>
         </p:txBody>
@@ -1640,18 +1820,12 @@
           <a:p>
             <a:fld id="{F7021451-1387-4CA6-816F-3879F97B5CBC}" type="slidenum">
               <a:rPr lang="en-US"/>
-              <a:t>7</a:t>
             </a:fld>
             <a:endParaRPr lang="en-US"/>
           </a:p>
         </p:txBody>
       </p:sp>
     </p:spTree>
-    <p:extLst>
-      <p:ext uri="{BB962C8B-B14F-4D97-AF65-F5344CB8AC3E}">
-        <p14:creationId xmlns:p14="http://schemas.microsoft.com/office/powerpoint/2010/main" val="1024086991"/>
-      </p:ext>
-    </p:extLst>
   </p:cSld>
   <p:clrMapOvr>
     <a:masterClrMapping/>
@@ -1692,6 +1866,11 @@
 <file path=ppt/slideMasters/slideMaster1.xml><?xml version="1.0" encoding="utf-8"?>
 <p:sldMaster xmlns:a="http://schemas.openxmlformats.org/drawingml/2006/main" xmlns:r="http://schemas.openxmlformats.org/officeDocument/2006/relationships" xmlns:p="http://schemas.openxmlformats.org/presentationml/2006/main">
   <p:cSld>
+    <p:bg>
+      <p:bgRef idx="1001">
+        <a:schemeClr val="bg1"/>
+      </p:bgRef>
+    </p:bg>
     <p:spTree>
       <p:nvGrpSpPr>
         <p:cNvPr id="1" name=""/>
@@ -1735,7 +1914,7 @@
         <a:spcBef>
           <a:spcPct val="20000"/>
         </a:spcBef>
-        <a:buFont typeface="Arial" pitchFamily="34" charset="0"/>
+        <a:buFont typeface="Arial" panose="020B0604020202090204" pitchFamily="34" charset="0"/>
         <a:buChar char="•"/>
         <a:defRPr sz="3200" kern="1200">
           <a:solidFill>
@@ -1750,7 +1929,7 @@
         <a:spcBef>
           <a:spcPct val="20000"/>
         </a:spcBef>
-        <a:buFont typeface="Arial" pitchFamily="34" charset="0"/>
+        <a:buFont typeface="Arial" panose="020B0604020202090204" pitchFamily="34" charset="0"/>
         <a:buChar char="–"/>
         <a:defRPr sz="2800" kern="1200">
           <a:solidFill>
@@ -1765,7 +1944,7 @@
         <a:spcBef>
           <a:spcPct val="20000"/>
         </a:spcBef>
-        <a:buFont typeface="Arial" pitchFamily="34" charset="0"/>
+        <a:buFont typeface="Arial" panose="020B0604020202090204" pitchFamily="34" charset="0"/>
         <a:buChar char="•"/>
         <a:defRPr sz="2400" kern="1200">
           <a:solidFill>
@@ -1780,7 +1959,7 @@
         <a:spcBef>
           <a:spcPct val="20000"/>
         </a:spcBef>
-        <a:buFont typeface="Arial" pitchFamily="34" charset="0"/>
+        <a:buFont typeface="Arial" panose="020B0604020202090204" pitchFamily="34" charset="0"/>
         <a:buChar char="–"/>
         <a:defRPr sz="2000" kern="1200">
           <a:solidFill>
@@ -1795,7 +1974,7 @@
         <a:spcBef>
           <a:spcPct val="20000"/>
         </a:spcBef>
-        <a:buFont typeface="Arial" pitchFamily="34" charset="0"/>
+        <a:buFont typeface="Arial" panose="020B0604020202090204" pitchFamily="34" charset="0"/>
         <a:buChar char="»"/>
         <a:defRPr sz="2000" kern="1200">
           <a:solidFill>
@@ -1810,7 +1989,7 @@
         <a:spcBef>
           <a:spcPct val="20000"/>
         </a:spcBef>
-        <a:buFont typeface="Arial" pitchFamily="34" charset="0"/>
+        <a:buFont typeface="Arial" panose="020B0604020202090204" pitchFamily="34" charset="0"/>
         <a:buChar char="•"/>
         <a:defRPr sz="2000" kern="1200">
           <a:solidFill>
@@ -1825,7 +2004,7 @@
         <a:spcBef>
           <a:spcPct val="20000"/>
         </a:spcBef>
-        <a:buFont typeface="Arial" pitchFamily="34" charset="0"/>
+        <a:buFont typeface="Arial" panose="020B0604020202090204" pitchFamily="34" charset="0"/>
         <a:buChar char="•"/>
         <a:defRPr sz="2000" kern="1200">
           <a:solidFill>
@@ -1840,7 +2019,7 @@
         <a:spcBef>
           <a:spcPct val="20000"/>
         </a:spcBef>
-        <a:buFont typeface="Arial" pitchFamily="34" charset="0"/>
+        <a:buFont typeface="Arial" panose="020B0604020202090204" pitchFamily="34" charset="0"/>
         <a:buChar char="•"/>
         <a:defRPr sz="2000" kern="1200">
           <a:solidFill>
@@ -1855,7 +2034,7 @@
         <a:spcBef>
           <a:spcPct val="20000"/>
         </a:spcBef>
-        <a:buFont typeface="Arial" pitchFamily="34" charset="0"/>
+        <a:buFont typeface="Arial" panose="020B0604020202090204" pitchFamily="34" charset="0"/>
         <a:buChar char="•"/>
         <a:defRPr sz="2000" kern="1200">
           <a:solidFill>
@@ -1968,12 +2147,13 @@
 
 <file path=ppt/slides/slide1.xml><?xml version="1.0" encoding="utf-8"?>
 <p:sld xmlns:a="http://schemas.openxmlformats.org/drawingml/2006/main" xmlns:r="http://schemas.openxmlformats.org/officeDocument/2006/relationships" xmlns:p="http://schemas.openxmlformats.org/presentationml/2006/main">
-  <p:cSld name="Slide 1">
+  <p:cSld>
     <p:bg>
       <p:bgPr>
         <a:solidFill>
           <a:srgbClr val="FFFFFF"/>
         </a:solidFill>
+        <a:effectLst/>
       </p:bgPr>
     </p:bg>
     <p:spTree>
@@ -2014,6 +2194,10 @@
             <a:prstDash val="solid"/>
           </a:ln>
         </p:spPr>
+        <p:txBody>
+          <a:bodyPr/>
+          <a:p/>
+        </p:txBody>
       </p:sp>
       <p:sp>
         <p:nvSpPr>
@@ -2039,6 +2223,10 @@
             <a:prstDash val="solid"/>
           </a:ln>
         </p:spPr>
+        <p:txBody>
+          <a:bodyPr/>
+          <a:p/>
+        </p:txBody>
       </p:sp>
       <p:sp>
         <p:nvSpPr>
@@ -2055,13 +2243,12 @@
             <a:avLst/>
           </a:prstGeom>
           <a:noFill/>
-          <a:ln/>
         </p:spPr>
         <p:txBody>
           <a:bodyPr wrap="square" rtlCol="0" anchor="ctr"/>
           <a:lstStyle/>
           <a:p>
-            <a:pPr algn="ctr" indent="0" marL="0">
+            <a:pPr marL="0" indent="0" algn="ctr">
               <a:buNone/>
             </a:pPr>
             <a:r>
@@ -2091,13 +2278,12 @@
             <a:avLst/>
           </a:prstGeom>
           <a:noFill/>
-          <a:ln/>
         </p:spPr>
         <p:txBody>
           <a:bodyPr wrap="square" rtlCol="0" anchor="ctr"/>
           <a:lstStyle/>
           <a:p>
-            <a:pPr algn="ctr" indent="0" marL="0">
+            <a:pPr marL="0" indent="0" algn="ctr">
               <a:buNone/>
             </a:pPr>
             <a:r>
@@ -2105,9 +2291,9 @@
                 <a:solidFill>
                   <a:srgbClr val="1A5276"/>
                 </a:solidFill>
-                <a:latin typeface="Trebuchet MS" pitchFamily="34" charset="0"/>
-                <a:ea typeface="Trebuchet MS" pitchFamily="34" charset="-122"/>
-                <a:cs typeface="Trebuchet MS" pitchFamily="34" charset="-120"/>
+                <a:latin typeface="Trebuchet MS" panose="020B0703020202090204" pitchFamily="34" charset="0"/>
+                <a:ea typeface="Trebuchet MS" panose="020B0703020202090204" pitchFamily="34" charset="-122"/>
+                <a:cs typeface="Trebuchet MS" panose="020B0703020202090204" pitchFamily="34" charset="-120"/>
               </a:rPr>
               <a:t>EarthSafe</a:t>
             </a:r>
@@ -2130,13 +2316,12 @@
             <a:avLst/>
           </a:prstGeom>
           <a:noFill/>
-          <a:ln/>
         </p:spPr>
         <p:txBody>
           <a:bodyPr wrap="square" rtlCol="0" anchor="ctr"/>
           <a:lstStyle/>
           <a:p>
-            <a:pPr algn="ctr" indent="0" marL="0">
+            <a:pPr marL="0" indent="0" algn="ctr">
               <a:buNone/>
             </a:pPr>
             <a:r>
@@ -2144,9 +2329,9 @@
                 <a:solidFill>
                   <a:srgbClr val="0D9488"/>
                 </a:solidFill>
-                <a:latin typeface="Trebuchet MS" pitchFamily="34" charset="0"/>
-                <a:ea typeface="Trebuchet MS" pitchFamily="34" charset="-122"/>
-                <a:cs typeface="Trebuchet MS" pitchFamily="34" charset="-120"/>
+                <a:latin typeface="Trebuchet MS" panose="020B0703020202090204" pitchFamily="34" charset="0"/>
+                <a:ea typeface="Trebuchet MS" panose="020B0703020202090204" pitchFamily="34" charset="-122"/>
+                <a:cs typeface="Trebuchet MS" panose="020B0703020202090204" pitchFamily="34" charset="-120"/>
               </a:rPr>
               <a:t>Real-Time Earthquake Hazard Prediction</a:t>
             </a:r>
@@ -2178,6 +2363,10 @@
             <a:prstDash val="solid"/>
           </a:ln>
         </p:spPr>
+        <p:txBody>
+          <a:bodyPr/>
+          <a:p/>
+        </p:txBody>
       </p:sp>
       <p:sp>
         <p:nvSpPr>
@@ -2194,13 +2383,12 @@
             <a:avLst/>
           </a:prstGeom>
           <a:noFill/>
-          <a:ln/>
         </p:spPr>
         <p:txBody>
           <a:bodyPr wrap="square" rtlCol="0" anchor="ctr"/>
           <a:lstStyle/>
           <a:p>
-            <a:pPr algn="ctr" indent="0" marL="0">
+            <a:pPr marL="0" indent="0" algn="ctr">
               <a:buNone/>
             </a:pPr>
             <a:r>
@@ -2244,6 +2432,10 @@
             <a:prstDash val="solid"/>
           </a:ln>
         </p:spPr>
+        <p:txBody>
+          <a:bodyPr/>
+          <a:p/>
+        </p:txBody>
       </p:sp>
       <p:sp>
         <p:nvSpPr>
@@ -2260,13 +2452,12 @@
             <a:avLst/>
           </a:prstGeom>
           <a:noFill/>
-          <a:ln/>
         </p:spPr>
         <p:txBody>
           <a:bodyPr wrap="square" lIns="0" tIns="0" rIns="0" bIns="0" rtlCol="0" anchor="ctr"/>
           <a:lstStyle/>
           <a:p>
-            <a:pPr algn="ctr" indent="0" marL="0">
+            <a:pPr marL="0" indent="0" algn="ctr">
               <a:buNone/>
             </a:pPr>
             <a:r>
@@ -2277,6 +2468,7 @@
                 <a:latin typeface="Calibri" pitchFamily="34" charset="0"/>
                 <a:ea typeface="Calibri" pitchFamily="34" charset="-122"/>
                 <a:cs typeface="Calibri" pitchFamily="34" charset="-120"/>
+                <a:hlinkClick r:id="rId1"/>
               </a:rPr>
               <a:t>🔗  earthsafe-eu9o2sytymwqnls48ppjg7.streamlit.app</a:t>
             </a:r>
@@ -2310,6 +2502,10 @@
             <a:prstDash val="solid"/>
           </a:ln>
         </p:spPr>
+        <p:txBody>
+          <a:bodyPr/>
+          <a:p/>
+        </p:txBody>
       </p:sp>
       <p:sp>
         <p:nvSpPr>
@@ -2326,13 +2522,12 @@
             <a:avLst/>
           </a:prstGeom>
           <a:noFill/>
-          <a:ln/>
         </p:spPr>
         <p:txBody>
           <a:bodyPr wrap="square" lIns="0" tIns="0" rIns="0" bIns="0" rtlCol="0" anchor="ctr"/>
           <a:lstStyle/>
           <a:p>
-            <a:pPr algn="ctr" indent="0" marL="0">
+            <a:pPr marL="0" indent="0" algn="ctr">
               <a:buNone/>
             </a:pPr>
             <a:r>
@@ -2343,6 +2538,7 @@
                 <a:latin typeface="Calibri" pitchFamily="34" charset="0"/>
                 <a:ea typeface="Calibri" pitchFamily="34" charset="-122"/>
                 <a:cs typeface="Calibri" pitchFamily="34" charset="-120"/>
+                <a:hlinkClick r:id="rId2"/>
               </a:rPr>
               <a:t>⚙️  Flask API  ·  POST /predict  ·  GET /recent</a:t>
             </a:r>
@@ -2360,12 +2556,13 @@
 
 <file path=ppt/slides/slide2.xml><?xml version="1.0" encoding="utf-8"?>
 <p:sld xmlns:a="http://schemas.openxmlformats.org/drawingml/2006/main" xmlns:r="http://schemas.openxmlformats.org/officeDocument/2006/relationships" xmlns:p="http://schemas.openxmlformats.org/presentationml/2006/main">
-  <p:cSld name="Slide 2">
+  <p:cSld>
     <p:bg>
       <p:bgPr>
         <a:solidFill>
           <a:srgbClr val="FFFFFF"/>
         </a:solidFill>
+        <a:effectLst/>
       </p:bgPr>
     </p:bg>
     <p:spTree>
@@ -2447,13 +2644,12 @@
             <a:avLst/>
           </a:prstGeom>
           <a:noFill/>
-          <a:ln/>
         </p:spPr>
         <p:txBody>
           <a:bodyPr wrap="square" rtlCol="0" anchor="ctr"/>
           <a:lstStyle/>
           <a:p>
-            <a:pPr indent="0" marL="0">
+            <a:pPr marL="0" indent="0">
               <a:buNone/>
             </a:pPr>
             <a:r>
@@ -2461,9 +2657,9 @@
                 <a:solidFill>
                   <a:srgbClr val="FFFFFF"/>
                 </a:solidFill>
-                <a:latin typeface="Trebuchet MS" pitchFamily="34" charset="0"/>
-                <a:ea typeface="Trebuchet MS" pitchFamily="34" charset="-122"/>
-                <a:cs typeface="Trebuchet MS" pitchFamily="34" charset="-120"/>
+                <a:latin typeface="Trebuchet MS" panose="020B0703020202090204" pitchFamily="34" charset="0"/>
+                <a:ea typeface="Trebuchet MS" panose="020B0703020202090204" pitchFamily="34" charset="-122"/>
+                <a:cs typeface="Trebuchet MS" panose="020B0703020202090204" pitchFamily="34" charset="-120"/>
               </a:rPr>
               <a:t>Project Overview &amp; Motivation</a:t>
             </a:r>
@@ -2486,13 +2682,12 @@
             <a:avLst/>
           </a:prstGeom>
           <a:noFill/>
-          <a:ln/>
         </p:spPr>
         <p:txBody>
           <a:bodyPr wrap="square" rtlCol="0" anchor="ctr"/>
           <a:lstStyle/>
           <a:p>
-            <a:pPr indent="0" marL="0">
+            <a:pPr marL="0" indent="0">
               <a:buNone/>
             </a:pPr>
             <a:r>
@@ -2500,9 +2695,9 @@
                 <a:solidFill>
                   <a:srgbClr val="1A5276"/>
                 </a:solidFill>
-                <a:latin typeface="Trebuchet MS" pitchFamily="34" charset="0"/>
-                <a:ea typeface="Trebuchet MS" pitchFamily="34" charset="-122"/>
-                <a:cs typeface="Trebuchet MS" pitchFamily="34" charset="-120"/>
+                <a:latin typeface="Trebuchet MS" panose="020B0703020202090204" pitchFamily="34" charset="0"/>
+                <a:ea typeface="Trebuchet MS" panose="020B0703020202090204" pitchFamily="34" charset="-122"/>
+                <a:cs typeface="Trebuchet MS" panose="020B0703020202090204" pitchFamily="34" charset="-120"/>
               </a:rPr>
               <a:t>The Problem</a:t>
             </a:r>
@@ -2525,13 +2720,12 @@
             <a:avLst/>
           </a:prstGeom>
           <a:noFill/>
-          <a:ln/>
         </p:spPr>
         <p:txBody>
           <a:bodyPr wrap="square" rtlCol="0" anchor="ctr"/>
           <a:lstStyle/>
           <a:p>
-            <a:pPr indent="0" marL="0">
+            <a:pPr marL="0" indent="0">
               <a:buNone/>
             </a:pPr>
             <a:r>
@@ -2548,13 +2742,13 @@
             <a:endParaRPr lang="en-US" sz="1500" dirty="0"/>
           </a:p>
           <a:p>
-            <a:pPr indent="0" marL="0">
+            <a:pPr marL="0" indent="0">
               <a:buNone/>
             </a:pPr>
             <a:endParaRPr lang="en-US" sz="1500" dirty="0"/>
           </a:p>
           <a:p>
-            <a:pPr indent="0" marL="0">
+            <a:pPr marL="0" indent="0">
               <a:buNone/>
             </a:pPr>
             <a:r>
@@ -2596,7 +2790,7 @@
             <a:prstDash val="solid"/>
           </a:ln>
           <a:effectLst>
-            <a:outerShdw sx="100000" sy="100000" kx="0" ky="0" algn="bl" rotWithShape="0" blurRad="127000" dist="38100" dir="8100000">
+            <a:outerShdw blurRad="127000" dist="38100" dir="8100000" algn="bl" rotWithShape="0">
               <a:srgbClr val="000000">
                 <a:alpha val="10000"/>
               </a:srgbClr>
@@ -2619,13 +2813,12 @@
             <a:avLst/>
           </a:prstGeom>
           <a:noFill/>
-          <a:ln/>
         </p:spPr>
         <p:txBody>
           <a:bodyPr wrap="square" rtlCol="0" anchor="ctr"/>
           <a:lstStyle/>
           <a:p>
-            <a:pPr algn="ctr" indent="0" marL="0">
+            <a:pPr marL="0" indent="0" algn="ctr">
               <a:buNone/>
             </a:pPr>
             <a:r>
@@ -2633,9 +2826,9 @@
                 <a:solidFill>
                   <a:srgbClr val="1A5276"/>
                 </a:solidFill>
-                <a:latin typeface="Trebuchet MS" pitchFamily="34" charset="0"/>
-                <a:ea typeface="Trebuchet MS" pitchFamily="34" charset="-122"/>
-                <a:cs typeface="Trebuchet MS" pitchFamily="34" charset="-120"/>
+                <a:latin typeface="Trebuchet MS" panose="020B0703020202090204" pitchFamily="34" charset="0"/>
+                <a:ea typeface="Trebuchet MS" panose="020B0703020202090204" pitchFamily="34" charset="-122"/>
+                <a:cs typeface="Trebuchet MS" panose="020B0703020202090204" pitchFamily="34" charset="-120"/>
               </a:rPr>
               <a:t>55,000+</a:t>
             </a:r>
@@ -2658,13 +2851,12 @@
             <a:avLst/>
           </a:prstGeom>
           <a:noFill/>
-          <a:ln/>
         </p:spPr>
         <p:txBody>
           <a:bodyPr wrap="square" rtlCol="0" anchor="ctr"/>
           <a:lstStyle/>
           <a:p>
-            <a:pPr algn="ctr" indent="0" marL="0">
+            <a:pPr marL="0" indent="0" algn="ctr">
               <a:buNone/>
             </a:pPr>
             <a:r>
@@ -2681,7 +2873,7 @@
             <a:endParaRPr lang="en-US" sz="1100" dirty="0"/>
           </a:p>
           <a:p>
-            <a:pPr algn="ctr" indent="0" marL="0">
+            <a:pPr marL="0" indent="0" algn="ctr">
               <a:buNone/>
             </a:pPr>
             <a:r>
@@ -2723,7 +2915,7 @@
             <a:prstDash val="solid"/>
           </a:ln>
           <a:effectLst>
-            <a:outerShdw sx="100000" sy="100000" kx="0" ky="0" algn="bl" rotWithShape="0" blurRad="127000" dist="38100" dir="8100000">
+            <a:outerShdw blurRad="127000" dist="38100" dir="8100000" algn="bl" rotWithShape="0">
               <a:srgbClr val="000000">
                 <a:alpha val="10000"/>
               </a:srgbClr>
@@ -2746,13 +2938,12 @@
             <a:avLst/>
           </a:prstGeom>
           <a:noFill/>
-          <a:ln/>
         </p:spPr>
         <p:txBody>
           <a:bodyPr wrap="square" rtlCol="0" anchor="ctr"/>
           <a:lstStyle/>
           <a:p>
-            <a:pPr algn="ctr" indent="0" marL="0">
+            <a:pPr marL="0" indent="0" algn="ctr">
               <a:buNone/>
             </a:pPr>
             <a:r>
@@ -2760,9 +2951,9 @@
                 <a:solidFill>
                   <a:srgbClr val="1A5276"/>
                 </a:solidFill>
-                <a:latin typeface="Trebuchet MS" pitchFamily="34" charset="0"/>
-                <a:ea typeface="Trebuchet MS" pitchFamily="34" charset="-122"/>
-                <a:cs typeface="Trebuchet MS" pitchFamily="34" charset="-120"/>
+                <a:latin typeface="Trebuchet MS" panose="020B0703020202090204" pitchFamily="34" charset="0"/>
+                <a:ea typeface="Trebuchet MS" panose="020B0703020202090204" pitchFamily="34" charset="-122"/>
+                <a:cs typeface="Trebuchet MS" panose="020B0703020202090204" pitchFamily="34" charset="-120"/>
               </a:rPr>
               <a:t>2,000</a:t>
             </a:r>
@@ -2785,13 +2976,12 @@
             <a:avLst/>
           </a:prstGeom>
           <a:noFill/>
-          <a:ln/>
         </p:spPr>
         <p:txBody>
           <a:bodyPr wrap="square" rtlCol="0" anchor="ctr"/>
           <a:lstStyle/>
           <a:p>
-            <a:pPr algn="ctr" indent="0" marL="0">
+            <a:pPr marL="0" indent="0" algn="ctr">
               <a:buNone/>
             </a:pPr>
             <a:r>
@@ -2808,7 +2998,7 @@
             <a:endParaRPr lang="en-US" sz="1100" dirty="0"/>
           </a:p>
           <a:p>
-            <a:pPr algn="ctr" indent="0" marL="0">
+            <a:pPr marL="0" indent="0" algn="ctr">
               <a:buNone/>
             </a:pPr>
             <a:r>
@@ -2850,7 +3040,7 @@
             <a:prstDash val="solid"/>
           </a:ln>
           <a:effectLst>
-            <a:outerShdw sx="100000" sy="100000" kx="0" ky="0" algn="bl" rotWithShape="0" blurRad="127000" dist="38100" dir="8100000">
+            <a:outerShdw blurRad="127000" dist="38100" dir="8100000" algn="bl" rotWithShape="0">
               <a:srgbClr val="000000">
                 <a:alpha val="10000"/>
               </a:srgbClr>
@@ -2873,13 +3063,12 @@
             <a:avLst/>
           </a:prstGeom>
           <a:noFill/>
-          <a:ln/>
         </p:spPr>
         <p:txBody>
           <a:bodyPr wrap="square" rtlCol="0" anchor="ctr"/>
           <a:lstStyle/>
           <a:p>
-            <a:pPr algn="ctr" indent="0" marL="0">
+            <a:pPr marL="0" indent="0" algn="ctr">
               <a:buNone/>
             </a:pPr>
             <a:r>
@@ -2887,9 +3076,9 @@
                 <a:solidFill>
                   <a:srgbClr val="1A5276"/>
                 </a:solidFill>
-                <a:latin typeface="Trebuchet MS" pitchFamily="34" charset="0"/>
-                <a:ea typeface="Trebuchet MS" pitchFamily="34" charset="-122"/>
-                <a:cs typeface="Trebuchet MS" pitchFamily="34" charset="-120"/>
+                <a:latin typeface="Trebuchet MS" panose="020B0703020202090204" pitchFamily="34" charset="0"/>
+                <a:ea typeface="Trebuchet MS" panose="020B0703020202090204" pitchFamily="34" charset="-122"/>
+                <a:cs typeface="Trebuchet MS" panose="020B0703020202090204" pitchFamily="34" charset="-120"/>
               </a:rPr>
               <a:t>5</a:t>
             </a:r>
@@ -2912,13 +3101,12 @@
             <a:avLst/>
           </a:prstGeom>
           <a:noFill/>
-          <a:ln/>
         </p:spPr>
         <p:txBody>
           <a:bodyPr wrap="square" rtlCol="0" anchor="ctr"/>
           <a:lstStyle/>
           <a:p>
-            <a:pPr algn="ctr" indent="0" marL="0">
+            <a:pPr marL="0" indent="0" algn="ctr">
               <a:buNone/>
             </a:pPr>
             <a:r>
@@ -2935,7 +3123,7 @@
             <a:endParaRPr lang="en-US" sz="1100" dirty="0"/>
           </a:p>
           <a:p>
-            <a:pPr algn="ctr" indent="0" marL="0">
+            <a:pPr marL="0" indent="0" algn="ctr">
               <a:buNone/>
             </a:pPr>
             <a:r>
@@ -2968,13 +3156,12 @@
             <a:avLst/>
           </a:prstGeom>
           <a:noFill/>
-          <a:ln/>
         </p:spPr>
         <p:txBody>
           <a:bodyPr wrap="square" rtlCol="0" anchor="ctr"/>
           <a:lstStyle/>
           <a:p>
-            <a:pPr indent="0" marL="0">
+            <a:pPr marL="0" indent="0">
               <a:buNone/>
             </a:pPr>
             <a:r>
@@ -2982,9 +3169,9 @@
                 <a:solidFill>
                   <a:srgbClr val="1A5276"/>
                 </a:solidFill>
-                <a:latin typeface="Trebuchet MS" pitchFamily="34" charset="0"/>
-                <a:ea typeface="Trebuchet MS" pitchFamily="34" charset="-122"/>
-                <a:cs typeface="Trebuchet MS" pitchFamily="34" charset="-120"/>
+                <a:latin typeface="Trebuchet MS" panose="020B0703020202090204" pitchFamily="34" charset="0"/>
+                <a:ea typeface="Trebuchet MS" panose="020B0703020202090204" pitchFamily="34" charset="-122"/>
+                <a:cs typeface="Trebuchet MS" panose="020B0703020202090204" pitchFamily="34" charset="-120"/>
               </a:rPr>
               <a:t>Hazard Levels</a:t>
             </a:r>
@@ -3016,7 +3203,7 @@
             <a:prstDash val="solid"/>
           </a:ln>
           <a:effectLst>
-            <a:outerShdw sx="100000" sy="100000" kx="0" ky="0" algn="bl" rotWithShape="0" blurRad="127000" dist="38100" dir="8100000">
+            <a:outerShdw blurRad="127000" dist="38100" dir="8100000" algn="bl" rotWithShape="0">
               <a:srgbClr val="000000">
                 <a:alpha val="10000"/>
               </a:srgbClr>
@@ -3064,13 +3251,12 @@
             <a:avLst/>
           </a:prstGeom>
           <a:noFill/>
-          <a:ln/>
         </p:spPr>
         <p:txBody>
           <a:bodyPr wrap="square" rtlCol="0" anchor="ctr"/>
           <a:lstStyle/>
           <a:p>
-            <a:pPr indent="0" marL="0">
+            <a:pPr marL="0" indent="0">
               <a:buNone/>
             </a:pPr>
             <a:r>
@@ -3078,9 +3264,9 @@
                 <a:solidFill>
                   <a:srgbClr val="1E8449"/>
                 </a:solidFill>
-                <a:latin typeface="Trebuchet MS" pitchFamily="34" charset="0"/>
-                <a:ea typeface="Trebuchet MS" pitchFamily="34" charset="-122"/>
-                <a:cs typeface="Trebuchet MS" pitchFamily="34" charset="-120"/>
+                <a:latin typeface="Trebuchet MS" panose="020B0703020202090204" pitchFamily="34" charset="0"/>
+                <a:ea typeface="Trebuchet MS" panose="020B0703020202090204" pitchFamily="34" charset="-122"/>
+                <a:cs typeface="Trebuchet MS" panose="020B0703020202090204" pitchFamily="34" charset="-120"/>
               </a:rPr>
               <a:t>🟢  Low</a:t>
             </a:r>
@@ -3103,13 +3289,12 @@
             <a:avLst/>
           </a:prstGeom>
           <a:noFill/>
-          <a:ln/>
         </p:spPr>
         <p:txBody>
           <a:bodyPr wrap="square" rtlCol="0" anchor="ctr"/>
           <a:lstStyle/>
           <a:p>
-            <a:pPr indent="0" marL="0">
+            <a:pPr marL="0" indent="0">
               <a:buNone/>
             </a:pPr>
             <a:r>
@@ -3151,7 +3336,7 @@
             <a:prstDash val="solid"/>
           </a:ln>
           <a:effectLst>
-            <a:outerShdw sx="100000" sy="100000" kx="0" ky="0" algn="bl" rotWithShape="0" blurRad="127000" dist="38100" dir="8100000">
+            <a:outerShdw blurRad="127000" dist="38100" dir="8100000" algn="bl" rotWithShape="0">
               <a:srgbClr val="000000">
                 <a:alpha val="10000"/>
               </a:srgbClr>
@@ -3199,13 +3384,12 @@
             <a:avLst/>
           </a:prstGeom>
           <a:noFill/>
-          <a:ln/>
         </p:spPr>
         <p:txBody>
           <a:bodyPr wrap="square" rtlCol="0" anchor="ctr"/>
           <a:lstStyle/>
           <a:p>
-            <a:pPr indent="0" marL="0">
+            <a:pPr marL="0" indent="0">
               <a:buNone/>
             </a:pPr>
             <a:r>
@@ -3213,9 +3397,9 @@
                 <a:solidFill>
                   <a:srgbClr val="D4800A"/>
                 </a:solidFill>
-                <a:latin typeface="Trebuchet MS" pitchFamily="34" charset="0"/>
-                <a:ea typeface="Trebuchet MS" pitchFamily="34" charset="-122"/>
-                <a:cs typeface="Trebuchet MS" pitchFamily="34" charset="-120"/>
+                <a:latin typeface="Trebuchet MS" panose="020B0703020202090204" pitchFamily="34" charset="0"/>
+                <a:ea typeface="Trebuchet MS" panose="020B0703020202090204" pitchFamily="34" charset="-122"/>
+                <a:cs typeface="Trebuchet MS" panose="020B0703020202090204" pitchFamily="34" charset="-120"/>
               </a:rPr>
               <a:t>🟡  Moderate</a:t>
             </a:r>
@@ -3238,13 +3422,12 @@
             <a:avLst/>
           </a:prstGeom>
           <a:noFill/>
-          <a:ln/>
         </p:spPr>
         <p:txBody>
           <a:bodyPr wrap="square" rtlCol="0" anchor="ctr"/>
           <a:lstStyle/>
           <a:p>
-            <a:pPr indent="0" marL="0">
+            <a:pPr marL="0" indent="0">
               <a:buNone/>
             </a:pPr>
             <a:r>
@@ -3286,7 +3469,7 @@
             <a:prstDash val="solid"/>
           </a:ln>
           <a:effectLst>
-            <a:outerShdw sx="100000" sy="100000" kx="0" ky="0" algn="bl" rotWithShape="0" blurRad="127000" dist="38100" dir="8100000">
+            <a:outerShdw blurRad="127000" dist="38100" dir="8100000" algn="bl" rotWithShape="0">
               <a:srgbClr val="000000">
                 <a:alpha val="10000"/>
               </a:srgbClr>
@@ -3334,13 +3517,12 @@
             <a:avLst/>
           </a:prstGeom>
           <a:noFill/>
-          <a:ln/>
         </p:spPr>
         <p:txBody>
           <a:bodyPr wrap="square" rtlCol="0" anchor="ctr"/>
           <a:lstStyle/>
           <a:p>
-            <a:pPr indent="0" marL="0">
+            <a:pPr marL="0" indent="0">
               <a:buNone/>
             </a:pPr>
             <a:r>
@@ -3348,9 +3530,9 @@
                 <a:solidFill>
                   <a:srgbClr val="C0392B"/>
                 </a:solidFill>
-                <a:latin typeface="Trebuchet MS" pitchFamily="34" charset="0"/>
-                <a:ea typeface="Trebuchet MS" pitchFamily="34" charset="-122"/>
-                <a:cs typeface="Trebuchet MS" pitchFamily="34" charset="-120"/>
+                <a:latin typeface="Trebuchet MS" panose="020B0703020202090204" pitchFamily="34" charset="0"/>
+                <a:ea typeface="Trebuchet MS" panose="020B0703020202090204" pitchFamily="34" charset="-122"/>
+                <a:cs typeface="Trebuchet MS" panose="020B0703020202090204" pitchFamily="34" charset="-120"/>
               </a:rPr>
               <a:t>🔴  High</a:t>
             </a:r>
@@ -3373,13 +3555,12 @@
             <a:avLst/>
           </a:prstGeom>
           <a:noFill/>
-          <a:ln/>
         </p:spPr>
         <p:txBody>
           <a:bodyPr wrap="square" rtlCol="0" anchor="ctr"/>
           <a:lstStyle/>
           <a:p>
-            <a:pPr indent="0" marL="0">
+            <a:pPr marL="0" indent="0">
               <a:buNone/>
             </a:pPr>
             <a:r>
@@ -3407,12 +3588,13 @@
 
 <file path=ppt/slides/slide3.xml><?xml version="1.0" encoding="utf-8"?>
 <p:sld xmlns:a="http://schemas.openxmlformats.org/drawingml/2006/main" xmlns:r="http://schemas.openxmlformats.org/officeDocument/2006/relationships" xmlns:p="http://schemas.openxmlformats.org/presentationml/2006/main">
-  <p:cSld name="Slide 3">
+  <p:cSld>
     <p:bg>
       <p:bgPr>
         <a:solidFill>
           <a:srgbClr val="FFFFFF"/>
         </a:solidFill>
+        <a:effectLst/>
       </p:bgPr>
     </p:bg>
     <p:spTree>
@@ -3494,13 +3676,12 @@
             <a:avLst/>
           </a:prstGeom>
           <a:noFill/>
-          <a:ln/>
         </p:spPr>
         <p:txBody>
           <a:bodyPr wrap="square" rtlCol="0" anchor="ctr"/>
           <a:lstStyle/>
           <a:p>
-            <a:pPr indent="0" marL="0">
+            <a:pPr marL="0" indent="0">
               <a:buNone/>
             </a:pPr>
             <a:r>
@@ -3508,9 +3689,9 @@
                 <a:solidFill>
                   <a:srgbClr val="FFFFFF"/>
                 </a:solidFill>
-                <a:latin typeface="Trebuchet MS" pitchFamily="34" charset="0"/>
-                <a:ea typeface="Trebuchet MS" pitchFamily="34" charset="-122"/>
-                <a:cs typeface="Trebuchet MS" pitchFamily="34" charset="-120"/>
+                <a:latin typeface="Trebuchet MS" panose="020B0703020202090204" pitchFamily="34" charset="0"/>
+                <a:ea typeface="Trebuchet MS" panose="020B0703020202090204" pitchFamily="34" charset="-122"/>
+                <a:cs typeface="Trebuchet MS" panose="020B0703020202090204" pitchFamily="34" charset="-120"/>
               </a:rPr>
               <a:t>Data Collection &amp; Preprocessing</a:t>
             </a:r>
@@ -3533,13 +3714,12 @@
             <a:avLst/>
           </a:prstGeom>
           <a:noFill/>
-          <a:ln/>
         </p:spPr>
         <p:txBody>
           <a:bodyPr wrap="square" rtlCol="0" anchor="ctr"/>
           <a:lstStyle/>
           <a:p>
-            <a:pPr indent="0" marL="0">
+            <a:pPr marL="0" indent="0">
               <a:buNone/>
             </a:pPr>
             <a:r>
@@ -3547,9 +3727,9 @@
                 <a:solidFill>
                   <a:srgbClr val="1A5276"/>
                 </a:solidFill>
-                <a:latin typeface="Trebuchet MS" pitchFamily="34" charset="0"/>
-                <a:ea typeface="Trebuchet MS" pitchFamily="34" charset="-122"/>
-                <a:cs typeface="Trebuchet MS" pitchFamily="34" charset="-120"/>
+                <a:latin typeface="Trebuchet MS" panose="020B0703020202090204" pitchFamily="34" charset="0"/>
+                <a:ea typeface="Trebuchet MS" panose="020B0703020202090204" pitchFamily="34" charset="-122"/>
+                <a:cs typeface="Trebuchet MS" panose="020B0703020202090204" pitchFamily="34" charset="-120"/>
               </a:rPr>
               <a:t>Data Pipeline</a:t>
             </a:r>
@@ -3597,13 +3777,12 @@
             <a:avLst/>
           </a:prstGeom>
           <a:noFill/>
-          <a:ln/>
         </p:spPr>
         <p:txBody>
           <a:bodyPr wrap="square" rtlCol="0" anchor="ctr"/>
           <a:lstStyle/>
           <a:p>
-            <a:pPr algn="ctr" indent="0" marL="0">
+            <a:pPr marL="0" indent="0" algn="ctr">
               <a:buNone/>
             </a:pPr>
             <a:r>
@@ -3611,9 +3790,9 @@
                 <a:solidFill>
                   <a:srgbClr val="FFFFFF"/>
                 </a:solidFill>
-                <a:latin typeface="Trebuchet MS" pitchFamily="34" charset="0"/>
-                <a:ea typeface="Trebuchet MS" pitchFamily="34" charset="-122"/>
-                <a:cs typeface="Trebuchet MS" pitchFamily="34" charset="-120"/>
+                <a:latin typeface="Trebuchet MS" panose="020B0703020202090204" pitchFamily="34" charset="0"/>
+                <a:ea typeface="Trebuchet MS" panose="020B0703020202090204" pitchFamily="34" charset="-122"/>
+                <a:cs typeface="Trebuchet MS" panose="020B0703020202090204" pitchFamily="34" charset="-120"/>
               </a:rPr>
               <a:t>01</a:t>
             </a:r>
@@ -3636,13 +3815,12 @@
             <a:avLst/>
           </a:prstGeom>
           <a:noFill/>
-          <a:ln/>
         </p:spPr>
         <p:txBody>
           <a:bodyPr wrap="square" rtlCol="0" anchor="ctr"/>
           <a:lstStyle/>
           <a:p>
-            <a:pPr indent="0" marL="0">
+            <a:pPr marL="0" indent="0">
               <a:buNone/>
             </a:pPr>
             <a:r>
@@ -3650,9 +3828,9 @@
                 <a:solidFill>
                   <a:srgbClr val="1A5276"/>
                 </a:solidFill>
-                <a:latin typeface="Trebuchet MS" pitchFamily="34" charset="0"/>
-                <a:ea typeface="Trebuchet MS" pitchFamily="34" charset="-122"/>
-                <a:cs typeface="Trebuchet MS" pitchFamily="34" charset="-120"/>
+                <a:latin typeface="Trebuchet MS" panose="020B0703020202090204" pitchFamily="34" charset="0"/>
+                <a:ea typeface="Trebuchet MS" panose="020B0703020202090204" pitchFamily="34" charset="-122"/>
+                <a:cs typeface="Trebuchet MS" panose="020B0703020202090204" pitchFamily="34" charset="-120"/>
               </a:rPr>
               <a:t>USGS API Fetch</a:t>
             </a:r>
@@ -3675,13 +3853,12 @@
             <a:avLst/>
           </a:prstGeom>
           <a:noFill/>
-          <a:ln/>
         </p:spPr>
         <p:txBody>
           <a:bodyPr wrap="square" rtlCol="0" anchor="ctr"/>
           <a:lstStyle/>
           <a:p>
-            <a:pPr indent="0" marL="0">
+            <a:pPr marL="0" indent="0">
               <a:buNone/>
             </a:pPr>
             <a:r>
@@ -3739,13 +3916,12 @@
             <a:avLst/>
           </a:prstGeom>
           <a:noFill/>
-          <a:ln/>
         </p:spPr>
         <p:txBody>
           <a:bodyPr wrap="square" rtlCol="0" anchor="ctr"/>
           <a:lstStyle/>
           <a:p>
-            <a:pPr algn="ctr" indent="0" marL="0">
+            <a:pPr marL="0" indent="0" algn="ctr">
               <a:buNone/>
             </a:pPr>
             <a:r>
@@ -3753,9 +3929,9 @@
                 <a:solidFill>
                   <a:srgbClr val="FFFFFF"/>
                 </a:solidFill>
-                <a:latin typeface="Trebuchet MS" pitchFamily="34" charset="0"/>
-                <a:ea typeface="Trebuchet MS" pitchFamily="34" charset="-122"/>
-                <a:cs typeface="Trebuchet MS" pitchFamily="34" charset="-120"/>
+                <a:latin typeface="Trebuchet MS" panose="020B0703020202090204" pitchFamily="34" charset="0"/>
+                <a:ea typeface="Trebuchet MS" panose="020B0703020202090204" pitchFamily="34" charset="-122"/>
+                <a:cs typeface="Trebuchet MS" panose="020B0703020202090204" pitchFamily="34" charset="-120"/>
               </a:rPr>
               <a:t>02</a:t>
             </a:r>
@@ -3778,13 +3954,12 @@
             <a:avLst/>
           </a:prstGeom>
           <a:noFill/>
-          <a:ln/>
         </p:spPr>
         <p:txBody>
           <a:bodyPr wrap="square" rtlCol="0" anchor="ctr"/>
           <a:lstStyle/>
           <a:p>
-            <a:pPr indent="0" marL="0">
+            <a:pPr marL="0" indent="0">
               <a:buNone/>
             </a:pPr>
             <a:r>
@@ -3792,9 +3967,9 @@
                 <a:solidFill>
                   <a:srgbClr val="1A5276"/>
                 </a:solidFill>
-                <a:latin typeface="Trebuchet MS" pitchFamily="34" charset="0"/>
-                <a:ea typeface="Trebuchet MS" pitchFamily="34" charset="-122"/>
-                <a:cs typeface="Trebuchet MS" pitchFamily="34" charset="-120"/>
+                <a:latin typeface="Trebuchet MS" panose="020B0703020202090204" pitchFamily="34" charset="0"/>
+                <a:ea typeface="Trebuchet MS" panose="020B0703020202090204" pitchFamily="34" charset="-122"/>
+                <a:cs typeface="Trebuchet MS" panose="020B0703020202090204" pitchFamily="34" charset="-120"/>
               </a:rPr>
               <a:t>Feature Engineering</a:t>
             </a:r>
@@ -3817,13 +3992,12 @@
             <a:avLst/>
           </a:prstGeom>
           <a:noFill/>
-          <a:ln/>
         </p:spPr>
         <p:txBody>
           <a:bodyPr wrap="square" rtlCol="0" anchor="ctr"/>
           <a:lstStyle/>
           <a:p>
-            <a:pPr indent="0" marL="0">
+            <a:pPr marL="0" indent="0">
               <a:buNone/>
             </a:pPr>
             <a:r>
@@ -3881,13 +4055,12 @@
             <a:avLst/>
           </a:prstGeom>
           <a:noFill/>
-          <a:ln/>
         </p:spPr>
         <p:txBody>
           <a:bodyPr wrap="square" rtlCol="0" anchor="ctr"/>
           <a:lstStyle/>
           <a:p>
-            <a:pPr algn="ctr" indent="0" marL="0">
+            <a:pPr marL="0" indent="0" algn="ctr">
               <a:buNone/>
             </a:pPr>
             <a:r>
@@ -3895,9 +4068,9 @@
                 <a:solidFill>
                   <a:srgbClr val="FFFFFF"/>
                 </a:solidFill>
-                <a:latin typeface="Trebuchet MS" pitchFamily="34" charset="0"/>
-                <a:ea typeface="Trebuchet MS" pitchFamily="34" charset="-122"/>
-                <a:cs typeface="Trebuchet MS" pitchFamily="34" charset="-120"/>
+                <a:latin typeface="Trebuchet MS" panose="020B0703020202090204" pitchFamily="34" charset="0"/>
+                <a:ea typeface="Trebuchet MS" panose="020B0703020202090204" pitchFamily="34" charset="-122"/>
+                <a:cs typeface="Trebuchet MS" panose="020B0703020202090204" pitchFamily="34" charset="-120"/>
               </a:rPr>
               <a:t>03</a:t>
             </a:r>
@@ -3920,13 +4093,12 @@
             <a:avLst/>
           </a:prstGeom>
           <a:noFill/>
-          <a:ln/>
         </p:spPr>
         <p:txBody>
           <a:bodyPr wrap="square" rtlCol="0" anchor="ctr"/>
           <a:lstStyle/>
           <a:p>
-            <a:pPr indent="0" marL="0">
+            <a:pPr marL="0" indent="0">
               <a:buNone/>
             </a:pPr>
             <a:r>
@@ -3934,9 +4106,9 @@
                 <a:solidFill>
                   <a:srgbClr val="1A5276"/>
                 </a:solidFill>
-                <a:latin typeface="Trebuchet MS" pitchFamily="34" charset="0"/>
-                <a:ea typeface="Trebuchet MS" pitchFamily="34" charset="-122"/>
-                <a:cs typeface="Trebuchet MS" pitchFamily="34" charset="-120"/>
+                <a:latin typeface="Trebuchet MS" panose="020B0703020202090204" pitchFamily="34" charset="0"/>
+                <a:ea typeface="Trebuchet MS" panose="020B0703020202090204" pitchFamily="34" charset="-122"/>
+                <a:cs typeface="Trebuchet MS" panose="020B0703020202090204" pitchFamily="34" charset="-120"/>
               </a:rPr>
               <a:t>Hazard Labeling</a:t>
             </a:r>
@@ -3959,13 +4131,12 @@
             <a:avLst/>
           </a:prstGeom>
           <a:noFill/>
-          <a:ln/>
         </p:spPr>
         <p:txBody>
           <a:bodyPr wrap="square" rtlCol="0" anchor="ctr"/>
           <a:lstStyle/>
           <a:p>
-            <a:pPr indent="0" marL="0">
+            <a:pPr marL="0" indent="0">
               <a:buNone/>
             </a:pPr>
             <a:r>
@@ -4023,13 +4194,12 @@
             <a:avLst/>
           </a:prstGeom>
           <a:noFill/>
-          <a:ln/>
         </p:spPr>
         <p:txBody>
           <a:bodyPr wrap="square" rtlCol="0" anchor="ctr"/>
           <a:lstStyle/>
           <a:p>
-            <a:pPr algn="ctr" indent="0" marL="0">
+            <a:pPr marL="0" indent="0" algn="ctr">
               <a:buNone/>
             </a:pPr>
             <a:r>
@@ -4037,9 +4207,9 @@
                 <a:solidFill>
                   <a:srgbClr val="FFFFFF"/>
                 </a:solidFill>
-                <a:latin typeface="Trebuchet MS" pitchFamily="34" charset="0"/>
-                <a:ea typeface="Trebuchet MS" pitchFamily="34" charset="-122"/>
-                <a:cs typeface="Trebuchet MS" pitchFamily="34" charset="-120"/>
+                <a:latin typeface="Trebuchet MS" panose="020B0703020202090204" pitchFamily="34" charset="0"/>
+                <a:ea typeface="Trebuchet MS" panose="020B0703020202090204" pitchFamily="34" charset="-122"/>
+                <a:cs typeface="Trebuchet MS" panose="020B0703020202090204" pitchFamily="34" charset="-120"/>
               </a:rPr>
               <a:t>04</a:t>
             </a:r>
@@ -4062,13 +4232,12 @@
             <a:avLst/>
           </a:prstGeom>
           <a:noFill/>
-          <a:ln/>
         </p:spPr>
         <p:txBody>
           <a:bodyPr wrap="square" rtlCol="0" anchor="ctr"/>
           <a:lstStyle/>
           <a:p>
-            <a:pPr indent="0" marL="0">
+            <a:pPr marL="0" indent="0">
               <a:buNone/>
             </a:pPr>
             <a:r>
@@ -4076,9 +4245,9 @@
                 <a:solidFill>
                   <a:srgbClr val="1A5276"/>
                 </a:solidFill>
-                <a:latin typeface="Trebuchet MS" pitchFamily="34" charset="0"/>
-                <a:ea typeface="Trebuchet MS" pitchFamily="34" charset="-122"/>
-                <a:cs typeface="Trebuchet MS" pitchFamily="34" charset="-120"/>
+                <a:latin typeface="Trebuchet MS" panose="020B0703020202090204" pitchFamily="34" charset="0"/>
+                <a:ea typeface="Trebuchet MS" panose="020B0703020202090204" pitchFamily="34" charset="-122"/>
+                <a:cs typeface="Trebuchet MS" panose="020B0703020202090204" pitchFamily="34" charset="-120"/>
               </a:rPr>
               <a:t>Stratified CV Split</a:t>
             </a:r>
@@ -4101,13 +4270,12 @@
             <a:avLst/>
           </a:prstGeom>
           <a:noFill/>
-          <a:ln/>
         </p:spPr>
         <p:txBody>
           <a:bodyPr wrap="square" rtlCol="0" anchor="ctr"/>
           <a:lstStyle/>
           <a:p>
-            <a:pPr indent="0" marL="0">
+            <a:pPr marL="0" indent="0">
               <a:buNone/>
             </a:pPr>
             <a:r>
@@ -4140,13 +4308,12 @@
             <a:avLst/>
           </a:prstGeom>
           <a:noFill/>
-          <a:ln/>
         </p:spPr>
         <p:txBody>
           <a:bodyPr wrap="square" rtlCol="0" anchor="ctr"/>
           <a:lstStyle/>
           <a:p>
-            <a:pPr indent="0" marL="0">
+            <a:pPr marL="0" indent="0">
               <a:buNone/>
             </a:pPr>
             <a:r>
@@ -4154,9 +4321,9 @@
                 <a:solidFill>
                   <a:srgbClr val="1A5276"/>
                 </a:solidFill>
-                <a:latin typeface="Trebuchet MS" pitchFamily="34" charset="0"/>
-                <a:ea typeface="Trebuchet MS" pitchFamily="34" charset="-122"/>
-                <a:cs typeface="Trebuchet MS" pitchFamily="34" charset="-120"/>
+                <a:latin typeface="Trebuchet MS" panose="020B0703020202090204" pitchFamily="34" charset="0"/>
+                <a:ea typeface="Trebuchet MS" panose="020B0703020202090204" pitchFamily="34" charset="-122"/>
+                <a:cs typeface="Trebuchet MS" panose="020B0703020202090204" pitchFamily="34" charset="-120"/>
               </a:rPr>
               <a:t>Class Distribution</a:t>
             </a:r>
@@ -4166,7 +4333,7 @@
       </p:sp>
       <p:graphicFrame>
         <p:nvGraphicFramePr>
-          <p:cNvPr id="23" name="Chart 0" descr=""/>
+          <p:cNvPr id="23" name="Chart 0"/>
           <p:cNvGraphicFramePr/>
           <p:nvPr/>
         </p:nvGraphicFramePr>
@@ -4174,22 +4341,22 @@
           <a:off x="4754880" y="1188720"/>
           <a:ext cx="4114800" cy="2926080"/>
         </p:xfrm>
-        <a:graphic xmlns:a="http://schemas.openxmlformats.org/drawingml/2006/main">
+        <a:graphic>
           <a:graphicData uri="http://schemas.openxmlformats.org/drawingml/2006/chart">
-            <c:chart xmlns:c="http://schemas.openxmlformats.org/drawingml/2006/chart" r:id="rId1"/>
+            <c:chart xmlns:c="http://schemas.openxmlformats.org/drawingml/2006/chart" xmlns:r="http://schemas.openxmlformats.org/officeDocument/2006/relationships" r:id="rId1"/>
           </a:graphicData>
         </a:graphic>
       </p:graphicFrame>
       <p:sp>
         <p:nvSpPr>
-          <p:cNvPr id="24" name="Shape 21"/>
-          <p:cNvSpPr/>
-          <p:nvPr/>
-        </p:nvSpPr>
-        <p:spPr>
-          <a:xfrm>
-            <a:off x="4754880" y="4187952"/>
-            <a:ext cx="4114800" cy="658368"/>
+          <p:cNvPr id="26" name="Shape 21"/>
+          <p:cNvSpPr/>
+          <p:nvPr/>
+        </p:nvSpPr>
+        <p:spPr>
+          <a:xfrm>
+            <a:off x="4663440" y="4315968"/>
+            <a:ext cx="4206240" cy="512064"/>
           </a:xfrm>
           <a:prstGeom prst="rect">
             <a:avLst/>
@@ -4199,7 +4366,7 @@
           </a:solidFill>
           <a:ln w="12700">
             <a:solidFill>
-              <a:srgbClr val="D68910"/>
+              <a:srgbClr val="D4800A"/>
             </a:solidFill>
             <a:prstDash val="solid"/>
           </a:ln>
@@ -4207,57 +4374,38 @@
       </p:sp>
       <p:sp>
         <p:nvSpPr>
-          <p:cNvPr id="25" name="Text 22"/>
-          <p:cNvSpPr/>
-          <p:nvPr/>
-        </p:nvSpPr>
-        <p:spPr>
-          <a:xfrm>
-            <a:off x="4892040" y="4224528"/>
-            <a:ext cx="3840480" cy="566928"/>
-          </a:xfrm>
-          <a:prstGeom prst="rect">
-            <a:avLst/>
-          </a:prstGeom>
-          <a:noFill/>
-          <a:ln/>
+          <p:cNvPr id="27" name="Text 22"/>
+          <p:cNvSpPr/>
+          <p:nvPr/>
+        </p:nvSpPr>
+        <p:spPr>
+          <a:xfrm>
+            <a:off x="4754880" y="4343400"/>
+            <a:ext cx="4023360" cy="457200"/>
+          </a:xfrm>
+          <a:prstGeom prst="rect">
+            <a:avLst/>
+          </a:prstGeom>
+          <a:noFill/>
         </p:spPr>
         <p:txBody>
           <a:bodyPr wrap="square" rtlCol="0" anchor="ctr"/>
-          <a:lstStyle/>
-          <a:p>
-            <a:pPr indent="0" marL="0">
-              <a:buNone/>
-            </a:pPr>
-            <a:r>
-              <a:rPr lang="en-US" sz="1300" dirty="0">
-                <a:solidFill>
-                  <a:srgbClr val="1A1A2A"/>
+          <a:p>
+            <a:pPr marL="0" indent="0">
+              <a:buNone/>
+            </a:pPr>
+            <a:r>
+              <a:rPr lang="en-US" sz="1200" dirty="0">
+                <a:solidFill>
+                  <a:srgbClr val="7D6608"/>
                 </a:solidFill>
                 <a:latin typeface="Calibri" pitchFamily="34" charset="0"/>
                 <a:ea typeface="Calibri" pitchFamily="34" charset="-122"/>
                 <a:cs typeface="Calibri" pitchFamily="34" charset="-120"/>
               </a:rPr>
-              <a:t>⚠️  High class: only 7 records (M≥6.0 events are rare).</a:t>
-            </a:r>
-            <a:endParaRPr lang="en-US" sz="1300" dirty="0"/>
-          </a:p>
-          <a:p>
-            <a:pPr indent="0" marL="0">
-              <a:buNone/>
-            </a:pPr>
-            <a:r>
-              <a:rPr lang="en-US" sz="1300" dirty="0">
-                <a:solidFill>
-                  <a:srgbClr val="1A1A2A"/>
-                </a:solidFill>
-                <a:latin typeface="Calibri" pitchFamily="34" charset="0"/>
-                <a:ea typeface="Calibri" pitchFamily="34" charset="-122"/>
-                <a:cs typeface="Calibri" pitchFamily="34" charset="-120"/>
-              </a:rPr>
-              <a:t>Handled with balanced sample weights in training.</a:t>
-            </a:r>
-            <a:endParaRPr lang="en-US" sz="1300" dirty="0"/>
+              <a:t>⚠️  High class: only 7 records (M≥6.0 events are rare). Handled with balanced sample weights in training.</a:t>
+            </a:r>
+            <a:endParaRPr lang="en-US" sz="1200" dirty="0"/>
           </a:p>
         </p:txBody>
       </p:sp>
@@ -4271,12 +4419,13 @@
 
 <file path=ppt/slides/slide4.xml><?xml version="1.0" encoding="utf-8"?>
 <p:sld xmlns:a="http://schemas.openxmlformats.org/drawingml/2006/main" xmlns:r="http://schemas.openxmlformats.org/officeDocument/2006/relationships" xmlns:p="http://schemas.openxmlformats.org/presentationml/2006/main">
-  <p:cSld name="Slide 4">
+  <p:cSld>
     <p:bg>
       <p:bgPr>
         <a:solidFill>
           <a:srgbClr val="FFFFFF"/>
         </a:solidFill>
+        <a:effectLst/>
       </p:bgPr>
     </p:bg>
     <p:spTree>
@@ -4358,13 +4507,12 @@
             <a:avLst/>
           </a:prstGeom>
           <a:noFill/>
-          <a:ln/>
         </p:spPr>
         <p:txBody>
           <a:bodyPr wrap="square" rtlCol="0" anchor="ctr"/>
           <a:lstStyle/>
           <a:p>
-            <a:pPr indent="0" marL="0">
+            <a:pPr marL="0" indent="0">
               <a:buNone/>
             </a:pPr>
             <a:r>
@@ -4372,9 +4520,9 @@
                 <a:solidFill>
                   <a:srgbClr val="FFFFFF"/>
                 </a:solidFill>
-                <a:latin typeface="Trebuchet MS" pitchFamily="34" charset="0"/>
-                <a:ea typeface="Trebuchet MS" pitchFamily="34" charset="-122"/>
-                <a:cs typeface="Trebuchet MS" pitchFamily="34" charset="-120"/>
+                <a:latin typeface="Trebuchet MS" panose="020B0703020202090204" pitchFamily="34" charset="0"/>
+                <a:ea typeface="Trebuchet MS" panose="020B0703020202090204" pitchFamily="34" charset="-122"/>
+                <a:cs typeface="Trebuchet MS" panose="020B0703020202090204" pitchFamily="34" charset="-120"/>
               </a:rPr>
               <a:t>Model Development &amp; Evaluation</a:t>
             </a:r>
@@ -4397,13 +4545,12 @@
             <a:avLst/>
           </a:prstGeom>
           <a:noFill/>
-          <a:ln/>
         </p:spPr>
         <p:txBody>
           <a:bodyPr wrap="square" rtlCol="0" anchor="ctr"/>
           <a:lstStyle/>
           <a:p>
-            <a:pPr algn="ctr" indent="0" marL="0">
+            <a:pPr marL="0" indent="0" algn="ctr">
               <a:buNone/>
             </a:pPr>
             <a:r>
@@ -4411,9 +4558,9 @@
                 <a:solidFill>
                   <a:srgbClr val="1A5276"/>
                 </a:solidFill>
-                <a:latin typeface="Trebuchet MS" pitchFamily="34" charset="0"/>
-                <a:ea typeface="Trebuchet MS" pitchFamily="34" charset="-122"/>
-                <a:cs typeface="Trebuchet MS" pitchFamily="34" charset="-120"/>
+                <a:latin typeface="Trebuchet MS" panose="020B0703020202090204" pitchFamily="34" charset="0"/>
+                <a:ea typeface="Trebuchet MS" panose="020B0703020202090204" pitchFamily="34" charset="-122"/>
+                <a:cs typeface="Trebuchet MS" panose="020B0703020202090204" pitchFamily="34" charset="-120"/>
               </a:rPr>
               <a:t>5-Fold Cross-Validation Results</a:t>
             </a:r>
@@ -4423,17 +4570,17 @@
       </p:sp>
       <p:graphicFrame>
         <p:nvGraphicFramePr>
-          <p:cNvPr id="6" name="Chart 0" descr=""/>
+          <p:cNvPr id="6" name="Chart 0"/>
           <p:cNvGraphicFramePr/>
           <p:nvPr/>
         </p:nvGraphicFramePr>
         <p:xfrm>
-          <a:off x="274320" y="1261872"/>
+          <a:off x="227965" y="1271397"/>
           <a:ext cx="5486400" cy="3611880"/>
         </p:xfrm>
-        <a:graphic xmlns:a="http://schemas.openxmlformats.org/drawingml/2006/main">
+        <a:graphic>
           <a:graphicData uri="http://schemas.openxmlformats.org/drawingml/2006/chart">
-            <c:chart xmlns:c="http://schemas.openxmlformats.org/drawingml/2006/chart" r:id="rId1"/>
+            <c:chart xmlns:c="http://schemas.openxmlformats.org/drawingml/2006/chart" xmlns:r="http://schemas.openxmlformats.org/officeDocument/2006/relationships" r:id="rId1"/>
           </a:graphicData>
         </a:graphic>
       </p:graphicFrame>
@@ -4461,7 +4608,7 @@
             <a:prstDash val="solid"/>
           </a:ln>
           <a:effectLst>
-            <a:outerShdw sx="100000" sy="100000" kx="0" ky="0" algn="bl" rotWithShape="0" blurRad="127000" dist="38100" dir="8100000">
+            <a:outerShdw blurRad="127000" dist="38100" dir="8100000" algn="bl" rotWithShape="0">
               <a:srgbClr val="000000">
                 <a:alpha val="10000"/>
               </a:srgbClr>
@@ -4484,13 +4631,12 @@
             <a:avLst/>
           </a:prstGeom>
           <a:noFill/>
-          <a:ln/>
         </p:spPr>
         <p:txBody>
           <a:bodyPr wrap="square" rtlCol="0" anchor="ctr"/>
           <a:lstStyle/>
           <a:p>
-            <a:pPr indent="0" marL="0">
+            <a:pPr marL="0" indent="0">
               <a:buNone/>
             </a:pPr>
             <a:r>
@@ -4498,9 +4644,9 @@
                 <a:solidFill>
                   <a:srgbClr val="D68910"/>
                 </a:solidFill>
-                <a:latin typeface="Trebuchet MS" pitchFamily="34" charset="0"/>
-                <a:ea typeface="Trebuchet MS" pitchFamily="34" charset="-122"/>
-                <a:cs typeface="Trebuchet MS" pitchFamily="34" charset="-120"/>
+                <a:latin typeface="Trebuchet MS" panose="020B0703020202090204" pitchFamily="34" charset="0"/>
+                <a:ea typeface="Trebuchet MS" panose="020B0703020202090204" pitchFamily="34" charset="-122"/>
+                <a:cs typeface="Trebuchet MS" panose="020B0703020202090204" pitchFamily="34" charset="-120"/>
               </a:rPr>
               <a:t>🏆  Best Model</a:t>
             </a:r>
@@ -4523,13 +4669,12 @@
             <a:avLst/>
           </a:prstGeom>
           <a:noFill/>
-          <a:ln/>
         </p:spPr>
         <p:txBody>
           <a:bodyPr wrap="square" rtlCol="0" anchor="ctr"/>
           <a:lstStyle/>
           <a:p>
-            <a:pPr algn="ctr" indent="0" marL="0">
+            <a:pPr marL="0" indent="0" algn="ctr">
               <a:buNone/>
             </a:pPr>
             <a:r>
@@ -4537,9 +4682,9 @@
                 <a:solidFill>
                   <a:srgbClr val="1A5276"/>
                 </a:solidFill>
-                <a:latin typeface="Trebuchet MS" pitchFamily="34" charset="0"/>
-                <a:ea typeface="Trebuchet MS" pitchFamily="34" charset="-122"/>
-                <a:cs typeface="Trebuchet MS" pitchFamily="34" charset="-120"/>
+                <a:latin typeface="Trebuchet MS" panose="020B0703020202090204" pitchFamily="34" charset="0"/>
+                <a:ea typeface="Trebuchet MS" panose="020B0703020202090204" pitchFamily="34" charset="-122"/>
+                <a:cs typeface="Trebuchet MS" panose="020B0703020202090204" pitchFamily="34" charset="-120"/>
               </a:rPr>
               <a:t>XGBoost</a:t>
             </a:r>
@@ -4562,13 +4707,12 @@
             <a:avLst/>
           </a:prstGeom>
           <a:noFill/>
-          <a:ln/>
         </p:spPr>
         <p:txBody>
           <a:bodyPr wrap="square" rtlCol="0" anchor="ctr"/>
           <a:lstStyle/>
           <a:p>
-            <a:pPr algn="ctr" indent="0" marL="0">
+            <a:pPr marL="0" indent="0" algn="ctr">
               <a:buNone/>
             </a:pPr>
             <a:r>
@@ -4601,13 +4745,12 @@
             <a:avLst/>
           </a:prstGeom>
           <a:noFill/>
-          <a:ln/>
         </p:spPr>
         <p:txBody>
           <a:bodyPr wrap="square" rtlCol="0" anchor="ctr"/>
           <a:lstStyle/>
           <a:p>
-            <a:pPr algn="ctr" indent="0" marL="0">
+            <a:pPr marL="0" indent="0" algn="ctr">
               <a:buNone/>
             </a:pPr>
             <a:r>
@@ -4640,13 +4783,12 @@
             <a:avLst/>
           </a:prstGeom>
           <a:noFill/>
-          <a:ln/>
         </p:spPr>
         <p:txBody>
           <a:bodyPr wrap="square" rtlCol="0" anchor="ctr"/>
           <a:lstStyle/>
           <a:p>
-            <a:pPr indent="0" marL="0">
+            <a:pPr marL="0" indent="0">
               <a:buNone/>
             </a:pPr>
             <a:r>
@@ -4654,9 +4796,9 @@
                 <a:solidFill>
                   <a:srgbClr val="1A5276"/>
                 </a:solidFill>
-                <a:latin typeface="Trebuchet MS" pitchFamily="34" charset="0"/>
-                <a:ea typeface="Trebuchet MS" pitchFamily="34" charset="-122"/>
-                <a:cs typeface="Trebuchet MS" pitchFamily="34" charset="-120"/>
+                <a:latin typeface="Trebuchet MS" panose="020B0703020202090204" pitchFamily="34" charset="0"/>
+                <a:ea typeface="Trebuchet MS" panose="020B0703020202090204" pitchFamily="34" charset="-122"/>
+                <a:cs typeface="Trebuchet MS" panose="020B0703020202090204" pitchFamily="34" charset="-120"/>
               </a:rPr>
               <a:t>Feature Importance</a:t>
             </a:r>
@@ -4679,13 +4821,12 @@
             <a:avLst/>
           </a:prstGeom>
           <a:noFill/>
-          <a:ln/>
         </p:spPr>
         <p:txBody>
           <a:bodyPr wrap="square" rtlCol="0" anchor="ctr"/>
           <a:lstStyle/>
           <a:p>
-            <a:pPr algn="r" indent="0" marL="0">
+            <a:pPr marL="0" indent="0" algn="r">
               <a:buNone/>
             </a:pPr>
             <a:r>
@@ -4743,13 +4884,12 @@
             <a:avLst/>
           </a:prstGeom>
           <a:noFill/>
-          <a:ln/>
         </p:spPr>
         <p:txBody>
           <a:bodyPr wrap="square" rtlCol="0" anchor="ctr"/>
           <a:lstStyle/>
           <a:p>
-            <a:pPr indent="0" marL="0">
+            <a:pPr marL="0" indent="0">
               <a:buNone/>
             </a:pPr>
             <a:r>
@@ -4782,13 +4922,12 @@
             <a:avLst/>
           </a:prstGeom>
           <a:noFill/>
-          <a:ln/>
         </p:spPr>
         <p:txBody>
           <a:bodyPr wrap="square" rtlCol="0" anchor="ctr"/>
           <a:lstStyle/>
           <a:p>
-            <a:pPr algn="r" indent="0" marL="0">
+            <a:pPr marL="0" indent="0" algn="r">
               <a:buNone/>
             </a:pPr>
             <a:r>
@@ -4846,13 +4985,12 @@
             <a:avLst/>
           </a:prstGeom>
           <a:noFill/>
-          <a:ln/>
         </p:spPr>
         <p:txBody>
           <a:bodyPr wrap="square" rtlCol="0" anchor="ctr"/>
           <a:lstStyle/>
           <a:p>
-            <a:pPr indent="0" marL="0">
+            <a:pPr marL="0" indent="0">
               <a:buNone/>
             </a:pPr>
             <a:r>
@@ -4885,13 +5023,12 @@
             <a:avLst/>
           </a:prstGeom>
           <a:noFill/>
-          <a:ln/>
         </p:spPr>
         <p:txBody>
           <a:bodyPr wrap="square" rtlCol="0" anchor="ctr"/>
           <a:lstStyle/>
           <a:p>
-            <a:pPr algn="r" indent="0" marL="0">
+            <a:pPr marL="0" indent="0" algn="r">
               <a:buNone/>
             </a:pPr>
             <a:r>
@@ -4949,13 +5086,12 @@
             <a:avLst/>
           </a:prstGeom>
           <a:noFill/>
-          <a:ln/>
         </p:spPr>
         <p:txBody>
           <a:bodyPr wrap="square" rtlCol="0" anchor="ctr"/>
           <a:lstStyle/>
           <a:p>
-            <a:pPr indent="0" marL="0">
+            <a:pPr marL="0" indent="0">
               <a:buNone/>
             </a:pPr>
             <a:r>
@@ -4988,13 +5124,12 @@
             <a:avLst/>
           </a:prstGeom>
           <a:noFill/>
-          <a:ln/>
         </p:spPr>
         <p:txBody>
           <a:bodyPr wrap="square" rtlCol="0" anchor="ctr"/>
           <a:lstStyle/>
           <a:p>
-            <a:pPr algn="r" indent="0" marL="0">
+            <a:pPr marL="0" indent="0" algn="r">
               <a:buNone/>
             </a:pPr>
             <a:r>
@@ -5052,13 +5187,12 @@
             <a:avLst/>
           </a:prstGeom>
           <a:noFill/>
-          <a:ln/>
         </p:spPr>
         <p:txBody>
           <a:bodyPr wrap="square" rtlCol="0" anchor="ctr"/>
           <a:lstStyle/>
           <a:p>
-            <a:pPr indent="0" marL="0">
+            <a:pPr marL="0" indent="0">
               <a:buNone/>
             </a:pPr>
             <a:r>
@@ -5091,13 +5225,12 @@
             <a:avLst/>
           </a:prstGeom>
           <a:noFill/>
-          <a:ln/>
         </p:spPr>
         <p:txBody>
           <a:bodyPr wrap="square" rtlCol="0" anchor="ctr"/>
           <a:lstStyle/>
           <a:p>
-            <a:pPr algn="r" indent="0" marL="0">
+            <a:pPr marL="0" indent="0" algn="r">
               <a:buNone/>
             </a:pPr>
             <a:r>
@@ -5155,13 +5288,12 @@
             <a:avLst/>
           </a:prstGeom>
           <a:noFill/>
-          <a:ln/>
         </p:spPr>
         <p:txBody>
           <a:bodyPr wrap="square" rtlCol="0" anchor="ctr"/>
           <a:lstStyle/>
           <a:p>
-            <a:pPr indent="0" marL="0">
+            <a:pPr marL="0" indent="0">
               <a:buNone/>
             </a:pPr>
             <a:r>
@@ -5174,6 +5306,190 @@
                 <a:cs typeface="Calibri" pitchFamily="34" charset="-120"/>
               </a:rPr>
               <a:t>2%</a:t>
+            </a:r>
+            <a:endParaRPr lang="en-US" sz="1100" dirty="0"/>
+          </a:p>
+        </p:txBody>
+      </p:sp>
+      <p:sp>
+        <p:nvSpPr>
+          <p:cNvPr id="33" name="Shape 3"/>
+          <p:cNvSpPr/>
+          <p:nvPr/>
+        </p:nvSpPr>
+        <p:spPr>
+          <a:xfrm>
+            <a:off x="5897880" y="868680"/>
+            <a:ext cx="2926080" cy="1737360"/>
+          </a:xfrm>
+          <a:prstGeom prst="rect">
+            <a:avLst/>
+          </a:prstGeom>
+          <a:solidFill>
+            <a:srgbClr val="EAF4FB"/>
+          </a:solidFill>
+          <a:ln w="12700">
+            <a:solidFill>
+              <a:srgbClr val="B2D8F0"/>
+            </a:solidFill>
+            <a:prstDash val="solid"/>
+          </a:ln>
+          <a:effectLst>
+            <a:outerShdw blurRad="127000" dist="38100" dir="8100000" algn="bl" rotWithShape="0">
+              <a:srgbClr val="000000">
+                <a:alpha val="10000"/>
+              </a:srgbClr>
+            </a:outerShdw>
+          </a:effectLst>
+        </p:spPr>
+      </p:sp>
+      <p:sp>
+        <p:nvSpPr>
+          <p:cNvPr id="34" name="Text 4"/>
+          <p:cNvSpPr/>
+          <p:nvPr/>
+        </p:nvSpPr>
+        <p:spPr>
+          <a:xfrm>
+            <a:off x="5989320" y="914400"/>
+            <a:ext cx="2743200" cy="384048"/>
+          </a:xfrm>
+          <a:prstGeom prst="rect">
+            <a:avLst/>
+          </a:prstGeom>
+          <a:noFill/>
+        </p:spPr>
+        <p:txBody>
+          <a:bodyPr wrap="square" rtlCol="0" anchor="ctr"/>
+          <a:lstStyle/>
+          <a:p>
+            <a:pPr marL="0" indent="0">
+              <a:buNone/>
+            </a:pPr>
+            <a:r>
+              <a:rPr lang="en-US" sz="1600" b="1" dirty="0">
+                <a:solidFill>
+                  <a:srgbClr val="1A5276"/>
+                </a:solidFill>
+                <a:latin typeface="Trebuchet MS" panose="020B0703020202090204" pitchFamily="34" charset="0"/>
+                <a:ea typeface="Trebuchet MS" panose="020B0703020202090204" pitchFamily="34" charset="-122"/>
+                <a:cs typeface="Trebuchet MS" panose="020B0703020202090204" pitchFamily="34" charset="-120"/>
+              </a:rPr>
+              <a:t>🏆  Best Model</a:t>
+            </a:r>
+            <a:endParaRPr lang="en-US" sz="1600" dirty="0"/>
+          </a:p>
+        </p:txBody>
+      </p:sp>
+      <p:sp>
+        <p:nvSpPr>
+          <p:cNvPr id="35" name="Text 5"/>
+          <p:cNvSpPr/>
+          <p:nvPr/>
+        </p:nvSpPr>
+        <p:spPr>
+          <a:xfrm>
+            <a:off x="5989320" y="1280160"/>
+            <a:ext cx="2743200" cy="530352"/>
+          </a:xfrm>
+          <a:prstGeom prst="rect">
+            <a:avLst/>
+          </a:prstGeom>
+          <a:noFill/>
+        </p:spPr>
+        <p:txBody>
+          <a:bodyPr wrap="square" rtlCol="0" anchor="ctr"/>
+          <a:lstStyle/>
+          <a:p>
+            <a:pPr marL="0" indent="0" algn="ctr">
+              <a:buNone/>
+            </a:pPr>
+            <a:r>
+              <a:rPr lang="en-US" sz="3400" b="1" dirty="0">
+                <a:solidFill>
+                  <a:srgbClr val="0D9488"/>
+                </a:solidFill>
+                <a:latin typeface="Trebuchet MS" panose="020B0703020202090204" pitchFamily="34" charset="0"/>
+                <a:ea typeface="Trebuchet MS" panose="020B0703020202090204" pitchFamily="34" charset="-122"/>
+                <a:cs typeface="Trebuchet MS" panose="020B0703020202090204" pitchFamily="34" charset="-120"/>
+              </a:rPr>
+              <a:t>XGBoost</a:t>
+            </a:r>
+            <a:endParaRPr lang="en-US" sz="3400" dirty="0"/>
+          </a:p>
+        </p:txBody>
+      </p:sp>
+      <p:sp>
+        <p:nvSpPr>
+          <p:cNvPr id="36" name="Text 6"/>
+          <p:cNvSpPr/>
+          <p:nvPr/>
+        </p:nvSpPr>
+        <p:spPr>
+          <a:xfrm>
+            <a:off x="5989320" y="1792224"/>
+            <a:ext cx="2743200" cy="310896"/>
+          </a:xfrm>
+          <a:prstGeom prst="rect">
+            <a:avLst/>
+          </a:prstGeom>
+          <a:noFill/>
+        </p:spPr>
+        <p:txBody>
+          <a:bodyPr wrap="square" rtlCol="0" anchor="ctr"/>
+          <a:lstStyle/>
+          <a:p>
+            <a:pPr marL="0" indent="0" algn="ctr">
+              <a:buNone/>
+            </a:pPr>
+            <a:r>
+              <a:rPr lang="en-US" sz="1200" dirty="0">
+                <a:solidFill>
+                  <a:srgbClr val="4A6274"/>
+                </a:solidFill>
+                <a:latin typeface="Calibri" pitchFamily="34" charset="0"/>
+                <a:ea typeface="Calibri" pitchFamily="34" charset="-122"/>
+                <a:cs typeface="Calibri" pitchFamily="34" charset="-120"/>
+              </a:rPr>
+              <a:t>Accuracy 99.95%  ·  Macro F1 1.00</a:t>
+            </a:r>
+            <a:endParaRPr lang="en-US" sz="1200" dirty="0"/>
+          </a:p>
+        </p:txBody>
+      </p:sp>
+      <p:sp>
+        <p:nvSpPr>
+          <p:cNvPr id="37" name="Text 7"/>
+          <p:cNvSpPr/>
+          <p:nvPr/>
+        </p:nvSpPr>
+        <p:spPr>
+          <a:xfrm>
+            <a:off x="5989320" y="2084832"/>
+            <a:ext cx="2743200" cy="402336"/>
+          </a:xfrm>
+          <a:prstGeom prst="rect">
+            <a:avLst/>
+          </a:prstGeom>
+          <a:noFill/>
+        </p:spPr>
+        <p:txBody>
+          <a:bodyPr wrap="square" rtlCol="0" anchor="ctr"/>
+          <a:lstStyle/>
+          <a:p>
+            <a:pPr marL="0" indent="0" algn="ctr">
+              <a:buNone/>
+            </a:pPr>
+            <a:r>
+              <a:rPr lang="en-US" sz="1100" i="1" dirty="0">
+                <a:solidFill>
+                  <a:srgbClr val="4A6274"/>
+                </a:solidFill>
+                <a:latin typeface="Calibri" pitchFamily="34" charset="0"/>
+                <a:ea typeface="Calibri" pitchFamily="34" charset="-122"/>
+                <a:cs typeface="Calibri" pitchFamily="34" charset="-120"/>
+              </a:rPr>
+              <a:t>300 trees · depth 6 · lr 0.05 · sample_weight balanced</a:t>
             </a:r>
             <a:endParaRPr lang="en-US" sz="1100" dirty="0"/>
           </a:p>
@@ -5189,12 +5505,13 @@
 
 <file path=ppt/slides/slide5.xml><?xml version="1.0" encoding="utf-8"?>
 <p:sld xmlns:a="http://schemas.openxmlformats.org/drawingml/2006/main" xmlns:r="http://schemas.openxmlformats.org/officeDocument/2006/relationships" xmlns:p="http://schemas.openxmlformats.org/presentationml/2006/main">
-  <p:cSld name="Slide 5">
+  <p:cSld>
     <p:bg>
       <p:bgPr>
         <a:solidFill>
           <a:srgbClr val="FFFFFF"/>
         </a:solidFill>
+        <a:effectLst/>
       </p:bgPr>
     </p:bg>
     <p:spTree>
@@ -5276,13 +5593,12 @@
             <a:avLst/>
           </a:prstGeom>
           <a:noFill/>
-          <a:ln/>
         </p:spPr>
         <p:txBody>
           <a:bodyPr wrap="square" rtlCol="0" anchor="ctr"/>
           <a:lstStyle/>
           <a:p>
-            <a:pPr indent="0" marL="0">
+            <a:pPr marL="0" indent="0">
               <a:buNone/>
             </a:pPr>
             <a:r>
@@ -5290,9 +5606,9 @@
                 <a:solidFill>
                   <a:srgbClr val="FFFFFF"/>
                 </a:solidFill>
-                <a:latin typeface="Trebuchet MS" pitchFamily="34" charset="0"/>
-                <a:ea typeface="Trebuchet MS" pitchFamily="34" charset="-122"/>
-                <a:cs typeface="Trebuchet MS" pitchFamily="34" charset="-120"/>
+                <a:latin typeface="Trebuchet MS" panose="020B0703020202090204" pitchFamily="34" charset="0"/>
+                <a:ea typeface="Trebuchet MS" panose="020B0703020202090204" pitchFamily="34" charset="-122"/>
+                <a:cs typeface="Trebuchet MS" panose="020B0703020202090204" pitchFamily="34" charset="-120"/>
               </a:rPr>
               <a:t>Solution Architecture</a:t>
             </a:r>
@@ -5302,7 +5618,7 @@
       </p:sp>
       <p:pic>
         <p:nvPicPr>
-          <p:cNvPr id="5" name="Image 0" descr="/Users/biubiu/Desktop/EarthSafe/data/processed/fig_architecture.png">    </p:cNvPr>
+          <p:cNvPr id="5" name="Image 0" descr="/Users/biubiu/Desktop/EarthSafe/data/processed/fig_architecture.png"/>
           <p:cNvPicPr>
             <a:picLocks noChangeAspect="1"/>
           </p:cNvPicPr>
@@ -5310,20 +5626,469 @@
         </p:nvPicPr>
         <p:blipFill>
           <a:blip r:embed="rId1"/>
+          <a:srcRect t="14445"/>
           <a:stretch>
             <a:fillRect/>
           </a:stretch>
         </p:blipFill>
         <p:spPr>
           <a:xfrm>
-            <a:off x="274320" y="822960"/>
-            <a:ext cx="8595360" cy="4334256"/>
+            <a:off x="320040" y="973455"/>
+            <a:ext cx="8595360" cy="3708400"/>
           </a:xfrm>
           <a:prstGeom prst="rect">
             <a:avLst/>
           </a:prstGeom>
         </p:spPr>
       </p:pic>
+      <p:sp>
+        <p:nvSpPr>
+          <p:cNvPr id="6" name="Shape 3"/>
+          <p:cNvSpPr/>
+          <p:nvPr/>
+        </p:nvSpPr>
+        <p:spPr>
+          <a:xfrm>
+            <a:off x="393192" y="4407408"/>
+            <a:ext cx="1115568" cy="384048"/>
+          </a:xfrm>
+          <a:prstGeom prst="roundRect">
+            <a:avLst>
+              <a:gd name="adj" fmla="val 14286"/>
+            </a:avLst>
+          </a:prstGeom>
+          <a:solidFill>
+            <a:srgbClr val="1A5276"/>
+          </a:solidFill>
+          <a:ln w="12700">
+            <a:solidFill>
+              <a:srgbClr val="1A5276"/>
+            </a:solidFill>
+            <a:prstDash val="solid"/>
+          </a:ln>
+        </p:spPr>
+      </p:sp>
+      <p:sp>
+        <p:nvSpPr>
+          <p:cNvPr id="7" name="Text 4"/>
+          <p:cNvSpPr/>
+          <p:nvPr/>
+        </p:nvSpPr>
+        <p:spPr>
+          <a:xfrm>
+            <a:off x="393192" y="4407408"/>
+            <a:ext cx="1115568" cy="384048"/>
+          </a:xfrm>
+          <a:prstGeom prst="rect">
+            <a:avLst/>
+          </a:prstGeom>
+          <a:noFill/>
+        </p:spPr>
+        <p:txBody>
+          <a:bodyPr wrap="square" lIns="0" tIns="0" rIns="0" bIns="0" rtlCol="0" anchor="ctr"/>
+          <a:p>
+            <a:pPr marL="0" indent="0" algn="ctr">
+              <a:buNone/>
+            </a:pPr>
+            <a:r>
+              <a:rPr lang="en-US" sz="1100" dirty="0">
+                <a:solidFill>
+                  <a:srgbClr val="FFFFFF"/>
+                </a:solidFill>
+                <a:latin typeface="Calibri" pitchFamily="34" charset="0"/>
+                <a:ea typeface="Calibri" pitchFamily="34" charset="-122"/>
+                <a:cs typeface="Calibri" pitchFamily="34" charset="-120"/>
+              </a:rPr>
+              <a:t>Python 3.11</a:t>
+            </a:r>
+            <a:endParaRPr lang="en-US" sz="1100" dirty="0"/>
+          </a:p>
+        </p:txBody>
+      </p:sp>
+      <p:sp>
+        <p:nvSpPr>
+          <p:cNvPr id="8" name="Shape 5"/>
+          <p:cNvSpPr/>
+          <p:nvPr/>
+        </p:nvSpPr>
+        <p:spPr>
+          <a:xfrm>
+            <a:off x="1600200" y="4407408"/>
+            <a:ext cx="1115568" cy="384048"/>
+          </a:xfrm>
+          <a:prstGeom prst="roundRect">
+            <a:avLst>
+              <a:gd name="adj" fmla="val 14286"/>
+            </a:avLst>
+          </a:prstGeom>
+          <a:solidFill>
+            <a:srgbClr val="1A5276"/>
+          </a:solidFill>
+          <a:ln w="12700">
+            <a:solidFill>
+              <a:srgbClr val="1A5276"/>
+            </a:solidFill>
+            <a:prstDash val="solid"/>
+          </a:ln>
+        </p:spPr>
+      </p:sp>
+      <p:sp>
+        <p:nvSpPr>
+          <p:cNvPr id="9" name="Text 6"/>
+          <p:cNvSpPr/>
+          <p:nvPr/>
+        </p:nvSpPr>
+        <p:spPr>
+          <a:xfrm>
+            <a:off x="1600200" y="4407408"/>
+            <a:ext cx="1115568" cy="384048"/>
+          </a:xfrm>
+          <a:prstGeom prst="rect">
+            <a:avLst/>
+          </a:prstGeom>
+          <a:noFill/>
+        </p:spPr>
+        <p:txBody>
+          <a:bodyPr wrap="square" lIns="0" tIns="0" rIns="0" bIns="0" rtlCol="0" anchor="ctr"/>
+          <a:p>
+            <a:pPr marL="0" indent="0" algn="ctr">
+              <a:buNone/>
+            </a:pPr>
+            <a:r>
+              <a:rPr lang="en-US" sz="1100" dirty="0">
+                <a:solidFill>
+                  <a:srgbClr val="FFFFFF"/>
+                </a:solidFill>
+                <a:latin typeface="Calibri" pitchFamily="34" charset="0"/>
+                <a:ea typeface="Calibri" pitchFamily="34" charset="-122"/>
+                <a:cs typeface="Calibri" pitchFamily="34" charset="-120"/>
+              </a:rPr>
+              <a:t>XGBoost 2.0</a:t>
+            </a:r>
+            <a:endParaRPr lang="en-US" sz="1100" dirty="0"/>
+          </a:p>
+        </p:txBody>
+      </p:sp>
+      <p:sp>
+        <p:nvSpPr>
+          <p:cNvPr id="10" name="Shape 7"/>
+          <p:cNvSpPr/>
+          <p:nvPr/>
+        </p:nvSpPr>
+        <p:spPr>
+          <a:xfrm>
+            <a:off x="2807208" y="4407408"/>
+            <a:ext cx="1115568" cy="384048"/>
+          </a:xfrm>
+          <a:prstGeom prst="roundRect">
+            <a:avLst>
+              <a:gd name="adj" fmla="val 14286"/>
+            </a:avLst>
+          </a:prstGeom>
+          <a:solidFill>
+            <a:srgbClr val="1A5276"/>
+          </a:solidFill>
+          <a:ln w="12700">
+            <a:solidFill>
+              <a:srgbClr val="1A5276"/>
+            </a:solidFill>
+            <a:prstDash val="solid"/>
+          </a:ln>
+        </p:spPr>
+      </p:sp>
+      <p:sp>
+        <p:nvSpPr>
+          <p:cNvPr id="11" name="Text 8"/>
+          <p:cNvSpPr/>
+          <p:nvPr/>
+        </p:nvSpPr>
+        <p:spPr>
+          <a:xfrm>
+            <a:off x="2807208" y="4407408"/>
+            <a:ext cx="1115568" cy="384048"/>
+          </a:xfrm>
+          <a:prstGeom prst="rect">
+            <a:avLst/>
+          </a:prstGeom>
+          <a:noFill/>
+        </p:spPr>
+        <p:txBody>
+          <a:bodyPr wrap="square" lIns="0" tIns="0" rIns="0" bIns="0" rtlCol="0" anchor="ctr"/>
+          <a:p>
+            <a:pPr marL="0" indent="0" algn="ctr">
+              <a:buNone/>
+            </a:pPr>
+            <a:r>
+              <a:rPr lang="en-US" sz="1100" dirty="0">
+                <a:solidFill>
+                  <a:srgbClr val="FFFFFF"/>
+                </a:solidFill>
+                <a:latin typeface="Calibri" pitchFamily="34" charset="0"/>
+                <a:ea typeface="Calibri" pitchFamily="34" charset="-122"/>
+                <a:cs typeface="Calibri" pitchFamily="34" charset="-120"/>
+              </a:rPr>
+              <a:t>Flask 3.0</a:t>
+            </a:r>
+            <a:endParaRPr lang="en-US" sz="1100" dirty="0"/>
+          </a:p>
+        </p:txBody>
+      </p:sp>
+      <p:sp>
+        <p:nvSpPr>
+          <p:cNvPr id="12" name="Shape 9"/>
+          <p:cNvSpPr/>
+          <p:nvPr/>
+        </p:nvSpPr>
+        <p:spPr>
+          <a:xfrm>
+            <a:off x="4014216" y="4407408"/>
+            <a:ext cx="1115568" cy="384048"/>
+          </a:xfrm>
+          <a:prstGeom prst="roundRect">
+            <a:avLst>
+              <a:gd name="adj" fmla="val 14286"/>
+            </a:avLst>
+          </a:prstGeom>
+          <a:solidFill>
+            <a:srgbClr val="1A5276"/>
+          </a:solidFill>
+          <a:ln w="12700">
+            <a:solidFill>
+              <a:srgbClr val="1A5276"/>
+            </a:solidFill>
+            <a:prstDash val="solid"/>
+          </a:ln>
+        </p:spPr>
+      </p:sp>
+      <p:sp>
+        <p:nvSpPr>
+          <p:cNvPr id="13" name="Text 10"/>
+          <p:cNvSpPr/>
+          <p:nvPr/>
+        </p:nvSpPr>
+        <p:spPr>
+          <a:xfrm>
+            <a:off x="4014216" y="4407408"/>
+            <a:ext cx="1115568" cy="384048"/>
+          </a:xfrm>
+          <a:prstGeom prst="rect">
+            <a:avLst/>
+          </a:prstGeom>
+          <a:noFill/>
+        </p:spPr>
+        <p:txBody>
+          <a:bodyPr wrap="square" lIns="0" tIns="0" rIns="0" bIns="0" rtlCol="0" anchor="ctr"/>
+          <a:p>
+            <a:pPr marL="0" indent="0" algn="ctr">
+              <a:buNone/>
+            </a:pPr>
+            <a:r>
+              <a:rPr lang="en-US" sz="1100" dirty="0">
+                <a:solidFill>
+                  <a:srgbClr val="FFFFFF"/>
+                </a:solidFill>
+                <a:latin typeface="Calibri" pitchFamily="34" charset="0"/>
+                <a:ea typeface="Calibri" pitchFamily="34" charset="-122"/>
+                <a:cs typeface="Calibri" pitchFamily="34" charset="-120"/>
+              </a:rPr>
+              <a:t>Streamlit 1.35</a:t>
+            </a:r>
+            <a:endParaRPr lang="en-US" sz="1100" dirty="0"/>
+          </a:p>
+        </p:txBody>
+      </p:sp>
+      <p:sp>
+        <p:nvSpPr>
+          <p:cNvPr id="14" name="Shape 11"/>
+          <p:cNvSpPr/>
+          <p:nvPr/>
+        </p:nvSpPr>
+        <p:spPr>
+          <a:xfrm>
+            <a:off x="5221224" y="4407408"/>
+            <a:ext cx="1115568" cy="384048"/>
+          </a:xfrm>
+          <a:prstGeom prst="roundRect">
+            <a:avLst>
+              <a:gd name="adj" fmla="val 14286"/>
+            </a:avLst>
+          </a:prstGeom>
+          <a:solidFill>
+            <a:srgbClr val="1A5276"/>
+          </a:solidFill>
+          <a:ln w="12700">
+            <a:solidFill>
+              <a:srgbClr val="1A5276"/>
+            </a:solidFill>
+            <a:prstDash val="solid"/>
+          </a:ln>
+        </p:spPr>
+      </p:sp>
+      <p:sp>
+        <p:nvSpPr>
+          <p:cNvPr id="15" name="Text 12"/>
+          <p:cNvSpPr/>
+          <p:nvPr/>
+        </p:nvSpPr>
+        <p:spPr>
+          <a:xfrm>
+            <a:off x="5221224" y="4407408"/>
+            <a:ext cx="1115568" cy="384048"/>
+          </a:xfrm>
+          <a:prstGeom prst="rect">
+            <a:avLst/>
+          </a:prstGeom>
+          <a:noFill/>
+        </p:spPr>
+        <p:txBody>
+          <a:bodyPr wrap="square" lIns="0" tIns="0" rIns="0" bIns="0" rtlCol="0" anchor="ctr"/>
+          <a:p>
+            <a:pPr marL="0" indent="0" algn="ctr">
+              <a:buNone/>
+            </a:pPr>
+            <a:r>
+              <a:rPr lang="en-US" sz="1100" dirty="0">
+                <a:solidFill>
+                  <a:srgbClr val="FFFFFF"/>
+                </a:solidFill>
+                <a:latin typeface="Calibri" pitchFamily="34" charset="0"/>
+                <a:ea typeface="Calibri" pitchFamily="34" charset="-122"/>
+                <a:cs typeface="Calibri" pitchFamily="34" charset="-120"/>
+              </a:rPr>
+              <a:t>Plotly 5.20</a:t>
+            </a:r>
+            <a:endParaRPr lang="en-US" sz="1100" dirty="0"/>
+          </a:p>
+        </p:txBody>
+      </p:sp>
+      <p:sp>
+        <p:nvSpPr>
+          <p:cNvPr id="16" name="Shape 13"/>
+          <p:cNvSpPr/>
+          <p:nvPr/>
+        </p:nvSpPr>
+        <p:spPr>
+          <a:xfrm>
+            <a:off x="6428232" y="4407408"/>
+            <a:ext cx="1115568" cy="384048"/>
+          </a:xfrm>
+          <a:prstGeom prst="roundRect">
+            <a:avLst>
+              <a:gd name="adj" fmla="val 14286"/>
+            </a:avLst>
+          </a:prstGeom>
+          <a:solidFill>
+            <a:srgbClr val="1A5276"/>
+          </a:solidFill>
+          <a:ln w="12700">
+            <a:solidFill>
+              <a:srgbClr val="1A5276"/>
+            </a:solidFill>
+            <a:prstDash val="solid"/>
+          </a:ln>
+        </p:spPr>
+      </p:sp>
+      <p:sp>
+        <p:nvSpPr>
+          <p:cNvPr id="17" name="Text 14"/>
+          <p:cNvSpPr/>
+          <p:nvPr/>
+        </p:nvSpPr>
+        <p:spPr>
+          <a:xfrm>
+            <a:off x="6428232" y="4407408"/>
+            <a:ext cx="1115568" cy="384048"/>
+          </a:xfrm>
+          <a:prstGeom prst="rect">
+            <a:avLst/>
+          </a:prstGeom>
+          <a:noFill/>
+        </p:spPr>
+        <p:txBody>
+          <a:bodyPr wrap="square" lIns="0" tIns="0" rIns="0" bIns="0" rtlCol="0" anchor="ctr"/>
+          <a:p>
+            <a:pPr marL="0" indent="0" algn="ctr">
+              <a:buNone/>
+            </a:pPr>
+            <a:r>
+              <a:rPr lang="en-US" sz="1100" dirty="0">
+                <a:solidFill>
+                  <a:srgbClr val="FFFFFF"/>
+                </a:solidFill>
+                <a:latin typeface="Calibri" pitchFamily="34" charset="0"/>
+                <a:ea typeface="Calibri" pitchFamily="34" charset="-122"/>
+                <a:cs typeface="Calibri" pitchFamily="34" charset="-120"/>
+              </a:rPr>
+              <a:t>Docker</a:t>
+            </a:r>
+            <a:endParaRPr lang="en-US" sz="1100" dirty="0"/>
+          </a:p>
+        </p:txBody>
+      </p:sp>
+      <p:sp>
+        <p:nvSpPr>
+          <p:cNvPr id="18" name="Shape 15"/>
+          <p:cNvSpPr/>
+          <p:nvPr/>
+        </p:nvSpPr>
+        <p:spPr>
+          <a:xfrm>
+            <a:off x="7635240" y="4407408"/>
+            <a:ext cx="1115568" cy="384048"/>
+          </a:xfrm>
+          <a:prstGeom prst="roundRect">
+            <a:avLst>
+              <a:gd name="adj" fmla="val 14286"/>
+            </a:avLst>
+          </a:prstGeom>
+          <a:solidFill>
+            <a:srgbClr val="1A5276"/>
+          </a:solidFill>
+          <a:ln w="12700">
+            <a:solidFill>
+              <a:srgbClr val="1A5276"/>
+            </a:solidFill>
+            <a:prstDash val="solid"/>
+          </a:ln>
+        </p:spPr>
+      </p:sp>
+      <p:sp>
+        <p:nvSpPr>
+          <p:cNvPr id="19" name="Text 16"/>
+          <p:cNvSpPr/>
+          <p:nvPr/>
+        </p:nvSpPr>
+        <p:spPr>
+          <a:xfrm>
+            <a:off x="7635240" y="4407408"/>
+            <a:ext cx="1115568" cy="384048"/>
+          </a:xfrm>
+          <a:prstGeom prst="rect">
+            <a:avLst/>
+          </a:prstGeom>
+          <a:noFill/>
+        </p:spPr>
+        <p:txBody>
+          <a:bodyPr wrap="square" lIns="0" tIns="0" rIns="0" bIns="0" rtlCol="0" anchor="ctr"/>
+          <a:p>
+            <a:pPr marL="0" indent="0" algn="ctr">
+              <a:buNone/>
+            </a:pPr>
+            <a:r>
+              <a:rPr lang="en-US" sz="1100" dirty="0">
+                <a:solidFill>
+                  <a:srgbClr val="FFFFFF"/>
+                </a:solidFill>
+                <a:latin typeface="Calibri" pitchFamily="34" charset="0"/>
+                <a:ea typeface="Calibri" pitchFamily="34" charset="-122"/>
+                <a:cs typeface="Calibri" pitchFamily="34" charset="-120"/>
+              </a:rPr>
+              <a:t>Cloud Run</a:t>
+            </a:r>
+            <a:endParaRPr lang="en-US" sz="1100" dirty="0"/>
+          </a:p>
+        </p:txBody>
+      </p:sp>
     </p:spTree>
   </p:cSld>
   <p:clrMapOvr>
@@ -5334,12 +6099,13 @@
 
 <file path=ppt/slides/slide6.xml><?xml version="1.0" encoding="utf-8"?>
 <p:sld xmlns:a="http://schemas.openxmlformats.org/drawingml/2006/main" xmlns:r="http://schemas.openxmlformats.org/officeDocument/2006/relationships" xmlns:p="http://schemas.openxmlformats.org/presentationml/2006/main">
-  <p:cSld name="Slide 6">
+  <p:cSld>
     <p:bg>
       <p:bgPr>
         <a:solidFill>
           <a:srgbClr val="FFFFFF"/>
         </a:solidFill>
+        <a:effectLst/>
       </p:bgPr>
     </p:bg>
     <p:spTree>
@@ -5421,13 +6187,12 @@
             <a:avLst/>
           </a:prstGeom>
           <a:noFill/>
-          <a:ln/>
         </p:spPr>
         <p:txBody>
           <a:bodyPr wrap="square" rtlCol="0" anchor="ctr"/>
           <a:lstStyle/>
           <a:p>
-            <a:pPr indent="0" marL="0">
+            <a:pPr marL="0" indent="0">
               <a:buNone/>
             </a:pPr>
             <a:r>
@@ -5435,9 +6200,9 @@
                 <a:solidFill>
                   <a:srgbClr val="FFFFFF"/>
                 </a:solidFill>
-                <a:latin typeface="Trebuchet MS" pitchFamily="34" charset="0"/>
-                <a:ea typeface="Trebuchet MS" pitchFamily="34" charset="-122"/>
-                <a:cs typeface="Trebuchet MS" pitchFamily="34" charset="-120"/>
+                <a:latin typeface="Trebuchet MS" panose="020B0703020202090204" pitchFamily="34" charset="0"/>
+                <a:ea typeface="Trebuchet MS" panose="020B0703020202090204" pitchFamily="34" charset="-122"/>
+                <a:cs typeface="Trebuchet MS" panose="020B0703020202090204" pitchFamily="34" charset="-120"/>
               </a:rPr>
               <a:t>App Features &amp; Live Demo</a:t>
             </a:r>
@@ -5485,13 +6250,12 @@
             <a:avLst/>
           </a:prstGeom>
           <a:noFill/>
-          <a:ln/>
         </p:spPr>
         <p:txBody>
           <a:bodyPr wrap="square" rtlCol="0" anchor="ctr"/>
           <a:lstStyle/>
           <a:p>
-            <a:pPr algn="ctr" indent="0" marL="0">
+            <a:pPr marL="0" indent="0" algn="ctr">
               <a:buNone/>
             </a:pPr>
             <a:r>
@@ -5521,13 +6285,12 @@
             <a:avLst/>
           </a:prstGeom>
           <a:noFill/>
-          <a:ln/>
         </p:spPr>
         <p:txBody>
           <a:bodyPr wrap="square" rtlCol="0" anchor="ctr"/>
           <a:lstStyle/>
           <a:p>
-            <a:pPr indent="0" marL="0">
+            <a:pPr marL="0" indent="0">
               <a:buNone/>
             </a:pPr>
             <a:r>
@@ -5535,9 +6298,9 @@
                 <a:solidFill>
                   <a:srgbClr val="0D9488"/>
                 </a:solidFill>
-                <a:latin typeface="Trebuchet MS" pitchFamily="34" charset="0"/>
-                <a:ea typeface="Trebuchet MS" pitchFamily="34" charset="-122"/>
-                <a:cs typeface="Trebuchet MS" pitchFamily="34" charset="-120"/>
+                <a:latin typeface="Trebuchet MS" panose="020B0703020202090204" pitchFamily="34" charset="0"/>
+                <a:ea typeface="Trebuchet MS" panose="020B0703020202090204" pitchFamily="34" charset="-122"/>
+                <a:cs typeface="Trebuchet MS" panose="020B0703020202090204" pitchFamily="34" charset="-120"/>
               </a:rPr>
               <a:t>Interactive Sliders</a:t>
             </a:r>
@@ -5560,13 +6323,12 @@
             <a:avLst/>
           </a:prstGeom>
           <a:noFill/>
-          <a:ln/>
         </p:spPr>
         <p:txBody>
           <a:bodyPr wrap="square" rtlCol="0" anchor="ctr"/>
           <a:lstStyle/>
           <a:p>
-            <a:pPr indent="0" marL="0">
+            <a:pPr marL="0" indent="0">
               <a:buNone/>
             </a:pPr>
             <a:r>
@@ -5649,13 +6411,12 @@
             <a:avLst/>
           </a:prstGeom>
           <a:noFill/>
-          <a:ln/>
         </p:spPr>
         <p:txBody>
           <a:bodyPr wrap="square" rtlCol="0" anchor="ctr"/>
           <a:lstStyle/>
           <a:p>
-            <a:pPr algn="ctr" indent="0" marL="0">
+            <a:pPr marL="0" indent="0" algn="ctr">
               <a:buNone/>
             </a:pPr>
             <a:r>
@@ -5685,13 +6446,12 @@
             <a:avLst/>
           </a:prstGeom>
           <a:noFill/>
-          <a:ln/>
         </p:spPr>
         <p:txBody>
           <a:bodyPr wrap="square" rtlCol="0" anchor="ctr"/>
           <a:lstStyle/>
           <a:p>
-            <a:pPr indent="0" marL="0">
+            <a:pPr marL="0" indent="0">
               <a:buNone/>
             </a:pPr>
             <a:r>
@@ -5699,9 +6459,9 @@
                 <a:solidFill>
                   <a:srgbClr val="1A5276"/>
                 </a:solidFill>
-                <a:latin typeface="Trebuchet MS" pitchFamily="34" charset="0"/>
-                <a:ea typeface="Trebuchet MS" pitchFamily="34" charset="-122"/>
-                <a:cs typeface="Trebuchet MS" pitchFamily="34" charset="-120"/>
+                <a:latin typeface="Trebuchet MS" panose="020B0703020202090204" pitchFamily="34" charset="0"/>
+                <a:ea typeface="Trebuchet MS" panose="020B0703020202090204" pitchFamily="34" charset="-122"/>
+                <a:cs typeface="Trebuchet MS" panose="020B0703020202090204" pitchFamily="34" charset="-120"/>
               </a:rPr>
               <a:t>Live Earthquake Map</a:t>
             </a:r>
@@ -5724,13 +6484,12 @@
             <a:avLst/>
           </a:prstGeom>
           <a:noFill/>
-          <a:ln/>
         </p:spPr>
         <p:txBody>
           <a:bodyPr wrap="square" rtlCol="0" anchor="ctr"/>
           <a:lstStyle/>
           <a:p>
-            <a:pPr indent="0" marL="0">
+            <a:pPr marL="0" indent="0">
               <a:buNone/>
             </a:pPr>
             <a:r>
@@ -5813,13 +6572,12 @@
             <a:avLst/>
           </a:prstGeom>
           <a:noFill/>
-          <a:ln/>
         </p:spPr>
         <p:txBody>
           <a:bodyPr wrap="square" rtlCol="0" anchor="ctr"/>
           <a:lstStyle/>
           <a:p>
-            <a:pPr algn="ctr" indent="0" marL="0">
+            <a:pPr marL="0" indent="0" algn="ctr">
               <a:buNone/>
             </a:pPr>
             <a:r>
@@ -5849,13 +6607,12 @@
             <a:avLst/>
           </a:prstGeom>
           <a:noFill/>
-          <a:ln/>
         </p:spPr>
         <p:txBody>
           <a:bodyPr wrap="square" rtlCol="0" anchor="ctr"/>
           <a:lstStyle/>
           <a:p>
-            <a:pPr indent="0" marL="0">
+            <a:pPr marL="0" indent="0">
               <a:buNone/>
             </a:pPr>
             <a:r>
@@ -5863,9 +6620,9 @@
                 <a:solidFill>
                   <a:srgbClr val="D68910"/>
                 </a:solidFill>
-                <a:latin typeface="Trebuchet MS" pitchFamily="34" charset="0"/>
-                <a:ea typeface="Trebuchet MS" pitchFamily="34" charset="-122"/>
-                <a:cs typeface="Trebuchet MS" pitchFamily="34" charset="-120"/>
+                <a:latin typeface="Trebuchet MS" panose="020B0703020202090204" pitchFamily="34" charset="0"/>
+                <a:ea typeface="Trebuchet MS" panose="020B0703020202090204" pitchFamily="34" charset="-122"/>
+                <a:cs typeface="Trebuchet MS" panose="020B0703020202090204" pitchFamily="34" charset="-120"/>
               </a:rPr>
               <a:t>Probability Display</a:t>
             </a:r>
@@ -5888,13 +6645,12 @@
             <a:avLst/>
           </a:prstGeom>
           <a:noFill/>
-          <a:ln/>
         </p:spPr>
         <p:txBody>
           <a:bodyPr wrap="square" rtlCol="0" anchor="ctr"/>
           <a:lstStyle/>
           <a:p>
-            <a:pPr indent="0" marL="0">
+            <a:pPr marL="0" indent="0">
               <a:buNone/>
             </a:pPr>
             <a:r>
@@ -5952,13 +6708,12 @@
             <a:avLst/>
           </a:prstGeom>
           <a:noFill/>
-          <a:ln/>
         </p:spPr>
         <p:txBody>
           <a:bodyPr wrap="square" lIns="0" tIns="177800" rIns="0" bIns="0" rtlCol="0" anchor="ctr"/>
           <a:lstStyle/>
           <a:p>
-            <a:pPr indent="0" marL="0">
+            <a:pPr marL="0" indent="0">
               <a:buNone/>
             </a:pPr>
             <a:r>
@@ -5966,9 +6721,9 @@
                 <a:solidFill>
                   <a:srgbClr val="FFFFFF"/>
                 </a:solidFill>
-                <a:latin typeface="Trebuchet MS" pitchFamily="34" charset="0"/>
-                <a:ea typeface="Trebuchet MS" pitchFamily="34" charset="-122"/>
-                <a:cs typeface="Trebuchet MS" pitchFamily="34" charset="-120"/>
+                <a:latin typeface="Trebuchet MS" panose="020B0703020202090204" pitchFamily="34" charset="0"/>
+                <a:ea typeface="Trebuchet MS" panose="020B0703020202090204" pitchFamily="34" charset="-122"/>
+                <a:cs typeface="Trebuchet MS" panose="020B0703020202090204" pitchFamily="34" charset="-120"/>
               </a:rPr>
               <a:t>⚡  Flask REST API</a:t>
             </a:r>
@@ -6016,13 +6771,12 @@
             <a:avLst/>
           </a:prstGeom>
           <a:noFill/>
-          <a:ln/>
         </p:spPr>
         <p:txBody>
           <a:bodyPr wrap="square" rtlCol="0" anchor="t"/>
           <a:lstStyle/>
           <a:p>
-            <a:pPr indent="0" marL="0">
+            <a:pPr marL="0" indent="0">
               <a:buNone/>
             </a:pPr>
             <a:r>
@@ -6030,16 +6784,16 @@
                 <a:solidFill>
                   <a:srgbClr val="A8D8A8"/>
                 </a:solidFill>
-                <a:latin typeface="Courier New" pitchFamily="34" charset="0"/>
-                <a:ea typeface="Courier New" pitchFamily="34" charset="-122"/>
-                <a:cs typeface="Courier New" pitchFamily="34" charset="-120"/>
+                <a:latin typeface="Courier New" panose="02070409020205090404" pitchFamily="34" charset="0"/>
+                <a:ea typeface="Courier New" panose="02070409020205090404" pitchFamily="34" charset="-122"/>
+                <a:cs typeface="Courier New" panose="02070409020205090404" pitchFamily="34" charset="-120"/>
               </a:rPr>
               <a:t>POST /predict</a:t>
             </a:r>
             <a:endParaRPr lang="en-US" sz="1100" dirty="0"/>
           </a:p>
           <a:p>
-            <a:pPr indent="0" marL="0">
+            <a:pPr marL="0" indent="0">
               <a:buNone/>
             </a:pPr>
             <a:r>
@@ -6047,16 +6801,16 @@
                 <a:solidFill>
                   <a:srgbClr val="A8D8A8"/>
                 </a:solidFill>
-                <a:latin typeface="Courier New" pitchFamily="34" charset="0"/>
-                <a:ea typeface="Courier New" pitchFamily="34" charset="-122"/>
-                <a:cs typeface="Courier New" pitchFamily="34" charset="-120"/>
+                <a:latin typeface="Courier New" panose="02070409020205090404" pitchFamily="34" charset="0"/>
+                <a:ea typeface="Courier New" panose="02070409020205090404" pitchFamily="34" charset="-122"/>
+                <a:cs typeface="Courier New" panose="02070409020205090404" pitchFamily="34" charset="-120"/>
               </a:rPr>
               <a:t>{"magnitude": 7.0, "depth": 10,</a:t>
             </a:r>
             <a:endParaRPr lang="en-US" sz="1100" dirty="0"/>
           </a:p>
           <a:p>
-            <a:pPr indent="0" marL="0">
+            <a:pPr marL="0" indent="0">
               <a:buNone/>
             </a:pPr>
             <a:r>
@@ -6064,22 +6818,22 @@
                 <a:solidFill>
                   <a:srgbClr val="A8D8A8"/>
                 </a:solidFill>
-                <a:latin typeface="Courier New" pitchFamily="34" charset="0"/>
-                <a:ea typeface="Courier New" pitchFamily="34" charset="-122"/>
-                <a:cs typeface="Courier New" pitchFamily="34" charset="-120"/>
+                <a:latin typeface="Courier New" panose="02070409020205090404" pitchFamily="34" charset="0"/>
+                <a:ea typeface="Courier New" panose="02070409020205090404" pitchFamily="34" charset="-122"/>
+                <a:cs typeface="Courier New" panose="02070409020205090404" pitchFamily="34" charset="-120"/>
               </a:rPr>
               <a:t> "gap": 90, "rms": 0.3, "location_type": 0}</a:t>
             </a:r>
             <a:endParaRPr lang="en-US" sz="1100" dirty="0"/>
           </a:p>
           <a:p>
-            <a:pPr indent="0" marL="0">
+            <a:pPr marL="0" indent="0">
               <a:buNone/>
             </a:pPr>
             <a:endParaRPr lang="en-US" sz="1100" dirty="0"/>
           </a:p>
           <a:p>
-            <a:pPr indent="0" marL="0">
+            <a:pPr marL="0" indent="0">
               <a:buNone/>
             </a:pPr>
             <a:r>
@@ -6087,16 +6841,16 @@
                 <a:solidFill>
                   <a:srgbClr val="A8D8A8"/>
                 </a:solidFill>
-                <a:latin typeface="Courier New" pitchFamily="34" charset="0"/>
-                <a:ea typeface="Courier New" pitchFamily="34" charset="-122"/>
-                <a:cs typeface="Courier New" pitchFamily="34" charset="-120"/>
+                <a:latin typeface="Courier New" panose="02070409020205090404" pitchFamily="34" charset="0"/>
+                <a:ea typeface="Courier New" panose="02070409020205090404" pitchFamily="34" charset="-122"/>
+                <a:cs typeface="Courier New" panose="02070409020205090404" pitchFamily="34" charset="-120"/>
               </a:rPr>
               <a:t>→ {"hazard_label": "High",</a:t>
             </a:r>
             <a:endParaRPr lang="en-US" sz="1100" dirty="0"/>
           </a:p>
           <a:p>
-            <a:pPr indent="0" marL="0">
+            <a:pPr marL="0" indent="0">
               <a:buNone/>
             </a:pPr>
             <a:r>
@@ -6104,16 +6858,16 @@
                 <a:solidFill>
                   <a:srgbClr val="A8D8A8"/>
                 </a:solidFill>
-                <a:latin typeface="Courier New" pitchFamily="34" charset="0"/>
-                <a:ea typeface="Courier New" pitchFamily="34" charset="-122"/>
-                <a:cs typeface="Courier New" pitchFamily="34" charset="-120"/>
+                <a:latin typeface="Courier New" panose="02070409020205090404" pitchFamily="34" charset="0"/>
+                <a:ea typeface="Courier New" panose="02070409020205090404" pitchFamily="34" charset="-122"/>
+                <a:cs typeface="Courier New" panose="02070409020205090404" pitchFamily="34" charset="-120"/>
               </a:rPr>
               <a:t>   "color": "#e74c3c",</a:t>
             </a:r>
             <a:endParaRPr lang="en-US" sz="1100" dirty="0"/>
           </a:p>
           <a:p>
-            <a:pPr indent="0" marL="0">
+            <a:pPr marL="0" indent="0">
               <a:buNone/>
             </a:pPr>
             <a:r>
@@ -6121,9 +6875,9 @@
                 <a:solidFill>
                   <a:srgbClr val="A8D8A8"/>
                 </a:solidFill>
-                <a:latin typeface="Courier New" pitchFamily="34" charset="0"/>
-                <a:ea typeface="Courier New" pitchFamily="34" charset="-122"/>
-                <a:cs typeface="Courier New" pitchFamily="34" charset="-120"/>
+                <a:latin typeface="Courier New" panose="02070409020205090404" pitchFamily="34" charset="0"/>
+                <a:ea typeface="Courier New" panose="02070409020205090404" pitchFamily="34" charset="-122"/>
+                <a:cs typeface="Courier New" panose="02070409020205090404" pitchFamily="34" charset="-120"/>
               </a:rPr>
               <a:t>   "probabilities": {...}}</a:t>
             </a:r>
@@ -6146,13 +6900,12 @@
             <a:avLst/>
           </a:prstGeom>
           <a:noFill/>
-          <a:ln/>
         </p:spPr>
         <p:txBody>
           <a:bodyPr wrap="square" rtlCol="0" anchor="ctr"/>
           <a:lstStyle/>
           <a:p>
-            <a:pPr algn="ctr" indent="0" marL="0">
+            <a:pPr marL="0" indent="0" algn="ctr">
               <a:buNone/>
             </a:pPr>
             <a:r>
@@ -6182,13 +6935,12 @@
             <a:avLst/>
           </a:prstGeom>
           <a:noFill/>
-          <a:ln/>
         </p:spPr>
         <p:txBody>
           <a:bodyPr wrap="square" rtlCol="0" anchor="ctr"/>
           <a:lstStyle/>
           <a:p>
-            <a:pPr indent="0" marL="0">
+            <a:pPr marL="0" indent="0">
               <a:buNone/>
             </a:pPr>
             <a:r>
@@ -6196,9 +6948,9 @@
                 <a:solidFill>
                   <a:srgbClr val="1A5276"/>
                 </a:solidFill>
-                <a:latin typeface="Trebuchet MS" pitchFamily="34" charset="0"/>
-                <a:ea typeface="Trebuchet MS" pitchFamily="34" charset="-122"/>
-                <a:cs typeface="Trebuchet MS" pitchFamily="34" charset="-120"/>
+                <a:latin typeface="Trebuchet MS" panose="020B0703020202090204" pitchFamily="34" charset="0"/>
+                <a:ea typeface="Trebuchet MS" panose="020B0703020202090204" pitchFamily="34" charset="-122"/>
+                <a:cs typeface="Trebuchet MS" panose="020B0703020202090204" pitchFamily="34" charset="-120"/>
               </a:rPr>
               <a:t>USGS Live Proxy</a:t>
             </a:r>
@@ -6221,13 +6973,12 @@
             <a:avLst/>
           </a:prstGeom>
           <a:noFill/>
-          <a:ln/>
         </p:spPr>
         <p:txBody>
           <a:bodyPr wrap="square" rtlCol="0" anchor="ctr"/>
           <a:lstStyle/>
           <a:p>
-            <a:pPr indent="0" marL="0">
+            <a:pPr marL="0" indent="0">
               <a:buNone/>
             </a:pPr>
             <a:r>
@@ -6260,13 +7011,12 @@
             <a:avLst/>
           </a:prstGeom>
           <a:noFill/>
-          <a:ln/>
         </p:spPr>
         <p:txBody>
           <a:bodyPr wrap="square" rtlCol="0" anchor="ctr"/>
           <a:lstStyle/>
           <a:p>
-            <a:pPr algn="ctr" indent="0" marL="0">
+            <a:pPr marL="0" indent="0" algn="ctr">
               <a:buNone/>
             </a:pPr>
             <a:r>
@@ -6296,13 +7046,12 @@
             <a:avLst/>
           </a:prstGeom>
           <a:noFill/>
-          <a:ln/>
         </p:spPr>
         <p:txBody>
           <a:bodyPr wrap="square" rtlCol="0" anchor="ctr"/>
           <a:lstStyle/>
           <a:p>
-            <a:pPr indent="0" marL="0">
+            <a:pPr marL="0" indent="0">
               <a:buNone/>
             </a:pPr>
             <a:r>
@@ -6310,9 +7059,9 @@
                 <a:solidFill>
                   <a:srgbClr val="1A5276"/>
                 </a:solidFill>
-                <a:latin typeface="Trebuchet MS" pitchFamily="34" charset="0"/>
-                <a:ea typeface="Trebuchet MS" pitchFamily="34" charset="-122"/>
-                <a:cs typeface="Trebuchet MS" pitchFamily="34" charset="-120"/>
+                <a:latin typeface="Trebuchet MS" panose="020B0703020202090204" pitchFamily="34" charset="0"/>
+                <a:ea typeface="Trebuchet MS" panose="020B0703020202090204" pitchFamily="34" charset="-122"/>
+                <a:cs typeface="Trebuchet MS" panose="020B0703020202090204" pitchFamily="34" charset="-120"/>
               </a:rPr>
               <a:t>Docker + Cloud Run</a:t>
             </a:r>
@@ -6335,13 +7084,12 @@
             <a:avLst/>
           </a:prstGeom>
           <a:noFill/>
-          <a:ln/>
         </p:spPr>
         <p:txBody>
           <a:bodyPr wrap="square" rtlCol="0" anchor="ctr"/>
           <a:lstStyle/>
           <a:p>
-            <a:pPr indent="0" marL="0">
+            <a:pPr marL="0" indent="0">
               <a:buNone/>
             </a:pPr>
             <a:r>
@@ -6374,13 +7122,12 @@
             <a:avLst/>
           </a:prstGeom>
           <a:noFill/>
-          <a:ln/>
         </p:spPr>
         <p:txBody>
           <a:bodyPr wrap="square" rtlCol="0" anchor="ctr"/>
           <a:lstStyle/>
           <a:p>
-            <a:pPr algn="ctr" indent="0" marL="0">
+            <a:pPr marL="0" indent="0" algn="ctr">
               <a:buNone/>
             </a:pPr>
             <a:r>
@@ -6410,13 +7157,12 @@
             <a:avLst/>
           </a:prstGeom>
           <a:noFill/>
-          <a:ln/>
         </p:spPr>
         <p:txBody>
           <a:bodyPr wrap="square" rtlCol="0" anchor="ctr"/>
           <a:lstStyle/>
           <a:p>
-            <a:pPr indent="0" marL="0">
+            <a:pPr marL="0" indent="0">
               <a:buNone/>
             </a:pPr>
             <a:r>
@@ -6424,9 +7170,9 @@
                 <a:solidFill>
                   <a:srgbClr val="1A5276"/>
                 </a:solidFill>
-                <a:latin typeface="Trebuchet MS" pitchFamily="34" charset="0"/>
-                <a:ea typeface="Trebuchet MS" pitchFamily="34" charset="-122"/>
-                <a:cs typeface="Trebuchet MS" pitchFamily="34" charset="-120"/>
+                <a:latin typeface="Trebuchet MS" panose="020B0703020202090204" pitchFamily="34" charset="0"/>
+                <a:ea typeface="Trebuchet MS" panose="020B0703020202090204" pitchFamily="34" charset="-122"/>
+                <a:cs typeface="Trebuchet MS" panose="020B0703020202090204" pitchFamily="34" charset="-120"/>
               </a:rPr>
               <a:t>Auto-Refresh</a:t>
             </a:r>
@@ -6449,13 +7195,12 @@
             <a:avLst/>
           </a:prstGeom>
           <a:noFill/>
-          <a:ln/>
         </p:spPr>
         <p:txBody>
           <a:bodyPr wrap="square" rtlCol="0" anchor="ctr"/>
           <a:lstStyle/>
           <a:p>
-            <a:pPr indent="0" marL="0">
+            <a:pPr marL="0" indent="0">
               <a:buNone/>
             </a:pPr>
             <a:r>
@@ -6470,6 +7215,106 @@
               <a:t>Map updates every 5 min via cache_data TTL</a:t>
             </a:r>
             <a:endParaRPr lang="en-US" sz="1200" dirty="0"/>
+          </a:p>
+        </p:txBody>
+      </p:sp>
+      <p:sp>
+        <p:nvSpPr>
+          <p:cNvPr id="32" name="文本框 31"/>
+          <p:cNvSpPr txBox="1"/>
+          <p:nvPr/>
+        </p:nvSpPr>
+        <p:spPr>
+          <a:xfrm>
+            <a:off x="274320" y="4745355"/>
+            <a:ext cx="4572000" cy="245110"/>
+          </a:xfrm>
+          <a:prstGeom prst="rect">
+            <a:avLst/>
+          </a:prstGeom>
+          <a:noFill/>
+        </p:spPr>
+        <p:txBody>
+          <a:bodyPr wrap="square" rtlCol="0" anchor="t">
+            <a:spAutoFit/>
+          </a:bodyPr>
+          <a:p>
+            <a:pPr marL="0" indent="0" algn="ctr">
+              <a:buNone/>
+            </a:pPr>
+            <a:r>
+              <a:rPr lang="en-US" sz="1000" dirty="0">
+                <a:solidFill>
+                  <a:srgbClr val="FFFFFF"/>
+                </a:solidFill>
+                <a:latin typeface="Calibri" pitchFamily="34" charset="0"/>
+                <a:ea typeface="Calibri" pitchFamily="34" charset="-122"/>
+                <a:cs typeface="Calibri" pitchFamily="34" charset="-120"/>
+                <a:sym typeface="+mn-ea"/>
+                <a:hlinkClick r:id="rId1"/>
+              </a:rPr>
+              <a:t>🔗  earthsafe-eu9o2sytymwqnls48ppjg7.streamlit.app</a:t>
+            </a:r>
+            <a:endParaRPr lang="en-US" altLang="en-US" sz="1000" dirty="0">
+              <a:solidFill>
+                <a:srgbClr val="FFFFFF"/>
+              </a:solidFill>
+              <a:latin typeface="Calibri" pitchFamily="34" charset="0"/>
+              <a:ea typeface="Calibri" pitchFamily="34" charset="-122"/>
+              <a:cs typeface="Calibri" pitchFamily="34" charset="-120"/>
+              <a:sym typeface="+mn-ea"/>
+              <a:hlinkClick r:id="rId1"/>
+            </a:endParaRPr>
+          </a:p>
+        </p:txBody>
+      </p:sp>
+      <p:sp>
+        <p:nvSpPr>
+          <p:cNvPr id="33" name="文本框 32"/>
+          <p:cNvSpPr txBox="1"/>
+          <p:nvPr/>
+        </p:nvSpPr>
+        <p:spPr>
+          <a:xfrm>
+            <a:off x="274320" y="4392930"/>
+            <a:ext cx="4572000" cy="245110"/>
+          </a:xfrm>
+          <a:prstGeom prst="rect">
+            <a:avLst/>
+          </a:prstGeom>
+          <a:noFill/>
+        </p:spPr>
+        <p:txBody>
+          <a:bodyPr wrap="square" rtlCol="0" anchor="t">
+            <a:spAutoFit/>
+          </a:bodyPr>
+          <a:p>
+            <a:pPr marL="0" indent="0" algn="ctr">
+              <a:buNone/>
+            </a:pPr>
+            <a:r>
+              <a:rPr lang="en-US" sz="1000" dirty="0">
+                <a:solidFill>
+                  <a:srgbClr val="FFFFFF"/>
+                </a:solidFill>
+                <a:latin typeface="Calibri" pitchFamily="34" charset="0"/>
+                <a:ea typeface="Calibri" pitchFamily="34" charset="-122"/>
+                <a:cs typeface="Calibri" pitchFamily="34" charset="-120"/>
+                <a:sym typeface="+mn-ea"/>
+                <a:hlinkClick r:id="rId2"/>
+              </a:rPr>
+              <a:t>⚙️  Flask API  ·  POST /predict  ·  GET /recent</a:t>
+            </a:r>
+            <a:endParaRPr lang="en-US" altLang="en-US" sz="1000" dirty="0">
+              <a:solidFill>
+                <a:srgbClr val="FFFFFF"/>
+              </a:solidFill>
+              <a:latin typeface="Calibri" pitchFamily="34" charset="0"/>
+              <a:ea typeface="Calibri" pitchFamily="34" charset="-122"/>
+              <a:cs typeface="Calibri" pitchFamily="34" charset="-120"/>
+              <a:sym typeface="+mn-ea"/>
+              <a:hlinkClick r:id="rId2"/>
+            </a:endParaRPr>
           </a:p>
         </p:txBody>
       </p:sp>
@@ -6483,12 +7328,13 @@
 
 <file path=ppt/slides/slide7.xml><?xml version="1.0" encoding="utf-8"?>
 <p:sld xmlns:a="http://schemas.openxmlformats.org/drawingml/2006/main" xmlns:r="http://schemas.openxmlformats.org/officeDocument/2006/relationships" xmlns:p="http://schemas.openxmlformats.org/presentationml/2006/main">
-  <p:cSld name="Slide 7">
+  <p:cSld>
     <p:bg>
       <p:bgPr>
         <a:solidFill>
           <a:srgbClr val="FFFFFF"/>
         </a:solidFill>
+        <a:effectLst/>
       </p:bgPr>
     </p:bg>
     <p:spTree>
@@ -6570,13 +7416,12 @@
             <a:avLst/>
           </a:prstGeom>
           <a:noFill/>
-          <a:ln/>
         </p:spPr>
         <p:txBody>
           <a:bodyPr wrap="square" rtlCol="0" anchor="ctr"/>
           <a:lstStyle/>
           <a:p>
-            <a:pPr indent="0" marL="0">
+            <a:pPr marL="0" indent="0">
               <a:buNone/>
             </a:pPr>
             <a:r>
@@ -6584,9 +7429,9 @@
                 <a:solidFill>
                   <a:srgbClr val="FFFFFF"/>
                 </a:solidFill>
-                <a:latin typeface="Trebuchet MS" pitchFamily="34" charset="0"/>
-                <a:ea typeface="Trebuchet MS" pitchFamily="34" charset="-122"/>
-                <a:cs typeface="Trebuchet MS" pitchFamily="34" charset="-120"/>
+                <a:latin typeface="Trebuchet MS" panose="020B0703020202090204" pitchFamily="34" charset="0"/>
+                <a:ea typeface="Trebuchet MS" panose="020B0703020202090204" pitchFamily="34" charset="-122"/>
+                <a:cs typeface="Trebuchet MS" panose="020B0703020202090204" pitchFamily="34" charset="-120"/>
               </a:rPr>
               <a:t>Challenges, Learnings &amp; Future Work</a:t>
             </a:r>
@@ -6684,13 +7529,12 @@
             <a:avLst/>
           </a:prstGeom>
           <a:noFill/>
-          <a:ln/>
         </p:spPr>
         <p:txBody>
           <a:bodyPr wrap="square" rtlCol="0" anchor="ctr"/>
           <a:lstStyle/>
           <a:p>
-            <a:pPr algn="ctr" indent="0" marL="0">
+            <a:pPr marL="0" indent="0" algn="ctr">
               <a:buNone/>
             </a:pPr>
             <a:r>
@@ -6720,13 +7564,12 @@
             <a:avLst/>
           </a:prstGeom>
           <a:noFill/>
-          <a:ln/>
         </p:spPr>
         <p:txBody>
           <a:bodyPr wrap="square" rtlCol="0" anchor="ctr"/>
           <a:lstStyle/>
           <a:p>
-            <a:pPr indent="0" marL="0">
+            <a:pPr marL="0" indent="0">
               <a:buNone/>
             </a:pPr>
             <a:r>
@@ -6734,9 +7577,9 @@
                 <a:solidFill>
                   <a:srgbClr val="C0392B"/>
                 </a:solidFill>
-                <a:latin typeface="Trebuchet MS" pitchFamily="34" charset="0"/>
-                <a:ea typeface="Trebuchet MS" pitchFamily="34" charset="-122"/>
-                <a:cs typeface="Trebuchet MS" pitchFamily="34" charset="-120"/>
+                <a:latin typeface="Trebuchet MS" panose="020B0703020202090204" pitchFamily="34" charset="0"/>
+                <a:ea typeface="Trebuchet MS" panose="020B0703020202090204" pitchFamily="34" charset="-122"/>
+                <a:cs typeface="Trebuchet MS" panose="020B0703020202090204" pitchFamily="34" charset="-120"/>
               </a:rPr>
               <a:t>Challenges</a:t>
             </a:r>
@@ -6771,276 +7614,6 @@
       </p:sp>
       <p:sp>
         <p:nvSpPr>
-          <p:cNvPr id="11" name="Shape 9"/>
-          <p:cNvSpPr/>
-          <p:nvPr/>
-        </p:nvSpPr>
-        <p:spPr>
-          <a:xfrm>
-            <a:off x="3291840" y="1097280"/>
-            <a:ext cx="1828800" cy="786384"/>
-          </a:xfrm>
-          <a:prstGeom prst="roundRect">
-            <a:avLst>
-              <a:gd name="adj" fmla="val 9302"/>
-            </a:avLst>
-          </a:prstGeom>
-          <a:solidFill>
-            <a:srgbClr val="FFFFFF"/>
-          </a:solidFill>
-          <a:ln w="12700">
-            <a:solidFill>
-              <a:srgbClr val="C0392B"/>
-            </a:solidFill>
-            <a:prstDash val="solid"/>
-          </a:ln>
-          <a:effectLst>
-            <a:outerShdw sx="100000" sy="100000" kx="0" ky="0" algn="bl" rotWithShape="0" blurRad="127000" dist="38100" dir="8100000">
-              <a:srgbClr val="000000">
-                <a:alpha val="10000"/>
-              </a:srgbClr>
-            </a:outerShdw>
-          </a:effectLst>
-        </p:spPr>
-      </p:sp>
-      <p:sp>
-        <p:nvSpPr>
-          <p:cNvPr id="12" name="Text 10"/>
-          <p:cNvSpPr/>
-          <p:nvPr/>
-        </p:nvSpPr>
-        <p:spPr>
-          <a:xfrm>
-            <a:off x="3364992" y="1097280"/>
-            <a:ext cx="1682496" cy="786384"/>
-          </a:xfrm>
-          <a:prstGeom prst="rect">
-            <a:avLst/>
-          </a:prstGeom>
-          <a:noFill/>
-          <a:ln/>
-        </p:spPr>
-        <p:txBody>
-          <a:bodyPr wrap="square" rtlCol="0" anchor="ctr"/>
-          <a:lstStyle/>
-          <a:p>
-            <a:pPr algn="ctr" indent="0" marL="0">
-              <a:buNone/>
-            </a:pPr>
-            <a:r>
-              <a:rPr lang="en-US" sz="1200" dirty="0">
-                <a:solidFill>
-                  <a:srgbClr val="1A1A2A"/>
-                </a:solidFill>
-                <a:latin typeface="Calibri" pitchFamily="34" charset="0"/>
-                <a:ea typeface="Calibri" pitchFamily="34" charset="-122"/>
-                <a:cs typeface="Calibri" pitchFamily="34" charset="-120"/>
-              </a:rPr>
-              <a:t>Class Imbalance</a:t>
-            </a:r>
-            <a:endParaRPr lang="en-US" sz="1200" dirty="0"/>
-          </a:p>
-          <a:p>
-            <a:pPr algn="ctr" indent="0" marL="0">
-              <a:buNone/>
-            </a:pPr>
-            <a:r>
-              <a:rPr lang="en-US" sz="1200" dirty="0">
-                <a:solidFill>
-                  <a:srgbClr val="1A1A2A"/>
-                </a:solidFill>
-                <a:latin typeface="Calibri" pitchFamily="34" charset="0"/>
-                <a:ea typeface="Calibri" pitchFamily="34" charset="-122"/>
-                <a:cs typeface="Calibri" pitchFamily="34" charset="-120"/>
-              </a:rPr>
-              <a:t>7 High / 2,000 records</a:t>
-            </a:r>
-            <a:endParaRPr lang="en-US" sz="1200" dirty="0"/>
-          </a:p>
-        </p:txBody>
-      </p:sp>
-      <p:sp>
-        <p:nvSpPr>
-          <p:cNvPr id="13" name="Shape 11"/>
-          <p:cNvSpPr/>
-          <p:nvPr/>
-        </p:nvSpPr>
-        <p:spPr>
-          <a:xfrm>
-            <a:off x="5175504" y="1097280"/>
-            <a:ext cx="1828800" cy="786384"/>
-          </a:xfrm>
-          <a:prstGeom prst="roundRect">
-            <a:avLst>
-              <a:gd name="adj" fmla="val 9302"/>
-            </a:avLst>
-          </a:prstGeom>
-          <a:solidFill>
-            <a:srgbClr val="FFFFFF"/>
-          </a:solidFill>
-          <a:ln w="12700">
-            <a:solidFill>
-              <a:srgbClr val="C0392B"/>
-            </a:solidFill>
-            <a:prstDash val="solid"/>
-          </a:ln>
-          <a:effectLst>
-            <a:outerShdw sx="100000" sy="100000" kx="0" ky="0" algn="bl" rotWithShape="0" blurRad="127000" dist="38100" dir="8100000">
-              <a:srgbClr val="000000">
-                <a:alpha val="10000"/>
-              </a:srgbClr>
-            </a:outerShdw>
-          </a:effectLst>
-        </p:spPr>
-      </p:sp>
-      <p:sp>
-        <p:nvSpPr>
-          <p:cNvPr id="14" name="Text 12"/>
-          <p:cNvSpPr/>
-          <p:nvPr/>
-        </p:nvSpPr>
-        <p:spPr>
-          <a:xfrm>
-            <a:off x="5248656" y="1097280"/>
-            <a:ext cx="1682496" cy="786384"/>
-          </a:xfrm>
-          <a:prstGeom prst="rect">
-            <a:avLst/>
-          </a:prstGeom>
-          <a:noFill/>
-          <a:ln/>
-        </p:spPr>
-        <p:txBody>
-          <a:bodyPr wrap="square" rtlCol="0" anchor="ctr"/>
-          <a:lstStyle/>
-          <a:p>
-            <a:pPr algn="ctr" indent="0" marL="0">
-              <a:buNone/>
-            </a:pPr>
-            <a:r>
-              <a:rPr lang="en-US" sz="1200" dirty="0">
-                <a:solidFill>
-                  <a:srgbClr val="1A1A2A"/>
-                </a:solidFill>
-                <a:latin typeface="Calibri" pitchFamily="34" charset="0"/>
-                <a:ea typeface="Calibri" pitchFamily="34" charset="-122"/>
-                <a:cs typeface="Calibri" pitchFamily="34" charset="-120"/>
-              </a:rPr>
-              <a:t>Port 5000 → 5001</a:t>
-            </a:r>
-            <a:endParaRPr lang="en-US" sz="1200" dirty="0"/>
-          </a:p>
-          <a:p>
-            <a:pPr algn="ctr" indent="0" marL="0">
-              <a:buNone/>
-            </a:pPr>
-            <a:r>
-              <a:rPr lang="en-US" sz="1200" dirty="0">
-                <a:solidFill>
-                  <a:srgbClr val="1A1A2A"/>
-                </a:solidFill>
-                <a:latin typeface="Calibri" pitchFamily="34" charset="0"/>
-                <a:ea typeface="Calibri" pitchFamily="34" charset="-122"/>
-                <a:cs typeface="Calibri" pitchFamily="34" charset="-120"/>
-              </a:rPr>
-              <a:t>macOS AirPlay conflict</a:t>
-            </a:r>
-            <a:endParaRPr lang="en-US" sz="1200" dirty="0"/>
-          </a:p>
-        </p:txBody>
-      </p:sp>
-      <p:sp>
-        <p:nvSpPr>
-          <p:cNvPr id="15" name="Shape 13"/>
-          <p:cNvSpPr/>
-          <p:nvPr/>
-        </p:nvSpPr>
-        <p:spPr>
-          <a:xfrm>
-            <a:off x="7059168" y="1097280"/>
-            <a:ext cx="1828800" cy="786384"/>
-          </a:xfrm>
-          <a:prstGeom prst="roundRect">
-            <a:avLst>
-              <a:gd name="adj" fmla="val 9302"/>
-            </a:avLst>
-          </a:prstGeom>
-          <a:solidFill>
-            <a:srgbClr val="FFFFFF"/>
-          </a:solidFill>
-          <a:ln w="12700">
-            <a:solidFill>
-              <a:srgbClr val="C0392B"/>
-            </a:solidFill>
-            <a:prstDash val="solid"/>
-          </a:ln>
-          <a:effectLst>
-            <a:outerShdw sx="100000" sy="100000" kx="0" ky="0" algn="bl" rotWithShape="0" blurRad="127000" dist="38100" dir="8100000">
-              <a:srgbClr val="000000">
-                <a:alpha val="10000"/>
-              </a:srgbClr>
-            </a:outerShdw>
-          </a:effectLst>
-        </p:spPr>
-      </p:sp>
-      <p:sp>
-        <p:nvSpPr>
-          <p:cNvPr id="16" name="Text 14"/>
-          <p:cNvSpPr/>
-          <p:nvPr/>
-        </p:nvSpPr>
-        <p:spPr>
-          <a:xfrm>
-            <a:off x="7132320" y="1097280"/>
-            <a:ext cx="1682496" cy="786384"/>
-          </a:xfrm>
-          <a:prstGeom prst="rect">
-            <a:avLst/>
-          </a:prstGeom>
-          <a:noFill/>
-          <a:ln/>
-        </p:spPr>
-        <p:txBody>
-          <a:bodyPr wrap="square" rtlCol="0" anchor="ctr"/>
-          <a:lstStyle/>
-          <a:p>
-            <a:pPr algn="ctr" indent="0" marL="0">
-              <a:buNone/>
-            </a:pPr>
-            <a:r>
-              <a:rPr lang="en-US" sz="1200" dirty="0">
-                <a:solidFill>
-                  <a:srgbClr val="1A1A2A"/>
-                </a:solidFill>
-                <a:latin typeface="Calibri" pitchFamily="34" charset="0"/>
-                <a:ea typeface="Calibri" pitchFamily="34" charset="-122"/>
-                <a:cs typeface="Calibri" pitchFamily="34" charset="-120"/>
-              </a:rPr>
-              <a:t>brew install libomp</a:t>
-            </a:r>
-            <a:endParaRPr lang="en-US" sz="1200" dirty="0"/>
-          </a:p>
-          <a:p>
-            <a:pPr algn="ctr" indent="0" marL="0">
-              <a:buNone/>
-            </a:pPr>
-            <a:r>
-              <a:rPr lang="en-US" sz="1200" dirty="0">
-                <a:solidFill>
-                  <a:srgbClr val="1A1A2A"/>
-                </a:solidFill>
-                <a:latin typeface="Calibri" pitchFamily="34" charset="0"/>
-                <a:ea typeface="Calibri" pitchFamily="34" charset="-122"/>
-                <a:cs typeface="Calibri" pitchFamily="34" charset="-120"/>
-              </a:rPr>
-              <a:t>XGBoost on Mac</a:t>
-            </a:r>
-            <a:endParaRPr lang="en-US" sz="1200" dirty="0"/>
-          </a:p>
-        </p:txBody>
-      </p:sp>
-      <p:sp>
-        <p:nvSpPr>
           <p:cNvPr id="17" name="Shape 15"/>
           <p:cNvSpPr/>
           <p:nvPr/>
@@ -7129,13 +7702,12 @@
             <a:avLst/>
           </a:prstGeom>
           <a:noFill/>
-          <a:ln/>
         </p:spPr>
         <p:txBody>
           <a:bodyPr wrap="square" rtlCol="0" anchor="ctr"/>
           <a:lstStyle/>
           <a:p>
-            <a:pPr algn="ctr" indent="0" marL="0">
+            <a:pPr marL="0" indent="0" algn="ctr">
               <a:buNone/>
             </a:pPr>
             <a:r>
@@ -7165,13 +7737,12 @@
             <a:avLst/>
           </a:prstGeom>
           <a:noFill/>
-          <a:ln/>
         </p:spPr>
         <p:txBody>
           <a:bodyPr wrap="square" rtlCol="0" anchor="ctr"/>
           <a:lstStyle/>
           <a:p>
-            <a:pPr indent="0" marL="0">
+            <a:pPr marL="0" indent="0">
               <a:buNone/>
             </a:pPr>
             <a:r>
@@ -7179,9 +7750,9 @@
                 <a:solidFill>
                   <a:srgbClr val="0D9488"/>
                 </a:solidFill>
-                <a:latin typeface="Trebuchet MS" pitchFamily="34" charset="0"/>
-                <a:ea typeface="Trebuchet MS" pitchFamily="34" charset="-122"/>
-                <a:cs typeface="Trebuchet MS" pitchFamily="34" charset="-120"/>
+                <a:latin typeface="Trebuchet MS" panose="020B0703020202090204" pitchFamily="34" charset="0"/>
+                <a:ea typeface="Trebuchet MS" panose="020B0703020202090204" pitchFamily="34" charset="-122"/>
+                <a:cs typeface="Trebuchet MS" panose="020B0703020202090204" pitchFamily="34" charset="-120"/>
               </a:rPr>
               <a:t>Learnings</a:t>
             </a:r>
@@ -7216,276 +7787,6 @@
       </p:sp>
       <p:sp>
         <p:nvSpPr>
-          <p:cNvPr id="23" name="Shape 21"/>
-          <p:cNvSpPr/>
-          <p:nvPr/>
-        </p:nvSpPr>
-        <p:spPr>
-          <a:xfrm>
-            <a:off x="3291840" y="2359152"/>
-            <a:ext cx="1828800" cy="786384"/>
-          </a:xfrm>
-          <a:prstGeom prst="roundRect">
-            <a:avLst>
-              <a:gd name="adj" fmla="val 9302"/>
-            </a:avLst>
-          </a:prstGeom>
-          <a:solidFill>
-            <a:srgbClr val="FFFFFF"/>
-          </a:solidFill>
-          <a:ln w="12700">
-            <a:solidFill>
-              <a:srgbClr val="0D9488"/>
-            </a:solidFill>
-            <a:prstDash val="solid"/>
-          </a:ln>
-          <a:effectLst>
-            <a:outerShdw sx="100000" sy="100000" kx="0" ky="0" algn="bl" rotWithShape="0" blurRad="127000" dist="38100" dir="8100000">
-              <a:srgbClr val="000000">
-                <a:alpha val="10000"/>
-              </a:srgbClr>
-            </a:outerShdw>
-          </a:effectLst>
-        </p:spPr>
-      </p:sp>
-      <p:sp>
-        <p:nvSpPr>
-          <p:cNvPr id="24" name="Text 22"/>
-          <p:cNvSpPr/>
-          <p:nvPr/>
-        </p:nvSpPr>
-        <p:spPr>
-          <a:xfrm>
-            <a:off x="3364992" y="2359152"/>
-            <a:ext cx="1682496" cy="786384"/>
-          </a:xfrm>
-          <a:prstGeom prst="rect">
-            <a:avLst/>
-          </a:prstGeom>
-          <a:noFill/>
-          <a:ln/>
-        </p:spPr>
-        <p:txBody>
-          <a:bodyPr wrap="square" rtlCol="0" anchor="ctr"/>
-          <a:lstStyle/>
-          <a:p>
-            <a:pPr algn="ctr" indent="0" marL="0">
-              <a:buNone/>
-            </a:pPr>
-            <a:r>
-              <a:rPr lang="en-US" sz="1200" dirty="0">
-                <a:solidFill>
-                  <a:srgbClr val="1A1A2A"/>
-                </a:solidFill>
-                <a:latin typeface="Calibri" pitchFamily="34" charset="0"/>
-                <a:ea typeface="Calibri" pitchFamily="34" charset="-122"/>
-                <a:cs typeface="Calibri" pitchFamily="34" charset="-120"/>
-              </a:rPr>
-              <a:t>End-to-End MLOps</a:t>
-            </a:r>
-            <a:endParaRPr lang="en-US" sz="1200" dirty="0"/>
-          </a:p>
-          <a:p>
-            <a:pPr algn="ctr" indent="0" marL="0">
-              <a:buNone/>
-            </a:pPr>
-            <a:r>
-              <a:rPr lang="en-US" sz="1200" dirty="0">
-                <a:solidFill>
-                  <a:srgbClr val="1A1A2A"/>
-                </a:solidFill>
-                <a:latin typeface="Calibri" pitchFamily="34" charset="0"/>
-                <a:ea typeface="Calibri" pitchFamily="34" charset="-122"/>
-                <a:cs typeface="Calibri" pitchFamily="34" charset="-120"/>
-              </a:rPr>
-              <a:t>data → model → API → cloud</a:t>
-            </a:r>
-            <a:endParaRPr lang="en-US" sz="1200" dirty="0"/>
-          </a:p>
-        </p:txBody>
-      </p:sp>
-      <p:sp>
-        <p:nvSpPr>
-          <p:cNvPr id="25" name="Shape 23"/>
-          <p:cNvSpPr/>
-          <p:nvPr/>
-        </p:nvSpPr>
-        <p:spPr>
-          <a:xfrm>
-            <a:off x="5175504" y="2359152"/>
-            <a:ext cx="1828800" cy="786384"/>
-          </a:xfrm>
-          <a:prstGeom prst="roundRect">
-            <a:avLst>
-              <a:gd name="adj" fmla="val 9302"/>
-            </a:avLst>
-          </a:prstGeom>
-          <a:solidFill>
-            <a:srgbClr val="FFFFFF"/>
-          </a:solidFill>
-          <a:ln w="12700">
-            <a:solidFill>
-              <a:srgbClr val="0D9488"/>
-            </a:solidFill>
-            <a:prstDash val="solid"/>
-          </a:ln>
-          <a:effectLst>
-            <a:outerShdw sx="100000" sy="100000" kx="0" ky="0" algn="bl" rotWithShape="0" blurRad="127000" dist="38100" dir="8100000">
-              <a:srgbClr val="000000">
-                <a:alpha val="10000"/>
-              </a:srgbClr>
-            </a:outerShdw>
-          </a:effectLst>
-        </p:spPr>
-      </p:sp>
-      <p:sp>
-        <p:nvSpPr>
-          <p:cNvPr id="26" name="Text 24"/>
-          <p:cNvSpPr/>
-          <p:nvPr/>
-        </p:nvSpPr>
-        <p:spPr>
-          <a:xfrm>
-            <a:off x="5248656" y="2359152"/>
-            <a:ext cx="1682496" cy="786384"/>
-          </a:xfrm>
-          <a:prstGeom prst="rect">
-            <a:avLst/>
-          </a:prstGeom>
-          <a:noFill/>
-          <a:ln/>
-        </p:spPr>
-        <p:txBody>
-          <a:bodyPr wrap="square" rtlCol="0" anchor="ctr"/>
-          <a:lstStyle/>
-          <a:p>
-            <a:pPr algn="ctr" indent="0" marL="0">
-              <a:buNone/>
-            </a:pPr>
-            <a:r>
-              <a:rPr lang="en-US" sz="1200" dirty="0">
-                <a:solidFill>
-                  <a:srgbClr val="1A1A2A"/>
-                </a:solidFill>
-                <a:latin typeface="Calibri" pitchFamily="34" charset="0"/>
-                <a:ea typeface="Calibri" pitchFamily="34" charset="-122"/>
-                <a:cs typeface="Calibri" pitchFamily="34" charset="-120"/>
-              </a:rPr>
-              <a:t>Macro F1 &gt; Accuracy</a:t>
-            </a:r>
-            <a:endParaRPr lang="en-US" sz="1200" dirty="0"/>
-          </a:p>
-          <a:p>
-            <a:pPr algn="ctr" indent="0" marL="0">
-              <a:buNone/>
-            </a:pPr>
-            <a:r>
-              <a:rPr lang="en-US" sz="1200" dirty="0">
-                <a:solidFill>
-                  <a:srgbClr val="1A1A2A"/>
-                </a:solidFill>
-                <a:latin typeface="Calibri" pitchFamily="34" charset="0"/>
-                <a:ea typeface="Calibri" pitchFamily="34" charset="-122"/>
-                <a:cs typeface="Calibri" pitchFamily="34" charset="-120"/>
-              </a:rPr>
-              <a:t>imbalanced classes</a:t>
-            </a:r>
-            <a:endParaRPr lang="en-US" sz="1200" dirty="0"/>
-          </a:p>
-        </p:txBody>
-      </p:sp>
-      <p:sp>
-        <p:nvSpPr>
-          <p:cNvPr id="27" name="Shape 25"/>
-          <p:cNvSpPr/>
-          <p:nvPr/>
-        </p:nvSpPr>
-        <p:spPr>
-          <a:xfrm>
-            <a:off x="7059168" y="2359152"/>
-            <a:ext cx="1828800" cy="786384"/>
-          </a:xfrm>
-          <a:prstGeom prst="roundRect">
-            <a:avLst>
-              <a:gd name="adj" fmla="val 9302"/>
-            </a:avLst>
-          </a:prstGeom>
-          <a:solidFill>
-            <a:srgbClr val="FFFFFF"/>
-          </a:solidFill>
-          <a:ln w="12700">
-            <a:solidFill>
-              <a:srgbClr val="0D9488"/>
-            </a:solidFill>
-            <a:prstDash val="solid"/>
-          </a:ln>
-          <a:effectLst>
-            <a:outerShdw sx="100000" sy="100000" kx="0" ky="0" algn="bl" rotWithShape="0" blurRad="127000" dist="38100" dir="8100000">
-              <a:srgbClr val="000000">
-                <a:alpha val="10000"/>
-              </a:srgbClr>
-            </a:outerShdw>
-          </a:effectLst>
-        </p:spPr>
-      </p:sp>
-      <p:sp>
-        <p:nvSpPr>
-          <p:cNvPr id="28" name="Text 26"/>
-          <p:cNvSpPr/>
-          <p:nvPr/>
-        </p:nvSpPr>
-        <p:spPr>
-          <a:xfrm>
-            <a:off x="7132320" y="2359152"/>
-            <a:ext cx="1682496" cy="786384"/>
-          </a:xfrm>
-          <a:prstGeom prst="rect">
-            <a:avLst/>
-          </a:prstGeom>
-          <a:noFill/>
-          <a:ln/>
-        </p:spPr>
-        <p:txBody>
-          <a:bodyPr wrap="square" rtlCol="0" anchor="ctr"/>
-          <a:lstStyle/>
-          <a:p>
-            <a:pPr algn="ctr" indent="0" marL="0">
-              <a:buNone/>
-            </a:pPr>
-            <a:r>
-              <a:rPr lang="en-US" sz="1200" dirty="0">
-                <a:solidFill>
-                  <a:srgbClr val="1A1A2A"/>
-                </a:solidFill>
-                <a:latin typeface="Calibri" pitchFamily="34" charset="0"/>
-                <a:ea typeface="Calibri" pitchFamily="34" charset="-122"/>
-                <a:cs typeface="Calibri" pitchFamily="34" charset="-120"/>
-              </a:rPr>
-              <a:t>Claude AI</a:t>
-            </a:r>
-            <a:endParaRPr lang="en-US" sz="1200" dirty="0"/>
-          </a:p>
-          <a:p>
-            <a:pPr algn="ctr" indent="0" marL="0">
-              <a:buNone/>
-            </a:pPr>
-            <a:r>
-              <a:rPr lang="en-US" sz="1200" dirty="0">
-                <a:solidFill>
-                  <a:srgbClr val="1A1A2A"/>
-                </a:solidFill>
-                <a:latin typeface="Calibri" pitchFamily="34" charset="0"/>
-                <a:ea typeface="Calibri" pitchFamily="34" charset="-122"/>
-                <a:cs typeface="Calibri" pitchFamily="34" charset="-120"/>
-              </a:rPr>
-              <a:t>code, debug &amp; deploy</a:t>
-            </a:r>
-            <a:endParaRPr lang="en-US" sz="1200" dirty="0"/>
-          </a:p>
-        </p:txBody>
-      </p:sp>
-      <p:sp>
-        <p:nvSpPr>
           <p:cNvPr id="29" name="Shape 27"/>
           <p:cNvSpPr/>
           <p:nvPr/>
@@ -7574,13 +7875,12 @@
             <a:avLst/>
           </a:prstGeom>
           <a:noFill/>
-          <a:ln/>
         </p:spPr>
         <p:txBody>
           <a:bodyPr wrap="square" rtlCol="0" anchor="ctr"/>
           <a:lstStyle/>
           <a:p>
-            <a:pPr algn="ctr" indent="0" marL="0">
+            <a:pPr marL="0" indent="0" algn="ctr">
               <a:buNone/>
             </a:pPr>
             <a:r>
@@ -7610,13 +7910,12 @@
             <a:avLst/>
           </a:prstGeom>
           <a:noFill/>
-          <a:ln/>
         </p:spPr>
         <p:txBody>
           <a:bodyPr wrap="square" rtlCol="0" anchor="ctr"/>
           <a:lstStyle/>
           <a:p>
-            <a:pPr indent="0" marL="0">
+            <a:pPr marL="0" indent="0">
               <a:buNone/>
             </a:pPr>
             <a:r>
@@ -7624,9 +7923,9 @@
                 <a:solidFill>
                   <a:srgbClr val="1A5276"/>
                 </a:solidFill>
-                <a:latin typeface="Trebuchet MS" pitchFamily="34" charset="0"/>
-                <a:ea typeface="Trebuchet MS" pitchFamily="34" charset="-122"/>
-                <a:cs typeface="Trebuchet MS" pitchFamily="34" charset="-120"/>
+                <a:latin typeface="Trebuchet MS" panose="020B0703020202090204" pitchFamily="34" charset="0"/>
+                <a:ea typeface="Trebuchet MS" panose="020B0703020202090204" pitchFamily="34" charset="-122"/>
+                <a:cs typeface="Trebuchet MS" panose="020B0703020202090204" pitchFamily="34" charset="-120"/>
               </a:rPr>
               <a:t>Future Work</a:t>
             </a:r>
@@ -7661,310 +7960,282 @@
       </p:sp>
       <p:sp>
         <p:nvSpPr>
-          <p:cNvPr id="35" name="Shape 33"/>
-          <p:cNvSpPr/>
-          <p:nvPr/>
-        </p:nvSpPr>
-        <p:spPr>
-          <a:xfrm>
-            <a:off x="3291840" y="3621024"/>
-            <a:ext cx="1828800" cy="786384"/>
-          </a:xfrm>
-          <a:prstGeom prst="roundRect">
-            <a:avLst>
-              <a:gd name="adj" fmla="val 9302"/>
-            </a:avLst>
-          </a:prstGeom>
-          <a:solidFill>
-            <a:srgbClr val="FFFFFF"/>
-          </a:solidFill>
-          <a:ln w="12700">
-            <a:solidFill>
-              <a:srgbClr val="1A5276"/>
-            </a:solidFill>
-            <a:prstDash val="solid"/>
-          </a:ln>
-          <a:effectLst>
-            <a:outerShdw sx="100000" sy="100000" kx="0" ky="0" algn="bl" rotWithShape="0" blurRad="127000" dist="38100" dir="8100000">
-              <a:srgbClr val="000000">
-                <a:alpha val="10000"/>
-              </a:srgbClr>
-            </a:outerShdw>
-          </a:effectLst>
-        </p:spPr>
-      </p:sp>
-      <p:sp>
-        <p:nvSpPr>
-          <p:cNvPr id="36" name="Text 34"/>
-          <p:cNvSpPr/>
-          <p:nvPr/>
-        </p:nvSpPr>
-        <p:spPr>
-          <a:xfrm>
-            <a:off x="3364992" y="3621024"/>
-            <a:ext cx="1682496" cy="786384"/>
-          </a:xfrm>
-          <a:prstGeom prst="rect">
-            <a:avLst/>
-          </a:prstGeom>
-          <a:noFill/>
-          <a:ln/>
+          <p:cNvPr id="41" name="Text 39"/>
+          <p:cNvSpPr/>
+          <p:nvPr/>
+        </p:nvSpPr>
+        <p:spPr>
+          <a:xfrm>
+            <a:off x="365760" y="4919472"/>
+            <a:ext cx="8412480" cy="182880"/>
+          </a:xfrm>
+          <a:prstGeom prst="rect">
+            <a:avLst/>
+          </a:prstGeom>
+          <a:noFill/>
         </p:spPr>
         <p:txBody>
           <a:bodyPr wrap="square" rtlCol="0" anchor="ctr"/>
           <a:lstStyle/>
           <a:p>
-            <a:pPr algn="ctr" indent="0" marL="0">
-              <a:buNone/>
-            </a:pPr>
-            <a:r>
-              <a:rPr lang="en-US" sz="1200" dirty="0">
-                <a:solidFill>
-                  <a:srgbClr val="1A1A2A"/>
+            <a:pPr marL="0" indent="0" algn="ctr">
+              <a:buNone/>
+            </a:pPr>
+            <a:r>
+              <a:rPr lang="en-US" sz="1100" dirty="0">
+                <a:solidFill>
+                  <a:srgbClr val="4A6274"/>
                 </a:solidFill>
                 <a:latin typeface="Calibri" pitchFamily="34" charset="0"/>
                 <a:ea typeface="Calibri" pitchFamily="34" charset="-122"/>
                 <a:cs typeface="Calibri" pitchFamily="34" charset="-120"/>
               </a:rPr>
-              <a:t>Temporal Features</a:t>
-            </a:r>
-            <a:endParaRPr lang="en-US" sz="1200" dirty="0"/>
-          </a:p>
-          <a:p>
-            <a:pPr algn="ctr" indent="0" marL="0">
-              <a:buNone/>
-            </a:pPr>
-            <a:r>
-              <a:rPr lang="en-US" sz="1200" dirty="0">
-                <a:solidFill>
-                  <a:srgbClr val="1A1A2A"/>
+              <a:t>EarthSafe  ·  STAT 418  ·  Yutong Ma  ·  UCLA Spring 2026</a:t>
+            </a:r>
+            <a:endParaRPr lang="en-US" sz="1100" dirty="0"/>
+          </a:p>
+        </p:txBody>
+      </p:sp>
+      <p:sp>
+        <p:nvSpPr>
+          <p:cNvPr id="50" name="TextContent 50"/>
+          <p:cNvSpPr/>
+          <p:nvPr/>
+        </p:nvSpPr>
+        <p:spPr>
+          <a:xfrm>
+            <a:off x="3364992" y="1024400"/>
+            <a:ext cx="5595168" cy="950000"/>
+          </a:xfrm>
+          <a:prstGeom prst="rect">
+            <a:avLst/>
+          </a:prstGeom>
+          <a:noFill/>
+        </p:spPr>
+        <p:txBody>
+          <a:bodyPr wrap="square" rtlCol="0" anchor="ctr"/>
+          <a:lstStyle/>
+          <a:p>
+            <a:pPr marL="0" indent="0">
+              <a:buNone/>
+            </a:pPr>
+            <a:r>
+              <a:rPr lang="en-US" sz="1300" dirty="0">
+                <a:solidFill>
+                  <a:srgbClr val="2C3E50"/>
                 </a:solidFill>
                 <a:latin typeface="Calibri" pitchFamily="34" charset="0"/>
-                <a:ea typeface="Calibri" pitchFamily="34" charset="-122"/>
-                <a:cs typeface="Calibri" pitchFamily="34" charset="-120"/>
-              </a:rPr>
-              <a:t>afterShock sequences</a:t>
-            </a:r>
-            <a:endParaRPr lang="en-US" sz="1200" dirty="0"/>
-          </a:p>
-        </p:txBody>
-      </p:sp>
-      <p:sp>
-        <p:nvSpPr>
-          <p:cNvPr id="37" name="Shape 35"/>
-          <p:cNvSpPr/>
-          <p:nvPr/>
-        </p:nvSpPr>
-        <p:spPr>
-          <a:xfrm>
-            <a:off x="5175504" y="3621024"/>
-            <a:ext cx="1828800" cy="786384"/>
-          </a:xfrm>
-          <a:prstGeom prst="roundRect">
-            <a:avLst>
-              <a:gd name="adj" fmla="val 9302"/>
-            </a:avLst>
-          </a:prstGeom>
-          <a:solidFill>
-            <a:srgbClr val="FFFFFF"/>
-          </a:solidFill>
-          <a:ln w="12700">
-            <a:solidFill>
-              <a:srgbClr val="1A5276"/>
-            </a:solidFill>
-            <a:prstDash val="solid"/>
-          </a:ln>
-          <a:effectLst>
-            <a:outerShdw sx="100000" sy="100000" kx="0" ky="0" algn="bl" rotWithShape="0" blurRad="127000" dist="38100" dir="8100000">
-              <a:srgbClr val="000000">
-                <a:alpha val="10000"/>
-              </a:srgbClr>
-            </a:outerShdw>
-          </a:effectLst>
-        </p:spPr>
-      </p:sp>
-      <p:sp>
-        <p:nvSpPr>
-          <p:cNvPr id="38" name="Text 36"/>
-          <p:cNvSpPr/>
-          <p:nvPr/>
-        </p:nvSpPr>
-        <p:spPr>
-          <a:xfrm>
-            <a:off x="5248656" y="3621024"/>
-            <a:ext cx="1682496" cy="786384"/>
-          </a:xfrm>
-          <a:prstGeom prst="rect">
-            <a:avLst/>
-          </a:prstGeom>
-          <a:noFill/>
-          <a:ln/>
+              </a:rPr>
+              <a:t>Class Imbalance  —  7 High records out of 2,000</a:t>
+            </a:r>
+            <a:endParaRPr lang="en-US" sz="1300" dirty="0">
+              <a:solidFill>
+                <a:srgbClr val="2C3E50"/>
+              </a:solidFill>
+              <a:latin typeface="Calibri" pitchFamily="34" charset="0"/>
+            </a:endParaRPr>
+          </a:p>
+          <a:p>
+            <a:pPr marL="0" indent="0">
+              <a:buNone/>
+            </a:pPr>
+            <a:r>
+              <a:rPr lang="en-US" sz="1300" dirty="0">
+                <a:solidFill>
+                  <a:srgbClr val="2C3E50"/>
+                </a:solidFill>
+                <a:latin typeface="Calibri" pitchFamily="34" charset="0"/>
+              </a:rPr>
+              <a:t>Port 5000 → 5001  —  macOS AirPlay conflict</a:t>
+            </a:r>
+            <a:endParaRPr lang="en-US" sz="1300" dirty="0">
+              <a:solidFill>
+                <a:srgbClr val="2C3E50"/>
+              </a:solidFill>
+              <a:latin typeface="Calibri" pitchFamily="34" charset="0"/>
+            </a:endParaRPr>
+          </a:p>
+          <a:p>
+            <a:pPr marL="0" indent="0">
+              <a:buNone/>
+            </a:pPr>
+            <a:r>
+              <a:rPr lang="en-US" sz="1300" dirty="0">
+                <a:solidFill>
+                  <a:srgbClr val="2C3E50"/>
+                </a:solidFill>
+                <a:latin typeface="Calibri" pitchFamily="34" charset="0"/>
+              </a:rPr>
+              <a:t>brew install libomp  —  XGBoost on Mac</a:t>
+            </a:r>
+            <a:endParaRPr lang="en-US" sz="1300" dirty="0">
+              <a:solidFill>
+                <a:srgbClr val="2C3E50"/>
+              </a:solidFill>
+              <a:latin typeface="Calibri" pitchFamily="34" charset="0"/>
+            </a:endParaRPr>
+          </a:p>
+        </p:txBody>
+      </p:sp>
+      <p:sp>
+        <p:nvSpPr>
+          <p:cNvPr id="51" name="TextContent 51"/>
+          <p:cNvSpPr/>
+          <p:nvPr/>
+        </p:nvSpPr>
+        <p:spPr>
+          <a:xfrm>
+            <a:off x="3364992" y="2286272"/>
+            <a:ext cx="5595168" cy="950000"/>
+          </a:xfrm>
+          <a:prstGeom prst="rect">
+            <a:avLst/>
+          </a:prstGeom>
+          <a:noFill/>
         </p:spPr>
         <p:txBody>
           <a:bodyPr wrap="square" rtlCol="0" anchor="ctr"/>
           <a:lstStyle/>
           <a:p>
-            <a:pPr algn="ctr" indent="0" marL="0">
-              <a:buNone/>
-            </a:pPr>
-            <a:r>
-              <a:rPr lang="en-US" sz="1200" dirty="0">
-                <a:solidFill>
-                  <a:srgbClr val="1A1A2A"/>
+            <a:pPr marL="0" indent="0">
+              <a:buNone/>
+            </a:pPr>
+            <a:r>
+              <a:rPr lang="en-US" sz="1300" dirty="0">
+                <a:solidFill>
+                  <a:srgbClr val="2C3E50"/>
                 </a:solidFill>
                 <a:latin typeface="Calibri" pitchFamily="34" charset="0"/>
-                <a:ea typeface="Calibri" pitchFamily="34" charset="-122"/>
-                <a:cs typeface="Calibri" pitchFamily="34" charset="-120"/>
-              </a:rPr>
-              <a:t>USGS WebSocket</a:t>
-            </a:r>
-            <a:endParaRPr lang="en-US" sz="1200" dirty="0"/>
-          </a:p>
-          <a:p>
-            <a:pPr algn="ctr" indent="0" marL="0">
-              <a:buNone/>
-            </a:pPr>
-            <a:r>
-              <a:rPr lang="en-US" sz="1200" dirty="0">
-                <a:solidFill>
-                  <a:srgbClr val="1A1A2A"/>
+              </a:rPr>
+              <a:t>End-to-End MLOps  —  data → model → API → cloud</a:t>
+            </a:r>
+            <a:endParaRPr lang="en-US" sz="1300" dirty="0">
+              <a:solidFill>
+                <a:srgbClr val="2C3E50"/>
+              </a:solidFill>
+              <a:latin typeface="Calibri" pitchFamily="34" charset="0"/>
+            </a:endParaRPr>
+          </a:p>
+          <a:p>
+            <a:pPr marL="0" indent="0">
+              <a:buNone/>
+            </a:pPr>
+            <a:r>
+              <a:rPr lang="en-US" sz="1300" dirty="0">
+                <a:solidFill>
+                  <a:srgbClr val="2C3E50"/>
                 </a:solidFill>
                 <a:latin typeface="Calibri" pitchFamily="34" charset="0"/>
-                <a:ea typeface="Calibri" pitchFamily="34" charset="-122"/>
-                <a:cs typeface="Calibri" pitchFamily="34" charset="-120"/>
-              </a:rPr>
-              <a:t>sub-second map updates</a:t>
-            </a:r>
-            <a:endParaRPr lang="en-US" sz="1200" dirty="0"/>
-          </a:p>
-        </p:txBody>
-      </p:sp>
-      <p:sp>
-        <p:nvSpPr>
-          <p:cNvPr id="39" name="Shape 37"/>
-          <p:cNvSpPr/>
-          <p:nvPr/>
-        </p:nvSpPr>
-        <p:spPr>
-          <a:xfrm>
-            <a:off x="7059168" y="3621024"/>
-            <a:ext cx="1828800" cy="786384"/>
-          </a:xfrm>
-          <a:prstGeom prst="roundRect">
-            <a:avLst>
-              <a:gd name="adj" fmla="val 9302"/>
-            </a:avLst>
-          </a:prstGeom>
-          <a:solidFill>
-            <a:srgbClr val="FFFFFF"/>
-          </a:solidFill>
-          <a:ln w="12700">
-            <a:solidFill>
-              <a:srgbClr val="1A5276"/>
-            </a:solidFill>
-            <a:prstDash val="solid"/>
-          </a:ln>
-          <a:effectLst>
-            <a:outerShdw sx="100000" sy="100000" kx="0" ky="0" algn="bl" rotWithShape="0" blurRad="127000" dist="38100" dir="8100000">
-              <a:srgbClr val="000000">
-                <a:alpha val="10000"/>
-              </a:srgbClr>
-            </a:outerShdw>
-          </a:effectLst>
-        </p:spPr>
-      </p:sp>
-      <p:sp>
-        <p:nvSpPr>
-          <p:cNvPr id="40" name="Text 38"/>
-          <p:cNvSpPr/>
-          <p:nvPr/>
-        </p:nvSpPr>
-        <p:spPr>
-          <a:xfrm>
-            <a:off x="7132320" y="3621024"/>
-            <a:ext cx="1682496" cy="786384"/>
-          </a:xfrm>
-          <a:prstGeom prst="rect">
-            <a:avLst/>
-          </a:prstGeom>
-          <a:noFill/>
-          <a:ln/>
+              </a:rPr>
+              <a:t>Macro F1 &gt; Accuracy  —  right metric for imbalanced classes</a:t>
+            </a:r>
+            <a:endParaRPr lang="en-US" sz="1300" dirty="0">
+              <a:solidFill>
+                <a:srgbClr val="2C3E50"/>
+              </a:solidFill>
+              <a:latin typeface="Calibri" pitchFamily="34" charset="0"/>
+            </a:endParaRPr>
+          </a:p>
+          <a:p>
+            <a:pPr marL="0" indent="0">
+              <a:buNone/>
+            </a:pPr>
+            <a:r>
+              <a:rPr lang="en-US" sz="1300" dirty="0">
+                <a:solidFill>
+                  <a:srgbClr val="2C3E50"/>
+                </a:solidFill>
+                <a:latin typeface="Calibri" pitchFamily="34" charset="0"/>
+              </a:rPr>
+              <a:t>Claude AI  —  code, debug &amp; deploy at every layer</a:t>
+            </a:r>
+            <a:endParaRPr lang="en-US" sz="1300" dirty="0">
+              <a:solidFill>
+                <a:srgbClr val="2C3E50"/>
+              </a:solidFill>
+              <a:latin typeface="Calibri" pitchFamily="34" charset="0"/>
+            </a:endParaRPr>
+          </a:p>
+        </p:txBody>
+      </p:sp>
+      <p:sp>
+        <p:nvSpPr>
+          <p:cNvPr id="52" name="TextContent 52"/>
+          <p:cNvSpPr/>
+          <p:nvPr/>
+        </p:nvSpPr>
+        <p:spPr>
+          <a:xfrm>
+            <a:off x="3364992" y="3548144"/>
+            <a:ext cx="5595168" cy="950000"/>
+          </a:xfrm>
+          <a:prstGeom prst="rect">
+            <a:avLst/>
+          </a:prstGeom>
+          <a:noFill/>
         </p:spPr>
         <p:txBody>
           <a:bodyPr wrap="square" rtlCol="0" anchor="ctr"/>
           <a:lstStyle/>
           <a:p>
-            <a:pPr algn="ctr" indent="0" marL="0">
-              <a:buNone/>
-            </a:pPr>
-            <a:r>
-              <a:rPr lang="en-US" sz="1200" dirty="0">
-                <a:solidFill>
-                  <a:srgbClr val="1A1A2A"/>
+            <a:pPr marL="0" indent="0">
+              <a:buNone/>
+            </a:pPr>
+            <a:r>
+              <a:rPr lang="en-US" sz="1300" dirty="0">
+                <a:solidFill>
+                  <a:srgbClr val="2C3E50"/>
                 </a:solidFill>
                 <a:latin typeface="Calibri" pitchFamily="34" charset="0"/>
-                <a:ea typeface="Calibri" pitchFamily="34" charset="-122"/>
-                <a:cs typeface="Calibri" pitchFamily="34" charset="-120"/>
-              </a:rPr>
-              <a:t>Magnitude Regression</a:t>
-            </a:r>
-            <a:endParaRPr lang="en-US" sz="1200" dirty="0"/>
-          </a:p>
-          <a:p>
-            <a:pPr algn="ctr" indent="0" marL="0">
-              <a:buNone/>
-            </a:pPr>
-            <a:r>
-              <a:rPr lang="en-US" sz="1200" dirty="0">
-                <a:solidFill>
-                  <a:srgbClr val="1A1A2A"/>
+              </a:rPr>
+              <a:t>Temporal Features  —  aftershock sequences</a:t>
+            </a:r>
+            <a:endParaRPr lang="en-US" sz="1300" dirty="0">
+              <a:solidFill>
+                <a:srgbClr val="2C3E50"/>
+              </a:solidFill>
+              <a:latin typeface="Calibri" pitchFamily="34" charset="0"/>
+            </a:endParaRPr>
+          </a:p>
+          <a:p>
+            <a:pPr marL="0" indent="0">
+              <a:buNone/>
+            </a:pPr>
+            <a:r>
+              <a:rPr lang="en-US" sz="1300" dirty="0">
+                <a:solidFill>
+                  <a:srgbClr val="2C3E50"/>
                 </a:solidFill>
                 <a:latin typeface="Calibri" pitchFamily="34" charset="0"/>
-                <a:ea typeface="Calibri" pitchFamily="34" charset="-122"/>
-                <a:cs typeface="Calibri" pitchFamily="34" charset="-120"/>
-              </a:rPr>
-              <a:t>early warning potential</a:t>
-            </a:r>
-            <a:endParaRPr lang="en-US" sz="1200" dirty="0"/>
-          </a:p>
-        </p:txBody>
-      </p:sp>
-      <p:sp>
-        <p:nvSpPr>
-          <p:cNvPr id="41" name="Text 39"/>
-          <p:cNvSpPr/>
-          <p:nvPr/>
-        </p:nvSpPr>
-        <p:spPr>
-          <a:xfrm>
-            <a:off x="365760" y="4919472"/>
-            <a:ext cx="8412480" cy="182880"/>
-          </a:xfrm>
-          <a:prstGeom prst="rect">
-            <a:avLst/>
-          </a:prstGeom>
-          <a:noFill/>
-          <a:ln/>
-        </p:spPr>
-        <p:txBody>
-          <a:bodyPr wrap="square" rtlCol="0" anchor="ctr"/>
-          <a:lstStyle/>
-          <a:p>
-            <a:pPr algn="ctr" indent="0" marL="0">
-              <a:buNone/>
-            </a:pPr>
-            <a:r>
-              <a:rPr lang="en-US" sz="1100" dirty="0">
-                <a:solidFill>
-                  <a:srgbClr val="4A6274"/>
+              </a:rPr>
+              <a:t>USGS WebSocket  —  sub-second map updates</a:t>
+            </a:r>
+            <a:endParaRPr lang="en-US" sz="1300" dirty="0">
+              <a:solidFill>
+                <a:srgbClr val="2C3E50"/>
+              </a:solidFill>
+              <a:latin typeface="Calibri" pitchFamily="34" charset="0"/>
+            </a:endParaRPr>
+          </a:p>
+          <a:p>
+            <a:pPr marL="0" indent="0">
+              <a:buNone/>
+            </a:pPr>
+            <a:r>
+              <a:rPr lang="en-US" sz="1300" dirty="0">
+                <a:solidFill>
+                  <a:srgbClr val="2C3E50"/>
                 </a:solidFill>
                 <a:latin typeface="Calibri" pitchFamily="34" charset="0"/>
-                <a:ea typeface="Calibri" pitchFamily="34" charset="-122"/>
-                <a:cs typeface="Calibri" pitchFamily="34" charset="-120"/>
-              </a:rPr>
-              <a:t>EarthSafe  ·  STAT 418  ·  Yutong Ma  ·  UCLA Spring 2026</a:t>
-            </a:r>
-            <a:endParaRPr lang="en-US" sz="1100" dirty="0"/>
+              </a:rPr>
+              <a:t>Magnitude Regression  —  early warning potential</a:t>
+            </a:r>
+            <a:endParaRPr lang="en-US" sz="1300" dirty="0">
+              <a:solidFill>
+                <a:srgbClr val="2C3E50"/>
+              </a:solidFill>
+              <a:latin typeface="Calibri" pitchFamily="34" charset="0"/>
+            </a:endParaRPr>
           </a:p>
         </p:txBody>
       </p:sp>
@@ -8019,7 +8290,7 @@
     </a:clrScheme>
     <a:fontScheme name="Office">
       <a:majorFont>
-        <a:latin typeface="Calibri Light" panose="020F0302020204030204"/>
+        <a:latin typeface="Calibri Light"/>
         <a:ea typeface=""/>
         <a:cs typeface=""/>
         <a:font script="Jpan" typeface="游ゴシック Light"/>
@@ -8052,26 +8323,9 @@
         <a:font script="Viet" typeface="Times New Roman"/>
         <a:font script="Uigh" typeface="Microsoft Uighur"/>
         <a:font script="Geor" typeface="Sylfaen"/>
-        <a:font script="Armn" typeface="Arial"/>
-        <a:font script="Bugi" typeface="Leelawadee UI"/>
-        <a:font script="Bopo" typeface="Microsoft JhengHei"/>
-        <a:font script="Java" typeface="Javanese Text"/>
-        <a:font script="Lisu" typeface="Segoe UI"/>
-        <a:font script="Mymr" typeface="Myanmar Text"/>
-        <a:font script="Nkoo" typeface="Ebrima"/>
-        <a:font script="Olck" typeface="Nirmala UI"/>
-        <a:font script="Osma" typeface="Ebrima"/>
-        <a:font script="Phag" typeface="Phagspa"/>
-        <a:font script="Syrn" typeface="Estrangelo Edessa"/>
-        <a:font script="Syrj" typeface="Estrangelo Edessa"/>
-        <a:font script="Syre" typeface="Estrangelo Edessa"/>
-        <a:font script="Sora" typeface="Nirmala UI"/>
-        <a:font script="Tale" typeface="Microsoft Tai Le"/>
-        <a:font script="Talu" typeface="Microsoft New Tai Lue"/>
-        <a:font script="Tfng" typeface="Ebrima"/>
       </a:majorFont>
       <a:minorFont>
-        <a:latin typeface="Calibri" panose="020F0502020204030204"/>
+        <a:latin typeface="Calibri"/>
         <a:ea typeface=""/>
         <a:cs typeface=""/>
         <a:font script="Jpan" typeface="游ゴシック"/>
@@ -8104,23 +8358,6 @@
         <a:font script="Viet" typeface="Arial"/>
         <a:font script="Uigh" typeface="Microsoft Uighur"/>
         <a:font script="Geor" typeface="Sylfaen"/>
-        <a:font script="Armn" typeface="Arial"/>
-        <a:font script="Bugi" typeface="Leelawadee UI"/>
-        <a:font script="Bopo" typeface="Microsoft JhengHei"/>
-        <a:font script="Java" typeface="Javanese Text"/>
-        <a:font script="Lisu" typeface="Segoe UI"/>
-        <a:font script="Mymr" typeface="Myanmar Text"/>
-        <a:font script="Nkoo" typeface="Ebrima"/>
-        <a:font script="Olck" typeface="Nirmala UI"/>
-        <a:font script="Osma" typeface="Ebrima"/>
-        <a:font script="Phag" typeface="Phagspa"/>
-        <a:font script="Syrn" typeface="Estrangelo Edessa"/>
-        <a:font script="Syrj" typeface="Estrangelo Edessa"/>
-        <a:font script="Syre" typeface="Estrangelo Edessa"/>
-        <a:font script="Sora" typeface="Nirmala UI"/>
-        <a:font script="Tale" typeface="Microsoft Tai Le"/>
-        <a:font script="Talu" typeface="Microsoft New Tai Lue"/>
-        <a:font script="Tfng" typeface="Ebrima"/>
       </a:minorFont>
     </a:fontScheme>
     <a:fmtScheme name="Office">
@@ -8261,8 +8498,265 @@
       </a:bgFillStyleLst>
     </a:fmtScheme>
   </a:themeElements>
-  <a:objectDefaults/>
-  <a:extraClrSchemeLst/>
+  <a:extLst>
+    <a:ext uri="{05A4C25C-085E-4340-85A3-A5531E510DB2}">
+      <thm15:themeFamily xmlns:thm15="http://schemas.microsoft.com/office/thememl/2012/main" name="Office Theme" id="{62F939B6-93AF-4DB8-9C6B-D6C7DFDC589F}" vid="{4A3C46E8-61CC-4603-A589-7422A47A8E4A}"/>
+    </a:ext>
+  </a:extLst>
+</a:theme>
+</file>
+
+<file path=ppt/theme/theme2.xml><?xml version="1.0" encoding="utf-8"?>
+<a:theme xmlns:a="http://schemas.openxmlformats.org/drawingml/2006/main" name="Office Theme">
+  <a:themeElements>
+    <a:clrScheme name="Office">
+      <a:dk1>
+        <a:sysClr val="windowText" lastClr="000000"/>
+      </a:dk1>
+      <a:lt1>
+        <a:sysClr val="window" lastClr="FFFFFF"/>
+      </a:lt1>
+      <a:dk2>
+        <a:srgbClr val="44546A"/>
+      </a:dk2>
+      <a:lt2>
+        <a:srgbClr val="E7E6E6"/>
+      </a:lt2>
+      <a:accent1>
+        <a:srgbClr val="4472C4"/>
+      </a:accent1>
+      <a:accent2>
+        <a:srgbClr val="ED7D31"/>
+      </a:accent2>
+      <a:accent3>
+        <a:srgbClr val="A5A5A5"/>
+      </a:accent3>
+      <a:accent4>
+        <a:srgbClr val="FFC000"/>
+      </a:accent4>
+      <a:accent5>
+        <a:srgbClr val="5B9BD5"/>
+      </a:accent5>
+      <a:accent6>
+        <a:srgbClr val="70AD47"/>
+      </a:accent6>
+      <a:hlink>
+        <a:srgbClr val="0563C1"/>
+      </a:hlink>
+      <a:folHlink>
+        <a:srgbClr val="954F72"/>
+      </a:folHlink>
+    </a:clrScheme>
+    <a:fontScheme name="Office">
+      <a:majorFont>
+        <a:latin typeface="Calibri Light"/>
+        <a:ea typeface=""/>
+        <a:cs typeface=""/>
+        <a:font script="Jpan" typeface="游ゴシック Light"/>
+        <a:font script="Hang" typeface="맑은 고딕"/>
+        <a:font script="Hans" typeface="等线 Light"/>
+        <a:font script="Hant" typeface="新細明體"/>
+        <a:font script="Arab" typeface="Times New Roman"/>
+        <a:font script="Hebr" typeface="Times New Roman"/>
+        <a:font script="Thai" typeface="Angsana New"/>
+        <a:font script="Ethi" typeface="Nyala"/>
+        <a:font script="Beng" typeface="Vrinda"/>
+        <a:font script="Gujr" typeface="Shruti"/>
+        <a:font script="Khmr" typeface="MoolBoran"/>
+        <a:font script="Knda" typeface="Tunga"/>
+        <a:font script="Guru" typeface="Raavi"/>
+        <a:font script="Cans" typeface="Euphemia"/>
+        <a:font script="Cher" typeface="Plantagenet Cherokee"/>
+        <a:font script="Yiii" typeface="Microsoft Yi Baiti"/>
+        <a:font script="Tibt" typeface="Microsoft Himalaya"/>
+        <a:font script="Thaa" typeface="MV Boli"/>
+        <a:font script="Deva" typeface="Mangal"/>
+        <a:font script="Telu" typeface="Gautami"/>
+        <a:font script="Taml" typeface="Latha"/>
+        <a:font script="Syrc" typeface="Estrangelo Edessa"/>
+        <a:font script="Orya" typeface="Kalinga"/>
+        <a:font script="Mlym" typeface="Kartika"/>
+        <a:font script="Laoo" typeface="DokChampa"/>
+        <a:font script="Sinh" typeface="Iskoola Pota"/>
+        <a:font script="Mong" typeface="Mongolian Baiti"/>
+        <a:font script="Viet" typeface="Times New Roman"/>
+        <a:font script="Uigh" typeface="Microsoft Uighur"/>
+        <a:font script="Geor" typeface="Sylfaen"/>
+      </a:majorFont>
+      <a:minorFont>
+        <a:latin typeface="Calibri"/>
+        <a:ea typeface=""/>
+        <a:cs typeface=""/>
+        <a:font script="Jpan" typeface="游ゴシック"/>
+        <a:font script="Hang" typeface="맑은 고딕"/>
+        <a:font script="Hans" typeface="等线"/>
+        <a:font script="Hant" typeface="新細明體"/>
+        <a:font script="Arab" typeface="Arial"/>
+        <a:font script="Hebr" typeface="Arial"/>
+        <a:font script="Thai" typeface="Cordia New"/>
+        <a:font script="Ethi" typeface="Nyala"/>
+        <a:font script="Beng" typeface="Vrinda"/>
+        <a:font script="Gujr" typeface="Shruti"/>
+        <a:font script="Khmr" typeface="DaunPenh"/>
+        <a:font script="Knda" typeface="Tunga"/>
+        <a:font script="Guru" typeface="Raavi"/>
+        <a:font script="Cans" typeface="Euphemia"/>
+        <a:font script="Cher" typeface="Plantagenet Cherokee"/>
+        <a:font script="Yiii" typeface="Microsoft Yi Baiti"/>
+        <a:font script="Tibt" typeface="Microsoft Himalaya"/>
+        <a:font script="Thaa" typeface="MV Boli"/>
+        <a:font script="Deva" typeface="Mangal"/>
+        <a:font script="Telu" typeface="Gautami"/>
+        <a:font script="Taml" typeface="Latha"/>
+        <a:font script="Syrc" typeface="Estrangelo Edessa"/>
+        <a:font script="Orya" typeface="Kalinga"/>
+        <a:font script="Mlym" typeface="Kartika"/>
+        <a:font script="Laoo" typeface="DokChampa"/>
+        <a:font script="Sinh" typeface="Iskoola Pota"/>
+        <a:font script="Mong" typeface="Mongolian Baiti"/>
+        <a:font script="Viet" typeface="Arial"/>
+        <a:font script="Uigh" typeface="Microsoft Uighur"/>
+        <a:font script="Geor" typeface="Sylfaen"/>
+      </a:minorFont>
+    </a:fontScheme>
+    <a:fmtScheme name="Office">
+      <a:fillStyleLst>
+        <a:solidFill>
+          <a:schemeClr val="phClr"/>
+        </a:solidFill>
+        <a:gradFill rotWithShape="1">
+          <a:gsLst>
+            <a:gs pos="0">
+              <a:schemeClr val="phClr">
+                <a:lumMod val="110000"/>
+                <a:satMod val="105000"/>
+                <a:tint val="67000"/>
+              </a:schemeClr>
+            </a:gs>
+            <a:gs pos="50000">
+              <a:schemeClr val="phClr">
+                <a:lumMod val="105000"/>
+                <a:satMod val="103000"/>
+                <a:tint val="73000"/>
+              </a:schemeClr>
+            </a:gs>
+            <a:gs pos="100000">
+              <a:schemeClr val="phClr">
+                <a:lumMod val="105000"/>
+                <a:satMod val="109000"/>
+                <a:tint val="81000"/>
+              </a:schemeClr>
+            </a:gs>
+          </a:gsLst>
+          <a:lin ang="5400000" scaled="0"/>
+        </a:gradFill>
+        <a:gradFill rotWithShape="1">
+          <a:gsLst>
+            <a:gs pos="0">
+              <a:schemeClr val="phClr">
+                <a:satMod val="103000"/>
+                <a:lumMod val="102000"/>
+                <a:tint val="94000"/>
+              </a:schemeClr>
+            </a:gs>
+            <a:gs pos="50000">
+              <a:schemeClr val="phClr">
+                <a:satMod val="110000"/>
+                <a:lumMod val="100000"/>
+                <a:shade val="100000"/>
+              </a:schemeClr>
+            </a:gs>
+            <a:gs pos="100000">
+              <a:schemeClr val="phClr">
+                <a:lumMod val="99000"/>
+                <a:satMod val="120000"/>
+                <a:shade val="78000"/>
+              </a:schemeClr>
+            </a:gs>
+          </a:gsLst>
+          <a:lin ang="5400000" scaled="0"/>
+        </a:gradFill>
+      </a:fillStyleLst>
+      <a:lnStyleLst>
+        <a:ln w="6350" cap="flat" cmpd="sng" algn="ctr">
+          <a:solidFill>
+            <a:schemeClr val="phClr"/>
+          </a:solidFill>
+          <a:prstDash val="solid"/>
+          <a:miter lim="800000"/>
+        </a:ln>
+        <a:ln w="12700" cap="flat" cmpd="sng" algn="ctr">
+          <a:solidFill>
+            <a:schemeClr val="phClr"/>
+          </a:solidFill>
+          <a:prstDash val="solid"/>
+          <a:miter lim="800000"/>
+        </a:ln>
+        <a:ln w="19050" cap="flat" cmpd="sng" algn="ctr">
+          <a:solidFill>
+            <a:schemeClr val="phClr"/>
+          </a:solidFill>
+          <a:prstDash val="solid"/>
+          <a:miter lim="800000"/>
+        </a:ln>
+      </a:lnStyleLst>
+      <a:effectStyleLst>
+        <a:effectStyle>
+          <a:effectLst/>
+        </a:effectStyle>
+        <a:effectStyle>
+          <a:effectLst/>
+        </a:effectStyle>
+        <a:effectStyle>
+          <a:effectLst>
+            <a:outerShdw blurRad="57150" dist="19050" dir="5400000" algn="ctr" rotWithShape="0">
+              <a:srgbClr val="000000">
+                <a:alpha val="63000"/>
+              </a:srgbClr>
+            </a:outerShdw>
+          </a:effectLst>
+        </a:effectStyle>
+      </a:effectStyleLst>
+      <a:bgFillStyleLst>
+        <a:solidFill>
+          <a:schemeClr val="phClr"/>
+        </a:solidFill>
+        <a:solidFill>
+          <a:schemeClr val="phClr">
+            <a:tint val="95000"/>
+            <a:satMod val="170000"/>
+          </a:schemeClr>
+        </a:solidFill>
+        <a:gradFill rotWithShape="1">
+          <a:gsLst>
+            <a:gs pos="0">
+              <a:schemeClr val="phClr">
+                <a:tint val="93000"/>
+                <a:satMod val="150000"/>
+                <a:shade val="98000"/>
+                <a:lumMod val="102000"/>
+              </a:schemeClr>
+            </a:gs>
+            <a:gs pos="50000">
+              <a:schemeClr val="phClr">
+                <a:tint val="98000"/>
+                <a:satMod val="130000"/>
+                <a:shade val="90000"/>
+                <a:lumMod val="103000"/>
+              </a:schemeClr>
+            </a:gs>
+            <a:gs pos="100000">
+              <a:schemeClr val="phClr">
+                <a:shade val="63000"/>
+                <a:satMod val="120000"/>
+              </a:schemeClr>
+            </a:gs>
+          </a:gsLst>
+          <a:lin ang="5400000" scaled="0"/>
+        </a:gradFill>
+      </a:bgFillStyleLst>
+    </a:fmtScheme>
+  </a:themeElements>
   <a:extLst>
     <a:ext uri="{05A4C25C-085E-4340-85A3-A5531E510DB2}">
       <thm15:themeFamily xmlns:thm15="http://schemas.microsoft.com/office/thememl/2012/main" name="Office Theme" id="{62F939B6-93AF-4DB8-9C6B-D6C7DFDC589F}" vid="{4A3C46E8-61CC-4603-A589-7422A47A8E4A}"/>
